--- a/public/documents/countries/arabie-saoudite.pptx
+++ b/public/documents/countries/arabie-saoudite.pptx
@@ -117,7 +117,7 @@
 </p:presentation>
 </file>
 
-<file path=ppt/charts/chart7.xml><?xml version="1.0" encoding="utf-8"?>
+<file path=ppt/charts/chart10.xml><?xml version="1.0" encoding="utf-8"?>
 <c:chartSpace xmlns:c="http://schemas.openxmlformats.org/drawingml/2006/chart" xmlns:a="http://schemas.openxmlformats.org/drawingml/2006/main" xmlns:r="http://schemas.openxmlformats.org/officeDocument/2006/relationships">
   <c:date1904 val="0"/>
   <c:roundedCorners val="1"/>
@@ -362,7 +362,7 @@
 </c:chartSpace>
 </file>
 
-<file path=ppt/charts/chart8.xml><?xml version="1.0" encoding="utf-8"?>
+<file path=ppt/charts/chart11.xml><?xml version="1.0" encoding="utf-8"?>
 <c:chartSpace xmlns:c="http://schemas.openxmlformats.org/drawingml/2006/chart" xmlns:a="http://schemas.openxmlformats.org/drawingml/2006/main" xmlns:r="http://schemas.openxmlformats.org/officeDocument/2006/relationships">
   <c:date1904 val="0"/>
   <c:roundedCorners val="1"/>
@@ -653,7 +653,7 @@
 </c:chartSpace>
 </file>
 
-<file path=ppt/charts/chart9.xml><?xml version="1.0" encoding="utf-8"?>
+<file path=ppt/charts/chart12.xml><?xml version="1.0" encoding="utf-8"?>
 <c:chartSpace xmlns:c="http://schemas.openxmlformats.org/drawingml/2006/chart" xmlns:a="http://schemas.openxmlformats.org/drawingml/2006/main" xmlns:r="http://schemas.openxmlformats.org/officeDocument/2006/relationships">
   <c:date1904 val="0"/>
   <c:roundedCorners val="1"/>
@@ -3343,7 +3343,7 @@
                 <a:ea typeface="Arial" pitchFamily="34" charset="-122"/>
                 <a:cs typeface="Arial" pitchFamily="34" charset="-120"/>
               </a:rPr>
-              <a:t>تحليل الأكريلاميد (مختبر Polymex، ISO 9001) وفحص REACH / SVHC (SGS) متاحان عند الطلب، إضافة إلى شهادة SOHISCERT السارية المفعول.</a:t>
+              <a:t>تحليل الأكريلاميد (مختبر Polymex، ISO 9001، بتركيز أقل من 3,0 ميكروغرام/غرام) وفحص REACH / SVHC (SGS) وشهادة SOHISCERT السارية حتى 4 سبتمبر 2027: متاحة جميعها عند الطلب.</a:t>
             </a:r>
             <a:endParaRPr lang="en-US" sz="1100" dirty="0"/>
           </a:p>

--- a/public/documents/countries/arabie-saoudite.pptx
+++ b/public/documents/countries/arabie-saoudite.pptx
@@ -117,7 +117,7 @@
 </p:presentation>
 </file>
 
-<file path=ppt/charts/chart10.xml><?xml version="1.0" encoding="utf-8"?>
+<file path=ppt/charts/chart7.xml><?xml version="1.0" encoding="utf-8"?>
 <c:chartSpace xmlns:c="http://schemas.openxmlformats.org/drawingml/2006/chart" xmlns:a="http://schemas.openxmlformats.org/drawingml/2006/main" xmlns:r="http://schemas.openxmlformats.org/officeDocument/2006/relationships">
   <c:date1904 val="0"/>
   <c:roundedCorners val="1"/>
@@ -362,7 +362,7 @@
 </c:chartSpace>
 </file>
 
-<file path=ppt/charts/chart11.xml><?xml version="1.0" encoding="utf-8"?>
+<file path=ppt/charts/chart8.xml><?xml version="1.0" encoding="utf-8"?>
 <c:chartSpace xmlns:c="http://schemas.openxmlformats.org/drawingml/2006/chart" xmlns:a="http://schemas.openxmlformats.org/drawingml/2006/main" xmlns:r="http://schemas.openxmlformats.org/officeDocument/2006/relationships">
   <c:date1904 val="0"/>
   <c:roundedCorners val="1"/>
@@ -653,7 +653,7 @@
 </c:chartSpace>
 </file>
 
-<file path=ppt/charts/chart12.xml><?xml version="1.0" encoding="utf-8"?>
+<file path=ppt/charts/chart9.xml><?xml version="1.0" encoding="utf-8"?>
 <c:chartSpace xmlns:c="http://schemas.openxmlformats.org/drawingml/2006/chart" xmlns:a="http://schemas.openxmlformats.org/drawingml/2006/main" xmlns:r="http://schemas.openxmlformats.org/officeDocument/2006/relationships">
   <c:date1904 val="0"/>
   <c:roundedCorners val="1"/>
@@ -2633,6 +2633,13 @@
 <file path=ppt/slides/slide1.xml><?xml version="1.0" encoding="utf-8"?>
 <p:sld xmlns:a="http://schemas.openxmlformats.org/drawingml/2006/main" xmlns:r="http://schemas.openxmlformats.org/officeDocument/2006/relationships" xmlns:p="http://schemas.openxmlformats.org/presentationml/2006/main">
   <p:cSld name="Slide 1">
+    <p:bg>
+      <p:bgPr>
+        <a:solidFill>
+          <a:srgbClr val="0D0D0D"/>
+        </a:solidFill>
+      </p:bgPr>
+    </p:bg>
     <p:spTree>
       <p:nvGrpSpPr>
         <p:cNvPr id="1" name=""/>
@@ -2664,7 +2671,7 @@
         <p:spPr>
           <a:xfrm>
             <a:off x="0" y="0"/>
-            <a:ext cx="12191695" cy="6858000"/>
+            <a:ext cx="5918911" cy="6858000"/>
           </a:xfrm>
           <a:prstGeom prst="rect">
             <a:avLst/>
@@ -2673,14 +2680,34 @@
       </p:pic>
       <p:sp>
         <p:nvSpPr>
-          <p:cNvPr id="3" name="Text 0"/>
-          <p:cNvSpPr txBox="1"/>
-          <p:nvPr/>
-        </p:nvSpPr>
-        <p:spPr>
-          <a:xfrm>
-            <a:off x="777240" y="1965960"/>
-            <a:ext cx="10058400" cy="320040"/>
+          <p:cNvPr id="3" name="Shape 0"/>
+          <p:cNvSpPr/>
+          <p:nvPr/>
+        </p:nvSpPr>
+        <p:spPr>
+          <a:xfrm>
+            <a:off x="5918911" y="0"/>
+            <a:ext cx="6272784" cy="6858000"/>
+          </a:xfrm>
+          <a:prstGeom prst="rect">
+            <a:avLst/>
+          </a:prstGeom>
+          <a:solidFill>
+            <a:srgbClr val="0D0D0D"/>
+          </a:solidFill>
+          <a:ln/>
+        </p:spPr>
+      </p:sp>
+      <p:sp>
+        <p:nvSpPr>
+          <p:cNvPr id="4" name="Text 1"/>
+          <p:cNvSpPr txBox="1"/>
+          <p:nvPr/>
+        </p:nvSpPr>
+        <p:spPr>
+          <a:xfrm>
+            <a:off x="6577279" y="566928"/>
+            <a:ext cx="4041648" cy="292608"/>
           </a:xfrm>
           <a:prstGeom prst="rect">
             <a:avLst/>
@@ -2696,114 +2723,242 @@
               <a:buNone/>
             </a:pPr>
             <a:r>
-              <a:rPr lang="en-US" sz="1300" b="1" spc="250" kern="0" dirty="0">
-                <a:solidFill>
-                  <a:srgbClr val="D9A441"/>
-                </a:solidFill>
-                <a:latin typeface="Arial" pitchFamily="34" charset="0"/>
-                <a:ea typeface="Arial" pitchFamily="34" charset="-122"/>
-                <a:cs typeface="Arial" pitchFamily="34" charset="-120"/>
-              </a:rPr>
-              <a:t>ملف السوق الزراعي</a:t>
-            </a:r>
-            <a:endParaRPr lang="en-US" sz="1300" dirty="0"/>
-          </a:p>
-        </p:txBody>
-      </p:sp>
-      <p:sp>
-        <p:nvSpPr>
-          <p:cNvPr id="4" name="Text 1"/>
-          <p:cNvSpPr txBox="1"/>
-          <p:nvPr/>
-        </p:nvSpPr>
-        <p:spPr>
-          <a:xfrm>
-            <a:off x="777240" y="2377440"/>
-            <a:ext cx="10241280" cy="1371600"/>
-          </a:xfrm>
-          <a:prstGeom prst="rect">
-            <a:avLst/>
-          </a:prstGeom>
-          <a:noFill/>
-          <a:ln/>
-        </p:spPr>
-        <p:txBody>
-          <a:bodyPr wrap="square" lIns="0" tIns="0" rIns="0" bIns="0" rtlCol="0" anchor="ctr"/>
-          <a:lstStyle/>
-          <a:p>
-            <a:pPr rtl="1" algn="r" indent="0" marL="0">
-              <a:buNone/>
-            </a:pPr>
-            <a:r>
-              <a:rPr lang="en-US" sz="4200" b="1" dirty="0">
-                <a:solidFill>
-                  <a:srgbClr val="FFFFFF"/>
-                </a:solidFill>
-                <a:latin typeface="Arial" pitchFamily="34" charset="0"/>
-                <a:ea typeface="Arial" pitchFamily="34" charset="-122"/>
-                <a:cs typeface="Arial" pitchFamily="34" charset="-120"/>
-              </a:rPr>
-              <a:t>المملكة العربية السعودية</a:t>
-            </a:r>
-            <a:endParaRPr lang="en-US" sz="4200" dirty="0"/>
-          </a:p>
-        </p:txBody>
-      </p:sp>
-      <p:sp>
-        <p:nvSpPr>
-          <p:cNvPr id="5" name="Text 2"/>
-          <p:cNvSpPr txBox="1"/>
-          <p:nvPr/>
-        </p:nvSpPr>
-        <p:spPr>
-          <a:xfrm>
-            <a:off x="777240" y="3840480"/>
-            <a:ext cx="8686800" cy="822960"/>
-          </a:xfrm>
-          <a:prstGeom prst="rect">
-            <a:avLst/>
-          </a:prstGeom>
-          <a:noFill/>
-          <a:ln/>
-        </p:spPr>
-        <p:txBody>
-          <a:bodyPr wrap="square" lIns="0" tIns="0" rIns="0" bIns="0" rtlCol="0" anchor="ctr"/>
+              <a:rPr lang="en-US" sz="1100" b="1" spc="80" kern="0" dirty="0">
+                <a:solidFill>
+                  <a:srgbClr val="8BC34A"/>
+                </a:solidFill>
+                <a:latin typeface="Arial" pitchFamily="34" charset="0"/>
+                <a:ea typeface="Arial" pitchFamily="34" charset="-122"/>
+                <a:cs typeface="Arial" pitchFamily="34" charset="-120"/>
+              </a:rPr>
+              <a:t>GREEN SOLUTIONS GROUP</a:t>
+            </a:r>
+            <a:endParaRPr lang="en-US" sz="1100" dirty="0"/>
+          </a:p>
+        </p:txBody>
+      </p:sp>
+      <p:pic>
+        <p:nvPicPr>
+          <p:cNvPr id="5" name="Image 1" descr="C:\Users\Utilisateur\dev\green-solutions-web\public\images\logo-icon.png">    </p:cNvPr>
+          <p:cNvPicPr>
+            <a:picLocks noChangeAspect="1"/>
+          </p:cNvPicPr>
+          <p:nvPr/>
+        </p:nvPicPr>
+        <p:blipFill>
+          <a:blip r:embed="rId2"/>
+          <a:stretch>
+            <a:fillRect/>
+          </a:stretch>
+        </p:blipFill>
+        <p:spPr>
+          <a:xfrm>
+            <a:off x="6577279" y="457200"/>
+            <a:ext cx="603504" cy="603504"/>
+          </a:xfrm>
+          <a:prstGeom prst="rect">
+            <a:avLst/>
+          </a:prstGeom>
+        </p:spPr>
+      </p:pic>
+      <p:pic>
+        <p:nvPicPr>
+          <p:cNvPr id="6" name="Image 2" descr="C:\Users\Utilisateur\dev\green-solutions-web\scripts\dossiers\drapeaux\arabie-saoudite.png">    </p:cNvPr>
+          <p:cNvPicPr>
+            <a:picLocks noChangeAspect="1"/>
+          </p:cNvPicPr>
+          <p:nvPr/>
+        </p:nvPicPr>
+        <p:blipFill>
+          <a:blip r:embed="rId3"/>
+          <a:stretch>
+            <a:fillRect/>
+          </a:stretch>
+        </p:blipFill>
+        <p:spPr>
+          <a:xfrm>
+            <a:off x="6577279" y="1389888"/>
+            <a:ext cx="1965960" cy="1310640"/>
+          </a:xfrm>
+          <a:prstGeom prst="rect">
+            <a:avLst/>
+          </a:prstGeom>
+        </p:spPr>
+      </p:pic>
+      <p:sp>
+        <p:nvSpPr>
+          <p:cNvPr id="7" name="Shape 2"/>
+          <p:cNvSpPr/>
+          <p:nvPr/>
+        </p:nvSpPr>
+        <p:spPr>
+          <a:xfrm>
+            <a:off x="6577279" y="1389888"/>
+            <a:ext cx="1965960" cy="1310640"/>
+          </a:xfrm>
+          <a:prstGeom prst="rect">
+            <a:avLst/>
+          </a:prstGeom>
+          <a:ln w="9525">
+            <a:solidFill>
+              <a:srgbClr val="3A3A3A"/>
+            </a:solidFill>
+            <a:prstDash val="solid"/>
+          </a:ln>
+        </p:spPr>
+      </p:sp>
+      <p:sp>
+        <p:nvSpPr>
+          <p:cNvPr id="8" name="Text 3"/>
+          <p:cNvSpPr txBox="1"/>
+          <p:nvPr/>
+        </p:nvSpPr>
+        <p:spPr>
+          <a:xfrm>
+            <a:off x="8771839" y="1298448"/>
+            <a:ext cx="2761488" cy="1234440"/>
+          </a:xfrm>
+          <a:prstGeom prst="rect">
+            <a:avLst/>
+          </a:prstGeom>
+          <a:noFill/>
+          <a:ln/>
+        </p:spPr>
+        <p:txBody>
+          <a:bodyPr wrap="square" lIns="0" tIns="0" rIns="0" bIns="0" rtlCol="0" anchor="t"/>
           <a:lstStyle/>
           <a:p>
             <a:pPr rtl="1" algn="r" indent="0" marL="0">
               <a:lnSpc>
-                <a:spcPct val="125000"/>
+                <a:spcPct val="110000"/>
               </a:lnSpc>
               <a:buNone/>
             </a:pPr>
             <a:r>
-              <a:rPr lang="en-US" sz="1600" dirty="0">
-                <a:solidFill>
-                  <a:srgbClr val="FFFFFF">
-                    <a:alpha val="88000"/>
-                  </a:srgbClr>
-                </a:solidFill>
-                <a:latin typeface="Arial" pitchFamily="34" charset="0"/>
-                <a:ea typeface="Arial" pitchFamily="34" charset="-122"/>
-                <a:cs typeface="Arial" pitchFamily="34" charset="-120"/>
-              </a:rPr>
-              <a:t>التمور والخضروات المحمية والزراعة المروية تحت قيد مائي دائم.</a:t>
+              <a:rPr lang="en-US" sz="2400" b="1" dirty="0">
+                <a:solidFill>
+                  <a:srgbClr val="FFFFFF"/>
+                </a:solidFill>
+                <a:latin typeface="Arial" pitchFamily="34" charset="0"/>
+                <a:ea typeface="Arial" pitchFamily="34" charset="-122"/>
+                <a:cs typeface="Arial" pitchFamily="34" charset="-120"/>
+              </a:rPr>
+              <a:t>المملكة العربية السعودية</a:t>
+            </a:r>
+            <a:endParaRPr lang="en-US" sz="2400" dirty="0"/>
+          </a:p>
+        </p:txBody>
+      </p:sp>
+      <p:sp>
+        <p:nvSpPr>
+          <p:cNvPr id="9" name="Shape 4"/>
+          <p:cNvSpPr/>
+          <p:nvPr/>
+        </p:nvSpPr>
+        <p:spPr>
+          <a:xfrm>
+            <a:off x="8744407" y="2889504"/>
+            <a:ext cx="2788920" cy="45720"/>
+          </a:xfrm>
+          <a:prstGeom prst="rect">
+            <a:avLst/>
+          </a:prstGeom>
+          <a:solidFill>
+            <a:srgbClr val="D9A441"/>
+          </a:solidFill>
+          <a:ln/>
+        </p:spPr>
+      </p:sp>
+      <p:sp>
+        <p:nvSpPr>
+          <p:cNvPr id="10" name="Text 5"/>
+          <p:cNvSpPr txBox="1"/>
+          <p:nvPr/>
+        </p:nvSpPr>
+        <p:spPr>
+          <a:xfrm>
+            <a:off x="6577279" y="3163824"/>
+            <a:ext cx="4956048" cy="384048"/>
+          </a:xfrm>
+          <a:prstGeom prst="rect">
+            <a:avLst/>
+          </a:prstGeom>
+          <a:noFill/>
+          <a:ln/>
+        </p:spPr>
+        <p:txBody>
+          <a:bodyPr wrap="square" lIns="0" tIns="0" rIns="0" bIns="0" rtlCol="0" anchor="ctr"/>
+          <a:lstStyle/>
+          <a:p>
+            <a:pPr rtl="1" algn="r" indent="0" marL="0">
+              <a:buNone/>
+            </a:pPr>
+            <a:r>
+              <a:rPr lang="en-US" sz="1600" b="1" dirty="0">
+                <a:solidFill>
+                  <a:srgbClr val="D9A441"/>
+                </a:solidFill>
+                <a:latin typeface="Arial" pitchFamily="34" charset="0"/>
+                <a:ea typeface="Arial" pitchFamily="34" charset="-122"/>
+                <a:cs typeface="Arial" pitchFamily="34" charset="-120"/>
+              </a:rPr>
+              <a:t>الرياض · 2026</a:t>
             </a:r>
             <a:endParaRPr lang="en-US" sz="1600" dirty="0"/>
           </a:p>
+        </p:txBody>
+      </p:sp>
+      <p:sp>
+        <p:nvSpPr>
+          <p:cNvPr id="11" name="Text 6"/>
+          <p:cNvSpPr txBox="1"/>
+          <p:nvPr/>
+        </p:nvSpPr>
+        <p:spPr>
+          <a:xfrm>
+            <a:off x="6577279" y="3767328"/>
+            <a:ext cx="4956048" cy="914400"/>
+          </a:xfrm>
+          <a:prstGeom prst="rect">
+            <a:avLst/>
+          </a:prstGeom>
+          <a:noFill/>
+          <a:ln/>
+        </p:spPr>
+        <p:txBody>
+          <a:bodyPr wrap="square" lIns="0" tIns="0" rIns="0" bIns="0" rtlCol="0" anchor="t"/>
+          <a:lstStyle/>
           <a:p>
             <a:pPr rtl="1" algn="r" indent="0" marL="0">
               <a:lnSpc>
-                <a:spcPct val="125000"/>
+                <a:spcPct val="128000"/>
               </a:lnSpc>
               <a:buNone/>
             </a:pPr>
             <a:r>
-              <a:rPr lang="en-US" sz="1600" dirty="0">
-                <a:solidFill>
-                  <a:srgbClr val="FFFFFF">
-                    <a:alpha val="88000"/>
-                  </a:srgbClr>
+              <a:rPr lang="en-US" sz="1450" dirty="0">
+                <a:solidFill>
+                  <a:srgbClr val="FFFFFF"/>
+                </a:solidFill>
+                <a:latin typeface="Arial" pitchFamily="34" charset="0"/>
+                <a:ea typeface="Arial" pitchFamily="34" charset="-122"/>
+                <a:cs typeface="Arial" pitchFamily="34" charset="-120"/>
+              </a:rPr>
+              <a:t>التمور والخضروات المحمية والزراعة المروية تحت قيد مائي دائم.</a:t>
+            </a:r>
+            <a:endParaRPr lang="en-US" sz="1450" dirty="0"/>
+          </a:p>
+          <a:p>
+            <a:pPr rtl="1" algn="r" indent="0" marL="0">
+              <a:lnSpc>
+                <a:spcPct val="128000"/>
+              </a:lnSpc>
+              <a:buNone/>
+            </a:pPr>
+            <a:r>
+              <a:rPr lang="en-US" sz="1450" dirty="0">
+                <a:solidFill>
+                  <a:srgbClr val="FFFFFF"/>
                 </a:solidFill>
                 <a:latin typeface="Arial" pitchFamily="34" charset="0"/>
                 <a:ea typeface="Arial" pitchFamily="34" charset="-122"/>
@@ -2811,20 +2966,20 @@
               </a:rPr>
               <a:t>ما الذي يغيّره احتباس الماء في التربة على مستوى الحقل.</a:t>
             </a:r>
-            <a:endParaRPr lang="en-US" sz="1600" dirty="0"/>
-          </a:p>
-        </p:txBody>
-      </p:sp>
-      <p:sp>
-        <p:nvSpPr>
-          <p:cNvPr id="6" name="Text 3"/>
-          <p:cNvSpPr txBox="1"/>
-          <p:nvPr/>
-        </p:nvSpPr>
-        <p:spPr>
-          <a:xfrm>
-            <a:off x="777240" y="5989320"/>
-            <a:ext cx="10058400" cy="320040"/>
+            <a:endParaRPr lang="en-US" sz="1450" dirty="0"/>
+          </a:p>
+        </p:txBody>
+      </p:sp>
+      <p:sp>
+        <p:nvSpPr>
+          <p:cNvPr id="12" name="Text 7"/>
+          <p:cNvSpPr txBox="1"/>
+          <p:nvPr/>
+        </p:nvSpPr>
+        <p:spPr>
+          <a:xfrm>
+            <a:off x="6577279" y="4892040"/>
+            <a:ext cx="4956048" cy="347472"/>
           </a:xfrm>
           <a:prstGeom prst="rect">
             <a:avLst/>
@@ -2840,19 +2995,56 @@
               <a:buNone/>
             </a:pPr>
             <a:r>
-              <a:rPr lang="en-US" sz="1100" dirty="0">
-                <a:solidFill>
-                  <a:srgbClr val="FFFFFF">
-                    <a:alpha val="65000"/>
-                  </a:srgbClr>
-                </a:solidFill>
-                <a:latin typeface="Arial" pitchFamily="34" charset="0"/>
-                <a:ea typeface="Arial" pitchFamily="34" charset="-122"/>
-                <a:cs typeface="Arial" pitchFamily="34" charset="-120"/>
-              </a:rPr>
-              <a:t>Green Solutions · contact@evergreen-ecosorb.com</a:t>
+              <a:rPr lang="en-US" sz="1100" b="1" dirty="0">
+                <a:solidFill>
+                  <a:srgbClr val="8BC34A"/>
+                </a:solidFill>
+                <a:latin typeface="Arial" pitchFamily="34" charset="0"/>
+                <a:ea typeface="Arial" pitchFamily="34" charset="-122"/>
+                <a:cs typeface="Arial" pitchFamily="34" charset="-120"/>
+              </a:rPr>
+              <a:t>ECOSORB® · ECOFERT® · NAPEMA® · PAULOWNIA</a:t>
             </a:r>
             <a:endParaRPr lang="en-US" sz="1100" dirty="0"/>
+          </a:p>
+        </p:txBody>
+      </p:sp>
+      <p:sp>
+        <p:nvSpPr>
+          <p:cNvPr id="13" name="Text 8"/>
+          <p:cNvSpPr txBox="1"/>
+          <p:nvPr/>
+        </p:nvSpPr>
+        <p:spPr>
+          <a:xfrm>
+            <a:off x="6577279" y="6053328"/>
+            <a:ext cx="4956048" cy="310896"/>
+          </a:xfrm>
+          <a:prstGeom prst="rect">
+            <a:avLst/>
+          </a:prstGeom>
+          <a:noFill/>
+          <a:ln/>
+        </p:spPr>
+        <p:txBody>
+          <a:bodyPr wrap="square" lIns="0" tIns="0" rIns="0" bIns="0" rtlCol="0" anchor="ctr"/>
+          <a:lstStyle/>
+          <a:p>
+            <a:pPr rtl="1" algn="r" indent="0" marL="0">
+              <a:buNone/>
+            </a:pPr>
+            <a:r>
+              <a:rPr lang="en-US" sz="850" dirty="0">
+                <a:solidFill>
+                  <a:srgbClr val="9A9A9A"/>
+                </a:solidFill>
+                <a:latin typeface="Arial" pitchFamily="34" charset="0"/>
+                <a:ea typeface="Arial" pitchFamily="34" charset="-122"/>
+                <a:cs typeface="Arial" pitchFamily="34" charset="-120"/>
+              </a:rPr>
+              <a:t>سبتمبر 2026 · وثيقة سرية · للاستخدام الحصري للمرسل إليه</a:t>
+            </a:r>
+            <a:endParaRPr lang="en-US" sz="850" dirty="0"/>
           </a:p>
         </p:txBody>
       </p:sp>

--- a/public/documents/countries/arabie-saoudite.pptx
+++ b/public/documents/countries/arabie-saoudite.pptx
@@ -3825,9 +3825,35 @@
           </a:p>
         </p:txBody>
       </p:sp>
-      <p:sp>
-        <p:nvSpPr>
-          <p:cNvPr id="6" name="Text 3"/>
+      <p:pic>
+        <p:nvPicPr>
+          <p:cNvPr id="6" name="Image 1" descr="C:\Users\Utilisateur\dev\green-solutions-web\scripts\dossiers\sceau-aim-clair.png">    </p:cNvPr>
+          <p:cNvPicPr>
+            <a:picLocks noChangeAspect="1"/>
+          </p:cNvPicPr>
+          <p:nvPr/>
+        </p:nvPicPr>
+        <p:blipFill>
+          <a:blip r:embed="rId2">
+            <a:alphaModFix amt="85000"/>
+          </a:blip>
+          <a:stretch>
+            <a:fillRect/>
+          </a:stretch>
+        </p:blipFill>
+        <p:spPr>
+          <a:xfrm>
+            <a:off x="502920" y="5193792"/>
+            <a:ext cx="1051560" cy="1051560"/>
+          </a:xfrm>
+          <a:prstGeom prst="rect">
+            <a:avLst/>
+          </a:prstGeom>
+        </p:spPr>
+      </p:pic>
+      <p:sp>
+        <p:nvSpPr>
+          <p:cNvPr id="7" name="Text 3"/>
           <p:cNvSpPr txBox="1"/>
           <p:nvPr/>
         </p:nvSpPr>
@@ -3868,7 +3894,7 @@
       </p:sp>
       <p:sp>
         <p:nvSpPr>
-          <p:cNvPr id="7" name="Text 4"/>
+          <p:cNvPr id="8" name="Text 4"/>
           <p:cNvSpPr txBox="1"/>
           <p:nvPr/>
         </p:nvSpPr>

--- a/public/documents/countries/arabie-saoudite.pptx
+++ b/public/documents/countries/arabie-saoudite.pptx
@@ -16,9 +16,16 @@
     <p:sldId id="264" r:id="rId10"/>
     <p:sldId id="265" r:id="rId11"/>
     <p:sldId id="266" r:id="rId12"/>
+    <p:sldId id="267" r:id="rId13"/>
+    <p:sldId id="268" r:id="rId14"/>
+    <p:sldId id="269" r:id="rId15"/>
+    <p:sldId id="270" r:id="rId16"/>
+    <p:sldId id="271" r:id="rId17"/>
+    <p:sldId id="272" r:id="rId18"/>
+    <p:sldId id="273" r:id="rId19"/>
   </p:sldIdLst>
   <p:notesMasterIdLst>
-    <p:notesMasterId r:id="rId13"/>
+    <p:notesMasterId r:id="rId20"/>
   </p:notesMasterIdLst>
   <p:sldSz cx="12192000" cy="6858000"/>
   <p:notesSz cx="6858000" cy="12192000"/>
@@ -117,252 +124,7 @@
 </p:presentation>
 </file>
 
-<file path=ppt/charts/chart7.xml><?xml version="1.0" encoding="utf-8"?>
-<c:chartSpace xmlns:c="http://schemas.openxmlformats.org/drawingml/2006/chart" xmlns:a="http://schemas.openxmlformats.org/drawingml/2006/main" xmlns:r="http://schemas.openxmlformats.org/officeDocument/2006/relationships">
-  <c:date1904 val="0"/>
-  <c:roundedCorners val="1"/>
-  <c:chart>
-    <c:autoTitleDeleted val="1"/>
-    <c:plotArea>
-      <c:layout/>
-      <c:doughnutChart>
-        <c:varyColors val="1"/>
-        <c:ser>
-          <c:idx val="0"/>
-          <c:order val="0"/>
-          <c:tx>
-            <c:strRef>
-              <c:f>Sheet1!$B$1</c:f>
-              <c:strCache>
-                <c:ptCount val="1"/>
-                <c:pt idx="0">
-                  <c:v>المياه المسحوبة</c:v>
-                </c:pt>
-              </c:strCache>
-            </c:strRef>
-          </c:tx>
-          <c:spPr>
-            <a:solidFill>
-              <a:schemeClr val="accent1"/>
-            </a:solidFill>
-            <a:ln w="9525" cap="flat">
-              <a:solidFill>
-                <a:srgbClr val="F9F9F9"/>
-              </a:solidFill>
-              <a:prstDash val="solid"/>
-              <a:round/>
-            </a:ln>
-            <a:effectLst/>
-          </c:spPr>
-          <c:dPt>
-            <c:idx val="0"/>
-            <c:bubble3D val="0"/>
-            <c:spPr>
-              <a:solidFill>
-                <a:srgbClr val="2C6E49"/>
-              </a:solidFill>
-              <a:effectLst/>
-            </c:spPr>
-          </c:dPt>
-          <c:dPt>
-            <c:idx val="1"/>
-            <c:bubble3D val="0"/>
-            <c:spPr>
-              <a:solidFill>
-                <a:srgbClr val="D9A441"/>
-              </a:solidFill>
-              <a:effectLst/>
-            </c:spPr>
-          </c:dPt>
-          <c:dPt>
-            <c:idx val="2"/>
-            <c:bubble3D val="0"/>
-            <c:spPr>
-              <a:solidFill>
-                <a:srgbClr val="7FA88C"/>
-              </a:solidFill>
-              <a:effectLst/>
-            </c:spPr>
-          </c:dPt>
-          <c:dLbls>
-            <c:dLbl>
-              <c:idx val="0"/>
-              <c:numFmt formatCode="[$-401]0&quot;%&quot;" sourceLinked="0"/>
-              <c:spPr/>
-              <c:txPr>
-                <a:bodyPr/>
-                <a:lstStyle/>
-                <a:p>
-                  <a:pPr>
-                    <a:defRPr sz="1100" b="0" i="0" u="none" strike="noStrike">
-                      <a:solidFill>
-                        <a:srgbClr val="FFFFFF"/>
-                      </a:solidFill>
-                      <a:latin typeface="Arial"/>
-                    </a:defRPr>
-                  </a:pPr>
-                </a:p>
-              </c:txPr>
-              <c:showLegendKey val="0"/>
-              <c:showVal val="1"/>
-              <c:showCatName val="0"/>
-              <c:showSerName val="0"/>
-              <c:showPercent val="0"/>
-              <c:showBubbleSize val="0"/>
-            </c:dLbl>
-            <c:dLbl>
-              <c:idx val="1"/>
-              <c:numFmt formatCode="[$-401]0&quot;%&quot;" sourceLinked="0"/>
-              <c:spPr/>
-              <c:txPr>
-                <a:bodyPr/>
-                <a:lstStyle/>
-                <a:p>
-                  <a:pPr>
-                    <a:defRPr sz="1100" b="0" i="0" u="none" strike="noStrike">
-                      <a:solidFill>
-                        <a:srgbClr val="FFFFFF"/>
-                      </a:solidFill>
-                      <a:latin typeface="Arial"/>
-                    </a:defRPr>
-                  </a:pPr>
-                </a:p>
-              </c:txPr>
-              <c:showLegendKey val="0"/>
-              <c:showVal val="1"/>
-              <c:showCatName val="0"/>
-              <c:showSerName val="0"/>
-              <c:showPercent val="0"/>
-              <c:showBubbleSize val="0"/>
-            </c:dLbl>
-            <c:dLbl>
-              <c:idx val="2"/>
-              <c:numFmt formatCode="[$-401]0&quot;%&quot;" sourceLinked="0"/>
-              <c:spPr/>
-              <c:txPr>
-                <a:bodyPr/>
-                <a:lstStyle/>
-                <a:p>
-                  <a:pPr>
-                    <a:defRPr sz="1100" b="0" i="0" u="none" strike="noStrike">
-                      <a:solidFill>
-                        <a:srgbClr val="FFFFFF"/>
-                      </a:solidFill>
-                      <a:latin typeface="Arial"/>
-                    </a:defRPr>
-                  </a:pPr>
-                </a:p>
-              </c:txPr>
-              <c:showLegendKey val="0"/>
-              <c:showVal val="1"/>
-              <c:showCatName val="0"/>
-              <c:showSerName val="0"/>
-              <c:showPercent val="0"/>
-              <c:showBubbleSize val="0"/>
-            </c:dLbl>
-            <c:numFmt formatCode="[$-401]0&quot;%&quot;" sourceLinked="0"/>
-            <c:txPr>
-              <a:bodyPr/>
-              <a:lstStyle/>
-              <a:p>
-                <a:pPr>
-                  <a:defRPr sz="1800" b="0" i="0" u="none" strike="noStrike">
-                    <a:solidFill>
-                      <a:srgbClr val="000000"/>
-                    </a:solidFill>
-                    <a:latin typeface="Arial"/>
-                  </a:defRPr>
-                </a:pPr>
-              </a:p>
-            </c:txPr>
-            <c:showLegendKey val="0"/>
-            <c:showVal val="0"/>
-            <c:showCatName val="1"/>
-            <c:showSerName val="0"/>
-            <c:showPercent val="1"/>
-            <c:showBubbleSize val="0"/>
-            <c:showLeaderLines val="0"/>
-          </c:dLbls>
-          <c:cat>
-            <c:strRef>
-              <c:f>Sheet1!$A$2:$A$4</c:f>
-              <c:strCache>
-                <c:ptCount val="3"/>
-                <c:pt idx="0">
-                  <c:v>الزراعة</c:v>
-                </c:pt>
-                <c:pt idx="1">
-                  <c:v>مياه الشرب</c:v>
-                </c:pt>
-                <c:pt idx="2">
-                  <c:v>الصناعة</c:v>
-                </c:pt>
-              </c:strCache>
-            </c:strRef>
-          </c:cat>
-          <c:val>
-            <c:numRef>
-              <c:f>Sheet1!$B$2:$B$4</c:f>
-              <c:numCache>
-                <c:ptCount val="3"/>
-                <c:pt idx="0">
-                  <c:v>84</c:v>
-                </c:pt>
-                <c:pt idx="1">
-                  <c:v>12</c:v>
-                </c:pt>
-                <c:pt idx="2">
-                  <c:v>4</c:v>
-                </c:pt>
-              </c:numCache>
-            </c:numRef>
-          </c:val>
-        </c:ser>
-        <c:firstSliceAng val="0"/>
-        <c:holeSize val="55"/>
-      </c:doughnutChart>
-      <c:spPr>
-        <a:noFill/>
-        <a:ln>
-          <a:noFill/>
-        </a:ln>
-        <a:effectLst/>
-      </c:spPr>
-    </c:plotArea>
-    <c:legend>
-      <c:legendPos val="b"/>
-      <c:overlay val="0"/>
-      <c:txPr>
-        <a:bodyPr/>
-        <a:lstStyle/>
-        <a:p>
-          <a:pPr>
-            <a:defRPr sz="1100">
-              <a:latin typeface="Arial"/>
-              <a:cs typeface="Arial"/>
-            </a:defRPr>
-          </a:pPr>
-          <a:endParaRPr lang="en-US"/>
-        </a:p>
-      </c:txPr>
-    </c:legend>
-    <c:plotVisOnly val="1"/>
-    <c:dispBlanksAs val="span"/>
-  </c:chart>
-  <c:spPr>
-    <a:noFill/>
-    <a:ln>
-      <a:noFill/>
-    </a:ln>
-    <a:effectLst/>
-  </c:spPr>
-  <c:externalData r:id="rId1">
-    <c:autoUpdate val="0"/>
-  </c:externalData>
-</c:chartSpace>
-</file>
-
-<file path=ppt/charts/chart8.xml><?xml version="1.0" encoding="utf-8"?>
+<file path=ppt/charts/chart10.xml><?xml version="1.0" encoding="utf-8"?>
 <c:chartSpace xmlns:c="http://schemas.openxmlformats.org/drawingml/2006/chart" xmlns:a="http://schemas.openxmlformats.org/drawingml/2006/main" xmlns:r="http://schemas.openxmlformats.org/officeDocument/2006/relationships">
   <c:date1904 val="0"/>
   <c:roundedCorners val="1"/>
@@ -653,7 +415,360 @@
 </c:chartSpace>
 </file>
 
-<file path=ppt/charts/chart9.xml><?xml version="1.0" encoding="utf-8"?>
+<file path=ppt/charts/chart11.xml><?xml version="1.0" encoding="utf-8"?>
+<c:chartSpace xmlns:c="http://schemas.openxmlformats.org/drawingml/2006/chart" xmlns:a="http://schemas.openxmlformats.org/drawingml/2006/main" xmlns:r="http://schemas.openxmlformats.org/officeDocument/2006/relationships">
+  <c:date1904 val="0"/>
+  <c:roundedCorners val="1"/>
+  <c:chart>
+    <c:autoTitleDeleted val="1"/>
+    <c:plotArea>
+      <c:layout/>
+      <c:barChart>
+        <c:barDir val="col"/>
+        <c:grouping val="clustered"/>
+        <c:varyColors val="0"/>
+        <c:ser>
+          <c:idx val="0"/>
+          <c:order val="0"/>
+          <c:tx>
+            <c:strRef>
+              <c:f>Sheet1!$B$1</c:f>
+              <c:strCache>
+                <c:ptCount val="1"/>
+                <c:pt idx="0">
+                  <c:v>الحد الأدنى (%)</c:v>
+                </c:pt>
+              </c:strCache>
+            </c:strRef>
+          </c:tx>
+          <c:spPr>
+            <a:solidFill>
+              <a:srgbClr val="2C6E49"/>
+            </a:solidFill>
+            <a:effectLst/>
+          </c:spPr>
+          <c:invertIfNegative val="0"/>
+          <c:dLbls>
+            <c:numFmt formatCode="[$-401]0&quot;%&quot;" sourceLinked="0"/>
+            <c:txPr>
+              <a:bodyPr/>
+              <a:lstStyle/>
+              <a:p>
+                <a:pPr>
+                  <a:defRPr b="0" i="0" strike="noStrike" sz="1100" u="none">
+                    <a:solidFill>
+                      <a:srgbClr val="16412B"/>
+                    </a:solidFill>
+                    <a:latin typeface="Arial"/>
+                  </a:defRPr>
+                </a:pPr>
+              </a:p>
+            </c:txPr>
+            <c:showLegendKey val="0"/>
+            <c:showVal val="1"/>
+            <c:showCatName val="0"/>
+            <c:showSerName val="0"/>
+            <c:showPercent val="0"/>
+            <c:showBubbleSize val="0"/>
+            <c:showLeaderLines val="0"/>
+          </c:dLbls>
+          <c:cat>
+            <c:multiLvlStrRef>
+              <c:f>Sheet1!$A$2:$A$5</c:f>
+              <c:multiLvlStrCache>
+                <c:ptCount val="4"/>
+                <c:lvl>
+                  <c:pt idx="0">
+                    <c:v>الطماطم</c:v>
+                  </c:pt>
+                  <c:pt idx="1">
+                    <c:v>الباذنجان</c:v>
+                  </c:pt>
+                  <c:pt idx="2">
+                    <c:v>الخيار</c:v>
+                  </c:pt>
+                  <c:pt idx="3">
+                    <c:v>التمور</c:v>
+                  </c:pt>
+                </c:lvl>
+              </c:multiLvlStrCache>
+            </c:multiLvlStrRef>
+          </c:cat>
+          <c:val>
+            <c:numRef>
+              <c:f>Sheet1!$B$2:$B$5</c:f>
+              <c:numCache>
+                <c:formatCode>General</c:formatCode>
+                <c:ptCount val="4"/>
+                <c:pt idx="0">
+                  <c:v>30</c:v>
+                </c:pt>
+                <c:pt idx="1">
+                  <c:v>20</c:v>
+                </c:pt>
+                <c:pt idx="2">
+                  <c:v>20</c:v>
+                </c:pt>
+                <c:pt idx="3">
+                  <c:v>20</c:v>
+                </c:pt>
+              </c:numCache>
+            </c:numRef>
+          </c:val>
+        </c:ser>
+        <c:ser>
+          <c:idx val="1"/>
+          <c:order val="1"/>
+          <c:tx>
+            <c:strRef>
+              <c:f>Sheet1!$C$1</c:f>
+              <c:strCache>
+                <c:ptCount val="1"/>
+                <c:pt idx="0">
+                  <c:v>الحد الأعلى (%)</c:v>
+                </c:pt>
+              </c:strCache>
+            </c:strRef>
+          </c:tx>
+          <c:spPr>
+            <a:solidFill>
+              <a:srgbClr val="D9A441"/>
+            </a:solidFill>
+            <a:effectLst/>
+          </c:spPr>
+          <c:invertIfNegative val="0"/>
+          <c:dLbls>
+            <c:numFmt formatCode="[$-401]0&quot;%&quot;" sourceLinked="0"/>
+            <c:txPr>
+              <a:bodyPr/>
+              <a:lstStyle/>
+              <a:p>
+                <a:pPr>
+                  <a:defRPr b="0" i="0" strike="noStrike" sz="1100" u="none">
+                    <a:solidFill>
+                      <a:srgbClr val="16412B"/>
+                    </a:solidFill>
+                    <a:latin typeface="Arial"/>
+                  </a:defRPr>
+                </a:pPr>
+              </a:p>
+            </c:txPr>
+            <c:showLegendKey val="0"/>
+            <c:showVal val="1"/>
+            <c:showCatName val="0"/>
+            <c:showSerName val="0"/>
+            <c:showPercent val="0"/>
+            <c:showBubbleSize val="0"/>
+            <c:showLeaderLines val="0"/>
+          </c:dLbls>
+          <c:cat>
+            <c:multiLvlStrRef>
+              <c:f>Sheet1!$A$2:$A$5</c:f>
+              <c:multiLvlStrCache>
+                <c:ptCount val="4"/>
+                <c:lvl>
+                  <c:pt idx="0">
+                    <c:v>الطماطم</c:v>
+                  </c:pt>
+                  <c:pt idx="1">
+                    <c:v>الباذنجان</c:v>
+                  </c:pt>
+                  <c:pt idx="2">
+                    <c:v>الخيار</c:v>
+                  </c:pt>
+                  <c:pt idx="3">
+                    <c:v>التمور</c:v>
+                  </c:pt>
+                </c:lvl>
+              </c:multiLvlStrCache>
+            </c:multiLvlStrRef>
+          </c:cat>
+          <c:val>
+            <c:numRef>
+              <c:f>Sheet1!$C$2:$C$5</c:f>
+              <c:numCache>
+                <c:formatCode>General</c:formatCode>
+                <c:ptCount val="4"/>
+                <c:pt idx="0">
+                  <c:v>50</c:v>
+                </c:pt>
+                <c:pt idx="1">
+                  <c:v>35</c:v>
+                </c:pt>
+                <c:pt idx="2">
+                  <c:v>40</c:v>
+                </c:pt>
+                <c:pt idx="3">
+                  <c:v>40</c:v>
+                </c:pt>
+              </c:numCache>
+            </c:numRef>
+          </c:val>
+        </c:ser>
+        <c:dLbls>
+          <c:numFmt formatCode="[$-401]0&quot;%&quot;" sourceLinked="0"/>
+          <c:txPr>
+            <a:bodyPr/>
+            <a:lstStyle/>
+            <a:p>
+              <a:pPr>
+                <a:defRPr b="0" i="0" strike="noStrike" sz="1100" u="none">
+                  <a:solidFill>
+                    <a:srgbClr val="16412B"/>
+                  </a:solidFill>
+                  <a:latin typeface="Arial"/>
+                </a:defRPr>
+              </a:pPr>
+            </a:p>
+          </c:txPr>
+          <c:showLegendKey val="0"/>
+          <c:showVal val="1"/>
+          <c:showCatName val="0"/>
+          <c:showSerName val="0"/>
+          <c:showPercent val="0"/>
+          <c:showBubbleSize val="0"/>
+          <c:showLeaderLines val="0"/>
+        </c:dLbls>
+        <c:gapWidth val="150"/>
+        <c:overlap val="0"/>
+        <c:axId val="2094734554"/>
+        <c:axId val="2094734552"/>
+        <c:axId val="2094734556"/>
+      </c:barChart>
+      <c:catAx>
+        <c:axId val="2094734554"/>
+        <c:scaling>
+          <c:orientation val="minMax"/>
+        </c:scaling>
+        <c:delete val="0"/>
+        <c:axPos val="b"/>
+        <c:numFmt formatCode="General" sourceLinked="1"/>
+        <c:majorTickMark val="out"/>
+        <c:minorTickMark val="none"/>
+        <c:tickLblPos val="low"/>
+        <c:spPr>
+          <a:ln w="12700" cap="flat">
+            <a:solidFill>
+              <a:srgbClr val="888888"/>
+            </a:solidFill>
+            <a:prstDash val="solid"/>
+            <a:round/>
+          </a:ln>
+        </c:spPr>
+        <c:txPr>
+          <a:bodyPr/>
+          <a:lstStyle/>
+          <a:p>
+            <a:pPr>
+              <a:defRPr sz="1100" b="0" i="0" u="none" strike="noStrike">
+                <a:solidFill>
+                  <a:srgbClr val="6F7D71"/>
+                </a:solidFill>
+                <a:latin typeface="Arial"/>
+              </a:defRPr>
+            </a:pPr>
+            <a:endParaRPr lang="en-US"/>
+          </a:p>
+        </c:txPr>
+        <c:crossAx val="2094734552"/>
+        <c:crosses val="autoZero"/>
+        <c:auto val="1"/>
+        <c:lblAlgn val="ctr"/>
+        <c:noMultiLvlLbl val="1"/>
+      </c:catAx>
+      <c:valAx>
+        <c:axId val="2094734552"/>
+        <c:scaling>
+          <c:orientation val="minMax"/>
+          <c:min val="0"/>
+        </c:scaling>
+        <c:delete val="0"/>
+        <c:axPos val="l"/>
+        <c:majorGridlines>
+          <c:spPr>
+            <a:ln w="9525" cap="flat">
+              <a:solidFill>
+                <a:srgbClr val="E0DFD0"/>
+              </a:solidFill>
+              <a:prstDash val="solid"/>
+              <a:round/>
+            </a:ln>
+          </c:spPr>
+        </c:majorGridlines>
+        <c:numFmt formatCode="General" sourceLinked="0"/>
+        <c:majorTickMark val="out"/>
+        <c:minorTickMark val="none"/>
+        <c:tickLblPos val="nextTo"/>
+        <c:spPr>
+          <a:ln w="12700" cap="flat">
+            <a:solidFill>
+              <a:srgbClr val="888888"/>
+            </a:solidFill>
+            <a:prstDash val="solid"/>
+            <a:round/>
+          </a:ln>
+        </c:spPr>
+        <c:txPr>
+          <a:bodyPr/>
+          <a:lstStyle/>
+          <a:p>
+            <a:pPr>
+              <a:defRPr sz="1100" b="0" i="0" u="none" strike="noStrike">
+                <a:solidFill>
+                  <a:srgbClr val="6F7D71"/>
+                </a:solidFill>
+                <a:latin typeface="Arial"/>
+              </a:defRPr>
+            </a:pPr>
+            <a:endParaRPr lang="en-US"/>
+          </a:p>
+        </c:txPr>
+        <c:crossAx val="2094734554"/>
+        <c:crosses val="autoZero"/>
+        <c:crossBetween val="between"/>
+      </c:valAx>
+      <c:spPr>
+        <a:noFill/>
+        <a:ln>
+          <a:noFill/>
+        </a:ln>
+        <a:effectLst/>
+      </c:spPr>
+    </c:plotArea>
+    <c:legend>
+      <c:legendPos val="b"/>
+      <c:overlay val="0"/>
+      <c:txPr>
+        <a:bodyPr/>
+        <a:lstStyle/>
+        <a:p>
+          <a:pPr>
+            <a:defRPr sz="1100">
+              <a:latin typeface="Arial"/>
+              <a:cs typeface="Arial"/>
+            </a:defRPr>
+          </a:pPr>
+          <a:endParaRPr lang="en-US"/>
+        </a:p>
+      </c:txPr>
+    </c:legend>
+    <c:plotVisOnly val="1"/>
+    <c:dispBlanksAs val="span"/>
+  </c:chart>
+  <c:spPr>
+    <a:noFill/>
+    <a:ln>
+      <a:noFill/>
+    </a:ln>
+    <a:effectLst/>
+  </c:spPr>
+  <c:externalData r:id="rId1">
+    <c:autoUpdate val="0"/>
+  </c:externalData>
+</c:chartSpace>
+</file>
+
+<file path=ppt/charts/chart12.xml><?xml version="1.0" encoding="utf-8"?>
 <c:chartSpace xmlns:c="http://schemas.openxmlformats.org/drawingml/2006/chart" xmlns:a="http://schemas.openxmlformats.org/drawingml/2006/main" xmlns:r="http://schemas.openxmlformats.org/officeDocument/2006/relationships">
   <c:date1904 val="0"/>
   <c:roundedCorners val="1"/>
@@ -1006,6 +1121,251 @@
 </c:chartSpace>
 </file>
 
+<file path=ppt/charts/chart9.xml><?xml version="1.0" encoding="utf-8"?>
+<c:chartSpace xmlns:c="http://schemas.openxmlformats.org/drawingml/2006/chart" xmlns:a="http://schemas.openxmlformats.org/drawingml/2006/main" xmlns:r="http://schemas.openxmlformats.org/officeDocument/2006/relationships">
+  <c:date1904 val="0"/>
+  <c:roundedCorners val="1"/>
+  <c:chart>
+    <c:autoTitleDeleted val="1"/>
+    <c:plotArea>
+      <c:layout/>
+      <c:doughnutChart>
+        <c:varyColors val="1"/>
+        <c:ser>
+          <c:idx val="0"/>
+          <c:order val="0"/>
+          <c:tx>
+            <c:strRef>
+              <c:f>Sheet1!$B$1</c:f>
+              <c:strCache>
+                <c:ptCount val="1"/>
+                <c:pt idx="0">
+                  <c:v>المياه المسحوبة</c:v>
+                </c:pt>
+              </c:strCache>
+            </c:strRef>
+          </c:tx>
+          <c:spPr>
+            <a:solidFill>
+              <a:schemeClr val="accent1"/>
+            </a:solidFill>
+            <a:ln w="9525" cap="flat">
+              <a:solidFill>
+                <a:srgbClr val="F9F9F9"/>
+              </a:solidFill>
+              <a:prstDash val="solid"/>
+              <a:round/>
+            </a:ln>
+            <a:effectLst/>
+          </c:spPr>
+          <c:dPt>
+            <c:idx val="0"/>
+            <c:bubble3D val="0"/>
+            <c:spPr>
+              <a:solidFill>
+                <a:srgbClr val="2C6E49"/>
+              </a:solidFill>
+              <a:effectLst/>
+            </c:spPr>
+          </c:dPt>
+          <c:dPt>
+            <c:idx val="1"/>
+            <c:bubble3D val="0"/>
+            <c:spPr>
+              <a:solidFill>
+                <a:srgbClr val="D9A441"/>
+              </a:solidFill>
+              <a:effectLst/>
+            </c:spPr>
+          </c:dPt>
+          <c:dPt>
+            <c:idx val="2"/>
+            <c:bubble3D val="0"/>
+            <c:spPr>
+              <a:solidFill>
+                <a:srgbClr val="7FA88C"/>
+              </a:solidFill>
+              <a:effectLst/>
+            </c:spPr>
+          </c:dPt>
+          <c:dLbls>
+            <c:dLbl>
+              <c:idx val="0"/>
+              <c:numFmt formatCode="[$-401]0&quot;%&quot;" sourceLinked="0"/>
+              <c:spPr/>
+              <c:txPr>
+                <a:bodyPr/>
+                <a:lstStyle/>
+                <a:p>
+                  <a:pPr>
+                    <a:defRPr sz="1100" b="0" i="0" u="none" strike="noStrike">
+                      <a:solidFill>
+                        <a:srgbClr val="FFFFFF"/>
+                      </a:solidFill>
+                      <a:latin typeface="Arial"/>
+                    </a:defRPr>
+                  </a:pPr>
+                </a:p>
+              </c:txPr>
+              <c:showLegendKey val="0"/>
+              <c:showVal val="1"/>
+              <c:showCatName val="0"/>
+              <c:showSerName val="0"/>
+              <c:showPercent val="0"/>
+              <c:showBubbleSize val="0"/>
+            </c:dLbl>
+            <c:dLbl>
+              <c:idx val="1"/>
+              <c:numFmt formatCode="[$-401]0&quot;%&quot;" sourceLinked="0"/>
+              <c:spPr/>
+              <c:txPr>
+                <a:bodyPr/>
+                <a:lstStyle/>
+                <a:p>
+                  <a:pPr>
+                    <a:defRPr sz="1100" b="0" i="0" u="none" strike="noStrike">
+                      <a:solidFill>
+                        <a:srgbClr val="FFFFFF"/>
+                      </a:solidFill>
+                      <a:latin typeface="Arial"/>
+                    </a:defRPr>
+                  </a:pPr>
+                </a:p>
+              </c:txPr>
+              <c:showLegendKey val="0"/>
+              <c:showVal val="1"/>
+              <c:showCatName val="0"/>
+              <c:showSerName val="0"/>
+              <c:showPercent val="0"/>
+              <c:showBubbleSize val="0"/>
+            </c:dLbl>
+            <c:dLbl>
+              <c:idx val="2"/>
+              <c:numFmt formatCode="[$-401]0&quot;%&quot;" sourceLinked="0"/>
+              <c:spPr/>
+              <c:txPr>
+                <a:bodyPr/>
+                <a:lstStyle/>
+                <a:p>
+                  <a:pPr>
+                    <a:defRPr sz="1100" b="0" i="0" u="none" strike="noStrike">
+                      <a:solidFill>
+                        <a:srgbClr val="FFFFFF"/>
+                      </a:solidFill>
+                      <a:latin typeface="Arial"/>
+                    </a:defRPr>
+                  </a:pPr>
+                </a:p>
+              </c:txPr>
+              <c:showLegendKey val="0"/>
+              <c:showVal val="1"/>
+              <c:showCatName val="0"/>
+              <c:showSerName val="0"/>
+              <c:showPercent val="0"/>
+              <c:showBubbleSize val="0"/>
+            </c:dLbl>
+            <c:numFmt formatCode="[$-401]0&quot;%&quot;" sourceLinked="0"/>
+            <c:txPr>
+              <a:bodyPr/>
+              <a:lstStyle/>
+              <a:p>
+                <a:pPr>
+                  <a:defRPr sz="1800" b="0" i="0" u="none" strike="noStrike">
+                    <a:solidFill>
+                      <a:srgbClr val="000000"/>
+                    </a:solidFill>
+                    <a:latin typeface="Arial"/>
+                  </a:defRPr>
+                </a:pPr>
+              </a:p>
+            </c:txPr>
+            <c:showLegendKey val="0"/>
+            <c:showVal val="0"/>
+            <c:showCatName val="1"/>
+            <c:showSerName val="0"/>
+            <c:showPercent val="1"/>
+            <c:showBubbleSize val="0"/>
+            <c:showLeaderLines val="0"/>
+          </c:dLbls>
+          <c:cat>
+            <c:strRef>
+              <c:f>Sheet1!$A$2:$A$4</c:f>
+              <c:strCache>
+                <c:ptCount val="3"/>
+                <c:pt idx="0">
+                  <c:v>الزراعة</c:v>
+                </c:pt>
+                <c:pt idx="1">
+                  <c:v>مياه الشرب</c:v>
+                </c:pt>
+                <c:pt idx="2">
+                  <c:v>الصناعة</c:v>
+                </c:pt>
+              </c:strCache>
+            </c:strRef>
+          </c:cat>
+          <c:val>
+            <c:numRef>
+              <c:f>Sheet1!$B$2:$B$4</c:f>
+              <c:numCache>
+                <c:ptCount val="3"/>
+                <c:pt idx="0">
+                  <c:v>84</c:v>
+                </c:pt>
+                <c:pt idx="1">
+                  <c:v>12</c:v>
+                </c:pt>
+                <c:pt idx="2">
+                  <c:v>4</c:v>
+                </c:pt>
+              </c:numCache>
+            </c:numRef>
+          </c:val>
+        </c:ser>
+        <c:firstSliceAng val="0"/>
+        <c:holeSize val="55"/>
+      </c:doughnutChart>
+      <c:spPr>
+        <a:noFill/>
+        <a:ln>
+          <a:noFill/>
+        </a:ln>
+        <a:effectLst/>
+      </c:spPr>
+    </c:plotArea>
+    <c:legend>
+      <c:legendPos val="b"/>
+      <c:overlay val="0"/>
+      <c:txPr>
+        <a:bodyPr/>
+        <a:lstStyle/>
+        <a:p>
+          <a:pPr>
+            <a:defRPr sz="1100">
+              <a:latin typeface="Arial"/>
+              <a:cs typeface="Arial"/>
+            </a:defRPr>
+          </a:pPr>
+          <a:endParaRPr lang="en-US"/>
+        </a:p>
+      </c:txPr>
+    </c:legend>
+    <c:plotVisOnly val="1"/>
+    <c:dispBlanksAs val="span"/>
+  </c:chart>
+  <c:spPr>
+    <a:noFill/>
+    <a:ln>
+      <a:noFill/>
+    </a:ln>
+    <a:effectLst/>
+  </c:spPr>
+  <c:externalData r:id="rId1">
+    <c:autoUpdate val="0"/>
+  </c:externalData>
+</c:chartSpace>
+</file>
+
 <file path=ppt/notesMasters/notesMaster1.xml><?xml version="1.0" encoding="utf-8"?>
 <p:notesMaster xmlns:a="http://schemas.openxmlformats.org/drawingml/2006/main" xmlns:r="http://schemas.openxmlformats.org/officeDocument/2006/relationships" xmlns:p="http://schemas.openxmlformats.org/presentationml/2006/main">
   <p:cSld>
@@ -1601,6 +1961,622 @@
             <a:fld id="{F7021451-1387-4CA6-816F-3879F97B5CBC}" type="slidenum">
               <a:rPr lang="en-US"/>
               <a:t>11</a:t>
+            </a:fld>
+            <a:endParaRPr lang="en-US"/>
+          </a:p>
+        </p:txBody>
+      </p:sp>
+    </p:spTree>
+    <p:extLst>
+      <p:ext uri="{BB962C8B-B14F-4D97-AF65-F5344CB8AC3E}">
+        <p14:creationId xmlns:p14="http://schemas.microsoft.com/office/powerpoint/2010/main" val="1024086991"/>
+      </p:ext>
+    </p:extLst>
+  </p:cSld>
+  <p:clrMapOvr>
+    <a:masterClrMapping/>
+  </p:clrMapOvr>
+</p:notes>
+</file>
+
+<file path=ppt/notesSlides/notesSlide12.xml><?xml version="1.0" encoding="utf-8"?>
+<p:notes xmlns:a="http://schemas.openxmlformats.org/drawingml/2006/main" xmlns:r="http://schemas.openxmlformats.org/officeDocument/2006/relationships" xmlns:p="http://schemas.openxmlformats.org/presentationml/2006/main">
+  <p:cSld>
+    <p:spTree>
+      <p:nvGrpSpPr>
+        <p:cNvPr id="1" name=""/>
+        <p:cNvGrpSpPr/>
+        <p:nvPr/>
+      </p:nvGrpSpPr>
+      <p:grpSpPr>
+        <a:xfrm>
+          <a:off x="0" y="0"/>
+          <a:ext cx="0" cy="0"/>
+          <a:chOff x="0" y="0"/>
+          <a:chExt cx="0" cy="0"/>
+        </a:xfrm>
+      </p:grpSpPr>
+      <p:sp>
+        <p:nvSpPr>
+          <p:cNvPr id="2" name="Slide Image Placeholder 1"/>
+          <p:cNvSpPr>
+            <a:spLocks noGrp="1" noRot="1" noChangeAspect="1"/>
+          </p:cNvSpPr>
+          <p:nvPr>
+            <p:ph type="sldImg"/>
+          </p:nvPr>
+        </p:nvSpPr>
+        <p:spPr/>
+      </p:sp>
+      <p:sp>
+        <p:nvSpPr>
+          <p:cNvPr id="3" name="Notes Placeholder 2"/>
+          <p:cNvSpPr>
+            <a:spLocks noGrp="1"/>
+          </p:cNvSpPr>
+          <p:nvPr>
+            <p:ph type="body" idx="1"/>
+          </p:nvPr>
+        </p:nvSpPr>
+        <p:spPr/>
+        <p:txBody>
+          <a:bodyPr/>
+          <a:lstStyle/>
+          <a:p>
+            <a:r>
+              <a:rPr lang="en-US" dirty="0"/>
+              <a:t/>
+            </a:r>
+            <a:endParaRPr lang="en-US" dirty="0"/>
+          </a:p>
+        </p:txBody>
+      </p:sp>
+      <p:sp>
+        <p:nvSpPr>
+          <p:cNvPr id="4" name="Slide Number Placeholder 3"/>
+          <p:cNvSpPr>
+            <a:spLocks noGrp="1"/>
+          </p:cNvSpPr>
+          <p:nvPr>
+            <p:ph type="sldNum" sz="quarter" idx="10"/>
+          </p:nvPr>
+        </p:nvSpPr>
+        <p:spPr/>
+        <p:txBody>
+          <a:bodyPr/>
+          <a:lstStyle/>
+          <a:p>
+            <a:fld id="{F7021451-1387-4CA6-816F-3879F97B5CBC}" type="slidenum">
+              <a:rPr lang="en-US"/>
+              <a:t>12</a:t>
+            </a:fld>
+            <a:endParaRPr lang="en-US"/>
+          </a:p>
+        </p:txBody>
+      </p:sp>
+    </p:spTree>
+    <p:extLst>
+      <p:ext uri="{BB962C8B-B14F-4D97-AF65-F5344CB8AC3E}">
+        <p14:creationId xmlns:p14="http://schemas.microsoft.com/office/powerpoint/2010/main" val="1024086991"/>
+      </p:ext>
+    </p:extLst>
+  </p:cSld>
+  <p:clrMapOvr>
+    <a:masterClrMapping/>
+  </p:clrMapOvr>
+</p:notes>
+</file>
+
+<file path=ppt/notesSlides/notesSlide13.xml><?xml version="1.0" encoding="utf-8"?>
+<p:notes xmlns:a="http://schemas.openxmlformats.org/drawingml/2006/main" xmlns:r="http://schemas.openxmlformats.org/officeDocument/2006/relationships" xmlns:p="http://schemas.openxmlformats.org/presentationml/2006/main">
+  <p:cSld>
+    <p:spTree>
+      <p:nvGrpSpPr>
+        <p:cNvPr id="1" name=""/>
+        <p:cNvGrpSpPr/>
+        <p:nvPr/>
+      </p:nvGrpSpPr>
+      <p:grpSpPr>
+        <a:xfrm>
+          <a:off x="0" y="0"/>
+          <a:ext cx="0" cy="0"/>
+          <a:chOff x="0" y="0"/>
+          <a:chExt cx="0" cy="0"/>
+        </a:xfrm>
+      </p:grpSpPr>
+      <p:sp>
+        <p:nvSpPr>
+          <p:cNvPr id="2" name="Slide Image Placeholder 1"/>
+          <p:cNvSpPr>
+            <a:spLocks noGrp="1" noRot="1" noChangeAspect="1"/>
+          </p:cNvSpPr>
+          <p:nvPr>
+            <p:ph type="sldImg"/>
+          </p:nvPr>
+        </p:nvSpPr>
+        <p:spPr/>
+      </p:sp>
+      <p:sp>
+        <p:nvSpPr>
+          <p:cNvPr id="3" name="Notes Placeholder 2"/>
+          <p:cNvSpPr>
+            <a:spLocks noGrp="1"/>
+          </p:cNvSpPr>
+          <p:nvPr>
+            <p:ph type="body" idx="1"/>
+          </p:nvPr>
+        </p:nvSpPr>
+        <p:spPr/>
+        <p:txBody>
+          <a:bodyPr/>
+          <a:lstStyle/>
+          <a:p>
+            <a:r>
+              <a:rPr lang="en-US" dirty="0"/>
+              <a:t/>
+            </a:r>
+            <a:endParaRPr lang="en-US" dirty="0"/>
+          </a:p>
+        </p:txBody>
+      </p:sp>
+      <p:sp>
+        <p:nvSpPr>
+          <p:cNvPr id="4" name="Slide Number Placeholder 3"/>
+          <p:cNvSpPr>
+            <a:spLocks noGrp="1"/>
+          </p:cNvSpPr>
+          <p:nvPr>
+            <p:ph type="sldNum" sz="quarter" idx="10"/>
+          </p:nvPr>
+        </p:nvSpPr>
+        <p:spPr/>
+        <p:txBody>
+          <a:bodyPr/>
+          <a:lstStyle/>
+          <a:p>
+            <a:fld id="{F7021451-1387-4CA6-816F-3879F97B5CBC}" type="slidenum">
+              <a:rPr lang="en-US"/>
+              <a:t>13</a:t>
+            </a:fld>
+            <a:endParaRPr lang="en-US"/>
+          </a:p>
+        </p:txBody>
+      </p:sp>
+    </p:spTree>
+    <p:extLst>
+      <p:ext uri="{BB962C8B-B14F-4D97-AF65-F5344CB8AC3E}">
+        <p14:creationId xmlns:p14="http://schemas.microsoft.com/office/powerpoint/2010/main" val="1024086991"/>
+      </p:ext>
+    </p:extLst>
+  </p:cSld>
+  <p:clrMapOvr>
+    <a:masterClrMapping/>
+  </p:clrMapOvr>
+</p:notes>
+</file>
+
+<file path=ppt/notesSlides/notesSlide14.xml><?xml version="1.0" encoding="utf-8"?>
+<p:notes xmlns:a="http://schemas.openxmlformats.org/drawingml/2006/main" xmlns:r="http://schemas.openxmlformats.org/officeDocument/2006/relationships" xmlns:p="http://schemas.openxmlformats.org/presentationml/2006/main">
+  <p:cSld>
+    <p:spTree>
+      <p:nvGrpSpPr>
+        <p:cNvPr id="1" name=""/>
+        <p:cNvGrpSpPr/>
+        <p:nvPr/>
+      </p:nvGrpSpPr>
+      <p:grpSpPr>
+        <a:xfrm>
+          <a:off x="0" y="0"/>
+          <a:ext cx="0" cy="0"/>
+          <a:chOff x="0" y="0"/>
+          <a:chExt cx="0" cy="0"/>
+        </a:xfrm>
+      </p:grpSpPr>
+      <p:sp>
+        <p:nvSpPr>
+          <p:cNvPr id="2" name="Slide Image Placeholder 1"/>
+          <p:cNvSpPr>
+            <a:spLocks noGrp="1" noRot="1" noChangeAspect="1"/>
+          </p:cNvSpPr>
+          <p:nvPr>
+            <p:ph type="sldImg"/>
+          </p:nvPr>
+        </p:nvSpPr>
+        <p:spPr/>
+      </p:sp>
+      <p:sp>
+        <p:nvSpPr>
+          <p:cNvPr id="3" name="Notes Placeholder 2"/>
+          <p:cNvSpPr>
+            <a:spLocks noGrp="1"/>
+          </p:cNvSpPr>
+          <p:nvPr>
+            <p:ph type="body" idx="1"/>
+          </p:nvPr>
+        </p:nvSpPr>
+        <p:spPr/>
+        <p:txBody>
+          <a:bodyPr/>
+          <a:lstStyle/>
+          <a:p>
+            <a:r>
+              <a:rPr lang="en-US" dirty="0"/>
+              <a:t/>
+            </a:r>
+            <a:endParaRPr lang="en-US" dirty="0"/>
+          </a:p>
+        </p:txBody>
+      </p:sp>
+      <p:sp>
+        <p:nvSpPr>
+          <p:cNvPr id="4" name="Slide Number Placeholder 3"/>
+          <p:cNvSpPr>
+            <a:spLocks noGrp="1"/>
+          </p:cNvSpPr>
+          <p:nvPr>
+            <p:ph type="sldNum" sz="quarter" idx="10"/>
+          </p:nvPr>
+        </p:nvSpPr>
+        <p:spPr/>
+        <p:txBody>
+          <a:bodyPr/>
+          <a:lstStyle/>
+          <a:p>
+            <a:fld id="{F7021451-1387-4CA6-816F-3879F97B5CBC}" type="slidenum">
+              <a:rPr lang="en-US"/>
+              <a:t>14</a:t>
+            </a:fld>
+            <a:endParaRPr lang="en-US"/>
+          </a:p>
+        </p:txBody>
+      </p:sp>
+    </p:spTree>
+    <p:extLst>
+      <p:ext uri="{BB962C8B-B14F-4D97-AF65-F5344CB8AC3E}">
+        <p14:creationId xmlns:p14="http://schemas.microsoft.com/office/powerpoint/2010/main" val="1024086991"/>
+      </p:ext>
+    </p:extLst>
+  </p:cSld>
+  <p:clrMapOvr>
+    <a:masterClrMapping/>
+  </p:clrMapOvr>
+</p:notes>
+</file>
+
+<file path=ppt/notesSlides/notesSlide15.xml><?xml version="1.0" encoding="utf-8"?>
+<p:notes xmlns:a="http://schemas.openxmlformats.org/drawingml/2006/main" xmlns:r="http://schemas.openxmlformats.org/officeDocument/2006/relationships" xmlns:p="http://schemas.openxmlformats.org/presentationml/2006/main">
+  <p:cSld>
+    <p:spTree>
+      <p:nvGrpSpPr>
+        <p:cNvPr id="1" name=""/>
+        <p:cNvGrpSpPr/>
+        <p:nvPr/>
+      </p:nvGrpSpPr>
+      <p:grpSpPr>
+        <a:xfrm>
+          <a:off x="0" y="0"/>
+          <a:ext cx="0" cy="0"/>
+          <a:chOff x="0" y="0"/>
+          <a:chExt cx="0" cy="0"/>
+        </a:xfrm>
+      </p:grpSpPr>
+      <p:sp>
+        <p:nvSpPr>
+          <p:cNvPr id="2" name="Slide Image Placeholder 1"/>
+          <p:cNvSpPr>
+            <a:spLocks noGrp="1" noRot="1" noChangeAspect="1"/>
+          </p:cNvSpPr>
+          <p:nvPr>
+            <p:ph type="sldImg"/>
+          </p:nvPr>
+        </p:nvSpPr>
+        <p:spPr/>
+      </p:sp>
+      <p:sp>
+        <p:nvSpPr>
+          <p:cNvPr id="3" name="Notes Placeholder 2"/>
+          <p:cNvSpPr>
+            <a:spLocks noGrp="1"/>
+          </p:cNvSpPr>
+          <p:nvPr>
+            <p:ph type="body" idx="1"/>
+          </p:nvPr>
+        </p:nvSpPr>
+        <p:spPr/>
+        <p:txBody>
+          <a:bodyPr/>
+          <a:lstStyle/>
+          <a:p>
+            <a:r>
+              <a:rPr lang="en-US" dirty="0"/>
+              <a:t/>
+            </a:r>
+            <a:endParaRPr lang="en-US" dirty="0"/>
+          </a:p>
+        </p:txBody>
+      </p:sp>
+      <p:sp>
+        <p:nvSpPr>
+          <p:cNvPr id="4" name="Slide Number Placeholder 3"/>
+          <p:cNvSpPr>
+            <a:spLocks noGrp="1"/>
+          </p:cNvSpPr>
+          <p:nvPr>
+            <p:ph type="sldNum" sz="quarter" idx="10"/>
+          </p:nvPr>
+        </p:nvSpPr>
+        <p:spPr/>
+        <p:txBody>
+          <a:bodyPr/>
+          <a:lstStyle/>
+          <a:p>
+            <a:fld id="{F7021451-1387-4CA6-816F-3879F97B5CBC}" type="slidenum">
+              <a:rPr lang="en-US"/>
+              <a:t>15</a:t>
+            </a:fld>
+            <a:endParaRPr lang="en-US"/>
+          </a:p>
+        </p:txBody>
+      </p:sp>
+    </p:spTree>
+    <p:extLst>
+      <p:ext uri="{BB962C8B-B14F-4D97-AF65-F5344CB8AC3E}">
+        <p14:creationId xmlns:p14="http://schemas.microsoft.com/office/powerpoint/2010/main" val="1024086991"/>
+      </p:ext>
+    </p:extLst>
+  </p:cSld>
+  <p:clrMapOvr>
+    <a:masterClrMapping/>
+  </p:clrMapOvr>
+</p:notes>
+</file>
+
+<file path=ppt/notesSlides/notesSlide16.xml><?xml version="1.0" encoding="utf-8"?>
+<p:notes xmlns:a="http://schemas.openxmlformats.org/drawingml/2006/main" xmlns:r="http://schemas.openxmlformats.org/officeDocument/2006/relationships" xmlns:p="http://schemas.openxmlformats.org/presentationml/2006/main">
+  <p:cSld>
+    <p:spTree>
+      <p:nvGrpSpPr>
+        <p:cNvPr id="1" name=""/>
+        <p:cNvGrpSpPr/>
+        <p:nvPr/>
+      </p:nvGrpSpPr>
+      <p:grpSpPr>
+        <a:xfrm>
+          <a:off x="0" y="0"/>
+          <a:ext cx="0" cy="0"/>
+          <a:chOff x="0" y="0"/>
+          <a:chExt cx="0" cy="0"/>
+        </a:xfrm>
+      </p:grpSpPr>
+      <p:sp>
+        <p:nvSpPr>
+          <p:cNvPr id="2" name="Slide Image Placeholder 1"/>
+          <p:cNvSpPr>
+            <a:spLocks noGrp="1" noRot="1" noChangeAspect="1"/>
+          </p:cNvSpPr>
+          <p:nvPr>
+            <p:ph type="sldImg"/>
+          </p:nvPr>
+        </p:nvSpPr>
+        <p:spPr/>
+      </p:sp>
+      <p:sp>
+        <p:nvSpPr>
+          <p:cNvPr id="3" name="Notes Placeholder 2"/>
+          <p:cNvSpPr>
+            <a:spLocks noGrp="1"/>
+          </p:cNvSpPr>
+          <p:nvPr>
+            <p:ph type="body" idx="1"/>
+          </p:nvPr>
+        </p:nvSpPr>
+        <p:spPr/>
+        <p:txBody>
+          <a:bodyPr/>
+          <a:lstStyle/>
+          <a:p>
+            <a:r>
+              <a:rPr lang="en-US" dirty="0"/>
+              <a:t/>
+            </a:r>
+            <a:endParaRPr lang="en-US" dirty="0"/>
+          </a:p>
+        </p:txBody>
+      </p:sp>
+      <p:sp>
+        <p:nvSpPr>
+          <p:cNvPr id="4" name="Slide Number Placeholder 3"/>
+          <p:cNvSpPr>
+            <a:spLocks noGrp="1"/>
+          </p:cNvSpPr>
+          <p:nvPr>
+            <p:ph type="sldNum" sz="quarter" idx="10"/>
+          </p:nvPr>
+        </p:nvSpPr>
+        <p:spPr/>
+        <p:txBody>
+          <a:bodyPr/>
+          <a:lstStyle/>
+          <a:p>
+            <a:fld id="{F7021451-1387-4CA6-816F-3879F97B5CBC}" type="slidenum">
+              <a:rPr lang="en-US"/>
+              <a:t>16</a:t>
+            </a:fld>
+            <a:endParaRPr lang="en-US"/>
+          </a:p>
+        </p:txBody>
+      </p:sp>
+    </p:spTree>
+    <p:extLst>
+      <p:ext uri="{BB962C8B-B14F-4D97-AF65-F5344CB8AC3E}">
+        <p14:creationId xmlns:p14="http://schemas.microsoft.com/office/powerpoint/2010/main" val="1024086991"/>
+      </p:ext>
+    </p:extLst>
+  </p:cSld>
+  <p:clrMapOvr>
+    <a:masterClrMapping/>
+  </p:clrMapOvr>
+</p:notes>
+</file>
+
+<file path=ppt/notesSlides/notesSlide17.xml><?xml version="1.0" encoding="utf-8"?>
+<p:notes xmlns:a="http://schemas.openxmlformats.org/drawingml/2006/main" xmlns:r="http://schemas.openxmlformats.org/officeDocument/2006/relationships" xmlns:p="http://schemas.openxmlformats.org/presentationml/2006/main">
+  <p:cSld>
+    <p:spTree>
+      <p:nvGrpSpPr>
+        <p:cNvPr id="1" name=""/>
+        <p:cNvGrpSpPr/>
+        <p:nvPr/>
+      </p:nvGrpSpPr>
+      <p:grpSpPr>
+        <a:xfrm>
+          <a:off x="0" y="0"/>
+          <a:ext cx="0" cy="0"/>
+          <a:chOff x="0" y="0"/>
+          <a:chExt cx="0" cy="0"/>
+        </a:xfrm>
+      </p:grpSpPr>
+      <p:sp>
+        <p:nvSpPr>
+          <p:cNvPr id="2" name="Slide Image Placeholder 1"/>
+          <p:cNvSpPr>
+            <a:spLocks noGrp="1" noRot="1" noChangeAspect="1"/>
+          </p:cNvSpPr>
+          <p:nvPr>
+            <p:ph type="sldImg"/>
+          </p:nvPr>
+        </p:nvSpPr>
+        <p:spPr/>
+      </p:sp>
+      <p:sp>
+        <p:nvSpPr>
+          <p:cNvPr id="3" name="Notes Placeholder 2"/>
+          <p:cNvSpPr>
+            <a:spLocks noGrp="1"/>
+          </p:cNvSpPr>
+          <p:nvPr>
+            <p:ph type="body" idx="1"/>
+          </p:nvPr>
+        </p:nvSpPr>
+        <p:spPr/>
+        <p:txBody>
+          <a:bodyPr/>
+          <a:lstStyle/>
+          <a:p>
+            <a:r>
+              <a:rPr lang="en-US" dirty="0"/>
+              <a:t/>
+            </a:r>
+            <a:endParaRPr lang="en-US" dirty="0"/>
+          </a:p>
+        </p:txBody>
+      </p:sp>
+      <p:sp>
+        <p:nvSpPr>
+          <p:cNvPr id="4" name="Slide Number Placeholder 3"/>
+          <p:cNvSpPr>
+            <a:spLocks noGrp="1"/>
+          </p:cNvSpPr>
+          <p:nvPr>
+            <p:ph type="sldNum" sz="quarter" idx="10"/>
+          </p:nvPr>
+        </p:nvSpPr>
+        <p:spPr/>
+        <p:txBody>
+          <a:bodyPr/>
+          <a:lstStyle/>
+          <a:p>
+            <a:fld id="{F7021451-1387-4CA6-816F-3879F97B5CBC}" type="slidenum">
+              <a:rPr lang="en-US"/>
+              <a:t>17</a:t>
+            </a:fld>
+            <a:endParaRPr lang="en-US"/>
+          </a:p>
+        </p:txBody>
+      </p:sp>
+    </p:spTree>
+    <p:extLst>
+      <p:ext uri="{BB962C8B-B14F-4D97-AF65-F5344CB8AC3E}">
+        <p14:creationId xmlns:p14="http://schemas.microsoft.com/office/powerpoint/2010/main" val="1024086991"/>
+      </p:ext>
+    </p:extLst>
+  </p:cSld>
+  <p:clrMapOvr>
+    <a:masterClrMapping/>
+  </p:clrMapOvr>
+</p:notes>
+</file>
+
+<file path=ppt/notesSlides/notesSlide18.xml><?xml version="1.0" encoding="utf-8"?>
+<p:notes xmlns:a="http://schemas.openxmlformats.org/drawingml/2006/main" xmlns:r="http://schemas.openxmlformats.org/officeDocument/2006/relationships" xmlns:p="http://schemas.openxmlformats.org/presentationml/2006/main">
+  <p:cSld>
+    <p:spTree>
+      <p:nvGrpSpPr>
+        <p:cNvPr id="1" name=""/>
+        <p:cNvGrpSpPr/>
+        <p:nvPr/>
+      </p:nvGrpSpPr>
+      <p:grpSpPr>
+        <a:xfrm>
+          <a:off x="0" y="0"/>
+          <a:ext cx="0" cy="0"/>
+          <a:chOff x="0" y="0"/>
+          <a:chExt cx="0" cy="0"/>
+        </a:xfrm>
+      </p:grpSpPr>
+      <p:sp>
+        <p:nvSpPr>
+          <p:cNvPr id="2" name="Slide Image Placeholder 1"/>
+          <p:cNvSpPr>
+            <a:spLocks noGrp="1" noRot="1" noChangeAspect="1"/>
+          </p:cNvSpPr>
+          <p:nvPr>
+            <p:ph type="sldImg"/>
+          </p:nvPr>
+        </p:nvSpPr>
+        <p:spPr/>
+      </p:sp>
+      <p:sp>
+        <p:nvSpPr>
+          <p:cNvPr id="3" name="Notes Placeholder 2"/>
+          <p:cNvSpPr>
+            <a:spLocks noGrp="1"/>
+          </p:cNvSpPr>
+          <p:nvPr>
+            <p:ph type="body" idx="1"/>
+          </p:nvPr>
+        </p:nvSpPr>
+        <p:spPr/>
+        <p:txBody>
+          <a:bodyPr/>
+          <a:lstStyle/>
+          <a:p>
+            <a:r>
+              <a:rPr lang="en-US" dirty="0"/>
+              <a:t/>
+            </a:r>
+            <a:endParaRPr lang="en-US" dirty="0"/>
+          </a:p>
+        </p:txBody>
+      </p:sp>
+      <p:sp>
+        <p:nvSpPr>
+          <p:cNvPr id="4" name="Slide Number Placeholder 3"/>
+          <p:cNvSpPr>
+            <a:spLocks noGrp="1"/>
+          </p:cNvSpPr>
+          <p:nvPr>
+            <p:ph type="sldNum" sz="quarter" idx="10"/>
+          </p:nvPr>
+        </p:nvSpPr>
+        <p:spPr/>
+        <p:txBody>
+          <a:bodyPr/>
+          <a:lstStyle/>
+          <a:p>
+            <a:fld id="{F7021451-1387-4CA6-816F-3879F97B5CBC}" type="slidenum">
+              <a:rPr lang="en-US"/>
+              <a:t>18</a:t>
             </a:fld>
             <a:endParaRPr lang="en-US"/>
           </a:p>
@@ -3113,7 +4089,7 @@
                 <a:ea typeface="Arial" pitchFamily="34" charset="-122"/>
                 <a:cs typeface="Arial" pitchFamily="34" charset="-120"/>
               </a:rPr>
-              <a:t>ما يجب توقّعه</a:t>
+              <a:t>استجابتنا</a:t>
             </a:r>
             <a:endParaRPr lang="en-US" sz="1150" dirty="0"/>
           </a:p>
@@ -3152,7 +4128,7 @@
                 <a:ea typeface="Arial" pitchFamily="34" charset="-122"/>
                 <a:cs typeface="Arial" pitchFamily="34" charset="-120"/>
               </a:rPr>
-              <a:t>مخاطر محددة وردود عليها</a:t>
+              <a:t>تقنيتان لقيدين مختلفين</a:t>
             </a:r>
             <a:endParaRPr lang="en-US" sz="3000" dirty="0"/>
           </a:p>
@@ -3191,7 +4167,7 @@
                 <a:ea typeface="Arial" pitchFamily="34" charset="-122"/>
                 <a:cs typeface="Arial" pitchFamily="34" charset="-120"/>
               </a:rPr>
-              <a:t>المخاطر</a:t>
+              <a:t>EVERGREEN® — احتباس الماء</a:t>
             </a:r>
             <a:endParaRPr lang="en-US" sz="1600" dirty="0"/>
           </a:p>
@@ -3237,7 +4213,7 @@
                 <a:ea typeface="Arial" pitchFamily="34" charset="-122"/>
                 <a:cs typeface="Arial" pitchFamily="34" charset="-120"/>
               </a:rPr>
-              <a:t>تربة رملية شديدة النفاذية وحرارة صيفية تتجاوز 45 درجة: تباين كبير في النتائج من قطعة إلى أخرى.</a:t>
+              <a:t>مادة حابسة للماء أساسها البوتاسيوم، تُوضع في منطقة الجذور عند الغرس أو عند تجديد الزراعة.</a:t>
             </a:r>
             <a:endParaRPr lang="en-US" sz="1350" dirty="0"/>
           </a:p>
@@ -3261,7 +4237,7 @@
                 <a:ea typeface="Arial" pitchFamily="34" charset="-122"/>
                 <a:cs typeface="Arial" pitchFamily="34" charset="-120"/>
               </a:rPr>
-              <a:t>ملوحة مياه الري والتربة في المناطق الشرقية، وما ترتّب عليها من حذر تجاه أي مادة مضافة.</a:t>
+              <a:t>تلتقط ماء الري أو المطر وتعيده إلى النبات تدريجياً، فتلغي الإجهاد المائي في المراحل الحرجة.</a:t>
             </a:r>
             <a:endParaRPr lang="en-US" sz="1350" dirty="0"/>
           </a:p>
@@ -3285,7 +4261,7 @@
                 <a:ea typeface="Arial" pitchFamily="34" charset="-122"/>
                 <a:cs typeface="Arial" pitchFamily="34" charset="-120"/>
               </a:rPr>
-              <a:t>منافسة منتجات رخيصة أساسها الصوديوم تركت انطباعاً سيئاً لدى المزارعين.</a:t>
+              <a:t>قدرة امتصاص تبلغ نحو 300 ضعف وزنها، ومفعول مفيد يمتد من 3 إلى 4 سنوات داخل التربة.</a:t>
             </a:r>
             <a:endParaRPr lang="en-US" sz="1350" dirty="0"/>
           </a:p>
@@ -3309,7 +4285,7 @@
                 <a:ea typeface="Arial" pitchFamily="34" charset="-122"/>
                 <a:cs typeface="Arial" pitchFamily="34" charset="-120"/>
               </a:rPr>
-              <a:t>دورات قرار طويلة لدى الشركات الزراعية الكبرى والجهات الحكومية.</a:t>
+              <a:t>تتحلل بنسبة 20 إلى 25 % سنوياً، دون تراكم ودون خطر جرعة زائدة.</a:t>
             </a:r>
             <a:endParaRPr lang="en-US" sz="1350" dirty="0"/>
           </a:p>
@@ -3348,7 +4324,7 @@
                 <a:ea typeface="Arial" pitchFamily="34" charset="-122"/>
                 <a:cs typeface="Arial" pitchFamily="34" charset="-120"/>
               </a:rPr>
-              <a:t>الردود</a:t>
+              <a:t>ECOFERT® — تغذية دون إنهاك التربة</a:t>
             </a:r>
             <a:endParaRPr lang="en-US" sz="1600" dirty="0"/>
           </a:p>
@@ -3394,7 +4370,7 @@
                 <a:ea typeface="Arial" pitchFamily="34" charset="-122"/>
                 <a:cs typeface="Arial" pitchFamily="34" charset="-120"/>
               </a:rPr>
-              <a:t>إجراء التجربة على دورة كاملة مع قطعة شاهد، لتوثيق الفارق بالأرقام لا بالوعود.</a:t>
+              <a:t>سماد بجرعات دقيقة من الأحماض الأمينية والنيتروجين والفوسفور والبوتاسيوم، من موارد متجددة.</a:t>
             </a:r>
             <a:endParaRPr lang="en-US" sz="1350" dirty="0"/>
           </a:p>
@@ -3418,7 +4394,7 @@
                 <a:ea typeface="Arial" pitchFamily="34" charset="-122"/>
                 <a:cs typeface="Arial" pitchFamily="34" charset="-120"/>
               </a:rPr>
-              <a:t>تركيبة أساسها البوتاسيوم لا الصوديوم: لا تضيف ملوحة، ومتوافقة مع المحاصيل الغذائية.</a:t>
+              <a:t>غير مخلّب: لا يستنزف مركّب الطين والدبال، ولا يرفع الملوحة ولا نسبة النترات.</a:t>
             </a:r>
             <a:endParaRPr lang="en-US" sz="1350" dirty="0"/>
           </a:p>
@@ -3442,7 +4418,7 @@
                 <a:ea typeface="Arial" pitchFamily="34" charset="-122"/>
                 <a:cs typeface="Arial" pitchFamily="34" charset="-120"/>
               </a:rPr>
-              <a:t>تجهيز الملف التنظيمي مبكراً: التحاليل وشهادات المطابقة قبل بدء التفاوض.</a:t>
+              <a:t>حاصل على شهادة SOHISCERT وشهادة الزراعة العضوية الأوروبية — شرط للدخول في دفاتر شروط المشترين الأوروبيين.</a:t>
             </a:r>
             <a:endParaRPr lang="en-US" sz="1350" dirty="0"/>
           </a:p>
@@ -3466,7 +4442,7 @@
                 <a:ea typeface="Arial" pitchFamily="34" charset="-122"/>
                 <a:cs typeface="Arial" pitchFamily="34" charset="-120"/>
               </a:rPr>
-              <a:t>العمل عبر الجمعيات التعاونية الزراعية وبرامج دعم الريف، لا عبر المزارع الفردية.</a:t>
+              <a:t>من قنينة إلى أربع قنينات سعة 140 مل للهكتار، متوافق مع أنظمة الري بالتسميد القائمة.</a:t>
             </a:r>
             <a:endParaRPr lang="en-US" sz="1350" dirty="0"/>
           </a:p>
@@ -3535,7 +4511,7 @@
                 <a:ea typeface="Arial" pitchFamily="34" charset="-122"/>
                 <a:cs typeface="Arial" pitchFamily="34" charset="-120"/>
               </a:rPr>
-              <a:t>تحليل الأكريلاميد (مختبر Polymex، ISO 9001، بتركيز أقل من 3,0 ميكروغرام/غرام) وفحص REACH / SVHC (SGS) وشهادة SOHISCERT السارية حتى 4 سبتمبر 2027: متاحة جميعها عند الطلب.</a:t>
+              <a:t>يُباع المنتجان منفصلين، غير أنهما صُمّما ليعزّز أحدهما الآخر: الحابس للماء يطيل مدة توافر الماء، والسماد يثمّن هذا الماء المتاح دون إنهاك التربة.</a:t>
             </a:r>
             <a:endParaRPr lang="en-US" sz="1100" dirty="0"/>
           </a:p>
@@ -3634,6 +4610,4717 @@
 <file path=ppt/slides/slide11.xml><?xml version="1.0" encoding="utf-8"?>
 <p:sld xmlns:a="http://schemas.openxmlformats.org/drawingml/2006/main" xmlns:r="http://schemas.openxmlformats.org/officeDocument/2006/relationships" xmlns:p="http://schemas.openxmlformats.org/presentationml/2006/main">
   <p:cSld name="Slide 11">
+    <p:bg>
+      <p:bgPr>
+        <a:solidFill>
+          <a:srgbClr val="FCFAF5"/>
+        </a:solidFill>
+      </p:bgPr>
+    </p:bg>
+    <p:spTree>
+      <p:nvGrpSpPr>
+        <p:cNvPr id="1" name=""/>
+        <p:cNvGrpSpPr/>
+        <p:nvPr/>
+      </p:nvGrpSpPr>
+      <p:grpSpPr>
+        <a:xfrm>
+          <a:off x="0" y="0"/>
+          <a:ext cx="0" cy="0"/>
+          <a:chOff x="0" y="0"/>
+          <a:chExt cx="0" cy="0"/>
+        </a:xfrm>
+      </p:grpSpPr>
+      <p:sp>
+        <p:nvSpPr>
+          <p:cNvPr id="2" name="Text 0"/>
+          <p:cNvSpPr txBox="1"/>
+          <p:nvPr/>
+        </p:nvSpPr>
+        <p:spPr>
+          <a:xfrm>
+            <a:off x="594360" y="411480"/>
+            <a:ext cx="10515600" cy="274320"/>
+          </a:xfrm>
+          <a:prstGeom prst="rect">
+            <a:avLst/>
+          </a:prstGeom>
+          <a:noFill/>
+          <a:ln/>
+        </p:spPr>
+        <p:txBody>
+          <a:bodyPr wrap="square" lIns="0" tIns="0" rIns="0" bIns="0" rtlCol="0" anchor="ctr"/>
+          <a:lstStyle/>
+          <a:p>
+            <a:pPr rtl="1" algn="r" indent="0" marL="0">
+              <a:buNone/>
+            </a:pPr>
+            <a:r>
+              <a:rPr lang="en-US" sz="1150" b="1" spc="200" kern="0" dirty="0">
+                <a:solidFill>
+                  <a:srgbClr val="D9A441"/>
+                </a:solidFill>
+                <a:latin typeface="Arial" pitchFamily="34" charset="0"/>
+                <a:ea typeface="Arial" pitchFamily="34" charset="-122"/>
+                <a:cs typeface="Arial" pitchFamily="34" charset="-120"/>
+              </a:rPr>
+              <a:t>بقية المنتجات</a:t>
+            </a:r>
+            <a:endParaRPr lang="en-US" sz="1150" dirty="0"/>
+          </a:p>
+        </p:txBody>
+      </p:sp>
+      <p:sp>
+        <p:nvSpPr>
+          <p:cNvPr id="3" name="Text 1"/>
+          <p:cNvSpPr txBox="1"/>
+          <p:nvPr/>
+        </p:nvSpPr>
+        <p:spPr>
+          <a:xfrm>
+            <a:off x="594360" y="731520"/>
+            <a:ext cx="10881360" cy="731520"/>
+          </a:xfrm>
+          <a:prstGeom prst="rect">
+            <a:avLst/>
+          </a:prstGeom>
+          <a:noFill/>
+          <a:ln/>
+        </p:spPr>
+        <p:txBody>
+          <a:bodyPr wrap="square" lIns="0" tIns="0" rIns="0" bIns="0" rtlCol="0" anchor="ctr"/>
+          <a:lstStyle/>
+          <a:p>
+            <a:pPr rtl="1" algn="r" indent="0" marL="0">
+              <a:buNone/>
+            </a:pPr>
+            <a:r>
+              <a:rPr lang="en-US" sz="3000" b="1" dirty="0">
+                <a:solidFill>
+                  <a:srgbClr val="16412B"/>
+                </a:solidFill>
+                <a:latin typeface="Arial" pitchFamily="34" charset="0"/>
+                <a:ea typeface="Arial" pitchFamily="34" charset="-122"/>
+                <a:cs typeface="Arial" pitchFamily="34" charset="-120"/>
+              </a:rPr>
+              <a:t>حماية المحاصيل وتثبيت التربة</a:t>
+            </a:r>
+            <a:endParaRPr lang="en-US" sz="3000" dirty="0"/>
+          </a:p>
+        </p:txBody>
+      </p:sp>
+      <p:sp>
+        <p:nvSpPr>
+          <p:cNvPr id="4" name="Text 2"/>
+          <p:cNvSpPr txBox="1"/>
+          <p:nvPr/>
+        </p:nvSpPr>
+        <p:spPr>
+          <a:xfrm>
+            <a:off x="594360" y="1783080"/>
+            <a:ext cx="5227168" cy="411480"/>
+          </a:xfrm>
+          <a:prstGeom prst="rect">
+            <a:avLst/>
+          </a:prstGeom>
+          <a:noFill/>
+          <a:ln/>
+        </p:spPr>
+        <p:txBody>
+          <a:bodyPr wrap="square" lIns="0" tIns="0" rIns="0" bIns="0" rtlCol="0" anchor="ctr"/>
+          <a:lstStyle/>
+          <a:p>
+            <a:pPr rtl="1" algn="r" indent="0" marL="0">
+              <a:buNone/>
+            </a:pPr>
+            <a:r>
+              <a:rPr lang="en-US" sz="1600" b="1" dirty="0">
+                <a:solidFill>
+                  <a:srgbClr val="2C6E49"/>
+                </a:solidFill>
+                <a:latin typeface="Arial" pitchFamily="34" charset="0"/>
+                <a:ea typeface="Arial" pitchFamily="34" charset="-122"/>
+                <a:cs typeface="Arial" pitchFamily="34" charset="-120"/>
+              </a:rPr>
+              <a:t>NAPEMA® — حماية دون متبقيات</a:t>
+            </a:r>
+            <a:endParaRPr lang="en-US" sz="1600" dirty="0"/>
+          </a:p>
+        </p:txBody>
+      </p:sp>
+      <p:sp>
+        <p:nvSpPr>
+          <p:cNvPr id="5" name="Text 3"/>
+          <p:cNvSpPr txBox="1"/>
+          <p:nvPr/>
+        </p:nvSpPr>
+        <p:spPr>
+          <a:xfrm>
+            <a:off x="594360" y="2286000"/>
+            <a:ext cx="5227168" cy="2468880"/>
+          </a:xfrm>
+          <a:prstGeom prst="rect">
+            <a:avLst/>
+          </a:prstGeom>
+          <a:noFill/>
+          <a:ln/>
+        </p:spPr>
+        <p:txBody>
+          <a:bodyPr wrap="square" lIns="0" tIns="0" rIns="0" bIns="0" rtlCol="0" anchor="t"/>
+          <a:lstStyle/>
+          <a:p>
+            <a:pPr algn="r" marL="342900" indent="-342900">
+              <a:lnSpc>
+                <a:spcPct val="122000"/>
+              </a:lnSpc>
+              <a:spcAft>
+                <a:spcPts val="1000"/>
+              </a:spcAft>
+              <a:buSzPct val="100000"/>
+              <a:buChar char="•"/>
+            </a:pPr>
+            <a:r>
+              <a:rPr lang="en-US" sz="1350" dirty="0">
+                <a:solidFill>
+                  <a:srgbClr val="364239"/>
+                </a:solidFill>
+                <a:latin typeface="Arial" pitchFamily="34" charset="0"/>
+                <a:ea typeface="Arial" pitchFamily="34" charset="-122"/>
+                <a:cs typeface="Arial" pitchFamily="34" charset="-120"/>
+              </a:rPr>
+              <a:t>مكافحة الأمراض والطفيليات والفطريات والآفات، دون أي جزيء كيميائي مُصنَّع.</a:t>
+            </a:r>
+            <a:endParaRPr lang="en-US" sz="1350" dirty="0"/>
+          </a:p>
+          <a:p>
+            <a:pPr algn="r" marL="342900" indent="-342900">
+              <a:lnSpc>
+                <a:spcPct val="122000"/>
+              </a:lnSpc>
+              <a:spcAft>
+                <a:spcPts val="1000"/>
+              </a:spcAft>
+              <a:buSzPct val="100000"/>
+              <a:buChar char="•"/>
+            </a:pPr>
+            <a:r>
+              <a:rPr lang="en-US" sz="1350" dirty="0">
+                <a:solidFill>
+                  <a:srgbClr val="364239"/>
+                </a:solidFill>
+                <a:latin typeface="Arial" pitchFamily="34" charset="0"/>
+                <a:ea typeface="Arial" pitchFamily="34" charset="-122"/>
+                <a:cs typeface="Arial" pitchFamily="34" charset="-120"/>
+              </a:rPr>
+              <a:t>رشّ على الأوراق والجذور، بمفعول وقائي وعلاجي في آن واحد.</a:t>
+            </a:r>
+            <a:endParaRPr lang="en-US" sz="1350" dirty="0"/>
+          </a:p>
+          <a:p>
+            <a:pPr algn="r" marL="342900" indent="-342900">
+              <a:lnSpc>
+                <a:spcPct val="122000"/>
+              </a:lnSpc>
+              <a:spcAft>
+                <a:spcPts val="1000"/>
+              </a:spcAft>
+              <a:buSzPct val="100000"/>
+              <a:buChar char="•"/>
+            </a:pPr>
+            <a:r>
+              <a:rPr lang="en-US" sz="1350" dirty="0">
+                <a:solidFill>
+                  <a:srgbClr val="364239"/>
+                </a:solidFill>
+                <a:latin typeface="Arial" pitchFamily="34" charset="0"/>
+                <a:ea typeface="Arial" pitchFamily="34" charset="-122"/>
+                <a:cs typeface="Arial" pitchFamily="34" charset="-120"/>
+              </a:rPr>
+              <a:t>لا متبقيات في التربة ولا في النبات ولا في الهواء، مع الحفاظ على الملقِّحات والحشرات النافعة.</a:t>
+            </a:r>
+            <a:endParaRPr lang="en-US" sz="1350" dirty="0"/>
+          </a:p>
+          <a:p>
+            <a:pPr algn="r" marL="342900" indent="-342900">
+              <a:lnSpc>
+                <a:spcPct val="122000"/>
+              </a:lnSpc>
+              <a:spcAft>
+                <a:spcPts val="1000"/>
+              </a:spcAft>
+              <a:buSzPct val="100000"/>
+              <a:buChar char="•"/>
+            </a:pPr>
+            <a:r>
+              <a:rPr lang="en-US" sz="1350" dirty="0">
+                <a:solidFill>
+                  <a:srgbClr val="364239"/>
+                </a:solidFill>
+                <a:latin typeface="Arial" pitchFamily="34" charset="0"/>
+                <a:ea typeface="Arial" pitchFamily="34" charset="-122"/>
+                <a:cs typeface="Arial" pitchFamily="34" charset="-120"/>
+              </a:rPr>
+              <a:t>تركيبة مصمَّمة لمشكلة محددة: البق الدقيقي، واخضرار الحمضيات (HLB)، والنيماتودا.</a:t>
+            </a:r>
+            <a:endParaRPr lang="en-US" sz="1350" dirty="0"/>
+          </a:p>
+        </p:txBody>
+      </p:sp>
+      <p:sp>
+        <p:nvSpPr>
+          <p:cNvPr id="6" name="Text 4"/>
+          <p:cNvSpPr txBox="1"/>
+          <p:nvPr/>
+        </p:nvSpPr>
+        <p:spPr>
+          <a:xfrm>
+            <a:off x="6370168" y="1783080"/>
+            <a:ext cx="5227168" cy="411480"/>
+          </a:xfrm>
+          <a:prstGeom prst="rect">
+            <a:avLst/>
+          </a:prstGeom>
+          <a:noFill/>
+          <a:ln/>
+        </p:spPr>
+        <p:txBody>
+          <a:bodyPr wrap="square" lIns="0" tIns="0" rIns="0" bIns="0" rtlCol="0" anchor="ctr"/>
+          <a:lstStyle/>
+          <a:p>
+            <a:pPr rtl="1" algn="r" indent="0" marL="0">
+              <a:buNone/>
+            </a:pPr>
+            <a:r>
+              <a:rPr lang="en-US" sz="1600" b="1" dirty="0">
+                <a:solidFill>
+                  <a:srgbClr val="2C6E49"/>
+                </a:solidFill>
+                <a:latin typeface="Arial" pitchFamily="34" charset="0"/>
+                <a:ea typeface="Arial" pitchFamily="34" charset="-122"/>
+                <a:cs typeface="Arial" pitchFamily="34" charset="-120"/>
+              </a:rPr>
+              <a:t>Paulownia ALTIFOLIA® — شجرة المناطق الحارة</a:t>
+            </a:r>
+            <a:endParaRPr lang="en-US" sz="1600" dirty="0"/>
+          </a:p>
+        </p:txBody>
+      </p:sp>
+      <p:sp>
+        <p:nvSpPr>
+          <p:cNvPr id="7" name="Text 5"/>
+          <p:cNvSpPr txBox="1"/>
+          <p:nvPr/>
+        </p:nvSpPr>
+        <p:spPr>
+          <a:xfrm>
+            <a:off x="6370168" y="2286000"/>
+            <a:ext cx="5227168" cy="2468880"/>
+          </a:xfrm>
+          <a:prstGeom prst="rect">
+            <a:avLst/>
+          </a:prstGeom>
+          <a:noFill/>
+          <a:ln/>
+        </p:spPr>
+        <p:txBody>
+          <a:bodyPr wrap="square" lIns="0" tIns="0" rIns="0" bIns="0" rtlCol="0" anchor="t"/>
+          <a:lstStyle/>
+          <a:p>
+            <a:pPr algn="r" marL="342900" indent="-342900">
+              <a:lnSpc>
+                <a:spcPct val="122000"/>
+              </a:lnSpc>
+              <a:spcAft>
+                <a:spcPts val="1000"/>
+              </a:spcAft>
+              <a:buSzPct val="100000"/>
+              <a:buChar char="•"/>
+            </a:pPr>
+            <a:r>
+              <a:rPr lang="en-US" sz="1350" dirty="0">
+                <a:solidFill>
+                  <a:srgbClr val="364239"/>
+                </a:solidFill>
+                <a:latin typeface="Arial" pitchFamily="34" charset="0"/>
+                <a:ea typeface="Arial" pitchFamily="34" charset="-122"/>
+                <a:cs typeface="Arial" pitchFamily="34" charset="-120"/>
+              </a:rPr>
+              <a:t>من 13 إلى 15 متراً خلال ست إلى ثماني سنوات، بجذع كبير القطر.</a:t>
+            </a:r>
+            <a:endParaRPr lang="en-US" sz="1350" dirty="0"/>
+          </a:p>
+          <a:p>
+            <a:pPr algn="r" marL="342900" indent="-342900">
+              <a:lnSpc>
+                <a:spcPct val="122000"/>
+              </a:lnSpc>
+              <a:spcAft>
+                <a:spcPts val="1000"/>
+              </a:spcAft>
+              <a:buSzPct val="100000"/>
+              <a:buChar char="•"/>
+            </a:pPr>
+            <a:r>
+              <a:rPr lang="en-US" sz="1350" dirty="0">
+                <a:solidFill>
+                  <a:srgbClr val="364239"/>
+                </a:solidFill>
+                <a:latin typeface="Arial" pitchFamily="34" charset="0"/>
+                <a:ea typeface="Arial" pitchFamily="34" charset="-122"/>
+                <a:cs typeface="Arial" pitchFamily="34" charset="-120"/>
+              </a:rPr>
+              <a:t>مع 100 غرام من EVERGREEN® لكل شتلة، تنخفض حاجة الري بنسبة 50 %.</a:t>
+            </a:r>
+            <a:endParaRPr lang="en-US" sz="1350" dirty="0"/>
+          </a:p>
+          <a:p>
+            <a:pPr algn="r" marL="342900" indent="-342900">
+              <a:lnSpc>
+                <a:spcPct val="122000"/>
+              </a:lnSpc>
+              <a:spcAft>
+                <a:spcPts val="1000"/>
+              </a:spcAft>
+              <a:buSzPct val="100000"/>
+              <a:buChar char="•"/>
+            </a:pPr>
+            <a:r>
+              <a:rPr lang="en-US" sz="1350" dirty="0">
+                <a:solidFill>
+                  <a:srgbClr val="364239"/>
+                </a:solidFill>
+                <a:latin typeface="Arial" pitchFamily="34" charset="0"/>
+                <a:ea typeface="Arial" pitchFamily="34" charset="-122"/>
+                <a:cs typeface="Arial" pitchFamily="34" charset="-120"/>
+              </a:rPr>
+              <a:t>تتحمّل من −25 إلى +45 درجة مئوية، ولا يشتعل خشبها قبل 426 درجة.</a:t>
+            </a:r>
+            <a:endParaRPr lang="en-US" sz="1350" dirty="0"/>
+          </a:p>
+          <a:p>
+            <a:pPr algn="r" marL="342900" indent="-342900">
+              <a:lnSpc>
+                <a:spcPct val="122000"/>
+              </a:lnSpc>
+              <a:spcAft>
+                <a:spcPts val="1000"/>
+              </a:spcAft>
+              <a:buSzPct val="100000"/>
+              <a:buChar char="•"/>
+            </a:pPr>
+            <a:r>
+              <a:rPr lang="en-US" sz="1350" dirty="0">
+                <a:solidFill>
+                  <a:srgbClr val="364239"/>
+                </a:solidFill>
+                <a:latin typeface="Arial" pitchFamily="34" charset="0"/>
+                <a:ea typeface="Arial" pitchFamily="34" charset="-122"/>
+                <a:cs typeface="Arial" pitchFamily="34" charset="-120"/>
+              </a:rPr>
+              <a:t>مصدّ للرياح، وحماية للتربة من التعرية، و400 إلى 700 كغ من العسل للهكتار.</a:t>
+            </a:r>
+            <a:endParaRPr lang="en-US" sz="1350" dirty="0"/>
+          </a:p>
+        </p:txBody>
+      </p:sp>
+      <p:sp>
+        <p:nvSpPr>
+          <p:cNvPr id="8" name="Shape 6"/>
+          <p:cNvSpPr/>
+          <p:nvPr/>
+        </p:nvSpPr>
+        <p:spPr>
+          <a:xfrm>
+            <a:off x="594360" y="4846320"/>
+            <a:ext cx="11002975" cy="960120"/>
+          </a:xfrm>
+          <a:prstGeom prst="roundRect">
+            <a:avLst>
+              <a:gd name="adj" fmla="val 7619"/>
+            </a:avLst>
+          </a:prstGeom>
+          <a:solidFill>
+            <a:srgbClr val="F2F1E8"/>
+          </a:solidFill>
+          <a:ln w="9525">
+            <a:solidFill>
+              <a:srgbClr val="E0DFD0"/>
+            </a:solidFill>
+            <a:prstDash val="solid"/>
+          </a:ln>
+        </p:spPr>
+      </p:sp>
+      <p:sp>
+        <p:nvSpPr>
+          <p:cNvPr id="9" name="Text 7"/>
+          <p:cNvSpPr txBox="1"/>
+          <p:nvPr/>
+        </p:nvSpPr>
+        <p:spPr>
+          <a:xfrm>
+            <a:off x="822960" y="4983480"/>
+            <a:ext cx="10545775" cy="713232"/>
+          </a:xfrm>
+          <a:prstGeom prst="rect">
+            <a:avLst/>
+          </a:prstGeom>
+          <a:noFill/>
+          <a:ln/>
+        </p:spPr>
+        <p:txBody>
+          <a:bodyPr wrap="square" lIns="0" tIns="0" rIns="0" bIns="0" rtlCol="0" anchor="t"/>
+          <a:lstStyle/>
+          <a:p>
+            <a:pPr rtl="1" algn="r" indent="0" marL="0">
+              <a:lnSpc>
+                <a:spcPct val="118000"/>
+              </a:lnSpc>
+              <a:buNone/>
+            </a:pPr>
+            <a:r>
+              <a:rPr lang="en-US" sz="1100" dirty="0">
+                <a:solidFill>
+                  <a:srgbClr val="6F7D71"/>
+                </a:solidFill>
+                <a:latin typeface="Arial" pitchFamily="34" charset="0"/>
+                <a:ea typeface="Arial" pitchFamily="34" charset="-122"/>
+                <a:cs typeface="Arial" pitchFamily="34" charset="-120"/>
+              </a:rPr>
+              <a:t>تُسلَّم الشتلات في أصص (25 إلى 30 سم)، معتمدة خالية من الأمراض، وتُستبدل بالضمان عند تلفها. أول قطع في نهاية السنة السادسة، ويُقدَّر الخشب بنحو 400 إلى 450 يورو للمتر المكعب.</a:t>
+            </a:r>
+            <a:endParaRPr lang="en-US" sz="1100" dirty="0"/>
+          </a:p>
+        </p:txBody>
+      </p:sp>
+      <p:sp>
+        <p:nvSpPr>
+          <p:cNvPr id="10" name="Text 8"/>
+          <p:cNvSpPr txBox="1"/>
+          <p:nvPr/>
+        </p:nvSpPr>
+        <p:spPr>
+          <a:xfrm>
+            <a:off x="502920" y="6382512"/>
+            <a:ext cx="8229600" cy="274320"/>
+          </a:xfrm>
+          <a:prstGeom prst="rect">
+            <a:avLst/>
+          </a:prstGeom>
+          <a:noFill/>
+          <a:ln/>
+        </p:spPr>
+        <p:txBody>
+          <a:bodyPr wrap="square" lIns="0" tIns="0" rIns="0" bIns="0" rtlCol="0" anchor="ctr"/>
+          <a:lstStyle/>
+          <a:p>
+            <a:pPr rtl="1" algn="r" indent="0" marL="0">
+              <a:buNone/>
+            </a:pPr>
+            <a:r>
+              <a:rPr lang="en-US" sz="950" dirty="0">
+                <a:solidFill>
+                  <a:srgbClr val="6F7D71">
+                    <a:alpha val="80000"/>
+                  </a:srgbClr>
+                </a:solidFill>
+                <a:latin typeface="Arial" pitchFamily="34" charset="0"/>
+                <a:ea typeface="Arial" pitchFamily="34" charset="-122"/>
+                <a:cs typeface="Arial" pitchFamily="34" charset="-120"/>
+              </a:rPr>
+              <a:t>Green Solutions · ملف السوق الزراعي السعودي</a:t>
+            </a:r>
+            <a:endParaRPr lang="en-US" sz="950" dirty="0"/>
+          </a:p>
+        </p:txBody>
+      </p:sp>
+      <p:sp>
+        <p:nvSpPr>
+          <p:cNvPr id="11" name="Text 9"/>
+          <p:cNvSpPr txBox="1"/>
+          <p:nvPr/>
+        </p:nvSpPr>
+        <p:spPr>
+          <a:xfrm>
+            <a:off x="11140135" y="6382512"/>
+            <a:ext cx="548640" cy="274320"/>
+          </a:xfrm>
+          <a:prstGeom prst="rect">
+            <a:avLst/>
+          </a:prstGeom>
+          <a:noFill/>
+          <a:ln/>
+        </p:spPr>
+        <p:txBody>
+          <a:bodyPr wrap="square" lIns="0" tIns="0" rIns="0" bIns="0" rtlCol="0" anchor="ctr"/>
+          <a:lstStyle/>
+          <a:p>
+            <a:pPr rtl="1" algn="r" indent="0" marL="0">
+              <a:buNone/>
+            </a:pPr>
+            <a:r>
+              <a:rPr lang="en-US" sz="950" dirty="0">
+                <a:solidFill>
+                  <a:srgbClr val="6F7D71">
+                    <a:alpha val="80000"/>
+                  </a:srgbClr>
+                </a:solidFill>
+                <a:latin typeface="Arial" pitchFamily="34" charset="0"/>
+                <a:ea typeface="Arial" pitchFamily="34" charset="-122"/>
+                <a:cs typeface="Arial" pitchFamily="34" charset="-120"/>
+              </a:rPr>
+              <a:t>10</a:t>
+            </a:r>
+            <a:endParaRPr lang="en-US" sz="950" dirty="0"/>
+          </a:p>
+        </p:txBody>
+      </p:sp>
+    </p:spTree>
+  </p:cSld>
+  <p:clrMapOvr>
+    <a:masterClrMapping/>
+  </p:clrMapOvr>
+</p:sld>
+</file>
+
+<file path=ppt/slides/slide12.xml><?xml version="1.0" encoding="utf-8"?>
+<p:sld xmlns:a="http://schemas.openxmlformats.org/drawingml/2006/main" xmlns:r="http://schemas.openxmlformats.org/officeDocument/2006/relationships" xmlns:p="http://schemas.openxmlformats.org/presentationml/2006/main">
+  <p:cSld name="Slide 12">
+    <p:bg>
+      <p:bgPr>
+        <a:solidFill>
+          <a:srgbClr val="FCFAF5"/>
+        </a:solidFill>
+      </p:bgPr>
+    </p:bg>
+    <p:spTree>
+      <p:nvGrpSpPr>
+        <p:cNvPr id="1" name=""/>
+        <p:cNvGrpSpPr/>
+        <p:nvPr/>
+      </p:nvGrpSpPr>
+      <p:grpSpPr>
+        <a:xfrm>
+          <a:off x="0" y="0"/>
+          <a:ext cx="0" cy="0"/>
+          <a:chOff x="0" y="0"/>
+          <a:chExt cx="0" cy="0"/>
+        </a:xfrm>
+      </p:grpSpPr>
+      <p:sp>
+        <p:nvSpPr>
+          <p:cNvPr id="2" name="Text 0"/>
+          <p:cNvSpPr txBox="1"/>
+          <p:nvPr/>
+        </p:nvSpPr>
+        <p:spPr>
+          <a:xfrm>
+            <a:off x="594360" y="411480"/>
+            <a:ext cx="10515600" cy="274320"/>
+          </a:xfrm>
+          <a:prstGeom prst="rect">
+            <a:avLst/>
+          </a:prstGeom>
+          <a:noFill/>
+          <a:ln/>
+        </p:spPr>
+        <p:txBody>
+          <a:bodyPr wrap="square" lIns="0" tIns="0" rIns="0" bIns="0" rtlCol="0" anchor="ctr"/>
+          <a:lstStyle/>
+          <a:p>
+            <a:pPr rtl="1" algn="r" indent="0" marL="0">
+              <a:buNone/>
+            </a:pPr>
+            <a:r>
+              <a:rPr lang="en-US" sz="1150" b="1" spc="200" kern="0" dirty="0">
+                <a:solidFill>
+                  <a:srgbClr val="D9A441"/>
+                </a:solidFill>
+                <a:latin typeface="Arial" pitchFamily="34" charset="0"/>
+                <a:ea typeface="Arial" pitchFamily="34" charset="-122"/>
+                <a:cs typeface="Arial" pitchFamily="34" charset="-120"/>
+              </a:rPr>
+              <a:t>أرقام استرشادية</a:t>
+            </a:r>
+            <a:endParaRPr lang="en-US" sz="1150" dirty="0"/>
+          </a:p>
+        </p:txBody>
+      </p:sp>
+      <p:sp>
+        <p:nvSpPr>
+          <p:cNvPr id="3" name="Text 1"/>
+          <p:cNvSpPr txBox="1"/>
+          <p:nvPr/>
+        </p:nvSpPr>
+        <p:spPr>
+          <a:xfrm>
+            <a:off x="594360" y="731520"/>
+            <a:ext cx="10881360" cy="731520"/>
+          </a:xfrm>
+          <a:prstGeom prst="rect">
+            <a:avLst/>
+          </a:prstGeom>
+          <a:noFill/>
+          <a:ln/>
+        </p:spPr>
+        <p:txBody>
+          <a:bodyPr wrap="square" lIns="0" tIns="0" rIns="0" bIns="0" rtlCol="0" anchor="ctr"/>
+          <a:lstStyle/>
+          <a:p>
+            <a:pPr rtl="1" algn="r" indent="0" marL="0">
+              <a:buNone/>
+            </a:pPr>
+            <a:r>
+              <a:rPr lang="en-US" sz="3000" b="1" dirty="0">
+                <a:solidFill>
+                  <a:srgbClr val="16412B"/>
+                </a:solidFill>
+                <a:latin typeface="Arial" pitchFamily="34" charset="0"/>
+                <a:ea typeface="Arial" pitchFamily="34" charset="-122"/>
+                <a:cs typeface="Arial" pitchFamily="34" charset="-120"/>
+              </a:rPr>
+              <a:t>توفير الماء المتوقع حسب أسلوب الري</a:t>
+            </a:r>
+            <a:endParaRPr lang="en-US" sz="3000" dirty="0"/>
+          </a:p>
+        </p:txBody>
+      </p:sp>
+      <p:graphicFrame>
+        <p:nvGraphicFramePr>
+          <p:cNvPr id="4" name="Chart 0" descr=""/>
+          <p:cNvGraphicFramePr/>
+          <p:nvPr/>
+        </p:nvGraphicFramePr>
+        <p:xfrm>
+          <a:off x="594360" y="1783080"/>
+          <a:ext cx="7360920" cy="3977640"/>
+        </p:xfrm>
+        <a:graphic xmlns:a="http://schemas.openxmlformats.org/drawingml/2006/main">
+          <a:graphicData uri="http://schemas.openxmlformats.org/drawingml/2006/chart">
+            <c:chart xmlns:c="http://schemas.openxmlformats.org/drawingml/2006/chart" r:id="rId1"/>
+          </a:graphicData>
+        </a:graphic>
+      </p:graphicFrame>
+      <p:sp>
+        <p:nvSpPr>
+          <p:cNvPr id="5" name="Shape 2"/>
+          <p:cNvSpPr/>
+          <p:nvPr/>
+        </p:nvSpPr>
+        <p:spPr>
+          <a:xfrm>
+            <a:off x="8275320" y="1783080"/>
+            <a:ext cx="3291840" cy="3977640"/>
+          </a:xfrm>
+          <a:prstGeom prst="roundRect">
+            <a:avLst>
+              <a:gd name="adj" fmla="val 2778"/>
+            </a:avLst>
+          </a:prstGeom>
+          <a:solidFill>
+            <a:srgbClr val="F2F1E8"/>
+          </a:solidFill>
+          <a:ln w="9525">
+            <a:solidFill>
+              <a:srgbClr val="E0DFD0"/>
+            </a:solidFill>
+            <a:prstDash val="solid"/>
+          </a:ln>
+        </p:spPr>
+      </p:sp>
+      <p:sp>
+        <p:nvSpPr>
+          <p:cNvPr id="6" name="Text 3"/>
+          <p:cNvSpPr txBox="1"/>
+          <p:nvPr/>
+        </p:nvSpPr>
+        <p:spPr>
+          <a:xfrm>
+            <a:off x="8503920" y="2011680"/>
+            <a:ext cx="2834640" cy="457200"/>
+          </a:xfrm>
+          <a:prstGeom prst="rect">
+            <a:avLst/>
+          </a:prstGeom>
+          <a:noFill/>
+          <a:ln/>
+        </p:spPr>
+        <p:txBody>
+          <a:bodyPr wrap="square" lIns="0" tIns="0" rIns="0" bIns="0" rtlCol="0" anchor="ctr"/>
+          <a:lstStyle/>
+          <a:p>
+            <a:pPr rtl="1" algn="r" indent="0" marL="0">
+              <a:buNone/>
+            </a:pPr>
+            <a:r>
+              <a:rPr lang="en-US" sz="1300" b="1" dirty="0">
+                <a:solidFill>
+                  <a:srgbClr val="2C6E49"/>
+                </a:solidFill>
+                <a:latin typeface="Arial" pitchFamily="34" charset="0"/>
+                <a:ea typeface="Arial" pitchFamily="34" charset="-122"/>
+                <a:cs typeface="Arial" pitchFamily="34" charset="-120"/>
+              </a:rPr>
+              <a:t>تُقرأ بتحفّظ</a:t>
+            </a:r>
+            <a:endParaRPr lang="en-US" sz="1300" dirty="0"/>
+          </a:p>
+        </p:txBody>
+      </p:sp>
+      <p:sp>
+        <p:nvSpPr>
+          <p:cNvPr id="7" name="Text 4"/>
+          <p:cNvSpPr txBox="1"/>
+          <p:nvPr/>
+        </p:nvSpPr>
+        <p:spPr>
+          <a:xfrm>
+            <a:off x="8503920" y="2560320"/>
+            <a:ext cx="2834640" cy="3017520"/>
+          </a:xfrm>
+          <a:prstGeom prst="rect">
+            <a:avLst/>
+          </a:prstGeom>
+          <a:noFill/>
+          <a:ln/>
+        </p:spPr>
+        <p:txBody>
+          <a:bodyPr wrap="square" lIns="0" tIns="0" rIns="0" bIns="0" rtlCol="0" anchor="t"/>
+          <a:lstStyle/>
+          <a:p>
+            <a:pPr rtl="1" algn="r" indent="0" marL="0">
+              <a:lnSpc>
+                <a:spcPct val="125000"/>
+              </a:lnSpc>
+              <a:buNone/>
+            </a:pPr>
+            <a:r>
+              <a:rPr lang="en-US" sz="1200" dirty="0">
+                <a:solidFill>
+                  <a:srgbClr val="364239"/>
+                </a:solidFill>
+                <a:latin typeface="Arial" pitchFamily="34" charset="0"/>
+                <a:ea typeface="Arial" pitchFamily="34" charset="-122"/>
+                <a:cs typeface="Arial" pitchFamily="34" charset="-120"/>
+              </a:rPr>
+              <a:t>هذه النطاقات تقديرية واسترشادية، مبنية على المكاسب الموثّقة لموادنا الحابسة للماء.</a:t>
+            </a:r>
+            <a:endParaRPr lang="en-US" sz="1200" dirty="0"/>
+          </a:p>
+          <a:p>
+            <a:pPr rtl="1" algn="r" indent="0" marL="0">
+              <a:lnSpc>
+                <a:spcPct val="125000"/>
+              </a:lnSpc>
+              <a:buNone/>
+            </a:pPr>
+            <a:endParaRPr lang="en-US" sz="1200" dirty="0"/>
+          </a:p>
+          <a:p>
+            <a:pPr rtl="1" algn="r" indent="0" marL="0">
+              <a:lnSpc>
+                <a:spcPct val="125000"/>
+              </a:lnSpc>
+              <a:buNone/>
+            </a:pPr>
+            <a:r>
+              <a:rPr lang="en-US" sz="1200" dirty="0">
+                <a:solidFill>
+                  <a:srgbClr val="364239"/>
+                </a:solidFill>
+                <a:latin typeface="Arial" pitchFamily="34" charset="0"/>
+                <a:ea typeface="Arial" pitchFamily="34" charset="-122"/>
+                <a:cs typeface="Arial" pitchFamily="34" charset="-120"/>
+              </a:rPr>
+              <a:t>تتوقف النتيجة الفعلية على التربة والمناخ والمحصول. وهي تعطي ترتيب حجم فحسب، ولا تشكّل بأي حال قيمة مضمونة أو تعاقدية أو مطلقة.</a:t>
+            </a:r>
+            <a:endParaRPr lang="en-US" sz="1200" dirty="0"/>
+          </a:p>
+        </p:txBody>
+      </p:sp>
+      <p:sp>
+        <p:nvSpPr>
+          <p:cNvPr id="8" name="Text 5"/>
+          <p:cNvSpPr txBox="1"/>
+          <p:nvPr/>
+        </p:nvSpPr>
+        <p:spPr>
+          <a:xfrm>
+            <a:off x="502920" y="6382512"/>
+            <a:ext cx="8229600" cy="274320"/>
+          </a:xfrm>
+          <a:prstGeom prst="rect">
+            <a:avLst/>
+          </a:prstGeom>
+          <a:noFill/>
+          <a:ln/>
+        </p:spPr>
+        <p:txBody>
+          <a:bodyPr wrap="square" lIns="0" tIns="0" rIns="0" bIns="0" rtlCol="0" anchor="ctr"/>
+          <a:lstStyle/>
+          <a:p>
+            <a:pPr rtl="1" algn="r" indent="0" marL="0">
+              <a:buNone/>
+            </a:pPr>
+            <a:r>
+              <a:rPr lang="en-US" sz="950" dirty="0">
+                <a:solidFill>
+                  <a:srgbClr val="6F7D71">
+                    <a:alpha val="80000"/>
+                  </a:srgbClr>
+                </a:solidFill>
+                <a:latin typeface="Arial" pitchFamily="34" charset="0"/>
+                <a:ea typeface="Arial" pitchFamily="34" charset="-122"/>
+                <a:cs typeface="Arial" pitchFamily="34" charset="-120"/>
+              </a:rPr>
+              <a:t>Green Solutions · ملف السوق الزراعي السعودي</a:t>
+            </a:r>
+            <a:endParaRPr lang="en-US" sz="950" dirty="0"/>
+          </a:p>
+        </p:txBody>
+      </p:sp>
+      <p:sp>
+        <p:nvSpPr>
+          <p:cNvPr id="9" name="Text 6"/>
+          <p:cNvSpPr txBox="1"/>
+          <p:nvPr/>
+        </p:nvSpPr>
+        <p:spPr>
+          <a:xfrm>
+            <a:off x="11140135" y="6382512"/>
+            <a:ext cx="548640" cy="274320"/>
+          </a:xfrm>
+          <a:prstGeom prst="rect">
+            <a:avLst/>
+          </a:prstGeom>
+          <a:noFill/>
+          <a:ln/>
+        </p:spPr>
+        <p:txBody>
+          <a:bodyPr wrap="square" lIns="0" tIns="0" rIns="0" bIns="0" rtlCol="0" anchor="ctr"/>
+          <a:lstStyle/>
+          <a:p>
+            <a:pPr rtl="1" algn="r" indent="0" marL="0">
+              <a:buNone/>
+            </a:pPr>
+            <a:r>
+              <a:rPr lang="en-US" sz="950" dirty="0">
+                <a:solidFill>
+                  <a:srgbClr val="6F7D71">
+                    <a:alpha val="80000"/>
+                  </a:srgbClr>
+                </a:solidFill>
+                <a:latin typeface="Arial" pitchFamily="34" charset="0"/>
+                <a:ea typeface="Arial" pitchFamily="34" charset="-122"/>
+                <a:cs typeface="Arial" pitchFamily="34" charset="-120"/>
+              </a:rPr>
+              <a:t>11</a:t>
+            </a:r>
+            <a:endParaRPr lang="en-US" sz="950" dirty="0"/>
+          </a:p>
+        </p:txBody>
+      </p:sp>
+    </p:spTree>
+  </p:cSld>
+  <p:clrMapOvr>
+    <a:masterClrMapping/>
+  </p:clrMapOvr>
+</p:sld>
+</file>
+
+<file path=ppt/slides/slide13.xml><?xml version="1.0" encoding="utf-8"?>
+<p:sld xmlns:a="http://schemas.openxmlformats.org/drawingml/2006/main" xmlns:r="http://schemas.openxmlformats.org/officeDocument/2006/relationships" xmlns:p="http://schemas.openxmlformats.org/presentationml/2006/main">
+  <p:cSld name="Slide 13">
+    <p:bg>
+      <p:bgPr>
+        <a:solidFill>
+          <a:srgbClr val="FCFAF5"/>
+        </a:solidFill>
+      </p:bgPr>
+    </p:bg>
+    <p:spTree>
+      <p:nvGrpSpPr>
+        <p:cNvPr id="1" name=""/>
+        <p:cNvGrpSpPr/>
+        <p:nvPr/>
+      </p:nvGrpSpPr>
+      <p:grpSpPr>
+        <a:xfrm>
+          <a:off x="0" y="0"/>
+          <a:ext cx="0" cy="0"/>
+          <a:chOff x="0" y="0"/>
+          <a:chExt cx="0" cy="0"/>
+        </a:xfrm>
+      </p:grpSpPr>
+      <p:sp>
+        <p:nvSpPr>
+          <p:cNvPr id="2" name="Text 0"/>
+          <p:cNvSpPr txBox="1"/>
+          <p:nvPr/>
+        </p:nvSpPr>
+        <p:spPr>
+          <a:xfrm>
+            <a:off x="594360" y="411480"/>
+            <a:ext cx="10515600" cy="274320"/>
+          </a:xfrm>
+          <a:prstGeom prst="rect">
+            <a:avLst/>
+          </a:prstGeom>
+          <a:noFill/>
+          <a:ln/>
+        </p:spPr>
+        <p:txBody>
+          <a:bodyPr wrap="square" lIns="0" tIns="0" rIns="0" bIns="0" rtlCol="0" anchor="ctr"/>
+          <a:lstStyle/>
+          <a:p>
+            <a:pPr rtl="1" algn="r" indent="0" marL="0">
+              <a:buNone/>
+            </a:pPr>
+            <a:r>
+              <a:rPr lang="en-US" sz="1150" b="1" spc="200" kern="0" dirty="0">
+                <a:solidFill>
+                  <a:srgbClr val="D9A441"/>
+                </a:solidFill>
+                <a:latin typeface="Arial" pitchFamily="34" charset="0"/>
+                <a:ea typeface="Arial" pitchFamily="34" charset="-122"/>
+                <a:cs typeface="Arial" pitchFamily="34" charset="-120"/>
+              </a:rPr>
+              <a:t>ثلاثة مواقع ذات أولوية</a:t>
+            </a:r>
+            <a:endParaRPr lang="en-US" sz="1150" dirty="0"/>
+          </a:p>
+        </p:txBody>
+      </p:sp>
+      <p:sp>
+        <p:nvSpPr>
+          <p:cNvPr id="3" name="Text 1"/>
+          <p:cNvSpPr txBox="1"/>
+          <p:nvPr/>
+        </p:nvSpPr>
+        <p:spPr>
+          <a:xfrm>
+            <a:off x="594360" y="731520"/>
+            <a:ext cx="10881360" cy="731520"/>
+          </a:xfrm>
+          <a:prstGeom prst="rect">
+            <a:avLst/>
+          </a:prstGeom>
+          <a:noFill/>
+          <a:ln/>
+        </p:spPr>
+        <p:txBody>
+          <a:bodyPr wrap="square" lIns="0" tIns="0" rIns="0" bIns="0" rtlCol="0" anchor="ctr"/>
+          <a:lstStyle/>
+          <a:p>
+            <a:pPr rtl="1" algn="r" indent="0" marL="0">
+              <a:buNone/>
+            </a:pPr>
+            <a:r>
+              <a:rPr lang="en-US" sz="3000" b="1" dirty="0">
+                <a:solidFill>
+                  <a:srgbClr val="16412B"/>
+                </a:solidFill>
+                <a:latin typeface="Arial" pitchFamily="34" charset="0"/>
+                <a:ea typeface="Arial" pitchFamily="34" charset="-122"/>
+                <a:cs typeface="Arial" pitchFamily="34" charset="-120"/>
+              </a:rPr>
+              <a:t>أين نبدأ التجارب الأولى</a:t>
+            </a:r>
+            <a:endParaRPr lang="en-US" sz="3000" dirty="0"/>
+          </a:p>
+        </p:txBody>
+      </p:sp>
+      <p:sp>
+        <p:nvSpPr>
+          <p:cNvPr id="4" name="Shape 2"/>
+          <p:cNvSpPr/>
+          <p:nvPr/>
+        </p:nvSpPr>
+        <p:spPr>
+          <a:xfrm>
+            <a:off x="594360" y="1783080"/>
+            <a:ext cx="3472586" cy="4069080"/>
+          </a:xfrm>
+          <a:prstGeom prst="roundRect">
+            <a:avLst>
+              <a:gd name="adj" fmla="val 2633"/>
+            </a:avLst>
+          </a:prstGeom>
+          <a:solidFill>
+            <a:srgbClr val="F2F1E8"/>
+          </a:solidFill>
+          <a:ln w="9525">
+            <a:solidFill>
+              <a:srgbClr val="E0DFD0"/>
+            </a:solidFill>
+            <a:prstDash val="solid"/>
+          </a:ln>
+        </p:spPr>
+      </p:sp>
+      <p:pic>
+        <p:nvPicPr>
+          <p:cNvPr id="5" name="Image 0" descr="preencoded.png">    </p:cNvPr>
+          <p:cNvPicPr>
+            <a:picLocks noChangeAspect="1"/>
+          </p:cNvPicPr>
+          <p:nvPr/>
+        </p:nvPicPr>
+        <p:blipFill>
+          <a:blip r:embed="rId1"/>
+          <a:stretch>
+            <a:fillRect/>
+          </a:stretch>
+        </p:blipFill>
+        <p:spPr>
+          <a:xfrm>
+            <a:off x="594360" y="1783080"/>
+            <a:ext cx="3472586" cy="1691640"/>
+          </a:xfrm>
+          <a:prstGeom prst="rect">
+            <a:avLst/>
+          </a:prstGeom>
+        </p:spPr>
+      </p:pic>
+      <p:sp>
+        <p:nvSpPr>
+          <p:cNvPr id="6" name="Text 3"/>
+          <p:cNvSpPr txBox="1"/>
+          <p:nvPr/>
+        </p:nvSpPr>
+        <p:spPr>
+          <a:xfrm>
+            <a:off x="795528" y="3639312"/>
+            <a:ext cx="3070250" cy="384048"/>
+          </a:xfrm>
+          <a:prstGeom prst="rect">
+            <a:avLst/>
+          </a:prstGeom>
+          <a:noFill/>
+          <a:ln/>
+        </p:spPr>
+        <p:txBody>
+          <a:bodyPr wrap="square" lIns="0" tIns="0" rIns="0" bIns="0" rtlCol="0" anchor="ctr"/>
+          <a:lstStyle/>
+          <a:p>
+            <a:pPr rtl="1" algn="r" indent="0" marL="0">
+              <a:buNone/>
+            </a:pPr>
+            <a:r>
+              <a:rPr lang="en-US" sz="1500" b="1" dirty="0">
+                <a:solidFill>
+                  <a:srgbClr val="2C6E49"/>
+                </a:solidFill>
+                <a:latin typeface="Arial" pitchFamily="34" charset="0"/>
+                <a:ea typeface="Arial" pitchFamily="34" charset="-122"/>
+                <a:cs typeface="Arial" pitchFamily="34" charset="-120"/>
+              </a:rPr>
+              <a:t>الأحساء</a:t>
+            </a:r>
+            <a:endParaRPr lang="en-US" sz="1500" dirty="0"/>
+          </a:p>
+        </p:txBody>
+      </p:sp>
+      <p:sp>
+        <p:nvSpPr>
+          <p:cNvPr id="7" name="Text 4"/>
+          <p:cNvSpPr txBox="1"/>
+          <p:nvPr/>
+        </p:nvSpPr>
+        <p:spPr>
+          <a:xfrm>
+            <a:off x="795528" y="4041648"/>
+            <a:ext cx="3070250" cy="329184"/>
+          </a:xfrm>
+          <a:prstGeom prst="rect">
+            <a:avLst/>
+          </a:prstGeom>
+          <a:noFill/>
+          <a:ln/>
+        </p:spPr>
+        <p:txBody>
+          <a:bodyPr wrap="square" lIns="0" tIns="0" rIns="0" bIns="0" rtlCol="0" anchor="ctr"/>
+          <a:lstStyle/>
+          <a:p>
+            <a:pPr rtl="1" algn="r" indent="0" marL="0">
+              <a:buNone/>
+            </a:pPr>
+            <a:r>
+              <a:rPr lang="en-US" sz="1250" b="1" dirty="0">
+                <a:solidFill>
+                  <a:srgbClr val="9C6C12"/>
+                </a:solidFill>
+                <a:latin typeface="Arial" pitchFamily="34" charset="0"/>
+                <a:ea typeface="Arial" pitchFamily="34" charset="-122"/>
+                <a:cs typeface="Arial" pitchFamily="34" charset="-120"/>
+              </a:rPr>
+              <a:t>≈ 2,5 مليون نخلة</a:t>
+            </a:r>
+            <a:endParaRPr lang="en-US" sz="1250" dirty="0"/>
+          </a:p>
+        </p:txBody>
+      </p:sp>
+      <p:sp>
+        <p:nvSpPr>
+          <p:cNvPr id="8" name="Text 5"/>
+          <p:cNvSpPr txBox="1"/>
+          <p:nvPr/>
+        </p:nvSpPr>
+        <p:spPr>
+          <a:xfrm>
+            <a:off x="795528" y="4407408"/>
+            <a:ext cx="3070250" cy="1280160"/>
+          </a:xfrm>
+          <a:prstGeom prst="rect">
+            <a:avLst/>
+          </a:prstGeom>
+          <a:noFill/>
+          <a:ln/>
+        </p:spPr>
+        <p:txBody>
+          <a:bodyPr wrap="square" lIns="0" tIns="0" rIns="0" bIns="0" rtlCol="0" anchor="t"/>
+          <a:lstStyle/>
+          <a:p>
+            <a:pPr algn="r" marL="342900" indent="-342900">
+              <a:lnSpc>
+                <a:spcPct val="116000"/>
+              </a:lnSpc>
+              <a:spcAft>
+                <a:spcPts val="700"/>
+              </a:spcAft>
+              <a:buSzPct val="100000"/>
+              <a:buChar char="•"/>
+            </a:pPr>
+            <a:r>
+              <a:rPr lang="en-US" sz="1150" dirty="0">
+                <a:solidFill>
+                  <a:srgbClr val="364239"/>
+                </a:solidFill>
+                <a:latin typeface="Arial" pitchFamily="34" charset="0"/>
+                <a:ea typeface="Arial" pitchFamily="34" charset="-122"/>
+                <a:cs typeface="Arial" pitchFamily="34" charset="-120"/>
+              </a:rPr>
+              <a:t>أكبر واحة نخيل في العالم، بتربة رملية شديدة النفاذية ومياه ري مالحة نسبياً.</a:t>
+            </a:r>
+            <a:endParaRPr lang="en-US" sz="1150" dirty="0"/>
+          </a:p>
+          <a:p>
+            <a:pPr algn="r" marL="342900" indent="-342900">
+              <a:lnSpc>
+                <a:spcPct val="116000"/>
+              </a:lnSpc>
+              <a:spcAft>
+                <a:spcPts val="700"/>
+              </a:spcAft>
+              <a:buSzPct val="100000"/>
+              <a:buChar char="•"/>
+            </a:pPr>
+            <a:r>
+              <a:rPr lang="en-US" sz="1150" dirty="0">
+                <a:solidFill>
+                  <a:srgbClr val="364239"/>
+                </a:solidFill>
+                <a:latin typeface="Arial" pitchFamily="34" charset="0"/>
+                <a:ea typeface="Arial" pitchFamily="34" charset="-122"/>
+                <a:cs typeface="Arial" pitchFamily="34" charset="-120"/>
+              </a:rPr>
+              <a:t>انخفاض متواصل في منسوب الآبار بعد أن كانت العيون تتدفق من تلقائها.</a:t>
+            </a:r>
+            <a:endParaRPr lang="en-US" sz="1150" dirty="0"/>
+          </a:p>
+          <a:p>
+            <a:pPr algn="r" marL="342900" indent="-342900">
+              <a:lnSpc>
+                <a:spcPct val="116000"/>
+              </a:lnSpc>
+              <a:spcAft>
+                <a:spcPts val="700"/>
+              </a:spcAft>
+              <a:buSzPct val="100000"/>
+              <a:buChar char="•"/>
+            </a:pPr>
+            <a:r>
+              <a:rPr lang="en-US" sz="1150" dirty="0">
+                <a:solidFill>
+                  <a:srgbClr val="364239"/>
+                </a:solidFill>
+                <a:latin typeface="Arial" pitchFamily="34" charset="0"/>
+                <a:ea typeface="Arial" pitchFamily="34" charset="-122"/>
+                <a:cs typeface="Arial" pitchFamily="34" charset="-120"/>
+              </a:rPr>
+              <a:t>زحف الرمال وارتفاع ملوحة التربة يستدعيان حلاً يعمل عند الجذر مباشرة.</a:t>
+            </a:r>
+            <a:endParaRPr lang="en-US" sz="1150" dirty="0"/>
+          </a:p>
+        </p:txBody>
+      </p:sp>
+      <p:sp>
+        <p:nvSpPr>
+          <p:cNvPr id="9" name="Shape 6"/>
+          <p:cNvSpPr/>
+          <p:nvPr/>
+        </p:nvSpPr>
+        <p:spPr>
+          <a:xfrm>
+            <a:off x="4359554" y="1783080"/>
+            <a:ext cx="3472586" cy="4069080"/>
+          </a:xfrm>
+          <a:prstGeom prst="roundRect">
+            <a:avLst>
+              <a:gd name="adj" fmla="val 2633"/>
+            </a:avLst>
+          </a:prstGeom>
+          <a:solidFill>
+            <a:srgbClr val="F2F1E8"/>
+          </a:solidFill>
+          <a:ln w="9525">
+            <a:solidFill>
+              <a:srgbClr val="E0DFD0"/>
+            </a:solidFill>
+            <a:prstDash val="solid"/>
+          </a:ln>
+        </p:spPr>
+      </p:sp>
+      <p:pic>
+        <p:nvPicPr>
+          <p:cNvPr id="10" name="Image 1" descr="preencoded.png">    </p:cNvPr>
+          <p:cNvPicPr>
+            <a:picLocks noChangeAspect="1"/>
+          </p:cNvPicPr>
+          <p:nvPr/>
+        </p:nvPicPr>
+        <p:blipFill>
+          <a:blip r:embed="rId2"/>
+          <a:stretch>
+            <a:fillRect/>
+          </a:stretch>
+        </p:blipFill>
+        <p:spPr>
+          <a:xfrm>
+            <a:off x="4359554" y="1783080"/>
+            <a:ext cx="3472586" cy="1691640"/>
+          </a:xfrm>
+          <a:prstGeom prst="rect">
+            <a:avLst/>
+          </a:prstGeom>
+        </p:spPr>
+      </p:pic>
+      <p:sp>
+        <p:nvSpPr>
+          <p:cNvPr id="11" name="Text 7"/>
+          <p:cNvSpPr txBox="1"/>
+          <p:nvPr/>
+        </p:nvSpPr>
+        <p:spPr>
+          <a:xfrm>
+            <a:off x="4560722" y="3639312"/>
+            <a:ext cx="3070250" cy="384048"/>
+          </a:xfrm>
+          <a:prstGeom prst="rect">
+            <a:avLst/>
+          </a:prstGeom>
+          <a:noFill/>
+          <a:ln/>
+        </p:spPr>
+        <p:txBody>
+          <a:bodyPr wrap="square" lIns="0" tIns="0" rIns="0" bIns="0" rtlCol="0" anchor="ctr"/>
+          <a:lstStyle/>
+          <a:p>
+            <a:pPr rtl="1" algn="r" indent="0" marL="0">
+              <a:buNone/>
+            </a:pPr>
+            <a:r>
+              <a:rPr lang="en-US" sz="1500" b="1" dirty="0">
+                <a:solidFill>
+                  <a:srgbClr val="2C6E49"/>
+                </a:solidFill>
+                <a:latin typeface="Arial" pitchFamily="34" charset="0"/>
+                <a:ea typeface="Arial" pitchFamily="34" charset="-122"/>
+                <a:cs typeface="Arial" pitchFamily="34" charset="-120"/>
+              </a:rPr>
+              <a:t>القصيم</a:t>
+            </a:r>
+            <a:endParaRPr lang="en-US" sz="1500" dirty="0"/>
+          </a:p>
+        </p:txBody>
+      </p:sp>
+      <p:sp>
+        <p:nvSpPr>
+          <p:cNvPr id="12" name="Text 8"/>
+          <p:cNvSpPr txBox="1"/>
+          <p:nvPr/>
+        </p:nvSpPr>
+        <p:spPr>
+          <a:xfrm>
+            <a:off x="4560722" y="4041648"/>
+            <a:ext cx="3070250" cy="329184"/>
+          </a:xfrm>
+          <a:prstGeom prst="rect">
+            <a:avLst/>
+          </a:prstGeom>
+          <a:noFill/>
+          <a:ln/>
+        </p:spPr>
+        <p:txBody>
+          <a:bodyPr wrap="square" lIns="0" tIns="0" rIns="0" bIns="0" rtlCol="0" anchor="ctr"/>
+          <a:lstStyle/>
+          <a:p>
+            <a:pPr rtl="1" algn="r" indent="0" marL="0">
+              <a:buNone/>
+            </a:pPr>
+            <a:r>
+              <a:rPr lang="en-US" sz="1250" b="1" dirty="0">
+                <a:solidFill>
+                  <a:srgbClr val="9C6C12"/>
+                </a:solidFill>
+                <a:latin typeface="Arial" pitchFamily="34" charset="0"/>
+                <a:ea typeface="Arial" pitchFamily="34" charset="-122"/>
+                <a:cs typeface="Arial" pitchFamily="34" charset="-120"/>
+              </a:rPr>
+              <a:t>أكثر من 8 ملايين نخلة</a:t>
+            </a:r>
+            <a:endParaRPr lang="en-US" sz="1250" dirty="0"/>
+          </a:p>
+        </p:txBody>
+      </p:sp>
+      <p:sp>
+        <p:nvSpPr>
+          <p:cNvPr id="13" name="Text 9"/>
+          <p:cNvSpPr txBox="1"/>
+          <p:nvPr/>
+        </p:nvSpPr>
+        <p:spPr>
+          <a:xfrm>
+            <a:off x="4560722" y="4407408"/>
+            <a:ext cx="3070250" cy="1280160"/>
+          </a:xfrm>
+          <a:prstGeom prst="rect">
+            <a:avLst/>
+          </a:prstGeom>
+          <a:noFill/>
+          <a:ln/>
+        </p:spPr>
+        <p:txBody>
+          <a:bodyPr wrap="square" lIns="0" tIns="0" rIns="0" bIns="0" rtlCol="0" anchor="t"/>
+          <a:lstStyle/>
+          <a:p>
+            <a:pPr algn="r" marL="342900" indent="-342900">
+              <a:lnSpc>
+                <a:spcPct val="116000"/>
+              </a:lnSpc>
+              <a:spcAft>
+                <a:spcPts val="700"/>
+              </a:spcAft>
+              <a:buSzPct val="100000"/>
+              <a:buChar char="•"/>
+            </a:pPr>
+            <a:r>
+              <a:rPr lang="en-US" sz="1150" dirty="0">
+                <a:solidFill>
+                  <a:srgbClr val="364239"/>
+                </a:solidFill>
+                <a:latin typeface="Arial" pitchFamily="34" charset="0"/>
+                <a:ea typeface="Arial" pitchFamily="34" charset="-122"/>
+                <a:cs typeface="Arial" pitchFamily="34" charset="-120"/>
+              </a:rPr>
+              <a:t>قلب الري المحوري في المملكة، معتمد على طبقة الساق الجوفية غير المتجددة.</a:t>
+            </a:r>
+            <a:endParaRPr lang="en-US" sz="1150" dirty="0"/>
+          </a:p>
+          <a:p>
+            <a:pPr algn="r" marL="342900" indent="-342900">
+              <a:lnSpc>
+                <a:spcPct val="116000"/>
+              </a:lnSpc>
+              <a:spcAft>
+                <a:spcPts val="700"/>
+              </a:spcAft>
+              <a:buSzPct val="100000"/>
+              <a:buChar char="•"/>
+            </a:pPr>
+            <a:r>
+              <a:rPr lang="en-US" sz="1150" dirty="0">
+                <a:solidFill>
+                  <a:srgbClr val="364239"/>
+                </a:solidFill>
+                <a:latin typeface="Arial" pitchFamily="34" charset="0"/>
+                <a:ea typeface="Arial" pitchFamily="34" charset="-122"/>
+                <a:cs typeface="Arial" pitchFamily="34" charset="-120"/>
+              </a:rPr>
+              <a:t>مزارع تجارية كبيرة قادرة على اتخاذ قرار سريع بشأن تجربة ميدانية.</a:t>
+            </a:r>
+            <a:endParaRPr lang="en-US" sz="1150" dirty="0"/>
+          </a:p>
+          <a:p>
+            <a:pPr algn="r" marL="342900" indent="-342900">
+              <a:lnSpc>
+                <a:spcPct val="116000"/>
+              </a:lnSpc>
+              <a:spcAft>
+                <a:spcPts val="700"/>
+              </a:spcAft>
+              <a:buSzPct val="100000"/>
+              <a:buChar char="•"/>
+            </a:pPr>
+            <a:r>
+              <a:rPr lang="en-US" sz="1150" dirty="0">
+                <a:solidFill>
+                  <a:srgbClr val="364239"/>
+                </a:solidFill>
+                <a:latin typeface="Arial" pitchFamily="34" charset="0"/>
+                <a:ea typeface="Arial" pitchFamily="34" charset="-122"/>
+                <a:cs typeface="Arial" pitchFamily="34" charset="-120"/>
+              </a:rPr>
+              <a:t>بريدة سوق تمور مرجعية: نتيجة تجربة واحدة تنتشر بسرعة بين المزارعين.</a:t>
+            </a:r>
+            <a:endParaRPr lang="en-US" sz="1150" dirty="0"/>
+          </a:p>
+        </p:txBody>
+      </p:sp>
+      <p:sp>
+        <p:nvSpPr>
+          <p:cNvPr id="14" name="Shape 10"/>
+          <p:cNvSpPr/>
+          <p:nvPr/>
+        </p:nvSpPr>
+        <p:spPr>
+          <a:xfrm>
+            <a:off x="8124749" y="1783080"/>
+            <a:ext cx="3472586" cy="4069080"/>
+          </a:xfrm>
+          <a:prstGeom prst="roundRect">
+            <a:avLst>
+              <a:gd name="adj" fmla="val 2633"/>
+            </a:avLst>
+          </a:prstGeom>
+          <a:solidFill>
+            <a:srgbClr val="F2F1E8"/>
+          </a:solidFill>
+          <a:ln w="9525">
+            <a:solidFill>
+              <a:srgbClr val="E0DFD0"/>
+            </a:solidFill>
+            <a:prstDash val="solid"/>
+          </a:ln>
+        </p:spPr>
+      </p:sp>
+      <p:pic>
+        <p:nvPicPr>
+          <p:cNvPr id="15" name="Image 2" descr="preencoded.png">    </p:cNvPr>
+          <p:cNvPicPr>
+            <a:picLocks noChangeAspect="1"/>
+          </p:cNvPicPr>
+          <p:nvPr/>
+        </p:nvPicPr>
+        <p:blipFill>
+          <a:blip r:embed="rId3"/>
+          <a:stretch>
+            <a:fillRect/>
+          </a:stretch>
+        </p:blipFill>
+        <p:spPr>
+          <a:xfrm>
+            <a:off x="8124749" y="1783080"/>
+            <a:ext cx="3472586" cy="1691640"/>
+          </a:xfrm>
+          <a:prstGeom prst="rect">
+            <a:avLst/>
+          </a:prstGeom>
+        </p:spPr>
+      </p:pic>
+      <p:sp>
+        <p:nvSpPr>
+          <p:cNvPr id="16" name="Text 11"/>
+          <p:cNvSpPr txBox="1"/>
+          <p:nvPr/>
+        </p:nvSpPr>
+        <p:spPr>
+          <a:xfrm>
+            <a:off x="8325917" y="3639312"/>
+            <a:ext cx="3070250" cy="384048"/>
+          </a:xfrm>
+          <a:prstGeom prst="rect">
+            <a:avLst/>
+          </a:prstGeom>
+          <a:noFill/>
+          <a:ln/>
+        </p:spPr>
+        <p:txBody>
+          <a:bodyPr wrap="square" lIns="0" tIns="0" rIns="0" bIns="0" rtlCol="0" anchor="ctr"/>
+          <a:lstStyle/>
+          <a:p>
+            <a:pPr rtl="1" algn="r" indent="0" marL="0">
+              <a:buNone/>
+            </a:pPr>
+            <a:r>
+              <a:rPr lang="en-US" sz="1500" b="1" dirty="0">
+                <a:solidFill>
+                  <a:srgbClr val="2C6E49"/>
+                </a:solidFill>
+                <a:latin typeface="Arial" pitchFamily="34" charset="0"/>
+                <a:ea typeface="Arial" pitchFamily="34" charset="-122"/>
+                <a:cs typeface="Arial" pitchFamily="34" charset="-120"/>
+              </a:rPr>
+              <a:t>عسير</a:t>
+            </a:r>
+            <a:endParaRPr lang="en-US" sz="1500" dirty="0"/>
+          </a:p>
+        </p:txBody>
+      </p:sp>
+      <p:sp>
+        <p:nvSpPr>
+          <p:cNvPr id="17" name="Text 12"/>
+          <p:cNvSpPr txBox="1"/>
+          <p:nvPr/>
+        </p:nvSpPr>
+        <p:spPr>
+          <a:xfrm>
+            <a:off x="8325917" y="4041648"/>
+            <a:ext cx="3070250" cy="329184"/>
+          </a:xfrm>
+          <a:prstGeom prst="rect">
+            <a:avLst/>
+          </a:prstGeom>
+          <a:noFill/>
+          <a:ln/>
+        </p:spPr>
+        <p:txBody>
+          <a:bodyPr wrap="square" lIns="0" tIns="0" rIns="0" bIns="0" rtlCol="0" anchor="ctr"/>
+          <a:lstStyle/>
+          <a:p>
+            <a:pPr rtl="1" algn="r" indent="0" marL="0">
+              <a:buNone/>
+            </a:pPr>
+            <a:r>
+              <a:rPr lang="en-US" sz="1250" b="1" dirty="0">
+                <a:solidFill>
+                  <a:srgbClr val="9C6C12"/>
+                </a:solidFill>
+                <a:latin typeface="Arial" pitchFamily="34" charset="0"/>
+                <a:ea typeface="Arial" pitchFamily="34" charset="-122"/>
+                <a:cs typeface="Arial" pitchFamily="34" charset="-120"/>
+              </a:rPr>
+              <a:t>300 إلى 500 مم أمطار</a:t>
+            </a:r>
+            <a:endParaRPr lang="en-US" sz="1250" dirty="0"/>
+          </a:p>
+        </p:txBody>
+      </p:sp>
+      <p:sp>
+        <p:nvSpPr>
+          <p:cNvPr id="18" name="Text 13"/>
+          <p:cNvSpPr txBox="1"/>
+          <p:nvPr/>
+        </p:nvSpPr>
+        <p:spPr>
+          <a:xfrm>
+            <a:off x="8325917" y="4407408"/>
+            <a:ext cx="3070250" cy="1280160"/>
+          </a:xfrm>
+          <a:prstGeom prst="rect">
+            <a:avLst/>
+          </a:prstGeom>
+          <a:noFill/>
+          <a:ln/>
+        </p:spPr>
+        <p:txBody>
+          <a:bodyPr wrap="square" lIns="0" tIns="0" rIns="0" bIns="0" rtlCol="0" anchor="t"/>
+          <a:lstStyle/>
+          <a:p>
+            <a:pPr algn="r" marL="342900" indent="-342900">
+              <a:lnSpc>
+                <a:spcPct val="116000"/>
+              </a:lnSpc>
+              <a:spcAft>
+                <a:spcPts val="700"/>
+              </a:spcAft>
+              <a:buSzPct val="100000"/>
+              <a:buChar char="•"/>
+            </a:pPr>
+            <a:r>
+              <a:rPr lang="en-US" sz="1150" dirty="0">
+                <a:solidFill>
+                  <a:srgbClr val="364239"/>
+                </a:solidFill>
+                <a:latin typeface="Arial" pitchFamily="34" charset="0"/>
+                <a:ea typeface="Arial" pitchFamily="34" charset="-122"/>
+                <a:cs typeface="Arial" pitchFamily="34" charset="-120"/>
+              </a:rPr>
+              <a:t>المنطقة الوحيدة التي تسمح بزراعة بعلية، على مدرجات جبلية ضيقة.</a:t>
+            </a:r>
+            <a:endParaRPr lang="en-US" sz="1150" dirty="0"/>
+          </a:p>
+          <a:p>
+            <a:pPr algn="r" marL="342900" indent="-342900">
+              <a:lnSpc>
+                <a:spcPct val="116000"/>
+              </a:lnSpc>
+              <a:spcAft>
+                <a:spcPts val="700"/>
+              </a:spcAft>
+              <a:buSzPct val="100000"/>
+              <a:buChar char="•"/>
+            </a:pPr>
+            <a:r>
+              <a:rPr lang="en-US" sz="1150" dirty="0">
+                <a:solidFill>
+                  <a:srgbClr val="364239"/>
+                </a:solidFill>
+                <a:latin typeface="Arial" pitchFamily="34" charset="0"/>
+                <a:ea typeface="Arial" pitchFamily="34" charset="-122"/>
+                <a:cs typeface="Arial" pitchFamily="34" charset="-120"/>
+              </a:rPr>
+              <a:t>الأمطار موسمية وغير منتظمة: الاحتفاظ بها في التربة هو المسألة الأساسية.</a:t>
+            </a:r>
+            <a:endParaRPr lang="en-US" sz="1150" dirty="0"/>
+          </a:p>
+          <a:p>
+            <a:pPr algn="r" marL="342900" indent="-342900">
+              <a:lnSpc>
+                <a:spcPct val="116000"/>
+              </a:lnSpc>
+              <a:spcAft>
+                <a:spcPts val="700"/>
+              </a:spcAft>
+              <a:buSzPct val="100000"/>
+              <a:buChar char="•"/>
+            </a:pPr>
+            <a:r>
+              <a:rPr lang="en-US" sz="1150" dirty="0">
+                <a:solidFill>
+                  <a:srgbClr val="364239"/>
+                </a:solidFill>
+                <a:latin typeface="Arial" pitchFamily="34" charset="0"/>
+                <a:ea typeface="Arial" pitchFamily="34" charset="-122"/>
+                <a:cs typeface="Arial" pitchFamily="34" charset="-120"/>
+              </a:rPr>
+              <a:t>محاصيل عالية القيمة — البن العربي والفواكه — تبرّر كلفة التدخل.</a:t>
+            </a:r>
+            <a:endParaRPr lang="en-US" sz="1150" dirty="0"/>
+          </a:p>
+        </p:txBody>
+      </p:sp>
+      <p:sp>
+        <p:nvSpPr>
+          <p:cNvPr id="19" name="Text 14"/>
+          <p:cNvSpPr txBox="1"/>
+          <p:nvPr/>
+        </p:nvSpPr>
+        <p:spPr>
+          <a:xfrm>
+            <a:off x="502920" y="6382512"/>
+            <a:ext cx="8229600" cy="274320"/>
+          </a:xfrm>
+          <a:prstGeom prst="rect">
+            <a:avLst/>
+          </a:prstGeom>
+          <a:noFill/>
+          <a:ln/>
+        </p:spPr>
+        <p:txBody>
+          <a:bodyPr wrap="square" lIns="0" tIns="0" rIns="0" bIns="0" rtlCol="0" anchor="ctr"/>
+          <a:lstStyle/>
+          <a:p>
+            <a:pPr rtl="1" algn="r" indent="0" marL="0">
+              <a:buNone/>
+            </a:pPr>
+            <a:r>
+              <a:rPr lang="en-US" sz="950" dirty="0">
+                <a:solidFill>
+                  <a:srgbClr val="6F7D71">
+                    <a:alpha val="80000"/>
+                  </a:srgbClr>
+                </a:solidFill>
+                <a:latin typeface="Arial" pitchFamily="34" charset="0"/>
+                <a:ea typeface="Arial" pitchFamily="34" charset="-122"/>
+                <a:cs typeface="Arial" pitchFamily="34" charset="-120"/>
+              </a:rPr>
+              <a:t>Green Solutions · ملف السوق الزراعي السعودي</a:t>
+            </a:r>
+            <a:endParaRPr lang="en-US" sz="950" dirty="0"/>
+          </a:p>
+        </p:txBody>
+      </p:sp>
+      <p:sp>
+        <p:nvSpPr>
+          <p:cNvPr id="20" name="Text 15"/>
+          <p:cNvSpPr txBox="1"/>
+          <p:nvPr/>
+        </p:nvSpPr>
+        <p:spPr>
+          <a:xfrm>
+            <a:off x="11140135" y="6382512"/>
+            <a:ext cx="548640" cy="274320"/>
+          </a:xfrm>
+          <a:prstGeom prst="rect">
+            <a:avLst/>
+          </a:prstGeom>
+          <a:noFill/>
+          <a:ln/>
+        </p:spPr>
+        <p:txBody>
+          <a:bodyPr wrap="square" lIns="0" tIns="0" rIns="0" bIns="0" rtlCol="0" anchor="ctr"/>
+          <a:lstStyle/>
+          <a:p>
+            <a:pPr rtl="1" algn="r" indent="0" marL="0">
+              <a:buNone/>
+            </a:pPr>
+            <a:r>
+              <a:rPr lang="en-US" sz="950" dirty="0">
+                <a:solidFill>
+                  <a:srgbClr val="6F7D71">
+                    <a:alpha val="80000"/>
+                  </a:srgbClr>
+                </a:solidFill>
+                <a:latin typeface="Arial" pitchFamily="34" charset="0"/>
+                <a:ea typeface="Arial" pitchFamily="34" charset="-122"/>
+                <a:cs typeface="Arial" pitchFamily="34" charset="-120"/>
+              </a:rPr>
+              <a:t>12</a:t>
+            </a:r>
+            <a:endParaRPr lang="en-US" sz="950" dirty="0"/>
+          </a:p>
+        </p:txBody>
+      </p:sp>
+    </p:spTree>
+  </p:cSld>
+  <p:clrMapOvr>
+    <a:masterClrMapping/>
+  </p:clrMapOvr>
+</p:sld>
+</file>
+
+<file path=ppt/slides/slide14.xml><?xml version="1.0" encoding="utf-8"?>
+<p:sld xmlns:a="http://schemas.openxmlformats.org/drawingml/2006/main" xmlns:r="http://schemas.openxmlformats.org/officeDocument/2006/relationships" xmlns:p="http://schemas.openxmlformats.org/presentationml/2006/main">
+  <p:cSld name="Slide 14">
+    <p:bg>
+      <p:bgPr>
+        <a:solidFill>
+          <a:srgbClr val="FCFAF5"/>
+        </a:solidFill>
+      </p:bgPr>
+    </p:bg>
+    <p:spTree>
+      <p:nvGrpSpPr>
+        <p:cNvPr id="1" name=""/>
+        <p:cNvGrpSpPr/>
+        <p:nvPr/>
+      </p:nvGrpSpPr>
+      <p:grpSpPr>
+        <a:xfrm>
+          <a:off x="0" y="0"/>
+          <a:ext cx="0" cy="0"/>
+          <a:chOff x="0" y="0"/>
+          <a:chExt cx="0" cy="0"/>
+        </a:xfrm>
+      </p:grpSpPr>
+      <p:sp>
+        <p:nvSpPr>
+          <p:cNvPr id="2" name="Text 0"/>
+          <p:cNvSpPr txBox="1"/>
+          <p:nvPr/>
+        </p:nvSpPr>
+        <p:spPr>
+          <a:xfrm>
+            <a:off x="594360" y="411480"/>
+            <a:ext cx="10515600" cy="274320"/>
+          </a:xfrm>
+          <a:prstGeom prst="rect">
+            <a:avLst/>
+          </a:prstGeom>
+          <a:noFill/>
+          <a:ln/>
+        </p:spPr>
+        <p:txBody>
+          <a:bodyPr wrap="square" lIns="0" tIns="0" rIns="0" bIns="0" rtlCol="0" anchor="ctr"/>
+          <a:lstStyle/>
+          <a:p>
+            <a:pPr rtl="1" algn="r" indent="0" marL="0">
+              <a:buNone/>
+            </a:pPr>
+            <a:r>
+              <a:rPr lang="en-US" sz="1150" b="1" spc="200" kern="0" dirty="0">
+                <a:solidFill>
+                  <a:srgbClr val="D9A441"/>
+                </a:solidFill>
+                <a:latin typeface="Arial" pitchFamily="34" charset="0"/>
+                <a:ea typeface="Arial" pitchFamily="34" charset="-122"/>
+                <a:cs typeface="Arial" pitchFamily="34" charset="-120"/>
+              </a:rPr>
+              <a:t>كيف نعمل</a:t>
+            </a:r>
+            <a:endParaRPr lang="en-US" sz="1150" dirty="0"/>
+          </a:p>
+        </p:txBody>
+      </p:sp>
+      <p:sp>
+        <p:nvSpPr>
+          <p:cNvPr id="3" name="Text 1"/>
+          <p:cNvSpPr txBox="1"/>
+          <p:nvPr/>
+        </p:nvSpPr>
+        <p:spPr>
+          <a:xfrm>
+            <a:off x="594360" y="731520"/>
+            <a:ext cx="10881360" cy="731520"/>
+          </a:xfrm>
+          <a:prstGeom prst="rect">
+            <a:avLst/>
+          </a:prstGeom>
+          <a:noFill/>
+          <a:ln/>
+        </p:spPr>
+        <p:txBody>
+          <a:bodyPr wrap="square" lIns="0" tIns="0" rIns="0" bIns="0" rtlCol="0" anchor="ctr"/>
+          <a:lstStyle/>
+          <a:p>
+            <a:pPr rtl="1" algn="r" indent="0" marL="0">
+              <a:buNone/>
+            </a:pPr>
+            <a:r>
+              <a:rPr lang="en-US" sz="3000" b="1" dirty="0">
+                <a:solidFill>
+                  <a:srgbClr val="16412B"/>
+                </a:solidFill>
+                <a:latin typeface="Arial" pitchFamily="34" charset="0"/>
+                <a:ea typeface="Arial" pitchFamily="34" charset="-122"/>
+                <a:cs typeface="Arial" pitchFamily="34" charset="-120"/>
+              </a:rPr>
+              <a:t>انتشار على مراحل، مع قياس عند كل خطوة</a:t>
+            </a:r>
+            <a:endParaRPr lang="en-US" sz="3000" dirty="0"/>
+          </a:p>
+        </p:txBody>
+      </p:sp>
+      <p:sp>
+        <p:nvSpPr>
+          <p:cNvPr id="4" name="Shape 2"/>
+          <p:cNvSpPr/>
+          <p:nvPr/>
+        </p:nvSpPr>
+        <p:spPr>
+          <a:xfrm>
+            <a:off x="594360" y="1874520"/>
+            <a:ext cx="2545004" cy="2834640"/>
+          </a:xfrm>
+          <a:prstGeom prst="roundRect">
+            <a:avLst>
+              <a:gd name="adj" fmla="val 3593"/>
+            </a:avLst>
+          </a:prstGeom>
+          <a:solidFill>
+            <a:srgbClr val="F2F1E8"/>
+          </a:solidFill>
+          <a:ln w="9525">
+            <a:solidFill>
+              <a:srgbClr val="E0DFD0"/>
+            </a:solidFill>
+            <a:prstDash val="solid"/>
+          </a:ln>
+        </p:spPr>
+      </p:sp>
+      <p:sp>
+        <p:nvSpPr>
+          <p:cNvPr id="5" name="Shape 3"/>
+          <p:cNvSpPr/>
+          <p:nvPr/>
+        </p:nvSpPr>
+        <p:spPr>
+          <a:xfrm>
+            <a:off x="822960" y="2103120"/>
+            <a:ext cx="566928" cy="566928"/>
+          </a:xfrm>
+          <a:prstGeom prst="ellipse">
+            <a:avLst/>
+          </a:prstGeom>
+          <a:solidFill>
+            <a:srgbClr val="2C6E49"/>
+          </a:solidFill>
+          <a:ln/>
+        </p:spPr>
+      </p:sp>
+      <p:sp>
+        <p:nvSpPr>
+          <p:cNvPr id="6" name="Text 4"/>
+          <p:cNvSpPr txBox="1"/>
+          <p:nvPr/>
+        </p:nvSpPr>
+        <p:spPr>
+          <a:xfrm>
+            <a:off x="822960" y="2103120"/>
+            <a:ext cx="566928" cy="566928"/>
+          </a:xfrm>
+          <a:prstGeom prst="rect">
+            <a:avLst/>
+          </a:prstGeom>
+          <a:noFill/>
+          <a:ln/>
+        </p:spPr>
+        <p:txBody>
+          <a:bodyPr wrap="square" lIns="0" tIns="0" rIns="0" bIns="0" rtlCol="0" anchor="ctr"/>
+          <a:lstStyle/>
+          <a:p>
+            <a:pPr rtl="1" algn="ctr" indent="0" marL="0">
+              <a:buNone/>
+            </a:pPr>
+            <a:r>
+              <a:rPr lang="en-US" sz="1600" b="1" dirty="0">
+                <a:solidFill>
+                  <a:srgbClr val="FFFFFF"/>
+                </a:solidFill>
+                <a:latin typeface="Arial" pitchFamily="34" charset="0"/>
+                <a:ea typeface="Arial" pitchFamily="34" charset="-122"/>
+                <a:cs typeface="Arial" pitchFamily="34" charset="-120"/>
+              </a:rPr>
+              <a:t>1</a:t>
+            </a:r>
+            <a:endParaRPr lang="en-US" sz="1600" dirty="0"/>
+          </a:p>
+        </p:txBody>
+      </p:sp>
+      <p:sp>
+        <p:nvSpPr>
+          <p:cNvPr id="7" name="Text 5"/>
+          <p:cNvSpPr txBox="1"/>
+          <p:nvPr/>
+        </p:nvSpPr>
+        <p:spPr>
+          <a:xfrm>
+            <a:off x="822960" y="2788920"/>
+            <a:ext cx="2087804" cy="457200"/>
+          </a:xfrm>
+          <a:prstGeom prst="rect">
+            <a:avLst/>
+          </a:prstGeom>
+          <a:noFill/>
+          <a:ln/>
+        </p:spPr>
+        <p:txBody>
+          <a:bodyPr wrap="square" lIns="0" tIns="0" rIns="0" bIns="0" rtlCol="0" anchor="ctr"/>
+          <a:lstStyle/>
+          <a:p>
+            <a:pPr rtl="1" algn="r" indent="0" marL="0">
+              <a:buNone/>
+            </a:pPr>
+            <a:r>
+              <a:rPr lang="en-US" sz="1400" b="1" dirty="0">
+                <a:solidFill>
+                  <a:srgbClr val="2C6E49"/>
+                </a:solidFill>
+                <a:latin typeface="Arial" pitchFamily="34" charset="0"/>
+                <a:ea typeface="Arial" pitchFamily="34" charset="-122"/>
+                <a:cs typeface="Arial" pitchFamily="34" charset="-120"/>
+              </a:rPr>
+              <a:t>التشخيص</a:t>
+            </a:r>
+            <a:endParaRPr lang="en-US" sz="1400" dirty="0"/>
+          </a:p>
+        </p:txBody>
+      </p:sp>
+      <p:sp>
+        <p:nvSpPr>
+          <p:cNvPr id="8" name="Text 6"/>
+          <p:cNvSpPr txBox="1"/>
+          <p:nvPr/>
+        </p:nvSpPr>
+        <p:spPr>
+          <a:xfrm>
+            <a:off x="822960" y="3291840"/>
+            <a:ext cx="2087804" cy="1234440"/>
+          </a:xfrm>
+          <a:prstGeom prst="rect">
+            <a:avLst/>
+          </a:prstGeom>
+          <a:noFill/>
+          <a:ln/>
+        </p:spPr>
+        <p:txBody>
+          <a:bodyPr wrap="square" lIns="0" tIns="0" rIns="0" bIns="0" rtlCol="0" anchor="t"/>
+          <a:lstStyle/>
+          <a:p>
+            <a:pPr rtl="1" algn="r" indent="0" marL="0">
+              <a:lnSpc>
+                <a:spcPct val="120000"/>
+              </a:lnSpc>
+              <a:buNone/>
+            </a:pPr>
+            <a:r>
+              <a:rPr lang="en-US" sz="1200" dirty="0">
+                <a:solidFill>
+                  <a:srgbClr val="364239"/>
+                </a:solidFill>
+                <a:latin typeface="Arial" pitchFamily="34" charset="0"/>
+                <a:ea typeface="Arial" pitchFamily="34" charset="-122"/>
+                <a:cs typeface="Arial" pitchFamily="34" charset="-120"/>
+              </a:rPr>
+              <a:t>تحليل التربة وأسلوب الري والمحصول. لا التزام في هذه المرحلة.</a:t>
+            </a:r>
+            <a:endParaRPr lang="en-US" sz="1200" dirty="0"/>
+          </a:p>
+        </p:txBody>
+      </p:sp>
+      <p:sp>
+        <p:nvSpPr>
+          <p:cNvPr id="9" name="Shape 7"/>
+          <p:cNvSpPr/>
+          <p:nvPr/>
+        </p:nvSpPr>
+        <p:spPr>
+          <a:xfrm>
+            <a:off x="3413684" y="1874520"/>
+            <a:ext cx="2545004" cy="2834640"/>
+          </a:xfrm>
+          <a:prstGeom prst="roundRect">
+            <a:avLst>
+              <a:gd name="adj" fmla="val 3593"/>
+            </a:avLst>
+          </a:prstGeom>
+          <a:solidFill>
+            <a:srgbClr val="F2F1E8"/>
+          </a:solidFill>
+          <a:ln w="9525">
+            <a:solidFill>
+              <a:srgbClr val="E0DFD0"/>
+            </a:solidFill>
+            <a:prstDash val="solid"/>
+          </a:ln>
+        </p:spPr>
+      </p:sp>
+      <p:sp>
+        <p:nvSpPr>
+          <p:cNvPr id="10" name="Shape 8"/>
+          <p:cNvSpPr/>
+          <p:nvPr/>
+        </p:nvSpPr>
+        <p:spPr>
+          <a:xfrm>
+            <a:off x="3642284" y="2103120"/>
+            <a:ext cx="566928" cy="566928"/>
+          </a:xfrm>
+          <a:prstGeom prst="ellipse">
+            <a:avLst/>
+          </a:prstGeom>
+          <a:solidFill>
+            <a:srgbClr val="2C6E49"/>
+          </a:solidFill>
+          <a:ln/>
+        </p:spPr>
+      </p:sp>
+      <p:sp>
+        <p:nvSpPr>
+          <p:cNvPr id="11" name="Text 9"/>
+          <p:cNvSpPr txBox="1"/>
+          <p:nvPr/>
+        </p:nvSpPr>
+        <p:spPr>
+          <a:xfrm>
+            <a:off x="3642284" y="2103120"/>
+            <a:ext cx="566928" cy="566928"/>
+          </a:xfrm>
+          <a:prstGeom prst="rect">
+            <a:avLst/>
+          </a:prstGeom>
+          <a:noFill/>
+          <a:ln/>
+        </p:spPr>
+        <p:txBody>
+          <a:bodyPr wrap="square" lIns="0" tIns="0" rIns="0" bIns="0" rtlCol="0" anchor="ctr"/>
+          <a:lstStyle/>
+          <a:p>
+            <a:pPr rtl="1" algn="ctr" indent="0" marL="0">
+              <a:buNone/>
+            </a:pPr>
+            <a:r>
+              <a:rPr lang="en-US" sz="1600" b="1" dirty="0">
+                <a:solidFill>
+                  <a:srgbClr val="FFFFFF"/>
+                </a:solidFill>
+                <a:latin typeface="Arial" pitchFamily="34" charset="0"/>
+                <a:ea typeface="Arial" pitchFamily="34" charset="-122"/>
+                <a:cs typeface="Arial" pitchFamily="34" charset="-120"/>
+              </a:rPr>
+              <a:t>2</a:t>
+            </a:r>
+            <a:endParaRPr lang="en-US" sz="1600" dirty="0"/>
+          </a:p>
+        </p:txBody>
+      </p:sp>
+      <p:sp>
+        <p:nvSpPr>
+          <p:cNvPr id="12" name="Text 10"/>
+          <p:cNvSpPr txBox="1"/>
+          <p:nvPr/>
+        </p:nvSpPr>
+        <p:spPr>
+          <a:xfrm>
+            <a:off x="3642284" y="2788920"/>
+            <a:ext cx="2087804" cy="457200"/>
+          </a:xfrm>
+          <a:prstGeom prst="rect">
+            <a:avLst/>
+          </a:prstGeom>
+          <a:noFill/>
+          <a:ln/>
+        </p:spPr>
+        <p:txBody>
+          <a:bodyPr wrap="square" lIns="0" tIns="0" rIns="0" bIns="0" rtlCol="0" anchor="ctr"/>
+          <a:lstStyle/>
+          <a:p>
+            <a:pPr rtl="1" algn="r" indent="0" marL="0">
+              <a:buNone/>
+            </a:pPr>
+            <a:r>
+              <a:rPr lang="en-US" sz="1400" b="1" dirty="0">
+                <a:solidFill>
+                  <a:srgbClr val="2C6E49"/>
+                </a:solidFill>
+                <a:latin typeface="Arial" pitchFamily="34" charset="0"/>
+                <a:ea typeface="Arial" pitchFamily="34" charset="-122"/>
+                <a:cs typeface="Arial" pitchFamily="34" charset="-120"/>
+              </a:rPr>
+              <a:t>قطعة تجريبية</a:t>
+            </a:r>
+            <a:endParaRPr lang="en-US" sz="1400" dirty="0"/>
+          </a:p>
+        </p:txBody>
+      </p:sp>
+      <p:sp>
+        <p:nvSpPr>
+          <p:cNvPr id="13" name="Text 11"/>
+          <p:cNvSpPr txBox="1"/>
+          <p:nvPr/>
+        </p:nvSpPr>
+        <p:spPr>
+          <a:xfrm>
+            <a:off x="3642284" y="3291840"/>
+            <a:ext cx="2087804" cy="1234440"/>
+          </a:xfrm>
+          <a:prstGeom prst="rect">
+            <a:avLst/>
+          </a:prstGeom>
+          <a:noFill/>
+          <a:ln/>
+        </p:spPr>
+        <p:txBody>
+          <a:bodyPr wrap="square" lIns="0" tIns="0" rIns="0" bIns="0" rtlCol="0" anchor="t"/>
+          <a:lstStyle/>
+          <a:p>
+            <a:pPr rtl="1" algn="r" indent="0" marL="0">
+              <a:lnSpc>
+                <a:spcPct val="120000"/>
+              </a:lnSpc>
+              <a:buNone/>
+            </a:pPr>
+            <a:r>
+              <a:rPr lang="en-US" sz="1200" dirty="0">
+                <a:solidFill>
+                  <a:srgbClr val="364239"/>
+                </a:solidFill>
+                <a:latin typeface="Arial" pitchFamily="34" charset="0"/>
+                <a:ea typeface="Arial" pitchFamily="34" charset="-122"/>
+                <a:cs typeface="Arial" pitchFamily="34" charset="-120"/>
+              </a:rPr>
+              <a:t>تجربة مقارنة على قطعة واحدة، مع قطعة شاهد تُدار بالطريقة نفسها.</a:t>
+            </a:r>
+            <a:endParaRPr lang="en-US" sz="1200" dirty="0"/>
+          </a:p>
+        </p:txBody>
+      </p:sp>
+      <p:sp>
+        <p:nvSpPr>
+          <p:cNvPr id="14" name="Shape 12"/>
+          <p:cNvSpPr/>
+          <p:nvPr/>
+        </p:nvSpPr>
+        <p:spPr>
+          <a:xfrm>
+            <a:off x="6233008" y="1874520"/>
+            <a:ext cx="2545004" cy="2834640"/>
+          </a:xfrm>
+          <a:prstGeom prst="roundRect">
+            <a:avLst>
+              <a:gd name="adj" fmla="val 3593"/>
+            </a:avLst>
+          </a:prstGeom>
+          <a:solidFill>
+            <a:srgbClr val="F2F1E8"/>
+          </a:solidFill>
+          <a:ln w="9525">
+            <a:solidFill>
+              <a:srgbClr val="E0DFD0"/>
+            </a:solidFill>
+            <a:prstDash val="solid"/>
+          </a:ln>
+        </p:spPr>
+      </p:sp>
+      <p:sp>
+        <p:nvSpPr>
+          <p:cNvPr id="15" name="Shape 13"/>
+          <p:cNvSpPr/>
+          <p:nvPr/>
+        </p:nvSpPr>
+        <p:spPr>
+          <a:xfrm>
+            <a:off x="6461608" y="2103120"/>
+            <a:ext cx="566928" cy="566928"/>
+          </a:xfrm>
+          <a:prstGeom prst="ellipse">
+            <a:avLst/>
+          </a:prstGeom>
+          <a:solidFill>
+            <a:srgbClr val="2C6E49"/>
+          </a:solidFill>
+          <a:ln/>
+        </p:spPr>
+      </p:sp>
+      <p:sp>
+        <p:nvSpPr>
+          <p:cNvPr id="16" name="Text 14"/>
+          <p:cNvSpPr txBox="1"/>
+          <p:nvPr/>
+        </p:nvSpPr>
+        <p:spPr>
+          <a:xfrm>
+            <a:off x="6461608" y="2103120"/>
+            <a:ext cx="566928" cy="566928"/>
+          </a:xfrm>
+          <a:prstGeom prst="rect">
+            <a:avLst/>
+          </a:prstGeom>
+          <a:noFill/>
+          <a:ln/>
+        </p:spPr>
+        <p:txBody>
+          <a:bodyPr wrap="square" lIns="0" tIns="0" rIns="0" bIns="0" rtlCol="0" anchor="ctr"/>
+          <a:lstStyle/>
+          <a:p>
+            <a:pPr rtl="1" algn="ctr" indent="0" marL="0">
+              <a:buNone/>
+            </a:pPr>
+            <a:r>
+              <a:rPr lang="en-US" sz="1600" b="1" dirty="0">
+                <a:solidFill>
+                  <a:srgbClr val="FFFFFF"/>
+                </a:solidFill>
+                <a:latin typeface="Arial" pitchFamily="34" charset="0"/>
+                <a:ea typeface="Arial" pitchFamily="34" charset="-122"/>
+                <a:cs typeface="Arial" pitchFamily="34" charset="-120"/>
+              </a:rPr>
+              <a:t>3</a:t>
+            </a:r>
+            <a:endParaRPr lang="en-US" sz="1600" dirty="0"/>
+          </a:p>
+        </p:txBody>
+      </p:sp>
+      <p:sp>
+        <p:nvSpPr>
+          <p:cNvPr id="17" name="Text 15"/>
+          <p:cNvSpPr txBox="1"/>
+          <p:nvPr/>
+        </p:nvSpPr>
+        <p:spPr>
+          <a:xfrm>
+            <a:off x="6461608" y="2788920"/>
+            <a:ext cx="2087804" cy="457200"/>
+          </a:xfrm>
+          <a:prstGeom prst="rect">
+            <a:avLst/>
+          </a:prstGeom>
+          <a:noFill/>
+          <a:ln/>
+        </p:spPr>
+        <p:txBody>
+          <a:bodyPr wrap="square" lIns="0" tIns="0" rIns="0" bIns="0" rtlCol="0" anchor="ctr"/>
+          <a:lstStyle/>
+          <a:p>
+            <a:pPr rtl="1" algn="r" indent="0" marL="0">
+              <a:buNone/>
+            </a:pPr>
+            <a:r>
+              <a:rPr lang="en-US" sz="1400" b="1" dirty="0">
+                <a:solidFill>
+                  <a:srgbClr val="2C6E49"/>
+                </a:solidFill>
+                <a:latin typeface="Arial" pitchFamily="34" charset="0"/>
+                <a:ea typeface="Arial" pitchFamily="34" charset="-122"/>
+                <a:cs typeface="Arial" pitchFamily="34" charset="-120"/>
+              </a:rPr>
+              <a:t>القياس</a:t>
+            </a:r>
+            <a:endParaRPr lang="en-US" sz="1400" dirty="0"/>
+          </a:p>
+        </p:txBody>
+      </p:sp>
+      <p:sp>
+        <p:nvSpPr>
+          <p:cNvPr id="18" name="Text 16"/>
+          <p:cNvSpPr txBox="1"/>
+          <p:nvPr/>
+        </p:nvSpPr>
+        <p:spPr>
+          <a:xfrm>
+            <a:off x="6461608" y="3291840"/>
+            <a:ext cx="2087804" cy="1234440"/>
+          </a:xfrm>
+          <a:prstGeom prst="rect">
+            <a:avLst/>
+          </a:prstGeom>
+          <a:noFill/>
+          <a:ln/>
+        </p:spPr>
+        <p:txBody>
+          <a:bodyPr wrap="square" lIns="0" tIns="0" rIns="0" bIns="0" rtlCol="0" anchor="t"/>
+          <a:lstStyle/>
+          <a:p>
+            <a:pPr rtl="1" algn="r" indent="0" marL="0">
+              <a:lnSpc>
+                <a:spcPct val="120000"/>
+              </a:lnSpc>
+              <a:buNone/>
+            </a:pPr>
+            <a:r>
+              <a:rPr lang="en-US" sz="1200" dirty="0">
+                <a:solidFill>
+                  <a:srgbClr val="364239"/>
+                </a:solidFill>
+                <a:latin typeface="Arial" pitchFamily="34" charset="0"/>
+                <a:ea typeface="Arial" pitchFamily="34" charset="-122"/>
+                <a:cs typeface="Arial" pitchFamily="34" charset="-120"/>
+              </a:rPr>
+              <a:t>رصد الاستهلاك المائي والإنتاج على مدى دورة زراعية كاملة.</a:t>
+            </a:r>
+            <a:endParaRPr lang="en-US" sz="1200" dirty="0"/>
+          </a:p>
+        </p:txBody>
+      </p:sp>
+      <p:sp>
+        <p:nvSpPr>
+          <p:cNvPr id="19" name="Shape 17"/>
+          <p:cNvSpPr/>
+          <p:nvPr/>
+        </p:nvSpPr>
+        <p:spPr>
+          <a:xfrm>
+            <a:off x="9052331" y="1874520"/>
+            <a:ext cx="2545004" cy="2834640"/>
+          </a:xfrm>
+          <a:prstGeom prst="roundRect">
+            <a:avLst>
+              <a:gd name="adj" fmla="val 3593"/>
+            </a:avLst>
+          </a:prstGeom>
+          <a:solidFill>
+            <a:srgbClr val="F2F1E8"/>
+          </a:solidFill>
+          <a:ln w="9525">
+            <a:solidFill>
+              <a:srgbClr val="E0DFD0"/>
+            </a:solidFill>
+            <a:prstDash val="solid"/>
+          </a:ln>
+        </p:spPr>
+      </p:sp>
+      <p:sp>
+        <p:nvSpPr>
+          <p:cNvPr id="20" name="Shape 18"/>
+          <p:cNvSpPr/>
+          <p:nvPr/>
+        </p:nvSpPr>
+        <p:spPr>
+          <a:xfrm>
+            <a:off x="9280931" y="2103120"/>
+            <a:ext cx="566928" cy="566928"/>
+          </a:xfrm>
+          <a:prstGeom prst="ellipse">
+            <a:avLst/>
+          </a:prstGeom>
+          <a:solidFill>
+            <a:srgbClr val="2C6E49"/>
+          </a:solidFill>
+          <a:ln/>
+        </p:spPr>
+      </p:sp>
+      <p:sp>
+        <p:nvSpPr>
+          <p:cNvPr id="21" name="Text 19"/>
+          <p:cNvSpPr txBox="1"/>
+          <p:nvPr/>
+        </p:nvSpPr>
+        <p:spPr>
+          <a:xfrm>
+            <a:off x="9280931" y="2103120"/>
+            <a:ext cx="566928" cy="566928"/>
+          </a:xfrm>
+          <a:prstGeom prst="rect">
+            <a:avLst/>
+          </a:prstGeom>
+          <a:noFill/>
+          <a:ln/>
+        </p:spPr>
+        <p:txBody>
+          <a:bodyPr wrap="square" lIns="0" tIns="0" rIns="0" bIns="0" rtlCol="0" anchor="ctr"/>
+          <a:lstStyle/>
+          <a:p>
+            <a:pPr rtl="1" algn="ctr" indent="0" marL="0">
+              <a:buNone/>
+            </a:pPr>
+            <a:r>
+              <a:rPr lang="en-US" sz="1600" b="1" dirty="0">
+                <a:solidFill>
+                  <a:srgbClr val="FFFFFF"/>
+                </a:solidFill>
+                <a:latin typeface="Arial" pitchFamily="34" charset="0"/>
+                <a:ea typeface="Arial" pitchFamily="34" charset="-122"/>
+                <a:cs typeface="Arial" pitchFamily="34" charset="-120"/>
+              </a:rPr>
+              <a:t>4</a:t>
+            </a:r>
+            <a:endParaRPr lang="en-US" sz="1600" dirty="0"/>
+          </a:p>
+        </p:txBody>
+      </p:sp>
+      <p:sp>
+        <p:nvSpPr>
+          <p:cNvPr id="22" name="Text 20"/>
+          <p:cNvSpPr txBox="1"/>
+          <p:nvPr/>
+        </p:nvSpPr>
+        <p:spPr>
+          <a:xfrm>
+            <a:off x="9280931" y="2788920"/>
+            <a:ext cx="2087804" cy="457200"/>
+          </a:xfrm>
+          <a:prstGeom prst="rect">
+            <a:avLst/>
+          </a:prstGeom>
+          <a:noFill/>
+          <a:ln/>
+        </p:spPr>
+        <p:txBody>
+          <a:bodyPr wrap="square" lIns="0" tIns="0" rIns="0" bIns="0" rtlCol="0" anchor="ctr"/>
+          <a:lstStyle/>
+          <a:p>
+            <a:pPr rtl="1" algn="r" indent="0" marL="0">
+              <a:buNone/>
+            </a:pPr>
+            <a:r>
+              <a:rPr lang="en-US" sz="1400" b="1" dirty="0">
+                <a:solidFill>
+                  <a:srgbClr val="2C6E49"/>
+                </a:solidFill>
+                <a:latin typeface="Arial" pitchFamily="34" charset="0"/>
+                <a:ea typeface="Arial" pitchFamily="34" charset="-122"/>
+                <a:cs typeface="Arial" pitchFamily="34" charset="-120"/>
+              </a:rPr>
+              <a:t>التوسّع</a:t>
+            </a:r>
+            <a:endParaRPr lang="en-US" sz="1400" dirty="0"/>
+          </a:p>
+        </p:txBody>
+      </p:sp>
+      <p:sp>
+        <p:nvSpPr>
+          <p:cNvPr id="23" name="Text 21"/>
+          <p:cNvSpPr txBox="1"/>
+          <p:nvPr/>
+        </p:nvSpPr>
+        <p:spPr>
+          <a:xfrm>
+            <a:off x="9280931" y="3291840"/>
+            <a:ext cx="2087804" cy="1234440"/>
+          </a:xfrm>
+          <a:prstGeom prst="rect">
+            <a:avLst/>
+          </a:prstGeom>
+          <a:noFill/>
+          <a:ln/>
+        </p:spPr>
+        <p:txBody>
+          <a:bodyPr wrap="square" lIns="0" tIns="0" rIns="0" bIns="0" rtlCol="0" anchor="t"/>
+          <a:lstStyle/>
+          <a:p>
+            <a:pPr rtl="1" algn="r" indent="0" marL="0">
+              <a:lnSpc>
+                <a:spcPct val="120000"/>
+              </a:lnSpc>
+              <a:buNone/>
+            </a:pPr>
+            <a:r>
+              <a:rPr lang="en-US" sz="1200" dirty="0">
+                <a:solidFill>
+                  <a:srgbClr val="364239"/>
+                </a:solidFill>
+                <a:latin typeface="Arial" pitchFamily="34" charset="0"/>
+                <a:ea typeface="Arial" pitchFamily="34" charset="-122"/>
+                <a:cs typeface="Arial" pitchFamily="34" charset="-120"/>
+              </a:rPr>
+              <a:t>تعميم تدريجي على بقية القطع بناءً على النتائج المسجّلة.</a:t>
+            </a:r>
+            <a:endParaRPr lang="en-US" sz="1200" dirty="0"/>
+          </a:p>
+        </p:txBody>
+      </p:sp>
+      <p:sp>
+        <p:nvSpPr>
+          <p:cNvPr id="24" name="Text 22"/>
+          <p:cNvSpPr txBox="1"/>
+          <p:nvPr/>
+        </p:nvSpPr>
+        <p:spPr>
+          <a:xfrm>
+            <a:off x="594360" y="4983480"/>
+            <a:ext cx="11002975" cy="822960"/>
+          </a:xfrm>
+          <a:prstGeom prst="rect">
+            <a:avLst/>
+          </a:prstGeom>
+          <a:noFill/>
+          <a:ln/>
+        </p:spPr>
+        <p:txBody>
+          <a:bodyPr wrap="square" lIns="0" tIns="0" rIns="0" bIns="0" rtlCol="0" anchor="t"/>
+          <a:lstStyle/>
+          <a:p>
+            <a:pPr rtl="1" algn="r" indent="0" marL="0">
+              <a:lnSpc>
+                <a:spcPct val="125000"/>
+              </a:lnSpc>
+              <a:buNone/>
+            </a:pPr>
+            <a:r>
+              <a:rPr lang="en-US" sz="1250" dirty="0">
+                <a:solidFill>
+                  <a:srgbClr val="6F7D71"/>
+                </a:solidFill>
+                <a:latin typeface="Arial" pitchFamily="34" charset="0"/>
+                <a:ea typeface="Arial" pitchFamily="34" charset="-122"/>
+                <a:cs typeface="Arial" pitchFamily="34" charset="-120"/>
+              </a:rPr>
+              <a:t>قاعدة الجرعة واحدة في كل مكان: 3 غرامات لكل لتر من التربة المفيدة. ما يتغير من أرض إلى أخرى هو حجم التربة الذي تستكشفه الجذور فعلياً.</a:t>
+            </a:r>
+            <a:endParaRPr lang="en-US" sz="1250" dirty="0"/>
+          </a:p>
+        </p:txBody>
+      </p:sp>
+      <p:sp>
+        <p:nvSpPr>
+          <p:cNvPr id="25" name="Text 23"/>
+          <p:cNvSpPr txBox="1"/>
+          <p:nvPr/>
+        </p:nvSpPr>
+        <p:spPr>
+          <a:xfrm>
+            <a:off x="502920" y="6382512"/>
+            <a:ext cx="8229600" cy="274320"/>
+          </a:xfrm>
+          <a:prstGeom prst="rect">
+            <a:avLst/>
+          </a:prstGeom>
+          <a:noFill/>
+          <a:ln/>
+        </p:spPr>
+        <p:txBody>
+          <a:bodyPr wrap="square" lIns="0" tIns="0" rIns="0" bIns="0" rtlCol="0" anchor="ctr"/>
+          <a:lstStyle/>
+          <a:p>
+            <a:pPr rtl="1" algn="r" indent="0" marL="0">
+              <a:buNone/>
+            </a:pPr>
+            <a:r>
+              <a:rPr lang="en-US" sz="950" dirty="0">
+                <a:solidFill>
+                  <a:srgbClr val="6F7D71">
+                    <a:alpha val="80000"/>
+                  </a:srgbClr>
+                </a:solidFill>
+                <a:latin typeface="Arial" pitchFamily="34" charset="0"/>
+                <a:ea typeface="Arial" pitchFamily="34" charset="-122"/>
+                <a:cs typeface="Arial" pitchFamily="34" charset="-120"/>
+              </a:rPr>
+              <a:t>Green Solutions · ملف السوق الزراعي السعودي</a:t>
+            </a:r>
+            <a:endParaRPr lang="en-US" sz="950" dirty="0"/>
+          </a:p>
+        </p:txBody>
+      </p:sp>
+      <p:sp>
+        <p:nvSpPr>
+          <p:cNvPr id="26" name="Text 24"/>
+          <p:cNvSpPr txBox="1"/>
+          <p:nvPr/>
+        </p:nvSpPr>
+        <p:spPr>
+          <a:xfrm>
+            <a:off x="11140135" y="6382512"/>
+            <a:ext cx="548640" cy="274320"/>
+          </a:xfrm>
+          <a:prstGeom prst="rect">
+            <a:avLst/>
+          </a:prstGeom>
+          <a:noFill/>
+          <a:ln/>
+        </p:spPr>
+        <p:txBody>
+          <a:bodyPr wrap="square" lIns="0" tIns="0" rIns="0" bIns="0" rtlCol="0" anchor="ctr"/>
+          <a:lstStyle/>
+          <a:p>
+            <a:pPr rtl="1" algn="r" indent="0" marL="0">
+              <a:buNone/>
+            </a:pPr>
+            <a:r>
+              <a:rPr lang="en-US" sz="950" dirty="0">
+                <a:solidFill>
+                  <a:srgbClr val="6F7D71">
+                    <a:alpha val="80000"/>
+                  </a:srgbClr>
+                </a:solidFill>
+                <a:latin typeface="Arial" pitchFamily="34" charset="0"/>
+                <a:ea typeface="Arial" pitchFamily="34" charset="-122"/>
+                <a:cs typeface="Arial" pitchFamily="34" charset="-120"/>
+              </a:rPr>
+              <a:t>13</a:t>
+            </a:r>
+            <a:endParaRPr lang="en-US" sz="950" dirty="0"/>
+          </a:p>
+        </p:txBody>
+      </p:sp>
+    </p:spTree>
+  </p:cSld>
+  <p:clrMapOvr>
+    <a:masterClrMapping/>
+  </p:clrMapOvr>
+</p:sld>
+</file>
+
+<file path=ppt/slides/slide15.xml><?xml version="1.0" encoding="utf-8"?>
+<p:sld xmlns:a="http://schemas.openxmlformats.org/drawingml/2006/main" xmlns:r="http://schemas.openxmlformats.org/officeDocument/2006/relationships" xmlns:p="http://schemas.openxmlformats.org/presentationml/2006/main">
+  <p:cSld name="Slide 15">
+    <p:bg>
+      <p:bgPr>
+        <a:solidFill>
+          <a:srgbClr val="FCFAF5"/>
+        </a:solidFill>
+      </p:bgPr>
+    </p:bg>
+    <p:spTree>
+      <p:nvGrpSpPr>
+        <p:cNvPr id="1" name=""/>
+        <p:cNvGrpSpPr/>
+        <p:nvPr/>
+      </p:nvGrpSpPr>
+      <p:grpSpPr>
+        <a:xfrm>
+          <a:off x="0" y="0"/>
+          <a:ext cx="0" cy="0"/>
+          <a:chOff x="0" y="0"/>
+          <a:chExt cx="0" cy="0"/>
+        </a:xfrm>
+      </p:grpSpPr>
+      <p:sp>
+        <p:nvSpPr>
+          <p:cNvPr id="2" name="Text 0"/>
+          <p:cNvSpPr txBox="1"/>
+          <p:nvPr/>
+        </p:nvSpPr>
+        <p:spPr>
+          <a:xfrm>
+            <a:off x="594360" y="411480"/>
+            <a:ext cx="10515600" cy="274320"/>
+          </a:xfrm>
+          <a:prstGeom prst="rect">
+            <a:avLst/>
+          </a:prstGeom>
+          <a:noFill/>
+          <a:ln/>
+        </p:spPr>
+        <p:txBody>
+          <a:bodyPr wrap="square" lIns="0" tIns="0" rIns="0" bIns="0" rtlCol="0" anchor="ctr"/>
+          <a:lstStyle/>
+          <a:p>
+            <a:pPr rtl="1" algn="r" indent="0" marL="0">
+              <a:buNone/>
+            </a:pPr>
+            <a:r>
+              <a:rPr lang="en-US" sz="1150" b="1" spc="200" kern="0" dirty="0">
+                <a:solidFill>
+                  <a:srgbClr val="D9A441"/>
+                </a:solidFill>
+                <a:latin typeface="Arial" pitchFamily="34" charset="0"/>
+                <a:ea typeface="Arial" pitchFamily="34" charset="-122"/>
+                <a:cs typeface="Arial" pitchFamily="34" charset="-120"/>
+              </a:rPr>
+              <a:t>العمل معاً</a:t>
+            </a:r>
+            <a:endParaRPr lang="en-US" sz="1150" dirty="0"/>
+          </a:p>
+        </p:txBody>
+      </p:sp>
+      <p:sp>
+        <p:nvSpPr>
+          <p:cNvPr id="3" name="Text 1"/>
+          <p:cNvSpPr txBox="1"/>
+          <p:nvPr/>
+        </p:nvSpPr>
+        <p:spPr>
+          <a:xfrm>
+            <a:off x="594360" y="731520"/>
+            <a:ext cx="10881360" cy="731520"/>
+          </a:xfrm>
+          <a:prstGeom prst="rect">
+            <a:avLst/>
+          </a:prstGeom>
+          <a:noFill/>
+          <a:ln/>
+        </p:spPr>
+        <p:txBody>
+          <a:bodyPr wrap="square" lIns="0" tIns="0" rIns="0" bIns="0" rtlCol="0" anchor="ctr"/>
+          <a:lstStyle/>
+          <a:p>
+            <a:pPr rtl="1" algn="r" indent="0" marL="0">
+              <a:buNone/>
+            </a:pPr>
+            <a:r>
+              <a:rPr lang="en-US" sz="3000" b="1" dirty="0">
+                <a:solidFill>
+                  <a:srgbClr val="16412B"/>
+                </a:solidFill>
+                <a:latin typeface="Arial" pitchFamily="34" charset="0"/>
+                <a:ea typeface="Arial" pitchFamily="34" charset="-122"/>
+                <a:cs typeface="Arial" pitchFamily="34" charset="-120"/>
+              </a:rPr>
+              <a:t>شريك محلي في المملكة العربية السعودية</a:t>
+            </a:r>
+            <a:endParaRPr lang="en-US" sz="3000" dirty="0"/>
+          </a:p>
+        </p:txBody>
+      </p:sp>
+      <p:sp>
+        <p:nvSpPr>
+          <p:cNvPr id="4" name="Shape 2"/>
+          <p:cNvSpPr/>
+          <p:nvPr/>
+        </p:nvSpPr>
+        <p:spPr>
+          <a:xfrm>
+            <a:off x="594360" y="1874520"/>
+            <a:ext cx="2545004" cy="2834640"/>
+          </a:xfrm>
+          <a:prstGeom prst="roundRect">
+            <a:avLst>
+              <a:gd name="adj" fmla="val 3593"/>
+            </a:avLst>
+          </a:prstGeom>
+          <a:solidFill>
+            <a:srgbClr val="F2F1E8"/>
+          </a:solidFill>
+          <a:ln w="9525">
+            <a:solidFill>
+              <a:srgbClr val="E0DFD0"/>
+            </a:solidFill>
+            <a:prstDash val="solid"/>
+          </a:ln>
+        </p:spPr>
+      </p:sp>
+      <p:sp>
+        <p:nvSpPr>
+          <p:cNvPr id="5" name="Shape 3"/>
+          <p:cNvSpPr/>
+          <p:nvPr/>
+        </p:nvSpPr>
+        <p:spPr>
+          <a:xfrm>
+            <a:off x="822960" y="2103120"/>
+            <a:ext cx="566928" cy="566928"/>
+          </a:xfrm>
+          <a:prstGeom prst="ellipse">
+            <a:avLst/>
+          </a:prstGeom>
+          <a:solidFill>
+            <a:srgbClr val="2C6E49"/>
+          </a:solidFill>
+          <a:ln/>
+        </p:spPr>
+      </p:sp>
+      <p:sp>
+        <p:nvSpPr>
+          <p:cNvPr id="6" name="Text 4"/>
+          <p:cNvSpPr txBox="1"/>
+          <p:nvPr/>
+        </p:nvSpPr>
+        <p:spPr>
+          <a:xfrm>
+            <a:off x="822960" y="2103120"/>
+            <a:ext cx="566928" cy="566928"/>
+          </a:xfrm>
+          <a:prstGeom prst="rect">
+            <a:avLst/>
+          </a:prstGeom>
+          <a:noFill/>
+          <a:ln/>
+        </p:spPr>
+        <p:txBody>
+          <a:bodyPr wrap="square" lIns="0" tIns="0" rIns="0" bIns="0" rtlCol="0" anchor="ctr"/>
+          <a:lstStyle/>
+          <a:p>
+            <a:pPr rtl="1" algn="ctr" indent="0" marL="0">
+              <a:buNone/>
+            </a:pPr>
+            <a:r>
+              <a:rPr lang="en-US" sz="1600" b="1" dirty="0">
+                <a:solidFill>
+                  <a:srgbClr val="FFFFFF"/>
+                </a:solidFill>
+                <a:latin typeface="Arial" pitchFamily="34" charset="0"/>
+                <a:ea typeface="Arial" pitchFamily="34" charset="-122"/>
+                <a:cs typeface="Arial" pitchFamily="34" charset="-120"/>
+              </a:rPr>
+              <a:t>1</a:t>
+            </a:r>
+            <a:endParaRPr lang="en-US" sz="1600" dirty="0"/>
+          </a:p>
+        </p:txBody>
+      </p:sp>
+      <p:sp>
+        <p:nvSpPr>
+          <p:cNvPr id="7" name="Text 5"/>
+          <p:cNvSpPr txBox="1"/>
+          <p:nvPr/>
+        </p:nvSpPr>
+        <p:spPr>
+          <a:xfrm>
+            <a:off x="822960" y="2788920"/>
+            <a:ext cx="2087804" cy="457200"/>
+          </a:xfrm>
+          <a:prstGeom prst="rect">
+            <a:avLst/>
+          </a:prstGeom>
+          <a:noFill/>
+          <a:ln/>
+        </p:spPr>
+        <p:txBody>
+          <a:bodyPr wrap="square" lIns="0" tIns="0" rIns="0" bIns="0" rtlCol="0" anchor="ctr"/>
+          <a:lstStyle/>
+          <a:p>
+            <a:pPr rtl="1" algn="r" indent="0" marL="0">
+              <a:buNone/>
+            </a:pPr>
+            <a:r>
+              <a:rPr lang="en-US" sz="1400" b="1" dirty="0">
+                <a:solidFill>
+                  <a:srgbClr val="2C6E49"/>
+                </a:solidFill>
+                <a:latin typeface="Arial" pitchFamily="34" charset="0"/>
+                <a:ea typeface="Arial" pitchFamily="34" charset="-122"/>
+                <a:cs typeface="Arial" pitchFamily="34" charset="-120"/>
+              </a:rPr>
+              <a:t>التوزيع</a:t>
+            </a:r>
+            <a:endParaRPr lang="en-US" sz="1400" dirty="0"/>
+          </a:p>
+        </p:txBody>
+      </p:sp>
+      <p:sp>
+        <p:nvSpPr>
+          <p:cNvPr id="8" name="Text 6"/>
+          <p:cNvSpPr txBox="1"/>
+          <p:nvPr/>
+        </p:nvSpPr>
+        <p:spPr>
+          <a:xfrm>
+            <a:off x="822960" y="3291840"/>
+            <a:ext cx="2087804" cy="1234440"/>
+          </a:xfrm>
+          <a:prstGeom prst="rect">
+            <a:avLst/>
+          </a:prstGeom>
+          <a:noFill/>
+          <a:ln/>
+        </p:spPr>
+        <p:txBody>
+          <a:bodyPr wrap="square" lIns="0" tIns="0" rIns="0" bIns="0" rtlCol="0" anchor="t"/>
+          <a:lstStyle/>
+          <a:p>
+            <a:pPr rtl="1" algn="r" indent="0" marL="0">
+              <a:lnSpc>
+                <a:spcPct val="120000"/>
+              </a:lnSpc>
+              <a:buNone/>
+            </a:pPr>
+            <a:r>
+              <a:rPr lang="en-US" sz="1200" dirty="0">
+                <a:solidFill>
+                  <a:srgbClr val="364239"/>
+                </a:solidFill>
+                <a:latin typeface="Arial" pitchFamily="34" charset="0"/>
+                <a:ea typeface="Arial" pitchFamily="34" charset="-122"/>
+                <a:cs typeface="Arial" pitchFamily="34" charset="-120"/>
+              </a:rPr>
+              <a:t>حصرية على مستوى الإقليم ومخزون إطلاق للموسم التجاري الأول.</a:t>
+            </a:r>
+            <a:endParaRPr lang="en-US" sz="1200" dirty="0"/>
+          </a:p>
+        </p:txBody>
+      </p:sp>
+      <p:sp>
+        <p:nvSpPr>
+          <p:cNvPr id="9" name="Shape 7"/>
+          <p:cNvSpPr/>
+          <p:nvPr/>
+        </p:nvSpPr>
+        <p:spPr>
+          <a:xfrm>
+            <a:off x="3413684" y="1874520"/>
+            <a:ext cx="2545004" cy="2834640"/>
+          </a:xfrm>
+          <a:prstGeom prst="roundRect">
+            <a:avLst>
+              <a:gd name="adj" fmla="val 3593"/>
+            </a:avLst>
+          </a:prstGeom>
+          <a:solidFill>
+            <a:srgbClr val="F2F1E8"/>
+          </a:solidFill>
+          <a:ln w="9525">
+            <a:solidFill>
+              <a:srgbClr val="E0DFD0"/>
+            </a:solidFill>
+            <a:prstDash val="solid"/>
+          </a:ln>
+        </p:spPr>
+      </p:sp>
+      <p:sp>
+        <p:nvSpPr>
+          <p:cNvPr id="10" name="Shape 8"/>
+          <p:cNvSpPr/>
+          <p:nvPr/>
+        </p:nvSpPr>
+        <p:spPr>
+          <a:xfrm>
+            <a:off x="3642284" y="2103120"/>
+            <a:ext cx="566928" cy="566928"/>
+          </a:xfrm>
+          <a:prstGeom prst="ellipse">
+            <a:avLst/>
+          </a:prstGeom>
+          <a:solidFill>
+            <a:srgbClr val="2C6E49"/>
+          </a:solidFill>
+          <a:ln/>
+        </p:spPr>
+      </p:sp>
+      <p:sp>
+        <p:nvSpPr>
+          <p:cNvPr id="11" name="Text 9"/>
+          <p:cNvSpPr txBox="1"/>
+          <p:nvPr/>
+        </p:nvSpPr>
+        <p:spPr>
+          <a:xfrm>
+            <a:off x="3642284" y="2103120"/>
+            <a:ext cx="566928" cy="566928"/>
+          </a:xfrm>
+          <a:prstGeom prst="rect">
+            <a:avLst/>
+          </a:prstGeom>
+          <a:noFill/>
+          <a:ln/>
+        </p:spPr>
+        <p:txBody>
+          <a:bodyPr wrap="square" lIns="0" tIns="0" rIns="0" bIns="0" rtlCol="0" anchor="ctr"/>
+          <a:lstStyle/>
+          <a:p>
+            <a:pPr rtl="1" algn="ctr" indent="0" marL="0">
+              <a:buNone/>
+            </a:pPr>
+            <a:r>
+              <a:rPr lang="en-US" sz="1600" b="1" dirty="0">
+                <a:solidFill>
+                  <a:srgbClr val="FFFFFF"/>
+                </a:solidFill>
+                <a:latin typeface="Arial" pitchFamily="34" charset="0"/>
+                <a:ea typeface="Arial" pitchFamily="34" charset="-122"/>
+                <a:cs typeface="Arial" pitchFamily="34" charset="-120"/>
+              </a:rPr>
+              <a:t>2</a:t>
+            </a:r>
+            <a:endParaRPr lang="en-US" sz="1600" dirty="0"/>
+          </a:p>
+        </p:txBody>
+      </p:sp>
+      <p:sp>
+        <p:nvSpPr>
+          <p:cNvPr id="12" name="Text 10"/>
+          <p:cNvSpPr txBox="1"/>
+          <p:nvPr/>
+        </p:nvSpPr>
+        <p:spPr>
+          <a:xfrm>
+            <a:off x="3642284" y="2788920"/>
+            <a:ext cx="2087804" cy="457200"/>
+          </a:xfrm>
+          <a:prstGeom prst="rect">
+            <a:avLst/>
+          </a:prstGeom>
+          <a:noFill/>
+          <a:ln/>
+        </p:spPr>
+        <p:txBody>
+          <a:bodyPr wrap="square" lIns="0" tIns="0" rIns="0" bIns="0" rtlCol="0" anchor="ctr"/>
+          <a:lstStyle/>
+          <a:p>
+            <a:pPr rtl="1" algn="r" indent="0" marL="0">
+              <a:buNone/>
+            </a:pPr>
+            <a:r>
+              <a:rPr lang="en-US" sz="1400" b="1" dirty="0">
+                <a:solidFill>
+                  <a:srgbClr val="2C6E49"/>
+                </a:solidFill>
+                <a:latin typeface="Arial" pitchFamily="34" charset="0"/>
+                <a:ea typeface="Arial" pitchFamily="34" charset="-122"/>
+                <a:cs typeface="Arial" pitchFamily="34" charset="-120"/>
+              </a:rPr>
+              <a:t>التدريب</a:t>
+            </a:r>
+            <a:endParaRPr lang="en-US" sz="1400" dirty="0"/>
+          </a:p>
+        </p:txBody>
+      </p:sp>
+      <p:sp>
+        <p:nvSpPr>
+          <p:cNvPr id="13" name="Text 11"/>
+          <p:cNvSpPr txBox="1"/>
+          <p:nvPr/>
+        </p:nvSpPr>
+        <p:spPr>
+          <a:xfrm>
+            <a:off x="3642284" y="3291840"/>
+            <a:ext cx="2087804" cy="1234440"/>
+          </a:xfrm>
+          <a:prstGeom prst="rect">
+            <a:avLst/>
+          </a:prstGeom>
+          <a:noFill/>
+          <a:ln/>
+        </p:spPr>
+        <p:txBody>
+          <a:bodyPr wrap="square" lIns="0" tIns="0" rIns="0" bIns="0" rtlCol="0" anchor="t"/>
+          <a:lstStyle/>
+          <a:p>
+            <a:pPr rtl="1" algn="r" indent="0" marL="0">
+              <a:lnSpc>
+                <a:spcPct val="120000"/>
+              </a:lnSpc>
+              <a:buNone/>
+            </a:pPr>
+            <a:r>
+              <a:rPr lang="en-US" sz="1200" dirty="0">
+                <a:solidFill>
+                  <a:srgbClr val="364239"/>
+                </a:solidFill>
+                <a:latin typeface="Arial" pitchFamily="34" charset="0"/>
+                <a:ea typeface="Arial" pitchFamily="34" charset="-122"/>
+                <a:cs typeface="Arial" pitchFamily="34" charset="-120"/>
+              </a:rPr>
+              <a:t>تدريب فني للفرق، وبروتوكولات الجرعات، وتحديثها في كل موسم.</a:t>
+            </a:r>
+            <a:endParaRPr lang="en-US" sz="1200" dirty="0"/>
+          </a:p>
+        </p:txBody>
+      </p:sp>
+      <p:sp>
+        <p:nvSpPr>
+          <p:cNvPr id="14" name="Shape 12"/>
+          <p:cNvSpPr/>
+          <p:nvPr/>
+        </p:nvSpPr>
+        <p:spPr>
+          <a:xfrm>
+            <a:off x="6233008" y="1874520"/>
+            <a:ext cx="2545004" cy="2834640"/>
+          </a:xfrm>
+          <a:prstGeom prst="roundRect">
+            <a:avLst>
+              <a:gd name="adj" fmla="val 3593"/>
+            </a:avLst>
+          </a:prstGeom>
+          <a:solidFill>
+            <a:srgbClr val="F2F1E8"/>
+          </a:solidFill>
+          <a:ln w="9525">
+            <a:solidFill>
+              <a:srgbClr val="E0DFD0"/>
+            </a:solidFill>
+            <a:prstDash val="solid"/>
+          </a:ln>
+        </p:spPr>
+      </p:sp>
+      <p:sp>
+        <p:nvSpPr>
+          <p:cNvPr id="15" name="Shape 13"/>
+          <p:cNvSpPr/>
+          <p:nvPr/>
+        </p:nvSpPr>
+        <p:spPr>
+          <a:xfrm>
+            <a:off x="6461608" y="2103120"/>
+            <a:ext cx="566928" cy="566928"/>
+          </a:xfrm>
+          <a:prstGeom prst="ellipse">
+            <a:avLst/>
+          </a:prstGeom>
+          <a:solidFill>
+            <a:srgbClr val="2C6E49"/>
+          </a:solidFill>
+          <a:ln/>
+        </p:spPr>
+      </p:sp>
+      <p:sp>
+        <p:nvSpPr>
+          <p:cNvPr id="16" name="Text 14"/>
+          <p:cNvSpPr txBox="1"/>
+          <p:nvPr/>
+        </p:nvSpPr>
+        <p:spPr>
+          <a:xfrm>
+            <a:off x="6461608" y="2103120"/>
+            <a:ext cx="566928" cy="566928"/>
+          </a:xfrm>
+          <a:prstGeom prst="rect">
+            <a:avLst/>
+          </a:prstGeom>
+          <a:noFill/>
+          <a:ln/>
+        </p:spPr>
+        <p:txBody>
+          <a:bodyPr wrap="square" lIns="0" tIns="0" rIns="0" bIns="0" rtlCol="0" anchor="ctr"/>
+          <a:lstStyle/>
+          <a:p>
+            <a:pPr rtl="1" algn="ctr" indent="0" marL="0">
+              <a:buNone/>
+            </a:pPr>
+            <a:r>
+              <a:rPr lang="en-US" sz="1600" b="1" dirty="0">
+                <a:solidFill>
+                  <a:srgbClr val="FFFFFF"/>
+                </a:solidFill>
+                <a:latin typeface="Arial" pitchFamily="34" charset="0"/>
+                <a:ea typeface="Arial" pitchFamily="34" charset="-122"/>
+                <a:cs typeface="Arial" pitchFamily="34" charset="-120"/>
+              </a:rPr>
+              <a:t>3</a:t>
+            </a:r>
+            <a:endParaRPr lang="en-US" sz="1600" dirty="0"/>
+          </a:p>
+        </p:txBody>
+      </p:sp>
+      <p:sp>
+        <p:nvSpPr>
+          <p:cNvPr id="17" name="Text 15"/>
+          <p:cNvSpPr txBox="1"/>
+          <p:nvPr/>
+        </p:nvSpPr>
+        <p:spPr>
+          <a:xfrm>
+            <a:off x="6461608" y="2788920"/>
+            <a:ext cx="2087804" cy="457200"/>
+          </a:xfrm>
+          <a:prstGeom prst="rect">
+            <a:avLst/>
+          </a:prstGeom>
+          <a:noFill/>
+          <a:ln/>
+        </p:spPr>
+        <p:txBody>
+          <a:bodyPr wrap="square" lIns="0" tIns="0" rIns="0" bIns="0" rtlCol="0" anchor="ctr"/>
+          <a:lstStyle/>
+          <a:p>
+            <a:pPr rtl="1" algn="r" indent="0" marL="0">
+              <a:buNone/>
+            </a:pPr>
+            <a:r>
+              <a:rPr lang="en-US" sz="1400" b="1" dirty="0">
+                <a:solidFill>
+                  <a:srgbClr val="2C6E49"/>
+                </a:solidFill>
+                <a:latin typeface="Arial" pitchFamily="34" charset="0"/>
+                <a:ea typeface="Arial" pitchFamily="34" charset="-122"/>
+                <a:cs typeface="Arial" pitchFamily="34" charset="-120"/>
+              </a:rPr>
+              <a:t>تجارب مشتركة</a:t>
+            </a:r>
+            <a:endParaRPr lang="en-US" sz="1400" dirty="0"/>
+          </a:p>
+        </p:txBody>
+      </p:sp>
+      <p:sp>
+        <p:nvSpPr>
+          <p:cNvPr id="18" name="Text 16"/>
+          <p:cNvSpPr txBox="1"/>
+          <p:nvPr/>
+        </p:nvSpPr>
+        <p:spPr>
+          <a:xfrm>
+            <a:off x="6461608" y="3291840"/>
+            <a:ext cx="2087804" cy="1234440"/>
+          </a:xfrm>
+          <a:prstGeom prst="rect">
+            <a:avLst/>
+          </a:prstGeom>
+          <a:noFill/>
+          <a:ln/>
+        </p:spPr>
+        <p:txBody>
+          <a:bodyPr wrap="square" lIns="0" tIns="0" rIns="0" bIns="0" rtlCol="0" anchor="t"/>
+          <a:lstStyle/>
+          <a:p>
+            <a:pPr rtl="1" algn="r" indent="0" marL="0">
+              <a:lnSpc>
+                <a:spcPct val="120000"/>
+              </a:lnSpc>
+              <a:buNone/>
+            </a:pPr>
+            <a:r>
+              <a:rPr lang="en-US" sz="1200" dirty="0">
+                <a:solidFill>
+                  <a:srgbClr val="364239"/>
+                </a:solidFill>
+                <a:latin typeface="Arial" pitchFamily="34" charset="0"/>
+                <a:ea typeface="Arial" pitchFamily="34" charset="-122"/>
+                <a:cs typeface="Arial" pitchFamily="34" charset="-120"/>
+              </a:rPr>
+              <a:t>قطع إرشادية مع قطعة شاهد، ونتائج تُعرض على المزارعين.</a:t>
+            </a:r>
+            <a:endParaRPr lang="en-US" sz="1200" dirty="0"/>
+          </a:p>
+        </p:txBody>
+      </p:sp>
+      <p:sp>
+        <p:nvSpPr>
+          <p:cNvPr id="19" name="Shape 17"/>
+          <p:cNvSpPr/>
+          <p:nvPr/>
+        </p:nvSpPr>
+        <p:spPr>
+          <a:xfrm>
+            <a:off x="9052331" y="1874520"/>
+            <a:ext cx="2545004" cy="2834640"/>
+          </a:xfrm>
+          <a:prstGeom prst="roundRect">
+            <a:avLst>
+              <a:gd name="adj" fmla="val 3593"/>
+            </a:avLst>
+          </a:prstGeom>
+          <a:solidFill>
+            <a:srgbClr val="F2F1E8"/>
+          </a:solidFill>
+          <a:ln w="9525">
+            <a:solidFill>
+              <a:srgbClr val="E0DFD0"/>
+            </a:solidFill>
+            <a:prstDash val="solid"/>
+          </a:ln>
+        </p:spPr>
+      </p:sp>
+      <p:sp>
+        <p:nvSpPr>
+          <p:cNvPr id="20" name="Shape 18"/>
+          <p:cNvSpPr/>
+          <p:nvPr/>
+        </p:nvSpPr>
+        <p:spPr>
+          <a:xfrm>
+            <a:off x="9280931" y="2103120"/>
+            <a:ext cx="566928" cy="566928"/>
+          </a:xfrm>
+          <a:prstGeom prst="ellipse">
+            <a:avLst/>
+          </a:prstGeom>
+          <a:solidFill>
+            <a:srgbClr val="2C6E49"/>
+          </a:solidFill>
+          <a:ln/>
+        </p:spPr>
+      </p:sp>
+      <p:sp>
+        <p:nvSpPr>
+          <p:cNvPr id="21" name="Text 19"/>
+          <p:cNvSpPr txBox="1"/>
+          <p:nvPr/>
+        </p:nvSpPr>
+        <p:spPr>
+          <a:xfrm>
+            <a:off x="9280931" y="2103120"/>
+            <a:ext cx="566928" cy="566928"/>
+          </a:xfrm>
+          <a:prstGeom prst="rect">
+            <a:avLst/>
+          </a:prstGeom>
+          <a:noFill/>
+          <a:ln/>
+        </p:spPr>
+        <p:txBody>
+          <a:bodyPr wrap="square" lIns="0" tIns="0" rIns="0" bIns="0" rtlCol="0" anchor="ctr"/>
+          <a:lstStyle/>
+          <a:p>
+            <a:pPr rtl="1" algn="ctr" indent="0" marL="0">
+              <a:buNone/>
+            </a:pPr>
+            <a:r>
+              <a:rPr lang="en-US" sz="1600" b="1" dirty="0">
+                <a:solidFill>
+                  <a:srgbClr val="FFFFFF"/>
+                </a:solidFill>
+                <a:latin typeface="Arial" pitchFamily="34" charset="0"/>
+                <a:ea typeface="Arial" pitchFamily="34" charset="-122"/>
+                <a:cs typeface="Arial" pitchFamily="34" charset="-120"/>
+              </a:rPr>
+              <a:t>4</a:t>
+            </a:r>
+            <a:endParaRPr lang="en-US" sz="1600" dirty="0"/>
+          </a:p>
+        </p:txBody>
+      </p:sp>
+      <p:sp>
+        <p:nvSpPr>
+          <p:cNvPr id="22" name="Text 20"/>
+          <p:cNvSpPr txBox="1"/>
+          <p:nvPr/>
+        </p:nvSpPr>
+        <p:spPr>
+          <a:xfrm>
+            <a:off x="9280931" y="2788920"/>
+            <a:ext cx="2087804" cy="457200"/>
+          </a:xfrm>
+          <a:prstGeom prst="rect">
+            <a:avLst/>
+          </a:prstGeom>
+          <a:noFill/>
+          <a:ln/>
+        </p:spPr>
+        <p:txBody>
+          <a:bodyPr wrap="square" lIns="0" tIns="0" rIns="0" bIns="0" rtlCol="0" anchor="ctr"/>
+          <a:lstStyle/>
+          <a:p>
+            <a:pPr rtl="1" algn="r" indent="0" marL="0">
+              <a:buNone/>
+            </a:pPr>
+            <a:r>
+              <a:rPr lang="en-US" sz="1400" b="1" dirty="0">
+                <a:solidFill>
+                  <a:srgbClr val="2C6E49"/>
+                </a:solidFill>
+                <a:latin typeface="Arial" pitchFamily="34" charset="0"/>
+                <a:ea typeface="Arial" pitchFamily="34" charset="-122"/>
+                <a:cs typeface="Arial" pitchFamily="34" charset="-120"/>
+              </a:rPr>
+              <a:t>المؤسسات</a:t>
+            </a:r>
+            <a:endParaRPr lang="en-US" sz="1400" dirty="0"/>
+          </a:p>
+        </p:txBody>
+      </p:sp>
+      <p:sp>
+        <p:nvSpPr>
+          <p:cNvPr id="23" name="Text 21"/>
+          <p:cNvSpPr txBox="1"/>
+          <p:nvPr/>
+        </p:nvSpPr>
+        <p:spPr>
+          <a:xfrm>
+            <a:off x="9280931" y="3291840"/>
+            <a:ext cx="2087804" cy="1234440"/>
+          </a:xfrm>
+          <a:prstGeom prst="rect">
+            <a:avLst/>
+          </a:prstGeom>
+          <a:noFill/>
+          <a:ln/>
+        </p:spPr>
+        <p:txBody>
+          <a:bodyPr wrap="square" lIns="0" tIns="0" rIns="0" bIns="0" rtlCol="0" anchor="t"/>
+          <a:lstStyle/>
+          <a:p>
+            <a:pPr rtl="1" algn="r" indent="0" marL="0">
+              <a:lnSpc>
+                <a:spcPct val="120000"/>
+              </a:lnSpc>
+              <a:buNone/>
+            </a:pPr>
+            <a:r>
+              <a:rPr lang="en-US" sz="1200" dirty="0">
+                <a:solidFill>
+                  <a:srgbClr val="364239"/>
+                </a:solidFill>
+                <a:latin typeface="Arial" pitchFamily="34" charset="0"/>
+                <a:ea typeface="Arial" pitchFamily="34" charset="-122"/>
+                <a:cs typeface="Arial" pitchFamily="34" charset="-120"/>
+              </a:rPr>
+              <a:t>حوار مع وزارة الزراعة وبرامج الأمن الغذائي.</a:t>
+            </a:r>
+            <a:endParaRPr lang="en-US" sz="1200" dirty="0"/>
+          </a:p>
+        </p:txBody>
+      </p:sp>
+      <p:sp>
+        <p:nvSpPr>
+          <p:cNvPr id="24" name="Text 22"/>
+          <p:cNvSpPr txBox="1"/>
+          <p:nvPr/>
+        </p:nvSpPr>
+        <p:spPr>
+          <a:xfrm>
+            <a:off x="594360" y="4983480"/>
+            <a:ext cx="11002975" cy="822960"/>
+          </a:xfrm>
+          <a:prstGeom prst="rect">
+            <a:avLst/>
+          </a:prstGeom>
+          <a:noFill/>
+          <a:ln/>
+        </p:spPr>
+        <p:txBody>
+          <a:bodyPr wrap="square" lIns="0" tIns="0" rIns="0" bIns="0" rtlCol="0" anchor="t"/>
+          <a:lstStyle/>
+          <a:p>
+            <a:pPr rtl="1" algn="r" indent="0" marL="0">
+              <a:lnSpc>
+                <a:spcPct val="125000"/>
+              </a:lnSpc>
+              <a:buNone/>
+            </a:pPr>
+            <a:r>
+              <a:rPr lang="en-US" sz="1250" dirty="0">
+                <a:solidFill>
+                  <a:srgbClr val="6F7D71"/>
+                </a:solidFill>
+                <a:latin typeface="Arial" pitchFamily="34" charset="0"/>
+                <a:ea typeface="Arial" pitchFamily="34" charset="-122"/>
+                <a:cs typeface="Arial" pitchFamily="34" charset="-120"/>
+              </a:rPr>
+              <a:t>يتكيف الإطار مع الإقليم: يمكن أن يقود الشراكة مستورد أو موزّع مدخلات زراعية أو جمعية منتجين.</a:t>
+            </a:r>
+            <a:endParaRPr lang="en-US" sz="1250" dirty="0"/>
+          </a:p>
+        </p:txBody>
+      </p:sp>
+      <p:sp>
+        <p:nvSpPr>
+          <p:cNvPr id="25" name="Text 23"/>
+          <p:cNvSpPr txBox="1"/>
+          <p:nvPr/>
+        </p:nvSpPr>
+        <p:spPr>
+          <a:xfrm>
+            <a:off x="502920" y="6382512"/>
+            <a:ext cx="8229600" cy="274320"/>
+          </a:xfrm>
+          <a:prstGeom prst="rect">
+            <a:avLst/>
+          </a:prstGeom>
+          <a:noFill/>
+          <a:ln/>
+        </p:spPr>
+        <p:txBody>
+          <a:bodyPr wrap="square" lIns="0" tIns="0" rIns="0" bIns="0" rtlCol="0" anchor="ctr"/>
+          <a:lstStyle/>
+          <a:p>
+            <a:pPr rtl="1" algn="r" indent="0" marL="0">
+              <a:buNone/>
+            </a:pPr>
+            <a:r>
+              <a:rPr lang="en-US" sz="950" dirty="0">
+                <a:solidFill>
+                  <a:srgbClr val="6F7D71">
+                    <a:alpha val="80000"/>
+                  </a:srgbClr>
+                </a:solidFill>
+                <a:latin typeface="Arial" pitchFamily="34" charset="0"/>
+                <a:ea typeface="Arial" pitchFamily="34" charset="-122"/>
+                <a:cs typeface="Arial" pitchFamily="34" charset="-120"/>
+              </a:rPr>
+              <a:t>Green Solutions · ملف السوق الزراعي السعودي</a:t>
+            </a:r>
+            <a:endParaRPr lang="en-US" sz="950" dirty="0"/>
+          </a:p>
+        </p:txBody>
+      </p:sp>
+      <p:sp>
+        <p:nvSpPr>
+          <p:cNvPr id="26" name="Text 24"/>
+          <p:cNvSpPr txBox="1"/>
+          <p:nvPr/>
+        </p:nvSpPr>
+        <p:spPr>
+          <a:xfrm>
+            <a:off x="11140135" y="6382512"/>
+            <a:ext cx="548640" cy="274320"/>
+          </a:xfrm>
+          <a:prstGeom prst="rect">
+            <a:avLst/>
+          </a:prstGeom>
+          <a:noFill/>
+          <a:ln/>
+        </p:spPr>
+        <p:txBody>
+          <a:bodyPr wrap="square" lIns="0" tIns="0" rIns="0" bIns="0" rtlCol="0" anchor="ctr"/>
+          <a:lstStyle/>
+          <a:p>
+            <a:pPr rtl="1" algn="r" indent="0" marL="0">
+              <a:buNone/>
+            </a:pPr>
+            <a:r>
+              <a:rPr lang="en-US" sz="950" dirty="0">
+                <a:solidFill>
+                  <a:srgbClr val="6F7D71">
+                    <a:alpha val="80000"/>
+                  </a:srgbClr>
+                </a:solidFill>
+                <a:latin typeface="Arial" pitchFamily="34" charset="0"/>
+                <a:ea typeface="Arial" pitchFamily="34" charset="-122"/>
+                <a:cs typeface="Arial" pitchFamily="34" charset="-120"/>
+              </a:rPr>
+              <a:t>14</a:t>
+            </a:r>
+            <a:endParaRPr lang="en-US" sz="950" dirty="0"/>
+          </a:p>
+        </p:txBody>
+      </p:sp>
+    </p:spTree>
+  </p:cSld>
+  <p:clrMapOvr>
+    <a:masterClrMapping/>
+  </p:clrMapOvr>
+</p:sld>
+</file>
+
+<file path=ppt/slides/slide16.xml><?xml version="1.0" encoding="utf-8"?>
+<p:sld xmlns:a="http://schemas.openxmlformats.org/drawingml/2006/main" xmlns:r="http://schemas.openxmlformats.org/officeDocument/2006/relationships" xmlns:p="http://schemas.openxmlformats.org/presentationml/2006/main">
+  <p:cSld name="Slide 16">
+    <p:bg>
+      <p:bgPr>
+        <a:solidFill>
+          <a:srgbClr val="FCFAF5"/>
+        </a:solidFill>
+      </p:bgPr>
+    </p:bg>
+    <p:spTree>
+      <p:nvGrpSpPr>
+        <p:cNvPr id="1" name=""/>
+        <p:cNvGrpSpPr/>
+        <p:nvPr/>
+      </p:nvGrpSpPr>
+      <p:grpSpPr>
+        <a:xfrm>
+          <a:off x="0" y="0"/>
+          <a:ext cx="0" cy="0"/>
+          <a:chOff x="0" y="0"/>
+          <a:chExt cx="0" cy="0"/>
+        </a:xfrm>
+      </p:grpSpPr>
+      <p:sp>
+        <p:nvSpPr>
+          <p:cNvPr id="2" name="Text 0"/>
+          <p:cNvSpPr txBox="1"/>
+          <p:nvPr/>
+        </p:nvSpPr>
+        <p:spPr>
+          <a:xfrm>
+            <a:off x="594360" y="411480"/>
+            <a:ext cx="10515600" cy="274320"/>
+          </a:xfrm>
+          <a:prstGeom prst="rect">
+            <a:avLst/>
+          </a:prstGeom>
+          <a:noFill/>
+          <a:ln/>
+        </p:spPr>
+        <p:txBody>
+          <a:bodyPr wrap="square" lIns="0" tIns="0" rIns="0" bIns="0" rtlCol="0" anchor="ctr"/>
+          <a:lstStyle/>
+          <a:p>
+            <a:pPr rtl="1" algn="r" indent="0" marL="0">
+              <a:buNone/>
+            </a:pPr>
+            <a:r>
+              <a:rPr lang="en-US" sz="1150" b="1" spc="200" kern="0" dirty="0">
+                <a:solidFill>
+                  <a:srgbClr val="D9A441"/>
+                </a:solidFill>
+                <a:latin typeface="Arial" pitchFamily="34" charset="0"/>
+                <a:ea typeface="Arial" pitchFamily="34" charset="-122"/>
+                <a:cs typeface="Arial" pitchFamily="34" charset="-120"/>
+              </a:rPr>
+              <a:t>ما يجب توقّعه</a:t>
+            </a:r>
+            <a:endParaRPr lang="en-US" sz="1150" dirty="0"/>
+          </a:p>
+        </p:txBody>
+      </p:sp>
+      <p:sp>
+        <p:nvSpPr>
+          <p:cNvPr id="3" name="Text 1"/>
+          <p:cNvSpPr txBox="1"/>
+          <p:nvPr/>
+        </p:nvSpPr>
+        <p:spPr>
+          <a:xfrm>
+            <a:off x="594360" y="731520"/>
+            <a:ext cx="10881360" cy="731520"/>
+          </a:xfrm>
+          <a:prstGeom prst="rect">
+            <a:avLst/>
+          </a:prstGeom>
+          <a:noFill/>
+          <a:ln/>
+        </p:spPr>
+        <p:txBody>
+          <a:bodyPr wrap="square" lIns="0" tIns="0" rIns="0" bIns="0" rtlCol="0" anchor="ctr"/>
+          <a:lstStyle/>
+          <a:p>
+            <a:pPr rtl="1" algn="r" indent="0" marL="0">
+              <a:buNone/>
+            </a:pPr>
+            <a:r>
+              <a:rPr lang="en-US" sz="3000" b="1" dirty="0">
+                <a:solidFill>
+                  <a:srgbClr val="16412B"/>
+                </a:solidFill>
+                <a:latin typeface="Arial" pitchFamily="34" charset="0"/>
+                <a:ea typeface="Arial" pitchFamily="34" charset="-122"/>
+                <a:cs typeface="Arial" pitchFamily="34" charset="-120"/>
+              </a:rPr>
+              <a:t>مخاطر محددة وردود عليها</a:t>
+            </a:r>
+            <a:endParaRPr lang="en-US" sz="3000" dirty="0"/>
+          </a:p>
+        </p:txBody>
+      </p:sp>
+      <p:sp>
+        <p:nvSpPr>
+          <p:cNvPr id="4" name="Text 2"/>
+          <p:cNvSpPr txBox="1"/>
+          <p:nvPr/>
+        </p:nvSpPr>
+        <p:spPr>
+          <a:xfrm>
+            <a:off x="594360" y="1783080"/>
+            <a:ext cx="5227168" cy="411480"/>
+          </a:xfrm>
+          <a:prstGeom prst="rect">
+            <a:avLst/>
+          </a:prstGeom>
+          <a:noFill/>
+          <a:ln/>
+        </p:spPr>
+        <p:txBody>
+          <a:bodyPr wrap="square" lIns="0" tIns="0" rIns="0" bIns="0" rtlCol="0" anchor="ctr"/>
+          <a:lstStyle/>
+          <a:p>
+            <a:pPr rtl="1" algn="r" indent="0" marL="0">
+              <a:buNone/>
+            </a:pPr>
+            <a:r>
+              <a:rPr lang="en-US" sz="1600" b="1" dirty="0">
+                <a:solidFill>
+                  <a:srgbClr val="2C6E49"/>
+                </a:solidFill>
+                <a:latin typeface="Arial" pitchFamily="34" charset="0"/>
+                <a:ea typeface="Arial" pitchFamily="34" charset="-122"/>
+                <a:cs typeface="Arial" pitchFamily="34" charset="-120"/>
+              </a:rPr>
+              <a:t>المخاطر</a:t>
+            </a:r>
+            <a:endParaRPr lang="en-US" sz="1600" dirty="0"/>
+          </a:p>
+        </p:txBody>
+      </p:sp>
+      <p:sp>
+        <p:nvSpPr>
+          <p:cNvPr id="5" name="Text 3"/>
+          <p:cNvSpPr txBox="1"/>
+          <p:nvPr/>
+        </p:nvSpPr>
+        <p:spPr>
+          <a:xfrm>
+            <a:off x="594360" y="2286000"/>
+            <a:ext cx="5227168" cy="2468880"/>
+          </a:xfrm>
+          <a:prstGeom prst="rect">
+            <a:avLst/>
+          </a:prstGeom>
+          <a:noFill/>
+          <a:ln/>
+        </p:spPr>
+        <p:txBody>
+          <a:bodyPr wrap="square" lIns="0" tIns="0" rIns="0" bIns="0" rtlCol="0" anchor="t"/>
+          <a:lstStyle/>
+          <a:p>
+            <a:pPr algn="r" marL="342900" indent="-342900">
+              <a:lnSpc>
+                <a:spcPct val="122000"/>
+              </a:lnSpc>
+              <a:spcAft>
+                <a:spcPts val="1000"/>
+              </a:spcAft>
+              <a:buSzPct val="100000"/>
+              <a:buChar char="•"/>
+            </a:pPr>
+            <a:r>
+              <a:rPr lang="en-US" sz="1350" dirty="0">
+                <a:solidFill>
+                  <a:srgbClr val="364239"/>
+                </a:solidFill>
+                <a:latin typeface="Arial" pitchFamily="34" charset="0"/>
+                <a:ea typeface="Arial" pitchFamily="34" charset="-122"/>
+                <a:cs typeface="Arial" pitchFamily="34" charset="-120"/>
+              </a:rPr>
+              <a:t>تربة رملية شديدة النفاذية وحرارة صيفية تتجاوز 45 درجة: تباين كبير في النتائج من قطعة إلى أخرى.</a:t>
+            </a:r>
+            <a:endParaRPr lang="en-US" sz="1350" dirty="0"/>
+          </a:p>
+          <a:p>
+            <a:pPr algn="r" marL="342900" indent="-342900">
+              <a:lnSpc>
+                <a:spcPct val="122000"/>
+              </a:lnSpc>
+              <a:spcAft>
+                <a:spcPts val="1000"/>
+              </a:spcAft>
+              <a:buSzPct val="100000"/>
+              <a:buChar char="•"/>
+            </a:pPr>
+            <a:r>
+              <a:rPr lang="en-US" sz="1350" dirty="0">
+                <a:solidFill>
+                  <a:srgbClr val="364239"/>
+                </a:solidFill>
+                <a:latin typeface="Arial" pitchFamily="34" charset="0"/>
+                <a:ea typeface="Arial" pitchFamily="34" charset="-122"/>
+                <a:cs typeface="Arial" pitchFamily="34" charset="-120"/>
+              </a:rPr>
+              <a:t>ملوحة مياه الري والتربة في المناطق الشرقية، وما ترتّب عليها من حذر تجاه أي مادة مضافة.</a:t>
+            </a:r>
+            <a:endParaRPr lang="en-US" sz="1350" dirty="0"/>
+          </a:p>
+          <a:p>
+            <a:pPr algn="r" marL="342900" indent="-342900">
+              <a:lnSpc>
+                <a:spcPct val="122000"/>
+              </a:lnSpc>
+              <a:spcAft>
+                <a:spcPts val="1000"/>
+              </a:spcAft>
+              <a:buSzPct val="100000"/>
+              <a:buChar char="•"/>
+            </a:pPr>
+            <a:r>
+              <a:rPr lang="en-US" sz="1350" dirty="0">
+                <a:solidFill>
+                  <a:srgbClr val="364239"/>
+                </a:solidFill>
+                <a:latin typeface="Arial" pitchFamily="34" charset="0"/>
+                <a:ea typeface="Arial" pitchFamily="34" charset="-122"/>
+                <a:cs typeface="Arial" pitchFamily="34" charset="-120"/>
+              </a:rPr>
+              <a:t>منافسة منتجات رخيصة أساسها الصوديوم تركت انطباعاً سيئاً لدى المزارعين.</a:t>
+            </a:r>
+            <a:endParaRPr lang="en-US" sz="1350" dirty="0"/>
+          </a:p>
+          <a:p>
+            <a:pPr algn="r" marL="342900" indent="-342900">
+              <a:lnSpc>
+                <a:spcPct val="122000"/>
+              </a:lnSpc>
+              <a:spcAft>
+                <a:spcPts val="1000"/>
+              </a:spcAft>
+              <a:buSzPct val="100000"/>
+              <a:buChar char="•"/>
+            </a:pPr>
+            <a:r>
+              <a:rPr lang="en-US" sz="1350" dirty="0">
+                <a:solidFill>
+                  <a:srgbClr val="364239"/>
+                </a:solidFill>
+                <a:latin typeface="Arial" pitchFamily="34" charset="0"/>
+                <a:ea typeface="Arial" pitchFamily="34" charset="-122"/>
+                <a:cs typeface="Arial" pitchFamily="34" charset="-120"/>
+              </a:rPr>
+              <a:t>دورات قرار طويلة لدى الشركات الزراعية الكبرى والجهات الحكومية.</a:t>
+            </a:r>
+            <a:endParaRPr lang="en-US" sz="1350" dirty="0"/>
+          </a:p>
+        </p:txBody>
+      </p:sp>
+      <p:sp>
+        <p:nvSpPr>
+          <p:cNvPr id="6" name="Text 4"/>
+          <p:cNvSpPr txBox="1"/>
+          <p:nvPr/>
+        </p:nvSpPr>
+        <p:spPr>
+          <a:xfrm>
+            <a:off x="6370168" y="1783080"/>
+            <a:ext cx="5227168" cy="411480"/>
+          </a:xfrm>
+          <a:prstGeom prst="rect">
+            <a:avLst/>
+          </a:prstGeom>
+          <a:noFill/>
+          <a:ln/>
+        </p:spPr>
+        <p:txBody>
+          <a:bodyPr wrap="square" lIns="0" tIns="0" rIns="0" bIns="0" rtlCol="0" anchor="ctr"/>
+          <a:lstStyle/>
+          <a:p>
+            <a:pPr rtl="1" algn="r" indent="0" marL="0">
+              <a:buNone/>
+            </a:pPr>
+            <a:r>
+              <a:rPr lang="en-US" sz="1600" b="1" dirty="0">
+                <a:solidFill>
+                  <a:srgbClr val="2C6E49"/>
+                </a:solidFill>
+                <a:latin typeface="Arial" pitchFamily="34" charset="0"/>
+                <a:ea typeface="Arial" pitchFamily="34" charset="-122"/>
+                <a:cs typeface="Arial" pitchFamily="34" charset="-120"/>
+              </a:rPr>
+              <a:t>الردود</a:t>
+            </a:r>
+            <a:endParaRPr lang="en-US" sz="1600" dirty="0"/>
+          </a:p>
+        </p:txBody>
+      </p:sp>
+      <p:sp>
+        <p:nvSpPr>
+          <p:cNvPr id="7" name="Text 5"/>
+          <p:cNvSpPr txBox="1"/>
+          <p:nvPr/>
+        </p:nvSpPr>
+        <p:spPr>
+          <a:xfrm>
+            <a:off x="6370168" y="2286000"/>
+            <a:ext cx="5227168" cy="2468880"/>
+          </a:xfrm>
+          <a:prstGeom prst="rect">
+            <a:avLst/>
+          </a:prstGeom>
+          <a:noFill/>
+          <a:ln/>
+        </p:spPr>
+        <p:txBody>
+          <a:bodyPr wrap="square" lIns="0" tIns="0" rIns="0" bIns="0" rtlCol="0" anchor="t"/>
+          <a:lstStyle/>
+          <a:p>
+            <a:pPr algn="r" marL="342900" indent="-342900">
+              <a:lnSpc>
+                <a:spcPct val="122000"/>
+              </a:lnSpc>
+              <a:spcAft>
+                <a:spcPts val="1000"/>
+              </a:spcAft>
+              <a:buSzPct val="100000"/>
+              <a:buChar char="•"/>
+            </a:pPr>
+            <a:r>
+              <a:rPr lang="en-US" sz="1350" dirty="0">
+                <a:solidFill>
+                  <a:srgbClr val="364239"/>
+                </a:solidFill>
+                <a:latin typeface="Arial" pitchFamily="34" charset="0"/>
+                <a:ea typeface="Arial" pitchFamily="34" charset="-122"/>
+                <a:cs typeface="Arial" pitchFamily="34" charset="-120"/>
+              </a:rPr>
+              <a:t>إجراء التجربة على دورة كاملة مع قطعة شاهد، لتوثيق الفارق بالأرقام لا بالوعود.</a:t>
+            </a:r>
+            <a:endParaRPr lang="en-US" sz="1350" dirty="0"/>
+          </a:p>
+          <a:p>
+            <a:pPr algn="r" marL="342900" indent="-342900">
+              <a:lnSpc>
+                <a:spcPct val="122000"/>
+              </a:lnSpc>
+              <a:spcAft>
+                <a:spcPts val="1000"/>
+              </a:spcAft>
+              <a:buSzPct val="100000"/>
+              <a:buChar char="•"/>
+            </a:pPr>
+            <a:r>
+              <a:rPr lang="en-US" sz="1350" dirty="0">
+                <a:solidFill>
+                  <a:srgbClr val="364239"/>
+                </a:solidFill>
+                <a:latin typeface="Arial" pitchFamily="34" charset="0"/>
+                <a:ea typeface="Arial" pitchFamily="34" charset="-122"/>
+                <a:cs typeface="Arial" pitchFamily="34" charset="-120"/>
+              </a:rPr>
+              <a:t>تركيبة أساسها البوتاسيوم لا الصوديوم: لا تضيف ملوحة، ومتوافقة مع المحاصيل الغذائية.</a:t>
+            </a:r>
+            <a:endParaRPr lang="en-US" sz="1350" dirty="0"/>
+          </a:p>
+          <a:p>
+            <a:pPr algn="r" marL="342900" indent="-342900">
+              <a:lnSpc>
+                <a:spcPct val="122000"/>
+              </a:lnSpc>
+              <a:spcAft>
+                <a:spcPts val="1000"/>
+              </a:spcAft>
+              <a:buSzPct val="100000"/>
+              <a:buChar char="•"/>
+            </a:pPr>
+            <a:r>
+              <a:rPr lang="en-US" sz="1350" dirty="0">
+                <a:solidFill>
+                  <a:srgbClr val="364239"/>
+                </a:solidFill>
+                <a:latin typeface="Arial" pitchFamily="34" charset="0"/>
+                <a:ea typeface="Arial" pitchFamily="34" charset="-122"/>
+                <a:cs typeface="Arial" pitchFamily="34" charset="-120"/>
+              </a:rPr>
+              <a:t>تجهيز الملف التنظيمي مبكراً: التحاليل وشهادات المطابقة قبل بدء التفاوض.</a:t>
+            </a:r>
+            <a:endParaRPr lang="en-US" sz="1350" dirty="0"/>
+          </a:p>
+          <a:p>
+            <a:pPr algn="r" marL="342900" indent="-342900">
+              <a:lnSpc>
+                <a:spcPct val="122000"/>
+              </a:lnSpc>
+              <a:spcAft>
+                <a:spcPts val="1000"/>
+              </a:spcAft>
+              <a:buSzPct val="100000"/>
+              <a:buChar char="•"/>
+            </a:pPr>
+            <a:r>
+              <a:rPr lang="en-US" sz="1350" dirty="0">
+                <a:solidFill>
+                  <a:srgbClr val="364239"/>
+                </a:solidFill>
+                <a:latin typeface="Arial" pitchFamily="34" charset="0"/>
+                <a:ea typeface="Arial" pitchFamily="34" charset="-122"/>
+                <a:cs typeface="Arial" pitchFamily="34" charset="-120"/>
+              </a:rPr>
+              <a:t>العمل عبر الجمعيات التعاونية الزراعية وبرامج دعم الريف، لا عبر المزارع الفردية.</a:t>
+            </a:r>
+            <a:endParaRPr lang="en-US" sz="1350" dirty="0"/>
+          </a:p>
+        </p:txBody>
+      </p:sp>
+      <p:sp>
+        <p:nvSpPr>
+          <p:cNvPr id="8" name="Shape 6"/>
+          <p:cNvSpPr/>
+          <p:nvPr/>
+        </p:nvSpPr>
+        <p:spPr>
+          <a:xfrm>
+            <a:off x="594360" y="4846320"/>
+            <a:ext cx="11002975" cy="960120"/>
+          </a:xfrm>
+          <a:prstGeom prst="roundRect">
+            <a:avLst>
+              <a:gd name="adj" fmla="val 7619"/>
+            </a:avLst>
+          </a:prstGeom>
+          <a:solidFill>
+            <a:srgbClr val="F2F1E8"/>
+          </a:solidFill>
+          <a:ln w="9525">
+            <a:solidFill>
+              <a:srgbClr val="E0DFD0"/>
+            </a:solidFill>
+            <a:prstDash val="solid"/>
+          </a:ln>
+        </p:spPr>
+      </p:sp>
+      <p:sp>
+        <p:nvSpPr>
+          <p:cNvPr id="9" name="Text 7"/>
+          <p:cNvSpPr txBox="1"/>
+          <p:nvPr/>
+        </p:nvSpPr>
+        <p:spPr>
+          <a:xfrm>
+            <a:off x="822960" y="4983480"/>
+            <a:ext cx="10545775" cy="713232"/>
+          </a:xfrm>
+          <a:prstGeom prst="rect">
+            <a:avLst/>
+          </a:prstGeom>
+          <a:noFill/>
+          <a:ln/>
+        </p:spPr>
+        <p:txBody>
+          <a:bodyPr wrap="square" lIns="0" tIns="0" rIns="0" bIns="0" rtlCol="0" anchor="t"/>
+          <a:lstStyle/>
+          <a:p>
+            <a:pPr rtl="1" algn="r" indent="0" marL="0">
+              <a:lnSpc>
+                <a:spcPct val="118000"/>
+              </a:lnSpc>
+              <a:buNone/>
+            </a:pPr>
+            <a:r>
+              <a:rPr lang="en-US" sz="1100" dirty="0">
+                <a:solidFill>
+                  <a:srgbClr val="6F7D71"/>
+                </a:solidFill>
+                <a:latin typeface="Arial" pitchFamily="34" charset="0"/>
+                <a:ea typeface="Arial" pitchFamily="34" charset="-122"/>
+                <a:cs typeface="Arial" pitchFamily="34" charset="-120"/>
+              </a:rPr>
+              <a:t>تحليل الأكريلاميد (مختبر Polymex، ISO 9001، بتركيز أقل من 3,0 ميكروغرام/غرام) وفحص REACH / SVHC (SGS) وشهادة SOHISCERT السارية حتى 4 سبتمبر 2027: متاحة جميعها عند الطلب.</a:t>
+            </a:r>
+            <a:endParaRPr lang="en-US" sz="1100" dirty="0"/>
+          </a:p>
+        </p:txBody>
+      </p:sp>
+      <p:sp>
+        <p:nvSpPr>
+          <p:cNvPr id="10" name="Text 8"/>
+          <p:cNvSpPr txBox="1"/>
+          <p:nvPr/>
+        </p:nvSpPr>
+        <p:spPr>
+          <a:xfrm>
+            <a:off x="502920" y="6382512"/>
+            <a:ext cx="8229600" cy="274320"/>
+          </a:xfrm>
+          <a:prstGeom prst="rect">
+            <a:avLst/>
+          </a:prstGeom>
+          <a:noFill/>
+          <a:ln/>
+        </p:spPr>
+        <p:txBody>
+          <a:bodyPr wrap="square" lIns="0" tIns="0" rIns="0" bIns="0" rtlCol="0" anchor="ctr"/>
+          <a:lstStyle/>
+          <a:p>
+            <a:pPr rtl="1" algn="r" indent="0" marL="0">
+              <a:buNone/>
+            </a:pPr>
+            <a:r>
+              <a:rPr lang="en-US" sz="950" dirty="0">
+                <a:solidFill>
+                  <a:srgbClr val="6F7D71">
+                    <a:alpha val="80000"/>
+                  </a:srgbClr>
+                </a:solidFill>
+                <a:latin typeface="Arial" pitchFamily="34" charset="0"/>
+                <a:ea typeface="Arial" pitchFamily="34" charset="-122"/>
+                <a:cs typeface="Arial" pitchFamily="34" charset="-120"/>
+              </a:rPr>
+              <a:t>Green Solutions · ملف السوق الزراعي السعودي</a:t>
+            </a:r>
+            <a:endParaRPr lang="en-US" sz="950" dirty="0"/>
+          </a:p>
+        </p:txBody>
+      </p:sp>
+      <p:sp>
+        <p:nvSpPr>
+          <p:cNvPr id="11" name="Text 9"/>
+          <p:cNvSpPr txBox="1"/>
+          <p:nvPr/>
+        </p:nvSpPr>
+        <p:spPr>
+          <a:xfrm>
+            <a:off x="11140135" y="6382512"/>
+            <a:ext cx="548640" cy="274320"/>
+          </a:xfrm>
+          <a:prstGeom prst="rect">
+            <a:avLst/>
+          </a:prstGeom>
+          <a:noFill/>
+          <a:ln/>
+        </p:spPr>
+        <p:txBody>
+          <a:bodyPr wrap="square" lIns="0" tIns="0" rIns="0" bIns="0" rtlCol="0" anchor="ctr"/>
+          <a:lstStyle/>
+          <a:p>
+            <a:pPr rtl="1" algn="r" indent="0" marL="0">
+              <a:buNone/>
+            </a:pPr>
+            <a:r>
+              <a:rPr lang="en-US" sz="950" dirty="0">
+                <a:solidFill>
+                  <a:srgbClr val="6F7D71">
+                    <a:alpha val="80000"/>
+                  </a:srgbClr>
+                </a:solidFill>
+                <a:latin typeface="Arial" pitchFamily="34" charset="0"/>
+                <a:ea typeface="Arial" pitchFamily="34" charset="-122"/>
+                <a:cs typeface="Arial" pitchFamily="34" charset="-120"/>
+              </a:rPr>
+              <a:t>15</a:t>
+            </a:r>
+            <a:endParaRPr lang="en-US" sz="950" dirty="0"/>
+          </a:p>
+        </p:txBody>
+      </p:sp>
+    </p:spTree>
+  </p:cSld>
+  <p:clrMapOvr>
+    <a:masterClrMapping/>
+  </p:clrMapOvr>
+</p:sld>
+</file>
+
+<file path=ppt/slides/slide17.xml><?xml version="1.0" encoding="utf-8"?>
+<p:sld xmlns:a="http://schemas.openxmlformats.org/drawingml/2006/main" xmlns:r="http://schemas.openxmlformats.org/officeDocument/2006/relationships" xmlns:p="http://schemas.openxmlformats.org/presentationml/2006/main">
+  <p:cSld name="Slide 17">
+    <p:bg>
+      <p:bgPr>
+        <a:solidFill>
+          <a:srgbClr val="FCFAF5"/>
+        </a:solidFill>
+      </p:bgPr>
+    </p:bg>
+    <p:spTree>
+      <p:nvGrpSpPr>
+        <p:cNvPr id="1" name=""/>
+        <p:cNvGrpSpPr/>
+        <p:nvPr/>
+      </p:nvGrpSpPr>
+      <p:grpSpPr>
+        <a:xfrm>
+          <a:off x="0" y="0"/>
+          <a:ext cx="0" cy="0"/>
+          <a:chOff x="0" y="0"/>
+          <a:chExt cx="0" cy="0"/>
+        </a:xfrm>
+      </p:grpSpPr>
+      <p:sp>
+        <p:nvSpPr>
+          <p:cNvPr id="2" name="Text 0"/>
+          <p:cNvSpPr txBox="1"/>
+          <p:nvPr/>
+        </p:nvSpPr>
+        <p:spPr>
+          <a:xfrm>
+            <a:off x="594360" y="411480"/>
+            <a:ext cx="10515600" cy="274320"/>
+          </a:xfrm>
+          <a:prstGeom prst="rect">
+            <a:avLst/>
+          </a:prstGeom>
+          <a:noFill/>
+          <a:ln/>
+        </p:spPr>
+        <p:txBody>
+          <a:bodyPr wrap="square" lIns="0" tIns="0" rIns="0" bIns="0" rtlCol="0" anchor="ctr"/>
+          <a:lstStyle/>
+          <a:p>
+            <a:pPr rtl="1" algn="r" indent="0" marL="0">
+              <a:buNone/>
+            </a:pPr>
+            <a:r>
+              <a:rPr lang="en-US" sz="1150" b="1" spc="200" kern="0" dirty="0">
+                <a:solidFill>
+                  <a:srgbClr val="D9A441"/>
+                </a:solidFill>
+                <a:latin typeface="Arial" pitchFamily="34" charset="0"/>
+                <a:ea typeface="Arial" pitchFamily="34" charset="-122"/>
+                <a:cs typeface="Arial" pitchFamily="34" charset="-120"/>
+              </a:rPr>
+              <a:t>المصادر</a:t>
+            </a:r>
+            <a:endParaRPr lang="en-US" sz="1150" dirty="0"/>
+          </a:p>
+        </p:txBody>
+      </p:sp>
+      <p:sp>
+        <p:nvSpPr>
+          <p:cNvPr id="3" name="Text 1"/>
+          <p:cNvSpPr txBox="1"/>
+          <p:nvPr/>
+        </p:nvSpPr>
+        <p:spPr>
+          <a:xfrm>
+            <a:off x="594360" y="731520"/>
+            <a:ext cx="10881360" cy="731520"/>
+          </a:xfrm>
+          <a:prstGeom prst="rect">
+            <a:avLst/>
+          </a:prstGeom>
+          <a:noFill/>
+          <a:ln/>
+        </p:spPr>
+        <p:txBody>
+          <a:bodyPr wrap="square" lIns="0" tIns="0" rIns="0" bIns="0" rtlCol="0" anchor="ctr"/>
+          <a:lstStyle/>
+          <a:p>
+            <a:pPr rtl="1" algn="r" indent="0" marL="0">
+              <a:buNone/>
+            </a:pPr>
+            <a:r>
+              <a:rPr lang="en-US" sz="3000" b="1" dirty="0">
+                <a:solidFill>
+                  <a:srgbClr val="16412B"/>
+                </a:solidFill>
+                <a:latin typeface="Arial" pitchFamily="34" charset="0"/>
+                <a:ea typeface="Arial" pitchFamily="34" charset="-122"/>
+                <a:cs typeface="Arial" pitchFamily="34" charset="-120"/>
+              </a:rPr>
+              <a:t>المصادر وافتراضات العمل</a:t>
+            </a:r>
+            <a:endParaRPr lang="en-US" sz="3000" dirty="0"/>
+          </a:p>
+        </p:txBody>
+      </p:sp>
+      <p:sp>
+        <p:nvSpPr>
+          <p:cNvPr id="4" name="Text 2"/>
+          <p:cNvSpPr txBox="1"/>
+          <p:nvPr/>
+        </p:nvSpPr>
+        <p:spPr>
+          <a:xfrm>
+            <a:off x="594360" y="1783080"/>
+            <a:ext cx="5227168" cy="411480"/>
+          </a:xfrm>
+          <a:prstGeom prst="rect">
+            <a:avLst/>
+          </a:prstGeom>
+          <a:noFill/>
+          <a:ln/>
+        </p:spPr>
+        <p:txBody>
+          <a:bodyPr wrap="square" lIns="0" tIns="0" rIns="0" bIns="0" rtlCol="0" anchor="ctr"/>
+          <a:lstStyle/>
+          <a:p>
+            <a:pPr rtl="1" algn="r" indent="0" marL="0">
+              <a:buNone/>
+            </a:pPr>
+            <a:r>
+              <a:rPr lang="en-US" sz="1600" b="1" dirty="0">
+                <a:solidFill>
+                  <a:srgbClr val="2C6E49"/>
+                </a:solidFill>
+                <a:latin typeface="Arial" pitchFamily="34" charset="0"/>
+                <a:ea typeface="Arial" pitchFamily="34" charset="-122"/>
+                <a:cs typeface="Arial" pitchFamily="34" charset="-120"/>
+              </a:rPr>
+              <a:t>المصادر الرئيسية</a:t>
+            </a:r>
+            <a:endParaRPr lang="en-US" sz="1600" dirty="0"/>
+          </a:p>
+        </p:txBody>
+      </p:sp>
+      <p:sp>
+        <p:nvSpPr>
+          <p:cNvPr id="5" name="Text 3"/>
+          <p:cNvSpPr txBox="1"/>
+          <p:nvPr/>
+        </p:nvSpPr>
+        <p:spPr>
+          <a:xfrm>
+            <a:off x="594360" y="2286000"/>
+            <a:ext cx="5227168" cy="2468880"/>
+          </a:xfrm>
+          <a:prstGeom prst="rect">
+            <a:avLst/>
+          </a:prstGeom>
+          <a:noFill/>
+          <a:ln/>
+        </p:spPr>
+        <p:txBody>
+          <a:bodyPr wrap="square" lIns="0" tIns="0" rIns="0" bIns="0" rtlCol="0" anchor="t"/>
+          <a:lstStyle/>
+          <a:p>
+            <a:pPr algn="r" marL="342900" indent="-342900">
+              <a:lnSpc>
+                <a:spcPct val="122000"/>
+              </a:lnSpc>
+              <a:spcAft>
+                <a:spcPts val="1000"/>
+              </a:spcAft>
+              <a:buSzPct val="100000"/>
+              <a:buChar char="•"/>
+            </a:pPr>
+            <a:r>
+              <a:rPr lang="en-US" sz="1350" dirty="0">
+                <a:solidFill>
+                  <a:srgbClr val="364239"/>
+                </a:solidFill>
+                <a:latin typeface="Arial" pitchFamily="34" charset="0"/>
+                <a:ea typeface="Arial" pitchFamily="34" charset="-122"/>
+                <a:cs typeface="Arial" pitchFamily="34" charset="-120"/>
+              </a:rPr>
+              <a:t>الهيئة العامة للإحصاء: الناتج المحلي حسب النشاط والإحصاءات الزراعية.</a:t>
+            </a:r>
+            <a:endParaRPr lang="en-US" sz="1350" dirty="0"/>
+          </a:p>
+          <a:p>
+            <a:pPr algn="r" marL="342900" indent="-342900">
+              <a:lnSpc>
+                <a:spcPct val="122000"/>
+              </a:lnSpc>
+              <a:spcAft>
+                <a:spcPts val="1000"/>
+              </a:spcAft>
+              <a:buSzPct val="100000"/>
+              <a:buChar char="•"/>
+            </a:pPr>
+            <a:r>
+              <a:rPr lang="en-US" sz="1350" dirty="0">
+                <a:solidFill>
+                  <a:srgbClr val="364239"/>
+                </a:solidFill>
+                <a:latin typeface="Arial" pitchFamily="34" charset="0"/>
+                <a:ea typeface="Arial" pitchFamily="34" charset="-122"/>
+                <a:cs typeface="Arial" pitchFamily="34" charset="-120"/>
+              </a:rPr>
+              <a:t>وزارة البيئة والمياه والزراعة: الاستراتيجية الوطنية للأمن الغذائي ونسب الاكتفاء الذاتي.</a:t>
+            </a:r>
+            <a:endParaRPr lang="en-US" sz="1350" dirty="0"/>
+          </a:p>
+          <a:p>
+            <a:pPr algn="r" marL="342900" indent="-342900">
+              <a:lnSpc>
+                <a:spcPct val="122000"/>
+              </a:lnSpc>
+              <a:spcAft>
+                <a:spcPts val="1000"/>
+              </a:spcAft>
+              <a:buSzPct val="100000"/>
+              <a:buChar char="•"/>
+            </a:pPr>
+            <a:r>
+              <a:rPr lang="en-US" sz="1350" dirty="0">
+                <a:solidFill>
+                  <a:srgbClr val="364239"/>
+                </a:solidFill>
+                <a:latin typeface="Arial" pitchFamily="34" charset="0"/>
+                <a:ea typeface="Arial" pitchFamily="34" charset="-122"/>
+                <a:cs typeface="Arial" pitchFamily="34" charset="-120"/>
+              </a:rPr>
+              <a:t>المركز الوطني للنخيل والتمور: أعداد النخيل وصادرات التمور.</a:t>
+            </a:r>
+            <a:endParaRPr lang="en-US" sz="1350" dirty="0"/>
+          </a:p>
+          <a:p>
+            <a:pPr algn="r" marL="342900" indent="-342900">
+              <a:lnSpc>
+                <a:spcPct val="122000"/>
+              </a:lnSpc>
+              <a:spcAft>
+                <a:spcPts val="1000"/>
+              </a:spcAft>
+              <a:buSzPct val="100000"/>
+              <a:buChar char="•"/>
+            </a:pPr>
+            <a:r>
+              <a:rPr lang="en-US" sz="1350" dirty="0">
+                <a:solidFill>
+                  <a:srgbClr val="364239"/>
+                </a:solidFill>
+                <a:latin typeface="Arial" pitchFamily="34" charset="0"/>
+                <a:ea typeface="Arial" pitchFamily="34" charset="-122"/>
+                <a:cs typeface="Arial" pitchFamily="34" charset="-120"/>
+              </a:rPr>
+              <a:t>منظمة الأغذية والزراعة (FAOSTAT وAQUASTAT) والبنك الدولي (WDI).</a:t>
+            </a:r>
+            <a:endParaRPr lang="en-US" sz="1350" dirty="0"/>
+          </a:p>
+        </p:txBody>
+      </p:sp>
+      <p:sp>
+        <p:nvSpPr>
+          <p:cNvPr id="6" name="Text 4"/>
+          <p:cNvSpPr txBox="1"/>
+          <p:nvPr/>
+        </p:nvSpPr>
+        <p:spPr>
+          <a:xfrm>
+            <a:off x="6370168" y="1783080"/>
+            <a:ext cx="5227168" cy="411480"/>
+          </a:xfrm>
+          <a:prstGeom prst="rect">
+            <a:avLst/>
+          </a:prstGeom>
+          <a:noFill/>
+          <a:ln/>
+        </p:spPr>
+        <p:txBody>
+          <a:bodyPr wrap="square" lIns="0" tIns="0" rIns="0" bIns="0" rtlCol="0" anchor="ctr"/>
+          <a:lstStyle/>
+          <a:p>
+            <a:pPr rtl="1" algn="r" indent="0" marL="0">
+              <a:buNone/>
+            </a:pPr>
+            <a:r>
+              <a:rPr lang="en-US" sz="1600" b="1" dirty="0">
+                <a:solidFill>
+                  <a:srgbClr val="2C6E49"/>
+                </a:solidFill>
+                <a:latin typeface="Arial" pitchFamily="34" charset="0"/>
+                <a:ea typeface="Arial" pitchFamily="34" charset="-122"/>
+                <a:cs typeface="Arial" pitchFamily="34" charset="-120"/>
+              </a:rPr>
+              <a:t>افتراضات العمل</a:t>
+            </a:r>
+            <a:endParaRPr lang="en-US" sz="1600" dirty="0"/>
+          </a:p>
+        </p:txBody>
+      </p:sp>
+      <p:sp>
+        <p:nvSpPr>
+          <p:cNvPr id="7" name="Text 5"/>
+          <p:cNvSpPr txBox="1"/>
+          <p:nvPr/>
+        </p:nvSpPr>
+        <p:spPr>
+          <a:xfrm>
+            <a:off x="6370168" y="2286000"/>
+            <a:ext cx="5227168" cy="2468880"/>
+          </a:xfrm>
+          <a:prstGeom prst="rect">
+            <a:avLst/>
+          </a:prstGeom>
+          <a:noFill/>
+          <a:ln/>
+        </p:spPr>
+        <p:txBody>
+          <a:bodyPr wrap="square" lIns="0" tIns="0" rIns="0" bIns="0" rtlCol="0" anchor="t"/>
+          <a:lstStyle/>
+          <a:p>
+            <a:pPr algn="r" marL="342900" indent="-342900">
+              <a:lnSpc>
+                <a:spcPct val="122000"/>
+              </a:lnSpc>
+              <a:spcAft>
+                <a:spcPts val="1000"/>
+              </a:spcAft>
+              <a:buSzPct val="100000"/>
+              <a:buChar char="•"/>
+            </a:pPr>
+            <a:r>
+              <a:rPr lang="en-US" sz="1350" dirty="0">
+                <a:solidFill>
+                  <a:srgbClr val="364239"/>
+                </a:solidFill>
+                <a:latin typeface="Arial" pitchFamily="34" charset="0"/>
+                <a:ea typeface="Arial" pitchFamily="34" charset="-122"/>
+                <a:cs typeface="Arial" pitchFamily="34" charset="-120"/>
+              </a:rPr>
+              <a:t>الأرقام رتب حجم مقرّبة، مأخوذة من أحدث البيانات العامة المتاحة.</a:t>
+            </a:r>
+            <a:endParaRPr lang="en-US" sz="1350" dirty="0"/>
+          </a:p>
+          <a:p>
+            <a:pPr algn="r" marL="342900" indent="-342900">
+              <a:lnSpc>
+                <a:spcPct val="122000"/>
+              </a:lnSpc>
+              <a:spcAft>
+                <a:spcPts val="1000"/>
+              </a:spcAft>
+              <a:buSzPct val="100000"/>
+              <a:buChar char="•"/>
+            </a:pPr>
+            <a:r>
+              <a:rPr lang="en-US" sz="1350" dirty="0">
+                <a:solidFill>
+                  <a:srgbClr val="364239"/>
+                </a:solidFill>
+                <a:latin typeface="Arial" pitchFamily="34" charset="0"/>
+                <a:ea typeface="Arial" pitchFamily="34" charset="-122"/>
+                <a:cs typeface="Arial" pitchFamily="34" charset="-120"/>
+              </a:rPr>
+              <a:t>توفير الماء وزيادة الإنتاج أرقام استرشادية تتغير بحسب التربة والمناخ والمحصول.</a:t>
+            </a:r>
+            <a:endParaRPr lang="en-US" sz="1350" dirty="0"/>
+          </a:p>
+          <a:p>
+            <a:pPr algn="r" marL="342900" indent="-342900">
+              <a:lnSpc>
+                <a:spcPct val="122000"/>
+              </a:lnSpc>
+              <a:spcAft>
+                <a:spcPts val="1000"/>
+              </a:spcAft>
+              <a:buSzPct val="100000"/>
+              <a:buChar char="•"/>
+            </a:pPr>
+            <a:r>
+              <a:rPr lang="en-US" sz="1350" dirty="0">
+                <a:solidFill>
+                  <a:srgbClr val="364239"/>
+                </a:solidFill>
+                <a:latin typeface="Arial" pitchFamily="34" charset="0"/>
+                <a:ea typeface="Arial" pitchFamily="34" charset="-122"/>
+                <a:cs typeface="Arial" pitchFamily="34" charset="-120"/>
+              </a:rPr>
+              <a:t>وثيقة عمل تجارية: تُحدَّث الأرقام قبل أي تقديم رسمي.</a:t>
+            </a:r>
+            <a:endParaRPr lang="en-US" sz="1350" dirty="0"/>
+          </a:p>
+        </p:txBody>
+      </p:sp>
+      <p:sp>
+        <p:nvSpPr>
+          <p:cNvPr id="8" name="Shape 6"/>
+          <p:cNvSpPr/>
+          <p:nvPr/>
+        </p:nvSpPr>
+        <p:spPr>
+          <a:xfrm>
+            <a:off x="594360" y="4846320"/>
+            <a:ext cx="11002975" cy="960120"/>
+          </a:xfrm>
+          <a:prstGeom prst="roundRect">
+            <a:avLst>
+              <a:gd name="adj" fmla="val 7619"/>
+            </a:avLst>
+          </a:prstGeom>
+          <a:solidFill>
+            <a:srgbClr val="F2F1E8"/>
+          </a:solidFill>
+          <a:ln w="9525">
+            <a:solidFill>
+              <a:srgbClr val="E0DFD0"/>
+            </a:solidFill>
+            <a:prstDash val="solid"/>
+          </a:ln>
+        </p:spPr>
+      </p:sp>
+      <p:sp>
+        <p:nvSpPr>
+          <p:cNvPr id="9" name="Text 7"/>
+          <p:cNvSpPr txBox="1"/>
+          <p:nvPr/>
+        </p:nvSpPr>
+        <p:spPr>
+          <a:xfrm>
+            <a:off x="822960" y="4983480"/>
+            <a:ext cx="10545775" cy="713232"/>
+          </a:xfrm>
+          <a:prstGeom prst="rect">
+            <a:avLst/>
+          </a:prstGeom>
+          <a:noFill/>
+          <a:ln/>
+        </p:spPr>
+        <p:txBody>
+          <a:bodyPr wrap="square" lIns="0" tIns="0" rIns="0" bIns="0" rtlCol="0" anchor="t"/>
+          <a:lstStyle/>
+          <a:p>
+            <a:pPr rtl="1" algn="r" indent="0" marL="0">
+              <a:lnSpc>
+                <a:spcPct val="118000"/>
+              </a:lnSpc>
+              <a:buNone/>
+            </a:pPr>
+            <a:r>
+              <a:rPr lang="en-US" sz="1100" dirty="0">
+                <a:solidFill>
+                  <a:srgbClr val="6F7D71"/>
+                </a:solidFill>
+                <a:latin typeface="Arial" pitchFamily="34" charset="0"/>
+                <a:ea typeface="Arial" pitchFamily="34" charset="-122"/>
+                <a:cs typeface="Arial" pitchFamily="34" charset="-120"/>
+              </a:rPr>
+              <a:t>تقارير التجارب والشهادات (SOHISCERT، وتحاليل Polymex وSGS) والنشرات الفنية متاحة عند الطلب.</a:t>
+            </a:r>
+            <a:endParaRPr lang="en-US" sz="1100" dirty="0"/>
+          </a:p>
+        </p:txBody>
+      </p:sp>
+      <p:sp>
+        <p:nvSpPr>
+          <p:cNvPr id="10" name="Text 8"/>
+          <p:cNvSpPr txBox="1"/>
+          <p:nvPr/>
+        </p:nvSpPr>
+        <p:spPr>
+          <a:xfrm>
+            <a:off x="502920" y="6382512"/>
+            <a:ext cx="8229600" cy="274320"/>
+          </a:xfrm>
+          <a:prstGeom prst="rect">
+            <a:avLst/>
+          </a:prstGeom>
+          <a:noFill/>
+          <a:ln/>
+        </p:spPr>
+        <p:txBody>
+          <a:bodyPr wrap="square" lIns="0" tIns="0" rIns="0" bIns="0" rtlCol="0" anchor="ctr"/>
+          <a:lstStyle/>
+          <a:p>
+            <a:pPr rtl="1" algn="r" indent="0" marL="0">
+              <a:buNone/>
+            </a:pPr>
+            <a:r>
+              <a:rPr lang="en-US" sz="950" dirty="0">
+                <a:solidFill>
+                  <a:srgbClr val="6F7D71">
+                    <a:alpha val="80000"/>
+                  </a:srgbClr>
+                </a:solidFill>
+                <a:latin typeface="Arial" pitchFamily="34" charset="0"/>
+                <a:ea typeface="Arial" pitchFamily="34" charset="-122"/>
+                <a:cs typeface="Arial" pitchFamily="34" charset="-120"/>
+              </a:rPr>
+              <a:t>Green Solutions · ملف السوق الزراعي السعودي</a:t>
+            </a:r>
+            <a:endParaRPr lang="en-US" sz="950" dirty="0"/>
+          </a:p>
+        </p:txBody>
+      </p:sp>
+      <p:sp>
+        <p:nvSpPr>
+          <p:cNvPr id="11" name="Text 9"/>
+          <p:cNvSpPr txBox="1"/>
+          <p:nvPr/>
+        </p:nvSpPr>
+        <p:spPr>
+          <a:xfrm>
+            <a:off x="11140135" y="6382512"/>
+            <a:ext cx="548640" cy="274320"/>
+          </a:xfrm>
+          <a:prstGeom prst="rect">
+            <a:avLst/>
+          </a:prstGeom>
+          <a:noFill/>
+          <a:ln/>
+        </p:spPr>
+        <p:txBody>
+          <a:bodyPr wrap="square" lIns="0" tIns="0" rIns="0" bIns="0" rtlCol="0" anchor="ctr"/>
+          <a:lstStyle/>
+          <a:p>
+            <a:pPr rtl="1" algn="r" indent="0" marL="0">
+              <a:buNone/>
+            </a:pPr>
+            <a:r>
+              <a:rPr lang="en-US" sz="950" dirty="0">
+                <a:solidFill>
+                  <a:srgbClr val="6F7D71">
+                    <a:alpha val="80000"/>
+                  </a:srgbClr>
+                </a:solidFill>
+                <a:latin typeface="Arial" pitchFamily="34" charset="0"/>
+                <a:ea typeface="Arial" pitchFamily="34" charset="-122"/>
+                <a:cs typeface="Arial" pitchFamily="34" charset="-120"/>
+              </a:rPr>
+              <a:t>16</a:t>
+            </a:r>
+            <a:endParaRPr lang="en-US" sz="950" dirty="0"/>
+          </a:p>
+        </p:txBody>
+      </p:sp>
+    </p:spTree>
+  </p:cSld>
+  <p:clrMapOvr>
+    <a:masterClrMapping/>
+  </p:clrMapOvr>
+</p:sld>
+</file>
+
+<file path=ppt/slides/slide18.xml><?xml version="1.0" encoding="utf-8"?>
+<p:sld xmlns:a="http://schemas.openxmlformats.org/drawingml/2006/main" xmlns:r="http://schemas.openxmlformats.org/officeDocument/2006/relationships" xmlns:p="http://schemas.openxmlformats.org/presentationml/2006/main">
+  <p:cSld name="Slide 18">
     <p:spTree>
       <p:nvGrpSpPr>
         <p:cNvPr id="1" name=""/>
@@ -3927,7 +9614,7 @@
                 <a:ea typeface="Arial" pitchFamily="34" charset="-122"/>
                 <a:cs typeface="Arial" pitchFamily="34" charset="-120"/>
               </a:rPr>
-              <a:t>10</a:t>
+              <a:t>17</a:t>
             </a:r>
             <a:endParaRPr lang="en-US" sz="950" dirty="0"/>
           </a:p>
@@ -4758,7 +10445,7 @@
               <a:buNone/>
             </a:pPr>
             <a:r>
-              <a:rPr lang="en-US" sz="1000" i="1" dirty="0">
+              <a:rPr lang="en-US" sz="1000" dirty="0">
                 <a:solidFill>
                   <a:srgbClr val="6F7D71"/>
                 </a:solidFill>
@@ -5406,7 +11093,7 @@
                 <a:ea typeface="Arial" pitchFamily="34" charset="-122"/>
                 <a:cs typeface="Arial" pitchFamily="34" charset="-120"/>
               </a:rPr>
-              <a:t>الإنتاج الزراعي</a:t>
+              <a:t>الاقتصاد والأمن الغذائي</a:t>
             </a:r>
             <a:endParaRPr lang="en-US" sz="1150" dirty="0"/>
           </a:p>
@@ -5445,42 +11132,26 @@
                 <a:ea typeface="Arial" pitchFamily="34" charset="-122"/>
                 <a:cs typeface="Arial" pitchFamily="34" charset="-120"/>
               </a:rPr>
-              <a:t>أربعة منتجات تشكّل جوهر الإنتاج المحلي</a:t>
+              <a:t>قدرة شرائية عالية وقاعدة غذائية ضيقة</a:t>
             </a:r>
             <a:endParaRPr lang="en-US" sz="3000" dirty="0"/>
           </a:p>
         </p:txBody>
       </p:sp>
-      <p:graphicFrame>
-        <p:nvGraphicFramePr>
-          <p:cNvPr id="4" name="Chart 0" descr=""/>
-          <p:cNvGraphicFramePr/>
-          <p:nvPr/>
-        </p:nvGraphicFramePr>
-        <p:xfrm>
-          <a:off x="594360" y="1783080"/>
-          <a:ext cx="7360920" cy="3977640"/>
-        </p:xfrm>
-        <a:graphic xmlns:a="http://schemas.openxmlformats.org/drawingml/2006/main">
-          <a:graphicData uri="http://schemas.openxmlformats.org/drawingml/2006/chart">
-            <c:chart xmlns:c="http://schemas.openxmlformats.org/drawingml/2006/chart" r:id="rId1"/>
-          </a:graphicData>
-        </a:graphic>
-      </p:graphicFrame>
-      <p:sp>
-        <p:nvSpPr>
-          <p:cNvPr id="5" name="Shape 2"/>
+      <p:sp>
+        <p:nvSpPr>
+          <p:cNvPr id="4" name="Shape 2"/>
           <p:cNvSpPr/>
           <p:nvPr/>
         </p:nvSpPr>
         <p:spPr>
           <a:xfrm>
-            <a:off x="8275320" y="1783080"/>
-            <a:ext cx="3291840" cy="3977640"/>
+            <a:off x="594360" y="1874520"/>
+            <a:ext cx="2545004" cy="2514600"/>
           </a:xfrm>
           <a:prstGeom prst="roundRect">
             <a:avLst>
-              <a:gd name="adj" fmla="val 2778"/>
+              <a:gd name="adj" fmla="val 3636"/>
             </a:avLst>
           </a:prstGeom>
           <a:solidFill>
@@ -5496,14 +11167,14 @@
       </p:sp>
       <p:sp>
         <p:nvSpPr>
-          <p:cNvPr id="6" name="Text 3"/>
-          <p:cNvSpPr txBox="1"/>
-          <p:nvPr/>
-        </p:nvSpPr>
-        <p:spPr>
-          <a:xfrm>
-            <a:off x="8503920" y="2011680"/>
-            <a:ext cx="2834640" cy="457200"/>
+          <p:cNvPr id="5" name="Text 3"/>
+          <p:cNvSpPr txBox="1"/>
+          <p:nvPr/>
+        </p:nvSpPr>
+        <p:spPr>
+          <a:xfrm>
+            <a:off x="777240" y="2148840"/>
+            <a:ext cx="2179244" cy="960120"/>
           </a:xfrm>
           <a:prstGeom prst="rect">
             <a:avLst/>
@@ -5515,11 +11186,11 @@
           <a:bodyPr wrap="square" lIns="0" tIns="0" rIns="0" bIns="0" rtlCol="0" anchor="ctr"/>
           <a:lstStyle/>
           <a:p>
-            <a:pPr rtl="1" algn="r" indent="0" marL="0">
-              <a:buNone/>
-            </a:pPr>
-            <a:r>
-              <a:rPr lang="en-US" sz="1300" b="1" dirty="0">
+            <a:pPr rtl="1" algn="ctr" indent="0" marL="0">
+              <a:buNone/>
+            </a:pPr>
+            <a:r>
+              <a:rPr lang="en-US" sz="3000" b="1" dirty="0">
                 <a:solidFill>
                   <a:srgbClr val="2C6E49"/>
                 </a:solidFill>
@@ -5527,22 +11198,388 @@
                 <a:ea typeface="Arial" pitchFamily="34" charset="-122"/>
                 <a:cs typeface="Arial" pitchFamily="34" charset="-120"/>
               </a:rPr>
-              <a:t>قراءة</a:t>
-            </a:r>
-            <a:endParaRPr lang="en-US" sz="1300" dirty="0"/>
-          </a:p>
-        </p:txBody>
-      </p:sp>
-      <p:sp>
-        <p:nvSpPr>
-          <p:cNvPr id="7" name="Text 4"/>
-          <p:cNvSpPr txBox="1"/>
-          <p:nvPr/>
-        </p:nvSpPr>
-        <p:spPr>
-          <a:xfrm>
-            <a:off x="8503920" y="2560320"/>
-            <a:ext cx="2834640" cy="3017520"/>
+              <a:t>≈ 33 مليون</a:t>
+            </a:r>
+            <a:endParaRPr lang="en-US" sz="3000" dirty="0"/>
+          </a:p>
+        </p:txBody>
+      </p:sp>
+      <p:sp>
+        <p:nvSpPr>
+          <p:cNvPr id="6" name="Text 4"/>
+          <p:cNvSpPr txBox="1"/>
+          <p:nvPr/>
+        </p:nvSpPr>
+        <p:spPr>
+          <a:xfrm>
+            <a:off x="795528" y="3154680"/>
+            <a:ext cx="2142668" cy="1051560"/>
+          </a:xfrm>
+          <a:prstGeom prst="rect">
+            <a:avLst/>
+          </a:prstGeom>
+          <a:noFill/>
+          <a:ln/>
+        </p:spPr>
+        <p:txBody>
+          <a:bodyPr wrap="square" lIns="0" tIns="0" rIns="0" bIns="0" rtlCol="0" anchor="t"/>
+          <a:lstStyle/>
+          <a:p>
+            <a:pPr rtl="1" algn="ctr" indent="0" marL="0">
+              <a:lnSpc>
+                <a:spcPct val="118000"/>
+              </a:lnSpc>
+              <a:buNone/>
+            </a:pPr>
+            <a:r>
+              <a:rPr lang="en-US" sz="1250" dirty="0">
+                <a:solidFill>
+                  <a:srgbClr val="364239"/>
+                </a:solidFill>
+                <a:latin typeface="Arial" pitchFamily="34" charset="0"/>
+                <a:ea typeface="Arial" pitchFamily="34" charset="-122"/>
+                <a:cs typeface="Arial" pitchFamily="34" charset="-120"/>
+              </a:rPr>
+              <a:t>نخلة في أنحاء المملكة، من أكبر ثروات النخيل في العالم</a:t>
+            </a:r>
+            <a:endParaRPr lang="en-US" sz="1250" dirty="0"/>
+          </a:p>
+        </p:txBody>
+      </p:sp>
+      <p:sp>
+        <p:nvSpPr>
+          <p:cNvPr id="7" name="Shape 5"/>
+          <p:cNvSpPr/>
+          <p:nvPr/>
+        </p:nvSpPr>
+        <p:spPr>
+          <a:xfrm>
+            <a:off x="3413684" y="1874520"/>
+            <a:ext cx="2545004" cy="2514600"/>
+          </a:xfrm>
+          <a:prstGeom prst="roundRect">
+            <a:avLst>
+              <a:gd name="adj" fmla="val 3636"/>
+            </a:avLst>
+          </a:prstGeom>
+          <a:solidFill>
+            <a:srgbClr val="F2F1E8"/>
+          </a:solidFill>
+          <a:ln w="9525">
+            <a:solidFill>
+              <a:srgbClr val="E0DFD0"/>
+            </a:solidFill>
+            <a:prstDash val="solid"/>
+          </a:ln>
+        </p:spPr>
+      </p:sp>
+      <p:sp>
+        <p:nvSpPr>
+          <p:cNvPr id="8" name="Text 6"/>
+          <p:cNvSpPr txBox="1"/>
+          <p:nvPr/>
+        </p:nvSpPr>
+        <p:spPr>
+          <a:xfrm>
+            <a:off x="3596564" y="2148840"/>
+            <a:ext cx="2179244" cy="960120"/>
+          </a:xfrm>
+          <a:prstGeom prst="rect">
+            <a:avLst/>
+          </a:prstGeom>
+          <a:noFill/>
+          <a:ln/>
+        </p:spPr>
+        <p:txBody>
+          <a:bodyPr wrap="square" lIns="0" tIns="0" rIns="0" bIns="0" rtlCol="0" anchor="ctr"/>
+          <a:lstStyle/>
+          <a:p>
+            <a:pPr rtl="1" algn="ctr" indent="0" marL="0">
+              <a:buNone/>
+            </a:pPr>
+            <a:r>
+              <a:rPr lang="en-US" sz="3000" b="1" dirty="0">
+                <a:solidFill>
+                  <a:srgbClr val="2C6E49"/>
+                </a:solidFill>
+                <a:latin typeface="Arial" pitchFamily="34" charset="0"/>
+                <a:ea typeface="Arial" pitchFamily="34" charset="-122"/>
+                <a:cs typeface="Arial" pitchFamily="34" charset="-120"/>
+              </a:rPr>
+              <a:t>≈ 1,5 مليار</a:t>
+            </a:r>
+            <a:endParaRPr lang="en-US" sz="3000" dirty="0"/>
+          </a:p>
+        </p:txBody>
+      </p:sp>
+      <p:sp>
+        <p:nvSpPr>
+          <p:cNvPr id="9" name="Text 7"/>
+          <p:cNvSpPr txBox="1"/>
+          <p:nvPr/>
+        </p:nvSpPr>
+        <p:spPr>
+          <a:xfrm>
+            <a:off x="3614852" y="3154680"/>
+            <a:ext cx="2142668" cy="1051560"/>
+          </a:xfrm>
+          <a:prstGeom prst="rect">
+            <a:avLst/>
+          </a:prstGeom>
+          <a:noFill/>
+          <a:ln/>
+        </p:spPr>
+        <p:txBody>
+          <a:bodyPr wrap="square" lIns="0" tIns="0" rIns="0" bIns="0" rtlCol="0" anchor="t"/>
+          <a:lstStyle/>
+          <a:p>
+            <a:pPr rtl="1" algn="ctr" indent="0" marL="0">
+              <a:lnSpc>
+                <a:spcPct val="118000"/>
+              </a:lnSpc>
+              <a:buNone/>
+            </a:pPr>
+            <a:r>
+              <a:rPr lang="en-US" sz="1250" dirty="0">
+                <a:solidFill>
+                  <a:srgbClr val="364239"/>
+                </a:solidFill>
+                <a:latin typeface="Arial" pitchFamily="34" charset="0"/>
+                <a:ea typeface="Arial" pitchFamily="34" charset="-122"/>
+                <a:cs typeface="Arial" pitchFamily="34" charset="-120"/>
+              </a:rPr>
+              <a:t>ريال قيمة صادرات التمور في عام 2023</a:t>
+            </a:r>
+            <a:endParaRPr lang="en-US" sz="1250" dirty="0"/>
+          </a:p>
+        </p:txBody>
+      </p:sp>
+      <p:sp>
+        <p:nvSpPr>
+          <p:cNvPr id="10" name="Shape 8"/>
+          <p:cNvSpPr/>
+          <p:nvPr/>
+        </p:nvSpPr>
+        <p:spPr>
+          <a:xfrm>
+            <a:off x="6233008" y="1874520"/>
+            <a:ext cx="2545004" cy="2514600"/>
+          </a:xfrm>
+          <a:prstGeom prst="roundRect">
+            <a:avLst>
+              <a:gd name="adj" fmla="val 3636"/>
+            </a:avLst>
+          </a:prstGeom>
+          <a:solidFill>
+            <a:srgbClr val="F2F1E8"/>
+          </a:solidFill>
+          <a:ln w="9525">
+            <a:solidFill>
+              <a:srgbClr val="E0DFD0"/>
+            </a:solidFill>
+            <a:prstDash val="solid"/>
+          </a:ln>
+        </p:spPr>
+      </p:sp>
+      <p:sp>
+        <p:nvSpPr>
+          <p:cNvPr id="11" name="Text 9"/>
+          <p:cNvSpPr txBox="1"/>
+          <p:nvPr/>
+        </p:nvSpPr>
+        <p:spPr>
+          <a:xfrm>
+            <a:off x="6415888" y="2148840"/>
+            <a:ext cx="2179244" cy="960120"/>
+          </a:xfrm>
+          <a:prstGeom prst="rect">
+            <a:avLst/>
+          </a:prstGeom>
+          <a:noFill/>
+          <a:ln/>
+        </p:spPr>
+        <p:txBody>
+          <a:bodyPr wrap="square" lIns="0" tIns="0" rIns="0" bIns="0" rtlCol="0" anchor="ctr"/>
+          <a:lstStyle/>
+          <a:p>
+            <a:pPr rtl="1" algn="ctr" indent="0" marL="0">
+              <a:buNone/>
+            </a:pPr>
+            <a:r>
+              <a:rPr lang="en-US" sz="3800" b="1" dirty="0">
+                <a:solidFill>
+                  <a:srgbClr val="2C6E49"/>
+                </a:solidFill>
+                <a:latin typeface="Arial" pitchFamily="34" charset="0"/>
+                <a:ea typeface="Arial" pitchFamily="34" charset="-122"/>
+                <a:cs typeface="Arial" pitchFamily="34" charset="-120"/>
+              </a:rPr>
+              <a:t>&gt; 100 %</a:t>
+            </a:r>
+            <a:endParaRPr lang="en-US" sz="3800" dirty="0"/>
+          </a:p>
+        </p:txBody>
+      </p:sp>
+      <p:sp>
+        <p:nvSpPr>
+          <p:cNvPr id="12" name="Text 10"/>
+          <p:cNvSpPr txBox="1"/>
+          <p:nvPr/>
+        </p:nvSpPr>
+        <p:spPr>
+          <a:xfrm>
+            <a:off x="6434176" y="3154680"/>
+            <a:ext cx="2142668" cy="1051560"/>
+          </a:xfrm>
+          <a:prstGeom prst="rect">
+            <a:avLst/>
+          </a:prstGeom>
+          <a:noFill/>
+          <a:ln/>
+        </p:spPr>
+        <p:txBody>
+          <a:bodyPr wrap="square" lIns="0" tIns="0" rIns="0" bIns="0" rtlCol="0" anchor="t"/>
+          <a:lstStyle/>
+          <a:p>
+            <a:pPr rtl="1" algn="ctr" indent="0" marL="0">
+              <a:lnSpc>
+                <a:spcPct val="118000"/>
+              </a:lnSpc>
+              <a:buNone/>
+            </a:pPr>
+            <a:r>
+              <a:rPr lang="en-US" sz="1250" dirty="0">
+                <a:solidFill>
+                  <a:srgbClr val="364239"/>
+                </a:solidFill>
+                <a:latin typeface="Arial" pitchFamily="34" charset="0"/>
+                <a:ea typeface="Arial" pitchFamily="34" charset="-122"/>
+                <a:cs typeface="Arial" pitchFamily="34" charset="-120"/>
+              </a:rPr>
+              <a:t>نسبة الاكتفاء الذاتي من التمور والحليب</a:t>
+            </a:r>
+            <a:endParaRPr lang="en-US" sz="1250" dirty="0"/>
+          </a:p>
+        </p:txBody>
+      </p:sp>
+      <p:sp>
+        <p:nvSpPr>
+          <p:cNvPr id="13" name="Shape 11"/>
+          <p:cNvSpPr/>
+          <p:nvPr/>
+        </p:nvSpPr>
+        <p:spPr>
+          <a:xfrm>
+            <a:off x="9052331" y="1874520"/>
+            <a:ext cx="2545004" cy="2514600"/>
+          </a:xfrm>
+          <a:prstGeom prst="roundRect">
+            <a:avLst>
+              <a:gd name="adj" fmla="val 3636"/>
+            </a:avLst>
+          </a:prstGeom>
+          <a:solidFill>
+            <a:srgbClr val="F2F1E8"/>
+          </a:solidFill>
+          <a:ln w="9525">
+            <a:solidFill>
+              <a:srgbClr val="E0DFD0"/>
+            </a:solidFill>
+            <a:prstDash val="solid"/>
+          </a:ln>
+        </p:spPr>
+      </p:sp>
+      <p:sp>
+        <p:nvSpPr>
+          <p:cNvPr id="14" name="Text 12"/>
+          <p:cNvSpPr txBox="1"/>
+          <p:nvPr/>
+        </p:nvSpPr>
+        <p:spPr>
+          <a:xfrm>
+            <a:off x="9235211" y="2148840"/>
+            <a:ext cx="2179244" cy="960120"/>
+          </a:xfrm>
+          <a:prstGeom prst="rect">
+            <a:avLst/>
+          </a:prstGeom>
+          <a:noFill/>
+          <a:ln/>
+        </p:spPr>
+        <p:txBody>
+          <a:bodyPr wrap="square" lIns="0" tIns="0" rIns="0" bIns="0" rtlCol="0" anchor="ctr"/>
+          <a:lstStyle/>
+          <a:p>
+            <a:pPr rtl="1" algn="ctr" indent="0" marL="0">
+              <a:buNone/>
+            </a:pPr>
+            <a:r>
+              <a:rPr lang="en-US" sz="3800" b="1" dirty="0">
+                <a:solidFill>
+                  <a:srgbClr val="2C6E49"/>
+                </a:solidFill>
+                <a:latin typeface="Arial" pitchFamily="34" charset="0"/>
+                <a:ea typeface="Arial" pitchFamily="34" charset="-122"/>
+                <a:cs typeface="Arial" pitchFamily="34" charset="-120"/>
+              </a:rPr>
+              <a:t>≈ 70 %</a:t>
+            </a:r>
+            <a:endParaRPr lang="en-US" sz="3800" dirty="0"/>
+          </a:p>
+        </p:txBody>
+      </p:sp>
+      <p:sp>
+        <p:nvSpPr>
+          <p:cNvPr id="15" name="Text 13"/>
+          <p:cNvSpPr txBox="1"/>
+          <p:nvPr/>
+        </p:nvSpPr>
+        <p:spPr>
+          <a:xfrm>
+            <a:off x="9253499" y="3154680"/>
+            <a:ext cx="2142668" cy="1051560"/>
+          </a:xfrm>
+          <a:prstGeom prst="rect">
+            <a:avLst/>
+          </a:prstGeom>
+          <a:noFill/>
+          <a:ln/>
+        </p:spPr>
+        <p:txBody>
+          <a:bodyPr wrap="square" lIns="0" tIns="0" rIns="0" bIns="0" rtlCol="0" anchor="t"/>
+          <a:lstStyle/>
+          <a:p>
+            <a:pPr rtl="1" algn="ctr" indent="0" marL="0">
+              <a:lnSpc>
+                <a:spcPct val="118000"/>
+              </a:lnSpc>
+              <a:buNone/>
+            </a:pPr>
+            <a:r>
+              <a:rPr lang="en-US" sz="1250" dirty="0">
+                <a:solidFill>
+                  <a:srgbClr val="364239"/>
+                </a:solidFill>
+                <a:latin typeface="Arial" pitchFamily="34" charset="0"/>
+                <a:ea typeface="Arial" pitchFamily="34" charset="-122"/>
+                <a:cs typeface="Arial" pitchFamily="34" charset="-120"/>
+              </a:rPr>
+              <a:t>نسبة الاكتفاء الذاتي من الدواجن، والهدف 80 %</a:t>
+            </a:r>
+            <a:endParaRPr lang="en-US" sz="1250" dirty="0"/>
+          </a:p>
+        </p:txBody>
+      </p:sp>
+      <p:sp>
+        <p:nvSpPr>
+          <p:cNvPr id="16" name="Text 14"/>
+          <p:cNvSpPr txBox="1"/>
+          <p:nvPr/>
+        </p:nvSpPr>
+        <p:spPr>
+          <a:xfrm>
+            <a:off x="594360" y="4709160"/>
+            <a:ext cx="11002975" cy="1097280"/>
           </a:xfrm>
           <a:prstGeom prst="rect">
             <a:avLst/>
@@ -5556,12 +11593,12 @@
           <a:p>
             <a:pPr rtl="1" algn="r" indent="0" marL="0">
               <a:lnSpc>
-                <a:spcPct val="125000"/>
+                <a:spcPct val="130000"/>
               </a:lnSpc>
               <a:buNone/>
             </a:pPr>
             <a:r>
-              <a:rPr lang="en-US" sz="1200" dirty="0">
+              <a:rPr lang="en-US" sz="1350" dirty="0">
                 <a:solidFill>
                   <a:srgbClr val="364239"/>
                 </a:solidFill>
@@ -5569,44 +11606,15 @@
                 <a:ea typeface="Arial" pitchFamily="34" charset="-122"/>
                 <a:cs typeface="Arial" pitchFamily="34" charset="-120"/>
               </a:rPr>
-              <a:t>التمور والخضروات المحمية هما الأعلى قيمة للهكتار، وفيهما يتحول توفير الماء إلى هامش مباشر.</a:t>
-            </a:r>
-            <a:endParaRPr lang="en-US" sz="1200" dirty="0"/>
-          </a:p>
-          <a:p>
-            <a:pPr rtl="1" algn="r" indent="0" marL="0">
-              <a:lnSpc>
-                <a:spcPct val="125000"/>
-              </a:lnSpc>
-              <a:buNone/>
-            </a:pPr>
-            <a:endParaRPr lang="en-US" sz="1200" dirty="0"/>
-          </a:p>
-          <a:p>
-            <a:pPr rtl="1" algn="r" indent="0" marL="0">
-              <a:lnSpc>
-                <a:spcPct val="125000"/>
-              </a:lnSpc>
-              <a:buNone/>
-            </a:pPr>
-            <a:r>
-              <a:rPr lang="en-US" sz="1200" dirty="0">
-                <a:solidFill>
-                  <a:srgbClr val="364239"/>
-                </a:solidFill>
-                <a:latin typeface="Arial" pitchFamily="34" charset="0"/>
-                <a:ea typeface="Arial" pitchFamily="34" charset="-122"/>
-                <a:cs typeface="Arial" pitchFamily="34" charset="-120"/>
-              </a:rPr>
-              <a:t>* عاد القمح ضمن حصص محدودة بعد التخلي عن هدف الاكتفاء الذاتي؛ يتغير حجمه من موسم إلى آخر تبعاً للسياسة المائية.</a:t>
-            </a:r>
-            <a:endParaRPr lang="en-US" sz="1200" dirty="0"/>
-          </a:p>
-        </p:txBody>
-      </p:sp>
-      <p:sp>
-        <p:nvSpPr>
-          <p:cNvPr id="8" name="Text 5"/>
+              <a:t>تشجع رؤية 2030 والاستراتيجية الوطنية للأمن الغذائي الإنتاج المحلي عالي القيمة — التمور والخضروات المحمية والدواجن — وتربطانه بترشيد المياه. أما الفجوة الغذائية فتبقى في الحبوب والأعلاف، ومعظمها مستورد.</a:t>
+            </a:r>
+            <a:endParaRPr lang="en-US" sz="1350" dirty="0"/>
+          </a:p>
+        </p:txBody>
+      </p:sp>
+      <p:sp>
+        <p:nvSpPr>
+          <p:cNvPr id="17" name="Text 15"/>
           <p:cNvSpPr txBox="1"/>
           <p:nvPr/>
         </p:nvSpPr>
@@ -5647,7 +11655,7 @@
       </p:sp>
       <p:sp>
         <p:nvSpPr>
-          <p:cNvPr id="9" name="Text 6"/>
+          <p:cNvPr id="18" name="Text 16"/>
           <p:cNvSpPr txBox="1"/>
           <p:nvPr/>
         </p:nvSpPr>
@@ -5751,7 +11759,7 @@
                 <a:ea typeface="Arial" pitchFamily="34" charset="-122"/>
                 <a:cs typeface="Arial" pitchFamily="34" charset="-120"/>
               </a:rPr>
-              <a:t>استجابتنا</a:t>
+              <a:t>الإنتاج الزراعي</a:t>
             </a:r>
             <a:endParaRPr lang="en-US" sz="1150" dirty="0"/>
           </a:p>
@@ -5790,340 +11798,42 @@
                 <a:ea typeface="Arial" pitchFamily="34" charset="-122"/>
                 <a:cs typeface="Arial" pitchFamily="34" charset="-120"/>
               </a:rPr>
-              <a:t>تقنيتان لقيدين مختلفين</a:t>
+              <a:t>أربعة منتجات تشكّل جوهر الإنتاج المحلي</a:t>
             </a:r>
             <a:endParaRPr lang="en-US" sz="3000" dirty="0"/>
           </a:p>
         </p:txBody>
       </p:sp>
-      <p:sp>
-        <p:nvSpPr>
-          <p:cNvPr id="4" name="Text 2"/>
-          <p:cNvSpPr txBox="1"/>
-          <p:nvPr/>
-        </p:nvSpPr>
-        <p:spPr>
-          <a:xfrm>
-            <a:off x="594360" y="1783080"/>
-            <a:ext cx="5227168" cy="411480"/>
-          </a:xfrm>
-          <a:prstGeom prst="rect">
-            <a:avLst/>
-          </a:prstGeom>
-          <a:noFill/>
-          <a:ln/>
-        </p:spPr>
-        <p:txBody>
-          <a:bodyPr wrap="square" lIns="0" tIns="0" rIns="0" bIns="0" rtlCol="0" anchor="ctr"/>
-          <a:lstStyle/>
-          <a:p>
-            <a:pPr rtl="1" algn="r" indent="0" marL="0">
-              <a:buNone/>
-            </a:pPr>
-            <a:r>
-              <a:rPr lang="en-US" sz="1600" b="1" dirty="0">
-                <a:solidFill>
-                  <a:srgbClr val="2C6E49"/>
-                </a:solidFill>
-                <a:latin typeface="Arial" pitchFamily="34" charset="0"/>
-                <a:ea typeface="Arial" pitchFamily="34" charset="-122"/>
-                <a:cs typeface="Arial" pitchFamily="34" charset="-120"/>
-              </a:rPr>
-              <a:t>EVERGREEN® — احتباس الماء</a:t>
-            </a:r>
-            <a:endParaRPr lang="en-US" sz="1600" dirty="0"/>
-          </a:p>
-        </p:txBody>
-      </p:sp>
-      <p:sp>
-        <p:nvSpPr>
-          <p:cNvPr id="5" name="Text 3"/>
-          <p:cNvSpPr txBox="1"/>
-          <p:nvPr/>
-        </p:nvSpPr>
-        <p:spPr>
-          <a:xfrm>
-            <a:off x="594360" y="2286000"/>
-            <a:ext cx="5227168" cy="2468880"/>
-          </a:xfrm>
-          <a:prstGeom prst="rect">
-            <a:avLst/>
-          </a:prstGeom>
-          <a:noFill/>
-          <a:ln/>
-        </p:spPr>
-        <p:txBody>
-          <a:bodyPr wrap="square" lIns="0" tIns="0" rIns="0" bIns="0" rtlCol="0" anchor="t"/>
-          <a:lstStyle/>
-          <a:p>
-            <a:pPr algn="r" marL="342900" indent="-342900">
-              <a:lnSpc>
-                <a:spcPct val="122000"/>
-              </a:lnSpc>
-              <a:spcAft>
-                <a:spcPts val="1000"/>
-              </a:spcAft>
-              <a:buSzPct val="100000"/>
-              <a:buChar char="•"/>
-            </a:pPr>
-            <a:r>
-              <a:rPr lang="en-US" sz="1350" dirty="0">
-                <a:solidFill>
-                  <a:srgbClr val="364239"/>
-                </a:solidFill>
-                <a:latin typeface="Arial" pitchFamily="34" charset="0"/>
-                <a:ea typeface="Arial" pitchFamily="34" charset="-122"/>
-                <a:cs typeface="Arial" pitchFamily="34" charset="-120"/>
-              </a:rPr>
-              <a:t>مادة حابسة للماء أساسها البوتاسيوم، تُوضع في منطقة الجذور عند الغرس أو عند تجديد الزراعة.</a:t>
-            </a:r>
-            <a:endParaRPr lang="en-US" sz="1350" dirty="0"/>
-          </a:p>
-          <a:p>
-            <a:pPr algn="r" marL="342900" indent="-342900">
-              <a:lnSpc>
-                <a:spcPct val="122000"/>
-              </a:lnSpc>
-              <a:spcAft>
-                <a:spcPts val="1000"/>
-              </a:spcAft>
-              <a:buSzPct val="100000"/>
-              <a:buChar char="•"/>
-            </a:pPr>
-            <a:r>
-              <a:rPr lang="en-US" sz="1350" dirty="0">
-                <a:solidFill>
-                  <a:srgbClr val="364239"/>
-                </a:solidFill>
-                <a:latin typeface="Arial" pitchFamily="34" charset="0"/>
-                <a:ea typeface="Arial" pitchFamily="34" charset="-122"/>
-                <a:cs typeface="Arial" pitchFamily="34" charset="-120"/>
-              </a:rPr>
-              <a:t>تلتقط ماء الري أو المطر وتعيده إلى النبات تدريجياً، فتلغي الإجهاد المائي في المراحل الحرجة.</a:t>
-            </a:r>
-            <a:endParaRPr lang="en-US" sz="1350" dirty="0"/>
-          </a:p>
-          <a:p>
-            <a:pPr algn="r" marL="342900" indent="-342900">
-              <a:lnSpc>
-                <a:spcPct val="122000"/>
-              </a:lnSpc>
-              <a:spcAft>
-                <a:spcPts val="1000"/>
-              </a:spcAft>
-              <a:buSzPct val="100000"/>
-              <a:buChar char="•"/>
-            </a:pPr>
-            <a:r>
-              <a:rPr lang="en-US" sz="1350" dirty="0">
-                <a:solidFill>
-                  <a:srgbClr val="364239"/>
-                </a:solidFill>
-                <a:latin typeface="Arial" pitchFamily="34" charset="0"/>
-                <a:ea typeface="Arial" pitchFamily="34" charset="-122"/>
-                <a:cs typeface="Arial" pitchFamily="34" charset="-120"/>
-              </a:rPr>
-              <a:t>قدرة امتصاص تبلغ نحو 300 ضعف وزنها، ومفعول مفيد يمتد من 3 إلى 4 سنوات داخل التربة.</a:t>
-            </a:r>
-            <a:endParaRPr lang="en-US" sz="1350" dirty="0"/>
-          </a:p>
-          <a:p>
-            <a:pPr algn="r" marL="342900" indent="-342900">
-              <a:lnSpc>
-                <a:spcPct val="122000"/>
-              </a:lnSpc>
-              <a:spcAft>
-                <a:spcPts val="1000"/>
-              </a:spcAft>
-              <a:buSzPct val="100000"/>
-              <a:buChar char="•"/>
-            </a:pPr>
-            <a:r>
-              <a:rPr lang="en-US" sz="1350" dirty="0">
-                <a:solidFill>
-                  <a:srgbClr val="364239"/>
-                </a:solidFill>
-                <a:latin typeface="Arial" pitchFamily="34" charset="0"/>
-                <a:ea typeface="Arial" pitchFamily="34" charset="-122"/>
-                <a:cs typeface="Arial" pitchFamily="34" charset="-120"/>
-              </a:rPr>
-              <a:t>تتحلل بنسبة 20 إلى 25 % سنوياً، دون تراكم ودون خطر جرعة زائدة.</a:t>
-            </a:r>
-            <a:endParaRPr lang="en-US" sz="1350" dirty="0"/>
-          </a:p>
-        </p:txBody>
-      </p:sp>
-      <p:sp>
-        <p:nvSpPr>
-          <p:cNvPr id="6" name="Text 4"/>
-          <p:cNvSpPr txBox="1"/>
-          <p:nvPr/>
-        </p:nvSpPr>
-        <p:spPr>
-          <a:xfrm>
-            <a:off x="6370168" y="1783080"/>
-            <a:ext cx="5227168" cy="411480"/>
-          </a:xfrm>
-          <a:prstGeom prst="rect">
-            <a:avLst/>
-          </a:prstGeom>
-          <a:noFill/>
-          <a:ln/>
-        </p:spPr>
-        <p:txBody>
-          <a:bodyPr wrap="square" lIns="0" tIns="0" rIns="0" bIns="0" rtlCol="0" anchor="ctr"/>
-          <a:lstStyle/>
-          <a:p>
-            <a:pPr rtl="1" algn="r" indent="0" marL="0">
-              <a:buNone/>
-            </a:pPr>
-            <a:r>
-              <a:rPr lang="en-US" sz="1600" b="1" dirty="0">
-                <a:solidFill>
-                  <a:srgbClr val="2C6E49"/>
-                </a:solidFill>
-                <a:latin typeface="Arial" pitchFamily="34" charset="0"/>
-                <a:ea typeface="Arial" pitchFamily="34" charset="-122"/>
-                <a:cs typeface="Arial" pitchFamily="34" charset="-120"/>
-              </a:rPr>
-              <a:t>ECOFERT® — تغذية دون إنهاك التربة</a:t>
-            </a:r>
-            <a:endParaRPr lang="en-US" sz="1600" dirty="0"/>
-          </a:p>
-        </p:txBody>
-      </p:sp>
-      <p:sp>
-        <p:nvSpPr>
-          <p:cNvPr id="7" name="Text 5"/>
-          <p:cNvSpPr txBox="1"/>
-          <p:nvPr/>
-        </p:nvSpPr>
-        <p:spPr>
-          <a:xfrm>
-            <a:off x="6370168" y="2286000"/>
-            <a:ext cx="5227168" cy="2468880"/>
-          </a:xfrm>
-          <a:prstGeom prst="rect">
-            <a:avLst/>
-          </a:prstGeom>
-          <a:noFill/>
-          <a:ln/>
-        </p:spPr>
-        <p:txBody>
-          <a:bodyPr wrap="square" lIns="0" tIns="0" rIns="0" bIns="0" rtlCol="0" anchor="t"/>
-          <a:lstStyle/>
-          <a:p>
-            <a:pPr algn="r" marL="342900" indent="-342900">
-              <a:lnSpc>
-                <a:spcPct val="122000"/>
-              </a:lnSpc>
-              <a:spcAft>
-                <a:spcPts val="1000"/>
-              </a:spcAft>
-              <a:buSzPct val="100000"/>
-              <a:buChar char="•"/>
-            </a:pPr>
-            <a:r>
-              <a:rPr lang="en-US" sz="1350" dirty="0">
-                <a:solidFill>
-                  <a:srgbClr val="364239"/>
-                </a:solidFill>
-                <a:latin typeface="Arial" pitchFamily="34" charset="0"/>
-                <a:ea typeface="Arial" pitchFamily="34" charset="-122"/>
-                <a:cs typeface="Arial" pitchFamily="34" charset="-120"/>
-              </a:rPr>
-              <a:t>سماد بجرعات دقيقة من الأحماض الأمينية والنيتروجين والفوسفور والبوتاسيوم، من موارد متجددة.</a:t>
-            </a:r>
-            <a:endParaRPr lang="en-US" sz="1350" dirty="0"/>
-          </a:p>
-          <a:p>
-            <a:pPr algn="r" marL="342900" indent="-342900">
-              <a:lnSpc>
-                <a:spcPct val="122000"/>
-              </a:lnSpc>
-              <a:spcAft>
-                <a:spcPts val="1000"/>
-              </a:spcAft>
-              <a:buSzPct val="100000"/>
-              <a:buChar char="•"/>
-            </a:pPr>
-            <a:r>
-              <a:rPr lang="en-US" sz="1350" dirty="0">
-                <a:solidFill>
-                  <a:srgbClr val="364239"/>
-                </a:solidFill>
-                <a:latin typeface="Arial" pitchFamily="34" charset="0"/>
-                <a:ea typeface="Arial" pitchFamily="34" charset="-122"/>
-                <a:cs typeface="Arial" pitchFamily="34" charset="-120"/>
-              </a:rPr>
-              <a:t>غير مخلّب: لا يستنزف مركّب الطين والدبال، ولا يرفع الملوحة ولا نسبة النترات.</a:t>
-            </a:r>
-            <a:endParaRPr lang="en-US" sz="1350" dirty="0"/>
-          </a:p>
-          <a:p>
-            <a:pPr algn="r" marL="342900" indent="-342900">
-              <a:lnSpc>
-                <a:spcPct val="122000"/>
-              </a:lnSpc>
-              <a:spcAft>
-                <a:spcPts val="1000"/>
-              </a:spcAft>
-              <a:buSzPct val="100000"/>
-              <a:buChar char="•"/>
-            </a:pPr>
-            <a:r>
-              <a:rPr lang="en-US" sz="1350" dirty="0">
-                <a:solidFill>
-                  <a:srgbClr val="364239"/>
-                </a:solidFill>
-                <a:latin typeface="Arial" pitchFamily="34" charset="0"/>
-                <a:ea typeface="Arial" pitchFamily="34" charset="-122"/>
-                <a:cs typeface="Arial" pitchFamily="34" charset="-120"/>
-              </a:rPr>
-              <a:t>حاصل على شهادة SOHISCERT وشهادة الزراعة العضوية الأوروبية — شرط للدخول في دفاتر شروط المشترين الأوروبيين.</a:t>
-            </a:r>
-            <a:endParaRPr lang="en-US" sz="1350" dirty="0"/>
-          </a:p>
-          <a:p>
-            <a:pPr algn="r" marL="342900" indent="-342900">
-              <a:lnSpc>
-                <a:spcPct val="122000"/>
-              </a:lnSpc>
-              <a:spcAft>
-                <a:spcPts val="1000"/>
-              </a:spcAft>
-              <a:buSzPct val="100000"/>
-              <a:buChar char="•"/>
-            </a:pPr>
-            <a:r>
-              <a:rPr lang="en-US" sz="1350" dirty="0">
-                <a:solidFill>
-                  <a:srgbClr val="364239"/>
-                </a:solidFill>
-                <a:latin typeface="Arial" pitchFamily="34" charset="0"/>
-                <a:ea typeface="Arial" pitchFamily="34" charset="-122"/>
-                <a:cs typeface="Arial" pitchFamily="34" charset="-120"/>
-              </a:rPr>
-              <a:t>من قنينة إلى أربع قنينات سعة 140 مل للهكتار، متوافق مع أنظمة الري بالتسميد القائمة.</a:t>
-            </a:r>
-            <a:endParaRPr lang="en-US" sz="1350" dirty="0"/>
-          </a:p>
-        </p:txBody>
-      </p:sp>
-      <p:sp>
-        <p:nvSpPr>
-          <p:cNvPr id="8" name="Shape 6"/>
+      <p:graphicFrame>
+        <p:nvGraphicFramePr>
+          <p:cNvPr id="4" name="Chart 0" descr=""/>
+          <p:cNvGraphicFramePr/>
+          <p:nvPr/>
+        </p:nvGraphicFramePr>
+        <p:xfrm>
+          <a:off x="594360" y="1783080"/>
+          <a:ext cx="7360920" cy="3977640"/>
+        </p:xfrm>
+        <a:graphic xmlns:a="http://schemas.openxmlformats.org/drawingml/2006/main">
+          <a:graphicData uri="http://schemas.openxmlformats.org/drawingml/2006/chart">
+            <c:chart xmlns:c="http://schemas.openxmlformats.org/drawingml/2006/chart" r:id="rId1"/>
+          </a:graphicData>
+        </a:graphic>
+      </p:graphicFrame>
+      <p:sp>
+        <p:nvSpPr>
+          <p:cNvPr id="5" name="Shape 2"/>
           <p:cNvSpPr/>
           <p:nvPr/>
         </p:nvSpPr>
         <p:spPr>
           <a:xfrm>
-            <a:off x="594360" y="4846320"/>
-            <a:ext cx="11002975" cy="960120"/>
+            <a:off x="8275320" y="1783080"/>
+            <a:ext cx="3291840" cy="3977640"/>
           </a:xfrm>
           <a:prstGeom prst="roundRect">
             <a:avLst>
-              <a:gd name="adj" fmla="val 7619"/>
+              <a:gd name="adj" fmla="val 2778"/>
             </a:avLst>
           </a:prstGeom>
           <a:solidFill>
@@ -6139,14 +11849,53 @@
       </p:sp>
       <p:sp>
         <p:nvSpPr>
-          <p:cNvPr id="9" name="Text 7"/>
-          <p:cNvSpPr txBox="1"/>
-          <p:nvPr/>
-        </p:nvSpPr>
-        <p:spPr>
-          <a:xfrm>
-            <a:off x="822960" y="4983480"/>
-            <a:ext cx="10545775" cy="713232"/>
+          <p:cNvPr id="6" name="Text 3"/>
+          <p:cNvSpPr txBox="1"/>
+          <p:nvPr/>
+        </p:nvSpPr>
+        <p:spPr>
+          <a:xfrm>
+            <a:off x="8503920" y="2011680"/>
+            <a:ext cx="2834640" cy="457200"/>
+          </a:xfrm>
+          <a:prstGeom prst="rect">
+            <a:avLst/>
+          </a:prstGeom>
+          <a:noFill/>
+          <a:ln/>
+        </p:spPr>
+        <p:txBody>
+          <a:bodyPr wrap="square" lIns="0" tIns="0" rIns="0" bIns="0" rtlCol="0" anchor="ctr"/>
+          <a:lstStyle/>
+          <a:p>
+            <a:pPr rtl="1" algn="r" indent="0" marL="0">
+              <a:buNone/>
+            </a:pPr>
+            <a:r>
+              <a:rPr lang="en-US" sz="1300" b="1" dirty="0">
+                <a:solidFill>
+                  <a:srgbClr val="2C6E49"/>
+                </a:solidFill>
+                <a:latin typeface="Arial" pitchFamily="34" charset="0"/>
+                <a:ea typeface="Arial" pitchFamily="34" charset="-122"/>
+                <a:cs typeface="Arial" pitchFamily="34" charset="-120"/>
+              </a:rPr>
+              <a:t>قراءة</a:t>
+            </a:r>
+            <a:endParaRPr lang="en-US" sz="1300" dirty="0"/>
+          </a:p>
+        </p:txBody>
+      </p:sp>
+      <p:sp>
+        <p:nvSpPr>
+          <p:cNvPr id="7" name="Text 4"/>
+          <p:cNvSpPr txBox="1"/>
+          <p:nvPr/>
+        </p:nvSpPr>
+        <p:spPr>
+          <a:xfrm>
+            <a:off x="8503920" y="2560320"/>
+            <a:ext cx="2834640" cy="3017520"/>
           </a:xfrm>
           <a:prstGeom prst="rect">
             <a:avLst/>
@@ -6160,28 +11909,57 @@
           <a:p>
             <a:pPr rtl="1" algn="r" indent="0" marL="0">
               <a:lnSpc>
-                <a:spcPct val="118000"/>
+                <a:spcPct val="125000"/>
               </a:lnSpc>
               <a:buNone/>
             </a:pPr>
             <a:r>
-              <a:rPr lang="en-US" sz="1100" dirty="0">
-                <a:solidFill>
-                  <a:srgbClr val="6F7D71"/>
-                </a:solidFill>
-                <a:latin typeface="Arial" pitchFamily="34" charset="0"/>
-                <a:ea typeface="Arial" pitchFamily="34" charset="-122"/>
-                <a:cs typeface="Arial" pitchFamily="34" charset="-120"/>
-              </a:rPr>
-              <a:t>يُباع المنتجان منفصلين، غير أنهما صُمّما ليعزّز أحدهما الآخر: الحابس للماء يطيل مدة توافر الماء، والسماد يثمّن هذا الماء المتاح دون إنهاك التربة.</a:t>
-            </a:r>
-            <a:endParaRPr lang="en-US" sz="1100" dirty="0"/>
-          </a:p>
-        </p:txBody>
-      </p:sp>
-      <p:sp>
-        <p:nvSpPr>
-          <p:cNvPr id="10" name="Text 8"/>
+              <a:rPr lang="en-US" sz="1200" dirty="0">
+                <a:solidFill>
+                  <a:srgbClr val="364239"/>
+                </a:solidFill>
+                <a:latin typeface="Arial" pitchFamily="34" charset="0"/>
+                <a:ea typeface="Arial" pitchFamily="34" charset="-122"/>
+                <a:cs typeface="Arial" pitchFamily="34" charset="-120"/>
+              </a:rPr>
+              <a:t>التمور والخضروات المحمية هما الأعلى قيمة للهكتار، وفيهما يتحول توفير الماء إلى هامش مباشر.</a:t>
+            </a:r>
+            <a:endParaRPr lang="en-US" sz="1200" dirty="0"/>
+          </a:p>
+          <a:p>
+            <a:pPr rtl="1" algn="r" indent="0" marL="0">
+              <a:lnSpc>
+                <a:spcPct val="125000"/>
+              </a:lnSpc>
+              <a:buNone/>
+            </a:pPr>
+            <a:endParaRPr lang="en-US" sz="1200" dirty="0"/>
+          </a:p>
+          <a:p>
+            <a:pPr rtl="1" algn="r" indent="0" marL="0">
+              <a:lnSpc>
+                <a:spcPct val="125000"/>
+              </a:lnSpc>
+              <a:buNone/>
+            </a:pPr>
+            <a:r>
+              <a:rPr lang="en-US" sz="1200" dirty="0">
+                <a:solidFill>
+                  <a:srgbClr val="364239"/>
+                </a:solidFill>
+                <a:latin typeface="Arial" pitchFamily="34" charset="0"/>
+                <a:ea typeface="Arial" pitchFamily="34" charset="-122"/>
+                <a:cs typeface="Arial" pitchFamily="34" charset="-120"/>
+              </a:rPr>
+              <a:t>* عاد القمح ضمن حصص محدودة بعد التخلي عن هدف الاكتفاء الذاتي؛ يتغير حجمه من موسم إلى آخر تبعاً للسياسة المائية.</a:t>
+            </a:r>
+            <a:endParaRPr lang="en-US" sz="1200" dirty="0"/>
+          </a:p>
+        </p:txBody>
+      </p:sp>
+      <p:sp>
+        <p:nvSpPr>
+          <p:cNvPr id="8" name="Text 5"/>
           <p:cNvSpPr txBox="1"/>
           <p:nvPr/>
         </p:nvSpPr>
@@ -6222,7 +12000,7 @@
       </p:sp>
       <p:sp>
         <p:nvSpPr>
-          <p:cNvPr id="11" name="Text 9"/>
+          <p:cNvPr id="9" name="Text 6"/>
           <p:cNvSpPr txBox="1"/>
           <p:nvPr/>
         </p:nvSpPr>
@@ -6326,7 +12104,7 @@
                 <a:ea typeface="Arial" pitchFamily="34" charset="-122"/>
                 <a:cs typeface="Arial" pitchFamily="34" charset="-120"/>
               </a:rPr>
-              <a:t>أرقام استرشادية</a:t>
+              <a:t>القطاع الأول</a:t>
             </a:r>
             <a:endParaRPr lang="en-US" sz="1150" dirty="0"/>
           </a:p>
@@ -6365,168 +12143,181 @@
                 <a:ea typeface="Arial" pitchFamily="34" charset="-122"/>
                 <a:cs typeface="Arial" pitchFamily="34" charset="-120"/>
               </a:rPr>
-              <a:t>توفير الماء المتوقع حسب أسلوب الري</a:t>
+              <a:t>التمور: ثروة وطنية تحت ضغط الماء والملوحة</a:t>
             </a:r>
             <a:endParaRPr lang="en-US" sz="3000" dirty="0"/>
           </a:p>
         </p:txBody>
       </p:sp>
-      <p:graphicFrame>
-        <p:nvGraphicFramePr>
-          <p:cNvPr id="4" name="Chart 0" descr=""/>
-          <p:cNvGraphicFramePr/>
-          <p:nvPr/>
-        </p:nvGraphicFramePr>
-        <p:xfrm>
-          <a:off x="594360" y="1783080"/>
-          <a:ext cx="7360920" cy="3977640"/>
-        </p:xfrm>
-        <a:graphic xmlns:a="http://schemas.openxmlformats.org/drawingml/2006/main">
-          <a:graphicData uri="http://schemas.openxmlformats.org/drawingml/2006/chart">
-            <c:chart xmlns:c="http://schemas.openxmlformats.org/drawingml/2006/chart" r:id="rId1"/>
-          </a:graphicData>
-        </a:graphic>
-      </p:graphicFrame>
-      <p:sp>
-        <p:nvSpPr>
-          <p:cNvPr id="5" name="Shape 2"/>
-          <p:cNvSpPr/>
-          <p:nvPr/>
-        </p:nvSpPr>
-        <p:spPr>
-          <a:xfrm>
-            <a:off x="8275320" y="1783080"/>
-            <a:ext cx="3291840" cy="3977640"/>
-          </a:xfrm>
-          <a:prstGeom prst="roundRect">
-            <a:avLst>
-              <a:gd name="adj" fmla="val 2778"/>
-            </a:avLst>
-          </a:prstGeom>
-          <a:solidFill>
-            <a:srgbClr val="F2F1E8"/>
-          </a:solidFill>
-          <a:ln w="9525">
-            <a:solidFill>
-              <a:srgbClr val="E0DFD0"/>
-            </a:solidFill>
-            <a:prstDash val="solid"/>
-          </a:ln>
-        </p:spPr>
+      <p:pic>
+        <p:nvPicPr>
+          <p:cNvPr id="4" name="Image 0" descr="preencoded.png">    </p:cNvPr>
+          <p:cNvPicPr>
+            <a:picLocks noChangeAspect="1"/>
+          </p:cNvPicPr>
+          <p:nvPr/>
+        </p:nvPicPr>
+        <p:blipFill>
+          <a:blip r:embed="rId1"/>
+          <a:stretch>
+            <a:fillRect/>
+          </a:stretch>
+        </p:blipFill>
+        <p:spPr>
+          <a:xfrm>
+            <a:off x="6522415" y="1783080"/>
+            <a:ext cx="5074920" cy="3794760"/>
+          </a:xfrm>
+          <a:prstGeom prst="rect">
+            <a:avLst/>
+          </a:prstGeom>
+        </p:spPr>
+      </p:pic>
+      <p:sp>
+        <p:nvSpPr>
+          <p:cNvPr id="5" name="Text 2"/>
+          <p:cNvSpPr txBox="1"/>
+          <p:nvPr/>
+        </p:nvSpPr>
+        <p:spPr>
+          <a:xfrm>
+            <a:off x="594360" y="1783080"/>
+            <a:ext cx="5379415" cy="4251960"/>
+          </a:xfrm>
+          <a:prstGeom prst="rect">
+            <a:avLst/>
+          </a:prstGeom>
+          <a:noFill/>
+          <a:ln/>
+        </p:spPr>
+        <p:txBody>
+          <a:bodyPr wrap="square" lIns="0" tIns="0" rIns="0" bIns="0" rtlCol="0" anchor="t"/>
+          <a:lstStyle/>
+          <a:p>
+            <a:pPr algn="r" marL="342900" indent="-342900">
+              <a:lnSpc>
+                <a:spcPct val="122000"/>
+              </a:lnSpc>
+              <a:spcAft>
+                <a:spcPts val="1100"/>
+              </a:spcAft>
+              <a:buSzPct val="100000"/>
+              <a:buChar char="•"/>
+            </a:pPr>
+            <a:r>
+              <a:rPr lang="en-US" sz="1400" dirty="0">
+                <a:solidFill>
+                  <a:srgbClr val="364239"/>
+                </a:solidFill>
+                <a:latin typeface="Arial" pitchFamily="34" charset="0"/>
+                <a:ea typeface="Arial" pitchFamily="34" charset="-122"/>
+                <a:cs typeface="Arial" pitchFamily="34" charset="-120"/>
+              </a:rPr>
+              <a:t>تتركز زراعة النخيل في القصيم والأحساء والمدينة المنورة والرياض، وتضم المملكة مئات الأصناف، أشهرها السكري والخلاص والعجوة.</a:t>
+            </a:r>
+            <a:endParaRPr lang="en-US" sz="1400" dirty="0"/>
+          </a:p>
+          <a:p>
+            <a:pPr algn="r" marL="342900" indent="-342900">
+              <a:lnSpc>
+                <a:spcPct val="122000"/>
+              </a:lnSpc>
+              <a:spcAft>
+                <a:spcPts val="1100"/>
+              </a:spcAft>
+              <a:buSzPct val="100000"/>
+              <a:buChar char="•"/>
+            </a:pPr>
+            <a:r>
+              <a:rPr lang="en-US" sz="1400" dirty="0">
+                <a:solidFill>
+                  <a:srgbClr val="364239"/>
+                </a:solidFill>
+                <a:latin typeface="Arial" pitchFamily="34" charset="0"/>
+                <a:ea typeface="Arial" pitchFamily="34" charset="-122"/>
+                <a:cs typeface="Arial" pitchFamily="34" charset="-120"/>
+              </a:rPr>
+              <a:t>يحتاج النخيل إلى كميات كبيرة من ماء الري في الصيف، وما زال كثير من البساتين يُروى بالغمر أو بالأحواض.</a:t>
+            </a:r>
+            <a:endParaRPr lang="en-US" sz="1400" dirty="0"/>
+          </a:p>
+          <a:p>
+            <a:pPr algn="r" marL="342900" indent="-342900">
+              <a:lnSpc>
+                <a:spcPct val="122000"/>
+              </a:lnSpc>
+              <a:spcAft>
+                <a:spcPts val="1100"/>
+              </a:spcAft>
+              <a:buSzPct val="100000"/>
+              <a:buChar char="•"/>
+            </a:pPr>
+            <a:r>
+              <a:rPr lang="en-US" sz="1400" dirty="0">
+                <a:solidFill>
+                  <a:srgbClr val="364239"/>
+                </a:solidFill>
+                <a:latin typeface="Arial" pitchFamily="34" charset="0"/>
+                <a:ea typeface="Arial" pitchFamily="34" charset="-122"/>
+                <a:cs typeface="Arial" pitchFamily="34" charset="-120"/>
+              </a:rPr>
+              <a:t>ملوحة مياه الآبار والتربة تُضعف الإنتاج وجودة الثمار، ولا سيما في الواحات الشرقية.</a:t>
+            </a:r>
+            <a:endParaRPr lang="en-US" sz="1400" dirty="0"/>
+          </a:p>
+          <a:p>
+            <a:pPr algn="r" marL="342900" indent="-342900">
+              <a:lnSpc>
+                <a:spcPct val="122000"/>
+              </a:lnSpc>
+              <a:spcAft>
+                <a:spcPts val="1100"/>
+              </a:spcAft>
+              <a:buSzPct val="100000"/>
+              <a:buChar char="•"/>
+            </a:pPr>
+            <a:r>
+              <a:rPr lang="en-US" sz="1400" dirty="0">
+                <a:solidFill>
+                  <a:srgbClr val="364239"/>
+                </a:solidFill>
+                <a:latin typeface="Arial" pitchFamily="34" charset="0"/>
+                <a:ea typeface="Arial" pitchFamily="34" charset="-122"/>
+                <a:cs typeface="Arial" pitchFamily="34" charset="-120"/>
+              </a:rPr>
+              <a:t>يدفع المركز الوطني للنخيل والتمور نحو الجودة والتصدير: كل تحسّن في انتظام الثمار قيمة مباشرة.</a:t>
+            </a:r>
+            <a:endParaRPr lang="en-US" sz="1400" dirty="0"/>
+          </a:p>
+          <a:p>
+            <a:pPr algn="r" marL="342900" indent="-342900">
+              <a:lnSpc>
+                <a:spcPct val="122000"/>
+              </a:lnSpc>
+              <a:spcAft>
+                <a:spcPts val="1100"/>
+              </a:spcAft>
+              <a:buSzPct val="100000"/>
+              <a:buChar char="•"/>
+            </a:pPr>
+            <a:r>
+              <a:rPr lang="en-US" sz="1400" dirty="0">
+                <a:solidFill>
+                  <a:srgbClr val="364239"/>
+                </a:solidFill>
+                <a:latin typeface="Arial" pitchFamily="34" charset="0"/>
+                <a:ea typeface="Arial" pitchFamily="34" charset="-122"/>
+                <a:cs typeface="Arial" pitchFamily="34" charset="-120"/>
+              </a:rPr>
+              <a:t>وضع الحابس للماء عند غرس الفسائل أو حول جذور النخيل القائم يطيل توافر الماء بين الريّات.</a:t>
+            </a:r>
+            <a:endParaRPr lang="en-US" sz="1400" dirty="0"/>
+          </a:p>
+        </p:txBody>
       </p:sp>
       <p:sp>
         <p:nvSpPr>
           <p:cNvPr id="6" name="Text 3"/>
-          <p:cNvSpPr txBox="1"/>
-          <p:nvPr/>
-        </p:nvSpPr>
-        <p:spPr>
-          <a:xfrm>
-            <a:off x="8503920" y="2011680"/>
-            <a:ext cx="2834640" cy="457200"/>
-          </a:xfrm>
-          <a:prstGeom prst="rect">
-            <a:avLst/>
-          </a:prstGeom>
-          <a:noFill/>
-          <a:ln/>
-        </p:spPr>
-        <p:txBody>
-          <a:bodyPr wrap="square" lIns="0" tIns="0" rIns="0" bIns="0" rtlCol="0" anchor="ctr"/>
-          <a:lstStyle/>
-          <a:p>
-            <a:pPr rtl="1" algn="r" indent="0" marL="0">
-              <a:buNone/>
-            </a:pPr>
-            <a:r>
-              <a:rPr lang="en-US" sz="1300" b="1" dirty="0">
-                <a:solidFill>
-                  <a:srgbClr val="2C6E49"/>
-                </a:solidFill>
-                <a:latin typeface="Arial" pitchFamily="34" charset="0"/>
-                <a:ea typeface="Arial" pitchFamily="34" charset="-122"/>
-                <a:cs typeface="Arial" pitchFamily="34" charset="-120"/>
-              </a:rPr>
-              <a:t>تُقرأ بتحفّظ</a:t>
-            </a:r>
-            <a:endParaRPr lang="en-US" sz="1300" dirty="0"/>
-          </a:p>
-        </p:txBody>
-      </p:sp>
-      <p:sp>
-        <p:nvSpPr>
-          <p:cNvPr id="7" name="Text 4"/>
-          <p:cNvSpPr txBox="1"/>
-          <p:nvPr/>
-        </p:nvSpPr>
-        <p:spPr>
-          <a:xfrm>
-            <a:off x="8503920" y="2560320"/>
-            <a:ext cx="2834640" cy="3017520"/>
-          </a:xfrm>
-          <a:prstGeom prst="rect">
-            <a:avLst/>
-          </a:prstGeom>
-          <a:noFill/>
-          <a:ln/>
-        </p:spPr>
-        <p:txBody>
-          <a:bodyPr wrap="square" lIns="0" tIns="0" rIns="0" bIns="0" rtlCol="0" anchor="t"/>
-          <a:lstStyle/>
-          <a:p>
-            <a:pPr rtl="1" algn="r" indent="0" marL="0">
-              <a:lnSpc>
-                <a:spcPct val="125000"/>
-              </a:lnSpc>
-              <a:buNone/>
-            </a:pPr>
-            <a:r>
-              <a:rPr lang="en-US" sz="1200" dirty="0">
-                <a:solidFill>
-                  <a:srgbClr val="364239"/>
-                </a:solidFill>
-                <a:latin typeface="Arial" pitchFamily="34" charset="0"/>
-                <a:ea typeface="Arial" pitchFamily="34" charset="-122"/>
-                <a:cs typeface="Arial" pitchFamily="34" charset="-120"/>
-              </a:rPr>
-              <a:t>هذه النطاقات تقديرية واسترشادية، مبنية على المكاسب الموثّقة لموادنا الحابسة للماء.</a:t>
-            </a:r>
-            <a:endParaRPr lang="en-US" sz="1200" dirty="0"/>
-          </a:p>
-          <a:p>
-            <a:pPr rtl="1" algn="r" indent="0" marL="0">
-              <a:lnSpc>
-                <a:spcPct val="125000"/>
-              </a:lnSpc>
-              <a:buNone/>
-            </a:pPr>
-            <a:endParaRPr lang="en-US" sz="1200" dirty="0"/>
-          </a:p>
-          <a:p>
-            <a:pPr rtl="1" algn="r" indent="0" marL="0">
-              <a:lnSpc>
-                <a:spcPct val="125000"/>
-              </a:lnSpc>
-              <a:buNone/>
-            </a:pPr>
-            <a:r>
-              <a:rPr lang="en-US" sz="1200" dirty="0">
-                <a:solidFill>
-                  <a:srgbClr val="364239"/>
-                </a:solidFill>
-                <a:latin typeface="Arial" pitchFamily="34" charset="0"/>
-                <a:ea typeface="Arial" pitchFamily="34" charset="-122"/>
-                <a:cs typeface="Arial" pitchFamily="34" charset="-120"/>
-              </a:rPr>
-              <a:t>تتوقف النتيجة الفعلية على التربة والمناخ والمحصول. وهي تعطي ترتيب حجم فحسب، ولا تشكّل بأي حال قيمة مضمونة أو تعاقدية أو مطلقة.</a:t>
-            </a:r>
-            <a:endParaRPr lang="en-US" sz="1200" dirty="0"/>
-          </a:p>
-        </p:txBody>
-      </p:sp>
-      <p:sp>
-        <p:nvSpPr>
-          <p:cNvPr id="8" name="Text 5"/>
           <p:cNvSpPr txBox="1"/>
           <p:nvPr/>
         </p:nvSpPr>
@@ -6567,7 +12358,7 @@
       </p:sp>
       <p:sp>
         <p:nvSpPr>
-          <p:cNvPr id="9" name="Text 6"/>
+          <p:cNvPr id="7" name="Text 4"/>
           <p:cNvSpPr txBox="1"/>
           <p:nvPr/>
         </p:nvSpPr>
@@ -6671,7 +12462,7 @@
                 <a:ea typeface="Arial" pitchFamily="34" charset="-122"/>
                 <a:cs typeface="Arial" pitchFamily="34" charset="-120"/>
               </a:rPr>
-              <a:t>ثلاثة مواقع ذات أولوية</a:t>
+              <a:t>القطاع الثاني</a:t>
             </a:r>
             <a:endParaRPr lang="en-US" sz="1150" dirty="0"/>
           </a:p>
@@ -6710,42 +12501,15 @@
                 <a:ea typeface="Arial" pitchFamily="34" charset="-122"/>
                 <a:cs typeface="Arial" pitchFamily="34" charset="-120"/>
               </a:rPr>
-              <a:t>أين نبدأ التجارب الأولى</a:t>
+              <a:t>الخضروات المحمية: كل لتر هامش ربح</a:t>
             </a:r>
             <a:endParaRPr lang="en-US" sz="3000" dirty="0"/>
           </a:p>
         </p:txBody>
-      </p:sp>
-      <p:sp>
-        <p:nvSpPr>
-          <p:cNvPr id="4" name="Shape 2"/>
-          <p:cNvSpPr/>
-          <p:nvPr/>
-        </p:nvSpPr>
-        <p:spPr>
-          <a:xfrm>
-            <a:off x="594360" y="1783080"/>
-            <a:ext cx="3472586" cy="4069080"/>
-          </a:xfrm>
-          <a:prstGeom prst="roundRect">
-            <a:avLst>
-              <a:gd name="adj" fmla="val 2633"/>
-            </a:avLst>
-          </a:prstGeom>
-          <a:solidFill>
-            <a:srgbClr val="F2F1E8"/>
-          </a:solidFill>
-          <a:ln w="9525">
-            <a:solidFill>
-              <a:srgbClr val="E0DFD0"/>
-            </a:solidFill>
-            <a:prstDash val="solid"/>
-          </a:ln>
-        </p:spPr>
       </p:sp>
       <p:pic>
         <p:nvPicPr>
-          <p:cNvPr id="5" name="Image 0" descr="preencoded.png">    </p:cNvPr>
+          <p:cNvPr id="4" name="Image 0" descr="preencoded.png">    </p:cNvPr>
           <p:cNvPicPr>
             <a:picLocks noChangeAspect="1"/>
           </p:cNvPicPr>
@@ -6760,7 +12524,7 @@
         <p:spPr>
           <a:xfrm>
             <a:off x="594360" y="1783080"/>
-            <a:ext cx="3472586" cy="1691640"/>
+            <a:ext cx="5074920" cy="3794760"/>
           </a:xfrm>
           <a:prstGeom prst="rect">
             <a:avLst/>
@@ -6769,92 +12533,14 @@
       </p:pic>
       <p:sp>
         <p:nvSpPr>
-          <p:cNvPr id="6" name="Text 3"/>
-          <p:cNvSpPr txBox="1"/>
-          <p:nvPr/>
-        </p:nvSpPr>
-        <p:spPr>
-          <a:xfrm>
-            <a:off x="795528" y="3639312"/>
-            <a:ext cx="3070250" cy="384048"/>
-          </a:xfrm>
-          <a:prstGeom prst="rect">
-            <a:avLst/>
-          </a:prstGeom>
-          <a:noFill/>
-          <a:ln/>
-        </p:spPr>
-        <p:txBody>
-          <a:bodyPr wrap="square" lIns="0" tIns="0" rIns="0" bIns="0" rtlCol="0" anchor="ctr"/>
-          <a:lstStyle/>
-          <a:p>
-            <a:pPr rtl="1" algn="r" indent="0" marL="0">
-              <a:buNone/>
-            </a:pPr>
-            <a:r>
-              <a:rPr lang="en-US" sz="1500" b="1" dirty="0">
-                <a:solidFill>
-                  <a:srgbClr val="2C6E49"/>
-                </a:solidFill>
-                <a:latin typeface="Arial" pitchFamily="34" charset="0"/>
-                <a:ea typeface="Arial" pitchFamily="34" charset="-122"/>
-                <a:cs typeface="Arial" pitchFamily="34" charset="-120"/>
-              </a:rPr>
-              <a:t>الأحساء</a:t>
-            </a:r>
-            <a:endParaRPr lang="en-US" sz="1500" dirty="0"/>
-          </a:p>
-        </p:txBody>
-      </p:sp>
-      <p:sp>
-        <p:nvSpPr>
-          <p:cNvPr id="7" name="Text 4"/>
-          <p:cNvSpPr txBox="1"/>
-          <p:nvPr/>
-        </p:nvSpPr>
-        <p:spPr>
-          <a:xfrm>
-            <a:off x="795528" y="4041648"/>
-            <a:ext cx="3070250" cy="329184"/>
-          </a:xfrm>
-          <a:prstGeom prst="rect">
-            <a:avLst/>
-          </a:prstGeom>
-          <a:noFill/>
-          <a:ln/>
-        </p:spPr>
-        <p:txBody>
-          <a:bodyPr wrap="square" lIns="0" tIns="0" rIns="0" bIns="0" rtlCol="0" anchor="ctr"/>
-          <a:lstStyle/>
-          <a:p>
-            <a:pPr rtl="1" algn="r" indent="0" marL="0">
-              <a:buNone/>
-            </a:pPr>
-            <a:r>
-              <a:rPr lang="en-US" sz="1250" b="1" dirty="0">
-                <a:solidFill>
-                  <a:srgbClr val="9C6C12"/>
-                </a:solidFill>
-                <a:latin typeface="Arial" pitchFamily="34" charset="0"/>
-                <a:ea typeface="Arial" pitchFamily="34" charset="-122"/>
-                <a:cs typeface="Arial" pitchFamily="34" charset="-120"/>
-              </a:rPr>
-              <a:t>≈ 2,5 مليون نخلة</a:t>
-            </a:r>
-            <a:endParaRPr lang="en-US" sz="1250" dirty="0"/>
-          </a:p>
-        </p:txBody>
-      </p:sp>
-      <p:sp>
-        <p:nvSpPr>
-          <p:cNvPr id="8" name="Text 5"/>
-          <p:cNvSpPr txBox="1"/>
-          <p:nvPr/>
-        </p:nvSpPr>
-        <p:spPr>
-          <a:xfrm>
-            <a:off x="795528" y="4407408"/>
-            <a:ext cx="3070250" cy="1280160"/>
+          <p:cNvPr id="5" name="Text 2"/>
+          <p:cNvSpPr txBox="1"/>
+          <p:nvPr/>
+        </p:nvSpPr>
+        <p:spPr>
+          <a:xfrm>
+            <a:off x="6217920" y="1783080"/>
+            <a:ext cx="5379415" cy="4251960"/>
           </a:xfrm>
           <a:prstGeom prst="rect">
             <a:avLst/>
@@ -6868,16 +12554,16 @@
           <a:p>
             <a:pPr algn="r" marL="342900" indent="-342900">
               <a:lnSpc>
-                <a:spcPct val="116000"/>
+                <a:spcPct val="122000"/>
               </a:lnSpc>
               <a:spcAft>
-                <a:spcPts val="700"/>
+                <a:spcPts val="1100"/>
               </a:spcAft>
               <a:buSzPct val="100000"/>
               <a:buChar char="•"/>
             </a:pPr>
             <a:r>
-              <a:rPr lang="en-US" sz="1150" dirty="0">
+              <a:rPr lang="en-US" sz="1400" dirty="0">
                 <a:solidFill>
                   <a:srgbClr val="364239"/>
                 </a:solidFill>
@@ -6885,23 +12571,23 @@
                 <a:ea typeface="Arial" pitchFamily="34" charset="-122"/>
                 <a:cs typeface="Arial" pitchFamily="34" charset="-120"/>
               </a:rPr>
-              <a:t>أكبر واحة نخيل في العالم، بتربة رملية شديدة النفاذية ومياه ري مالحة نسبياً.</a:t>
-            </a:r>
-            <a:endParaRPr lang="en-US" sz="1150" dirty="0"/>
+              <a:t>توسعت البيوت المحمية لتقليص استيراد الطماطم والخيار والفلفل، بدعم حكومي للتقنيات الموفّرة للماء.</a:t>
+            </a:r>
+            <a:endParaRPr lang="en-US" sz="1400" dirty="0"/>
           </a:p>
           <a:p>
             <a:pPr algn="r" marL="342900" indent="-342900">
               <a:lnSpc>
-                <a:spcPct val="116000"/>
+                <a:spcPct val="122000"/>
               </a:lnSpc>
               <a:spcAft>
-                <a:spcPts val="700"/>
+                <a:spcPts val="1100"/>
               </a:spcAft>
               <a:buSzPct val="100000"/>
               <a:buChar char="•"/>
             </a:pPr>
             <a:r>
-              <a:rPr lang="en-US" sz="1150" dirty="0">
+              <a:rPr lang="en-US" sz="1400" dirty="0">
                 <a:solidFill>
                   <a:srgbClr val="364239"/>
                 </a:solidFill>
@@ -6909,23 +12595,23 @@
                 <a:ea typeface="Arial" pitchFamily="34" charset="-122"/>
                 <a:cs typeface="Arial" pitchFamily="34" charset="-120"/>
               </a:rPr>
-              <a:t>انخفاض متواصل في منسوب الآبار بعد أن كانت العيون تتدفق من تلقائها.</a:t>
-            </a:r>
-            <a:endParaRPr lang="en-US" sz="1150" dirty="0"/>
+              <a:t>حرارة الصيف تفرض التبريد وتزيد الطلب على الماء: الماء والطاقة أكبر بندين في كلفة الإنتاج.</a:t>
+            </a:r>
+            <a:endParaRPr lang="en-US" sz="1400" dirty="0"/>
           </a:p>
           <a:p>
             <a:pPr algn="r" marL="342900" indent="-342900">
               <a:lnSpc>
-                <a:spcPct val="116000"/>
+                <a:spcPct val="122000"/>
               </a:lnSpc>
               <a:spcAft>
-                <a:spcPts val="700"/>
+                <a:spcPts val="1100"/>
               </a:spcAft>
               <a:buSzPct val="100000"/>
               <a:buChar char="•"/>
             </a:pPr>
             <a:r>
-              <a:rPr lang="en-US" sz="1150" dirty="0">
+              <a:rPr lang="en-US" sz="1400" dirty="0">
                 <a:solidFill>
                   <a:srgbClr val="364239"/>
                 </a:solidFill>
@@ -6933,174 +12619,23 @@
                 <a:ea typeface="Arial" pitchFamily="34" charset="-122"/>
                 <a:cs typeface="Arial" pitchFamily="34" charset="-120"/>
               </a:rPr>
-              <a:t>زحف الرمال وارتفاع ملوحة التربة يستدعيان حلاً يعمل عند الجذر مباشرة.</a:t>
-            </a:r>
-            <a:endParaRPr lang="en-US" sz="1150" dirty="0"/>
-          </a:p>
-        </p:txBody>
-      </p:sp>
-      <p:sp>
-        <p:nvSpPr>
-          <p:cNvPr id="9" name="Shape 6"/>
-          <p:cNvSpPr/>
-          <p:nvPr/>
-        </p:nvSpPr>
-        <p:spPr>
-          <a:xfrm>
-            <a:off x="4359554" y="1783080"/>
-            <a:ext cx="3472586" cy="4069080"/>
-          </a:xfrm>
-          <a:prstGeom prst="roundRect">
-            <a:avLst>
-              <a:gd name="adj" fmla="val 2633"/>
-            </a:avLst>
-          </a:prstGeom>
-          <a:solidFill>
-            <a:srgbClr val="F2F1E8"/>
-          </a:solidFill>
-          <a:ln w="9525">
-            <a:solidFill>
-              <a:srgbClr val="E0DFD0"/>
-            </a:solidFill>
-            <a:prstDash val="solid"/>
-          </a:ln>
-        </p:spPr>
-      </p:sp>
-      <p:pic>
-        <p:nvPicPr>
-          <p:cNvPr id="10" name="Image 1" descr="preencoded.png">    </p:cNvPr>
-          <p:cNvPicPr>
-            <a:picLocks noChangeAspect="1"/>
-          </p:cNvPicPr>
-          <p:nvPr/>
-        </p:nvPicPr>
-        <p:blipFill>
-          <a:blip r:embed="rId2"/>
-          <a:stretch>
-            <a:fillRect/>
-          </a:stretch>
-        </p:blipFill>
-        <p:spPr>
-          <a:xfrm>
-            <a:off x="4359554" y="1783080"/>
-            <a:ext cx="3472586" cy="1691640"/>
-          </a:xfrm>
-          <a:prstGeom prst="rect">
-            <a:avLst/>
-          </a:prstGeom>
-        </p:spPr>
-      </p:pic>
-      <p:sp>
-        <p:nvSpPr>
-          <p:cNvPr id="11" name="Text 7"/>
-          <p:cNvSpPr txBox="1"/>
-          <p:nvPr/>
-        </p:nvSpPr>
-        <p:spPr>
-          <a:xfrm>
-            <a:off x="4560722" y="3639312"/>
-            <a:ext cx="3070250" cy="384048"/>
-          </a:xfrm>
-          <a:prstGeom prst="rect">
-            <a:avLst/>
-          </a:prstGeom>
-          <a:noFill/>
-          <a:ln/>
-        </p:spPr>
-        <p:txBody>
-          <a:bodyPr wrap="square" lIns="0" tIns="0" rIns="0" bIns="0" rtlCol="0" anchor="ctr"/>
-          <a:lstStyle/>
-          <a:p>
-            <a:pPr rtl="1" algn="r" indent="0" marL="0">
-              <a:buNone/>
-            </a:pPr>
-            <a:r>
-              <a:rPr lang="en-US" sz="1500" b="1" dirty="0">
-                <a:solidFill>
-                  <a:srgbClr val="2C6E49"/>
-                </a:solidFill>
-                <a:latin typeface="Arial" pitchFamily="34" charset="0"/>
-                <a:ea typeface="Arial" pitchFamily="34" charset="-122"/>
-                <a:cs typeface="Arial" pitchFamily="34" charset="-120"/>
-              </a:rPr>
-              <a:t>القصيم</a:t>
-            </a:r>
-            <a:endParaRPr lang="en-US" sz="1500" dirty="0"/>
-          </a:p>
-        </p:txBody>
-      </p:sp>
-      <p:sp>
-        <p:nvSpPr>
-          <p:cNvPr id="12" name="Text 8"/>
-          <p:cNvSpPr txBox="1"/>
-          <p:nvPr/>
-        </p:nvSpPr>
-        <p:spPr>
-          <a:xfrm>
-            <a:off x="4560722" y="4041648"/>
-            <a:ext cx="3070250" cy="329184"/>
-          </a:xfrm>
-          <a:prstGeom prst="rect">
-            <a:avLst/>
-          </a:prstGeom>
-          <a:noFill/>
-          <a:ln/>
-        </p:spPr>
-        <p:txBody>
-          <a:bodyPr wrap="square" lIns="0" tIns="0" rIns="0" bIns="0" rtlCol="0" anchor="ctr"/>
-          <a:lstStyle/>
-          <a:p>
-            <a:pPr rtl="1" algn="r" indent="0" marL="0">
-              <a:buNone/>
-            </a:pPr>
-            <a:r>
-              <a:rPr lang="en-US" sz="1250" b="1" dirty="0">
-                <a:solidFill>
-                  <a:srgbClr val="9C6C12"/>
-                </a:solidFill>
-                <a:latin typeface="Arial" pitchFamily="34" charset="0"/>
-                <a:ea typeface="Arial" pitchFamily="34" charset="-122"/>
-                <a:cs typeface="Arial" pitchFamily="34" charset="-120"/>
-              </a:rPr>
-              <a:t>أكثر من 8 ملايين نخلة</a:t>
-            </a:r>
-            <a:endParaRPr lang="en-US" sz="1250" dirty="0"/>
-          </a:p>
-        </p:txBody>
-      </p:sp>
-      <p:sp>
-        <p:nvSpPr>
-          <p:cNvPr id="13" name="Text 9"/>
-          <p:cNvSpPr txBox="1"/>
-          <p:nvPr/>
-        </p:nvSpPr>
-        <p:spPr>
-          <a:xfrm>
-            <a:off x="4560722" y="4407408"/>
-            <a:ext cx="3070250" cy="1280160"/>
-          </a:xfrm>
-          <a:prstGeom prst="rect">
-            <a:avLst/>
-          </a:prstGeom>
-          <a:noFill/>
-          <a:ln/>
-        </p:spPr>
-        <p:txBody>
-          <a:bodyPr wrap="square" lIns="0" tIns="0" rIns="0" bIns="0" rtlCol="0" anchor="t"/>
-          <a:lstStyle/>
+              <a:t>في التربة الرملية، يؤدي أي انقطاع في الري إلى إجهاد فوري وتساقط الأزهار.</a:t>
+            </a:r>
+            <a:endParaRPr lang="en-US" sz="1400" dirty="0"/>
+          </a:p>
           <a:p>
             <a:pPr algn="r" marL="342900" indent="-342900">
               <a:lnSpc>
-                <a:spcPct val="116000"/>
+                <a:spcPct val="122000"/>
               </a:lnSpc>
               <a:spcAft>
-                <a:spcPts val="700"/>
+                <a:spcPts val="1100"/>
               </a:spcAft>
               <a:buSzPct val="100000"/>
               <a:buChar char="•"/>
             </a:pPr>
             <a:r>
-              <a:rPr lang="en-US" sz="1150" dirty="0">
+              <a:rPr lang="en-US" sz="1400" dirty="0">
                 <a:solidFill>
                   <a:srgbClr val="364239"/>
                 </a:solidFill>
@@ -7108,23 +12643,23 @@
                 <a:ea typeface="Arial" pitchFamily="34" charset="-122"/>
                 <a:cs typeface="Arial" pitchFamily="34" charset="-120"/>
               </a:rPr>
-              <a:t>قلب الري المحوري في المملكة، معتمد على طبقة الساق الجوفية غير المتجددة.</a:t>
-            </a:r>
-            <a:endParaRPr lang="en-US" sz="1150" dirty="0"/>
+              <a:t>الخضروات من أكثر المحاصيل استجابة: من 30 إلى 50 % زيادة متوقعة في محصول الطماطم.</a:t>
+            </a:r>
+            <a:endParaRPr lang="en-US" sz="1400" dirty="0"/>
           </a:p>
           <a:p>
             <a:pPr algn="r" marL="342900" indent="-342900">
               <a:lnSpc>
-                <a:spcPct val="116000"/>
+                <a:spcPct val="122000"/>
               </a:lnSpc>
               <a:spcAft>
-                <a:spcPts val="700"/>
+                <a:spcPts val="1100"/>
               </a:spcAft>
               <a:buSzPct val="100000"/>
               <a:buChar char="•"/>
             </a:pPr>
             <a:r>
-              <a:rPr lang="en-US" sz="1150" dirty="0">
+              <a:rPr lang="en-US" sz="1400" dirty="0">
                 <a:solidFill>
                   <a:srgbClr val="364239"/>
                 </a:solidFill>
@@ -7132,262 +12667,15 @@
                 <a:ea typeface="Arial" pitchFamily="34" charset="-122"/>
                 <a:cs typeface="Arial" pitchFamily="34" charset="-120"/>
               </a:rPr>
-              <a:t>مزارع تجارية كبيرة قادرة على اتخاذ قرار سريع بشأن تجربة ميدانية.</a:t>
-            </a:r>
-            <a:endParaRPr lang="en-US" sz="1150" dirty="0"/>
-          </a:p>
-          <a:p>
-            <a:pPr algn="r" marL="342900" indent="-342900">
-              <a:lnSpc>
-                <a:spcPct val="116000"/>
-              </a:lnSpc>
-              <a:spcAft>
-                <a:spcPts val="700"/>
-              </a:spcAft>
-              <a:buSzPct val="100000"/>
-              <a:buChar char="•"/>
-            </a:pPr>
-            <a:r>
-              <a:rPr lang="en-US" sz="1150" dirty="0">
-                <a:solidFill>
-                  <a:srgbClr val="364239"/>
-                </a:solidFill>
-                <a:latin typeface="Arial" pitchFamily="34" charset="0"/>
-                <a:ea typeface="Arial" pitchFamily="34" charset="-122"/>
-                <a:cs typeface="Arial" pitchFamily="34" charset="-120"/>
-              </a:rPr>
-              <a:t>بريدة سوق تمور مرجعية: نتيجة تجربة واحدة تنتشر بسرعة بين المزارعين.</a:t>
-            </a:r>
-            <a:endParaRPr lang="en-US" sz="1150" dirty="0"/>
-          </a:p>
-        </p:txBody>
-      </p:sp>
-      <p:sp>
-        <p:nvSpPr>
-          <p:cNvPr id="14" name="Shape 10"/>
-          <p:cNvSpPr/>
-          <p:nvPr/>
-        </p:nvSpPr>
-        <p:spPr>
-          <a:xfrm>
-            <a:off x="8124749" y="1783080"/>
-            <a:ext cx="3472586" cy="4069080"/>
-          </a:xfrm>
-          <a:prstGeom prst="roundRect">
-            <a:avLst>
-              <a:gd name="adj" fmla="val 2633"/>
-            </a:avLst>
-          </a:prstGeom>
-          <a:solidFill>
-            <a:srgbClr val="F2F1E8"/>
-          </a:solidFill>
-          <a:ln w="9525">
-            <a:solidFill>
-              <a:srgbClr val="E0DFD0"/>
-            </a:solidFill>
-            <a:prstDash val="solid"/>
-          </a:ln>
-        </p:spPr>
-      </p:sp>
-      <p:pic>
-        <p:nvPicPr>
-          <p:cNvPr id="15" name="Image 2" descr="preencoded.png">    </p:cNvPr>
-          <p:cNvPicPr>
-            <a:picLocks noChangeAspect="1"/>
-          </p:cNvPicPr>
-          <p:nvPr/>
-        </p:nvPicPr>
-        <p:blipFill>
-          <a:blip r:embed="rId3"/>
-          <a:stretch>
-            <a:fillRect/>
-          </a:stretch>
-        </p:blipFill>
-        <p:spPr>
-          <a:xfrm>
-            <a:off x="8124749" y="1783080"/>
-            <a:ext cx="3472586" cy="1691640"/>
-          </a:xfrm>
-          <a:prstGeom prst="rect">
-            <a:avLst/>
-          </a:prstGeom>
-        </p:spPr>
-      </p:pic>
-      <p:sp>
-        <p:nvSpPr>
-          <p:cNvPr id="16" name="Text 11"/>
-          <p:cNvSpPr txBox="1"/>
-          <p:nvPr/>
-        </p:nvSpPr>
-        <p:spPr>
-          <a:xfrm>
-            <a:off x="8325917" y="3639312"/>
-            <a:ext cx="3070250" cy="384048"/>
-          </a:xfrm>
-          <a:prstGeom prst="rect">
-            <a:avLst/>
-          </a:prstGeom>
-          <a:noFill/>
-          <a:ln/>
-        </p:spPr>
-        <p:txBody>
-          <a:bodyPr wrap="square" lIns="0" tIns="0" rIns="0" bIns="0" rtlCol="0" anchor="ctr"/>
-          <a:lstStyle/>
-          <a:p>
-            <a:pPr rtl="1" algn="r" indent="0" marL="0">
-              <a:buNone/>
-            </a:pPr>
-            <a:r>
-              <a:rPr lang="en-US" sz="1500" b="1" dirty="0">
-                <a:solidFill>
-                  <a:srgbClr val="2C6E49"/>
-                </a:solidFill>
-                <a:latin typeface="Arial" pitchFamily="34" charset="0"/>
-                <a:ea typeface="Arial" pitchFamily="34" charset="-122"/>
-                <a:cs typeface="Arial" pitchFamily="34" charset="-120"/>
-              </a:rPr>
-              <a:t>عسير</a:t>
-            </a:r>
-            <a:endParaRPr lang="en-US" sz="1500" dirty="0"/>
-          </a:p>
-        </p:txBody>
-      </p:sp>
-      <p:sp>
-        <p:nvSpPr>
-          <p:cNvPr id="17" name="Text 12"/>
-          <p:cNvSpPr txBox="1"/>
-          <p:nvPr/>
-        </p:nvSpPr>
-        <p:spPr>
-          <a:xfrm>
-            <a:off x="8325917" y="4041648"/>
-            <a:ext cx="3070250" cy="329184"/>
-          </a:xfrm>
-          <a:prstGeom prst="rect">
-            <a:avLst/>
-          </a:prstGeom>
-          <a:noFill/>
-          <a:ln/>
-        </p:spPr>
-        <p:txBody>
-          <a:bodyPr wrap="square" lIns="0" tIns="0" rIns="0" bIns="0" rtlCol="0" anchor="ctr"/>
-          <a:lstStyle/>
-          <a:p>
-            <a:pPr rtl="1" algn="r" indent="0" marL="0">
-              <a:buNone/>
-            </a:pPr>
-            <a:r>
-              <a:rPr lang="en-US" sz="1250" b="1" dirty="0">
-                <a:solidFill>
-                  <a:srgbClr val="9C6C12"/>
-                </a:solidFill>
-                <a:latin typeface="Arial" pitchFamily="34" charset="0"/>
-                <a:ea typeface="Arial" pitchFamily="34" charset="-122"/>
-                <a:cs typeface="Arial" pitchFamily="34" charset="-120"/>
-              </a:rPr>
-              <a:t>300 إلى 500 مم أمطار</a:t>
-            </a:r>
-            <a:endParaRPr lang="en-US" sz="1250" dirty="0"/>
-          </a:p>
-        </p:txBody>
-      </p:sp>
-      <p:sp>
-        <p:nvSpPr>
-          <p:cNvPr id="18" name="Text 13"/>
-          <p:cNvSpPr txBox="1"/>
-          <p:nvPr/>
-        </p:nvSpPr>
-        <p:spPr>
-          <a:xfrm>
-            <a:off x="8325917" y="4407408"/>
-            <a:ext cx="3070250" cy="1280160"/>
-          </a:xfrm>
-          <a:prstGeom prst="rect">
-            <a:avLst/>
-          </a:prstGeom>
-          <a:noFill/>
-          <a:ln/>
-        </p:spPr>
-        <p:txBody>
-          <a:bodyPr wrap="square" lIns="0" tIns="0" rIns="0" bIns="0" rtlCol="0" anchor="t"/>
-          <a:lstStyle/>
-          <a:p>
-            <a:pPr algn="r" marL="342900" indent="-342900">
-              <a:lnSpc>
-                <a:spcPct val="116000"/>
-              </a:lnSpc>
-              <a:spcAft>
-                <a:spcPts val="700"/>
-              </a:spcAft>
-              <a:buSzPct val="100000"/>
-              <a:buChar char="•"/>
-            </a:pPr>
-            <a:r>
-              <a:rPr lang="en-US" sz="1150" dirty="0">
-                <a:solidFill>
-                  <a:srgbClr val="364239"/>
-                </a:solidFill>
-                <a:latin typeface="Arial" pitchFamily="34" charset="0"/>
-                <a:ea typeface="Arial" pitchFamily="34" charset="-122"/>
-                <a:cs typeface="Arial" pitchFamily="34" charset="-120"/>
-              </a:rPr>
-              <a:t>المنطقة الوحيدة التي تسمح بزراعة بعلية، على مدرجات جبلية ضيقة.</a:t>
-            </a:r>
-            <a:endParaRPr lang="en-US" sz="1150" dirty="0"/>
-          </a:p>
-          <a:p>
-            <a:pPr algn="r" marL="342900" indent="-342900">
-              <a:lnSpc>
-                <a:spcPct val="116000"/>
-              </a:lnSpc>
-              <a:spcAft>
-                <a:spcPts val="700"/>
-              </a:spcAft>
-              <a:buSzPct val="100000"/>
-              <a:buChar char="•"/>
-            </a:pPr>
-            <a:r>
-              <a:rPr lang="en-US" sz="1150" dirty="0">
-                <a:solidFill>
-                  <a:srgbClr val="364239"/>
-                </a:solidFill>
-                <a:latin typeface="Arial" pitchFamily="34" charset="0"/>
-                <a:ea typeface="Arial" pitchFamily="34" charset="-122"/>
-                <a:cs typeface="Arial" pitchFamily="34" charset="-120"/>
-              </a:rPr>
-              <a:t>الأمطار موسمية وغير منتظمة: الاحتفاظ بها في التربة هو المسألة الأساسية.</a:t>
-            </a:r>
-            <a:endParaRPr lang="en-US" sz="1150" dirty="0"/>
-          </a:p>
-          <a:p>
-            <a:pPr algn="r" marL="342900" indent="-342900">
-              <a:lnSpc>
-                <a:spcPct val="116000"/>
-              </a:lnSpc>
-              <a:spcAft>
-                <a:spcPts val="700"/>
-              </a:spcAft>
-              <a:buSzPct val="100000"/>
-              <a:buChar char="•"/>
-            </a:pPr>
-            <a:r>
-              <a:rPr lang="en-US" sz="1150" dirty="0">
-                <a:solidFill>
-                  <a:srgbClr val="364239"/>
-                </a:solidFill>
-                <a:latin typeface="Arial" pitchFamily="34" charset="0"/>
-                <a:ea typeface="Arial" pitchFamily="34" charset="-122"/>
-                <a:cs typeface="Arial" pitchFamily="34" charset="-120"/>
-              </a:rPr>
-              <a:t>محاصيل عالية القيمة — البن العربي والفواكه — تبرّر كلفة التدخل.</a:t>
-            </a:r>
-            <a:endParaRPr lang="en-US" sz="1150" dirty="0"/>
-          </a:p>
-        </p:txBody>
-      </p:sp>
-      <p:sp>
-        <p:nvSpPr>
-          <p:cNvPr id="19" name="Text 14"/>
+              <a:t>‏NAPEMA® يعالج الآفات دون متبقيات، وهو شرط في سلاسل التجزئة الكبرى والتصدير.</a:t>
+            </a:r>
+            <a:endParaRPr lang="en-US" sz="1400" dirty="0"/>
+          </a:p>
+        </p:txBody>
+      </p:sp>
+      <p:sp>
+        <p:nvSpPr>
+          <p:cNvPr id="6" name="Text 3"/>
           <p:cNvSpPr txBox="1"/>
           <p:nvPr/>
         </p:nvSpPr>
@@ -7428,7 +12716,7 @@
       </p:sp>
       <p:sp>
         <p:nvSpPr>
-          <p:cNvPr id="20" name="Text 15"/>
+          <p:cNvPr id="7" name="Text 4"/>
           <p:cNvSpPr txBox="1"/>
           <p:nvPr/>
         </p:nvSpPr>
@@ -7532,7 +12820,7 @@
                 <a:ea typeface="Arial" pitchFamily="34" charset="-122"/>
                 <a:cs typeface="Arial" pitchFamily="34" charset="-120"/>
               </a:rPr>
-              <a:t>كيف نعمل</a:t>
+              <a:t>إمكانات الإنتاج</a:t>
             </a:r>
             <a:endParaRPr lang="en-US" sz="1150" dirty="0"/>
           </a:p>
@@ -7571,26 +12859,42 @@
                 <a:ea typeface="Arial" pitchFamily="34" charset="-122"/>
                 <a:cs typeface="Arial" pitchFamily="34" charset="-120"/>
               </a:rPr>
-              <a:t>انتشار على مراحل، مع قياس عند كل خطوة</a:t>
+              <a:t>الزيادة المتوقعة في الإنتاج حسب المحصول</a:t>
             </a:r>
             <a:endParaRPr lang="en-US" sz="3000" dirty="0"/>
           </a:p>
         </p:txBody>
       </p:sp>
-      <p:sp>
-        <p:nvSpPr>
-          <p:cNvPr id="4" name="Shape 2"/>
+      <p:graphicFrame>
+        <p:nvGraphicFramePr>
+          <p:cNvPr id="4" name="Chart 0" descr=""/>
+          <p:cNvGraphicFramePr/>
+          <p:nvPr/>
+        </p:nvGraphicFramePr>
+        <p:xfrm>
+          <a:off x="594360" y="1783080"/>
+          <a:ext cx="7360920" cy="3977640"/>
+        </p:xfrm>
+        <a:graphic xmlns:a="http://schemas.openxmlformats.org/drawingml/2006/main">
+          <a:graphicData uri="http://schemas.openxmlformats.org/drawingml/2006/chart">
+            <c:chart xmlns:c="http://schemas.openxmlformats.org/drawingml/2006/chart" r:id="rId1"/>
+          </a:graphicData>
+        </a:graphic>
+      </p:graphicFrame>
+      <p:sp>
+        <p:nvSpPr>
+          <p:cNvPr id="5" name="Shape 2"/>
           <p:cNvSpPr/>
           <p:nvPr/>
         </p:nvSpPr>
         <p:spPr>
           <a:xfrm>
-            <a:off x="594360" y="1874520"/>
-            <a:ext cx="2545004" cy="2834640"/>
+            <a:off x="8275320" y="1783080"/>
+            <a:ext cx="3291840" cy="3977640"/>
           </a:xfrm>
           <a:prstGeom prst="roundRect">
             <a:avLst>
-              <a:gd name="adj" fmla="val 3593"/>
+              <a:gd name="adj" fmla="val 2778"/>
             </a:avLst>
           </a:prstGeom>
           <a:solidFill>
@@ -7606,34 +12910,14 @@
       </p:sp>
       <p:sp>
         <p:nvSpPr>
-          <p:cNvPr id="5" name="Shape 3"/>
-          <p:cNvSpPr/>
-          <p:nvPr/>
-        </p:nvSpPr>
-        <p:spPr>
-          <a:xfrm>
-            <a:off x="822960" y="2103120"/>
-            <a:ext cx="566928" cy="566928"/>
-          </a:xfrm>
-          <a:prstGeom prst="ellipse">
-            <a:avLst/>
-          </a:prstGeom>
-          <a:solidFill>
-            <a:srgbClr val="2C6E49"/>
-          </a:solidFill>
-          <a:ln/>
-        </p:spPr>
-      </p:sp>
-      <p:sp>
-        <p:nvSpPr>
-          <p:cNvPr id="6" name="Text 4"/>
-          <p:cNvSpPr txBox="1"/>
-          <p:nvPr/>
-        </p:nvSpPr>
-        <p:spPr>
-          <a:xfrm>
-            <a:off x="822960" y="2103120"/>
-            <a:ext cx="566928" cy="566928"/>
+          <p:cNvPr id="6" name="Text 3"/>
+          <p:cNvSpPr txBox="1"/>
+          <p:nvPr/>
+        </p:nvSpPr>
+        <p:spPr>
+          <a:xfrm>
+            <a:off x="8503920" y="2011680"/>
+            <a:ext cx="2834640" cy="457200"/>
           </a:xfrm>
           <a:prstGeom prst="rect">
             <a:avLst/>
@@ -7645,50 +12929,11 @@
           <a:bodyPr wrap="square" lIns="0" tIns="0" rIns="0" bIns="0" rtlCol="0" anchor="ctr"/>
           <a:lstStyle/>
           <a:p>
-            <a:pPr rtl="1" algn="ctr" indent="0" marL="0">
-              <a:buNone/>
-            </a:pPr>
-            <a:r>
-              <a:rPr lang="en-US" sz="1600" b="1" dirty="0">
-                <a:solidFill>
-                  <a:srgbClr val="FFFFFF"/>
-                </a:solidFill>
-                <a:latin typeface="Arial" pitchFamily="34" charset="0"/>
-                <a:ea typeface="Arial" pitchFamily="34" charset="-122"/>
-                <a:cs typeface="Arial" pitchFamily="34" charset="-120"/>
-              </a:rPr>
-              <a:t>1</a:t>
-            </a:r>
-            <a:endParaRPr lang="en-US" sz="1600" dirty="0"/>
-          </a:p>
-        </p:txBody>
-      </p:sp>
-      <p:sp>
-        <p:nvSpPr>
-          <p:cNvPr id="7" name="Text 5"/>
-          <p:cNvSpPr txBox="1"/>
-          <p:nvPr/>
-        </p:nvSpPr>
-        <p:spPr>
-          <a:xfrm>
-            <a:off x="822960" y="2788920"/>
-            <a:ext cx="2087804" cy="457200"/>
-          </a:xfrm>
-          <a:prstGeom prst="rect">
-            <a:avLst/>
-          </a:prstGeom>
-          <a:noFill/>
-          <a:ln/>
-        </p:spPr>
-        <p:txBody>
-          <a:bodyPr wrap="square" lIns="0" tIns="0" rIns="0" bIns="0" rtlCol="0" anchor="ctr"/>
-          <a:lstStyle/>
-          <a:p>
             <a:pPr rtl="1" algn="r" indent="0" marL="0">
               <a:buNone/>
             </a:pPr>
             <a:r>
-              <a:rPr lang="en-US" sz="1400" b="1" dirty="0">
+              <a:rPr lang="en-US" sz="1300" b="1" dirty="0">
                 <a:solidFill>
                   <a:srgbClr val="2C6E49"/>
                 </a:solidFill>
@@ -7696,565 +12941,22 @@
                 <a:ea typeface="Arial" pitchFamily="34" charset="-122"/>
                 <a:cs typeface="Arial" pitchFamily="34" charset="-120"/>
               </a:rPr>
-              <a:t>التشخيص</a:t>
-            </a:r>
-            <a:endParaRPr lang="en-US" sz="1400" dirty="0"/>
-          </a:p>
-        </p:txBody>
-      </p:sp>
-      <p:sp>
-        <p:nvSpPr>
-          <p:cNvPr id="8" name="Text 6"/>
-          <p:cNvSpPr txBox="1"/>
-          <p:nvPr/>
-        </p:nvSpPr>
-        <p:spPr>
-          <a:xfrm>
-            <a:off x="822960" y="3291840"/>
-            <a:ext cx="2087804" cy="1234440"/>
-          </a:xfrm>
-          <a:prstGeom prst="rect">
-            <a:avLst/>
-          </a:prstGeom>
-          <a:noFill/>
-          <a:ln/>
-        </p:spPr>
-        <p:txBody>
-          <a:bodyPr wrap="square" lIns="0" tIns="0" rIns="0" bIns="0" rtlCol="0" anchor="t"/>
-          <a:lstStyle/>
-          <a:p>
-            <a:pPr rtl="1" algn="r" indent="0" marL="0">
-              <a:lnSpc>
-                <a:spcPct val="120000"/>
-              </a:lnSpc>
-              <a:buNone/>
-            </a:pPr>
-            <a:r>
-              <a:rPr lang="en-US" sz="1200" dirty="0">
-                <a:solidFill>
-                  <a:srgbClr val="364239"/>
-                </a:solidFill>
-                <a:latin typeface="Arial" pitchFamily="34" charset="0"/>
-                <a:ea typeface="Arial" pitchFamily="34" charset="-122"/>
-                <a:cs typeface="Arial" pitchFamily="34" charset="-120"/>
-              </a:rPr>
-              <a:t>تحليل التربة وأسلوب الري والمحصول. لا التزام في هذه المرحلة.</a:t>
-            </a:r>
-            <a:endParaRPr lang="en-US" sz="1200" dirty="0"/>
-          </a:p>
-        </p:txBody>
-      </p:sp>
-      <p:sp>
-        <p:nvSpPr>
-          <p:cNvPr id="9" name="Shape 7"/>
-          <p:cNvSpPr/>
-          <p:nvPr/>
-        </p:nvSpPr>
-        <p:spPr>
-          <a:xfrm>
-            <a:off x="3413684" y="1874520"/>
-            <a:ext cx="2545004" cy="2834640"/>
-          </a:xfrm>
-          <a:prstGeom prst="roundRect">
-            <a:avLst>
-              <a:gd name="adj" fmla="val 3593"/>
-            </a:avLst>
-          </a:prstGeom>
-          <a:solidFill>
-            <a:srgbClr val="F2F1E8"/>
-          </a:solidFill>
-          <a:ln w="9525">
-            <a:solidFill>
-              <a:srgbClr val="E0DFD0"/>
-            </a:solidFill>
-            <a:prstDash val="solid"/>
-          </a:ln>
-        </p:spPr>
-      </p:sp>
-      <p:sp>
-        <p:nvSpPr>
-          <p:cNvPr id="10" name="Shape 8"/>
-          <p:cNvSpPr/>
-          <p:nvPr/>
-        </p:nvSpPr>
-        <p:spPr>
-          <a:xfrm>
-            <a:off x="3642284" y="2103120"/>
-            <a:ext cx="566928" cy="566928"/>
-          </a:xfrm>
-          <a:prstGeom prst="ellipse">
-            <a:avLst/>
-          </a:prstGeom>
-          <a:solidFill>
-            <a:srgbClr val="2C6E49"/>
-          </a:solidFill>
-          <a:ln/>
-        </p:spPr>
-      </p:sp>
-      <p:sp>
-        <p:nvSpPr>
-          <p:cNvPr id="11" name="Text 9"/>
-          <p:cNvSpPr txBox="1"/>
-          <p:nvPr/>
-        </p:nvSpPr>
-        <p:spPr>
-          <a:xfrm>
-            <a:off x="3642284" y="2103120"/>
-            <a:ext cx="566928" cy="566928"/>
-          </a:xfrm>
-          <a:prstGeom prst="rect">
-            <a:avLst/>
-          </a:prstGeom>
-          <a:noFill/>
-          <a:ln/>
-        </p:spPr>
-        <p:txBody>
-          <a:bodyPr wrap="square" lIns="0" tIns="0" rIns="0" bIns="0" rtlCol="0" anchor="ctr"/>
-          <a:lstStyle/>
-          <a:p>
-            <a:pPr rtl="1" algn="ctr" indent="0" marL="0">
-              <a:buNone/>
-            </a:pPr>
-            <a:r>
-              <a:rPr lang="en-US" sz="1600" b="1" dirty="0">
-                <a:solidFill>
-                  <a:srgbClr val="FFFFFF"/>
-                </a:solidFill>
-                <a:latin typeface="Arial" pitchFamily="34" charset="0"/>
-                <a:ea typeface="Arial" pitchFamily="34" charset="-122"/>
-                <a:cs typeface="Arial" pitchFamily="34" charset="-120"/>
-              </a:rPr>
-              <a:t>2</a:t>
-            </a:r>
-            <a:endParaRPr lang="en-US" sz="1600" dirty="0"/>
-          </a:p>
-        </p:txBody>
-      </p:sp>
-      <p:sp>
-        <p:nvSpPr>
-          <p:cNvPr id="12" name="Text 10"/>
-          <p:cNvSpPr txBox="1"/>
-          <p:nvPr/>
-        </p:nvSpPr>
-        <p:spPr>
-          <a:xfrm>
-            <a:off x="3642284" y="2788920"/>
-            <a:ext cx="2087804" cy="457200"/>
-          </a:xfrm>
-          <a:prstGeom prst="rect">
-            <a:avLst/>
-          </a:prstGeom>
-          <a:noFill/>
-          <a:ln/>
-        </p:spPr>
-        <p:txBody>
-          <a:bodyPr wrap="square" lIns="0" tIns="0" rIns="0" bIns="0" rtlCol="0" anchor="ctr"/>
-          <a:lstStyle/>
-          <a:p>
-            <a:pPr rtl="1" algn="r" indent="0" marL="0">
-              <a:buNone/>
-            </a:pPr>
-            <a:r>
-              <a:rPr lang="en-US" sz="1400" b="1" dirty="0">
-                <a:solidFill>
-                  <a:srgbClr val="2C6E49"/>
-                </a:solidFill>
-                <a:latin typeface="Arial" pitchFamily="34" charset="0"/>
-                <a:ea typeface="Arial" pitchFamily="34" charset="-122"/>
-                <a:cs typeface="Arial" pitchFamily="34" charset="-120"/>
-              </a:rPr>
-              <a:t>قطعة تجريبية</a:t>
-            </a:r>
-            <a:endParaRPr lang="en-US" sz="1400" dirty="0"/>
-          </a:p>
-        </p:txBody>
-      </p:sp>
-      <p:sp>
-        <p:nvSpPr>
-          <p:cNvPr id="13" name="Text 11"/>
-          <p:cNvSpPr txBox="1"/>
-          <p:nvPr/>
-        </p:nvSpPr>
-        <p:spPr>
-          <a:xfrm>
-            <a:off x="3642284" y="3291840"/>
-            <a:ext cx="2087804" cy="1234440"/>
-          </a:xfrm>
-          <a:prstGeom prst="rect">
-            <a:avLst/>
-          </a:prstGeom>
-          <a:noFill/>
-          <a:ln/>
-        </p:spPr>
-        <p:txBody>
-          <a:bodyPr wrap="square" lIns="0" tIns="0" rIns="0" bIns="0" rtlCol="0" anchor="t"/>
-          <a:lstStyle/>
-          <a:p>
-            <a:pPr rtl="1" algn="r" indent="0" marL="0">
-              <a:lnSpc>
-                <a:spcPct val="120000"/>
-              </a:lnSpc>
-              <a:buNone/>
-            </a:pPr>
-            <a:r>
-              <a:rPr lang="en-US" sz="1200" dirty="0">
-                <a:solidFill>
-                  <a:srgbClr val="364239"/>
-                </a:solidFill>
-                <a:latin typeface="Arial" pitchFamily="34" charset="0"/>
-                <a:ea typeface="Arial" pitchFamily="34" charset="-122"/>
-                <a:cs typeface="Arial" pitchFamily="34" charset="-120"/>
-              </a:rPr>
-              <a:t>تجربة مقارنة على قطعة واحدة، مع قطعة شاهد تُدار بالطريقة نفسها.</a:t>
-            </a:r>
-            <a:endParaRPr lang="en-US" sz="1200" dirty="0"/>
-          </a:p>
-        </p:txBody>
-      </p:sp>
-      <p:sp>
-        <p:nvSpPr>
-          <p:cNvPr id="14" name="Shape 12"/>
-          <p:cNvSpPr/>
-          <p:nvPr/>
-        </p:nvSpPr>
-        <p:spPr>
-          <a:xfrm>
-            <a:off x="6233008" y="1874520"/>
-            <a:ext cx="2545004" cy="2834640"/>
-          </a:xfrm>
-          <a:prstGeom prst="roundRect">
-            <a:avLst>
-              <a:gd name="adj" fmla="val 3593"/>
-            </a:avLst>
-          </a:prstGeom>
-          <a:solidFill>
-            <a:srgbClr val="F2F1E8"/>
-          </a:solidFill>
-          <a:ln w="9525">
-            <a:solidFill>
-              <a:srgbClr val="E0DFD0"/>
-            </a:solidFill>
-            <a:prstDash val="solid"/>
-          </a:ln>
-        </p:spPr>
-      </p:sp>
-      <p:sp>
-        <p:nvSpPr>
-          <p:cNvPr id="15" name="Shape 13"/>
-          <p:cNvSpPr/>
-          <p:nvPr/>
-        </p:nvSpPr>
-        <p:spPr>
-          <a:xfrm>
-            <a:off x="6461608" y="2103120"/>
-            <a:ext cx="566928" cy="566928"/>
-          </a:xfrm>
-          <a:prstGeom prst="ellipse">
-            <a:avLst/>
-          </a:prstGeom>
-          <a:solidFill>
-            <a:srgbClr val="2C6E49"/>
-          </a:solidFill>
-          <a:ln/>
-        </p:spPr>
-      </p:sp>
-      <p:sp>
-        <p:nvSpPr>
-          <p:cNvPr id="16" name="Text 14"/>
-          <p:cNvSpPr txBox="1"/>
-          <p:nvPr/>
-        </p:nvSpPr>
-        <p:spPr>
-          <a:xfrm>
-            <a:off x="6461608" y="2103120"/>
-            <a:ext cx="566928" cy="566928"/>
-          </a:xfrm>
-          <a:prstGeom prst="rect">
-            <a:avLst/>
-          </a:prstGeom>
-          <a:noFill/>
-          <a:ln/>
-        </p:spPr>
-        <p:txBody>
-          <a:bodyPr wrap="square" lIns="0" tIns="0" rIns="0" bIns="0" rtlCol="0" anchor="ctr"/>
-          <a:lstStyle/>
-          <a:p>
-            <a:pPr rtl="1" algn="ctr" indent="0" marL="0">
-              <a:buNone/>
-            </a:pPr>
-            <a:r>
-              <a:rPr lang="en-US" sz="1600" b="1" dirty="0">
-                <a:solidFill>
-                  <a:srgbClr val="FFFFFF"/>
-                </a:solidFill>
-                <a:latin typeface="Arial" pitchFamily="34" charset="0"/>
-                <a:ea typeface="Arial" pitchFamily="34" charset="-122"/>
-                <a:cs typeface="Arial" pitchFamily="34" charset="-120"/>
-              </a:rPr>
-              <a:t>3</a:t>
-            </a:r>
-            <a:endParaRPr lang="en-US" sz="1600" dirty="0"/>
-          </a:p>
-        </p:txBody>
-      </p:sp>
-      <p:sp>
-        <p:nvSpPr>
-          <p:cNvPr id="17" name="Text 15"/>
-          <p:cNvSpPr txBox="1"/>
-          <p:nvPr/>
-        </p:nvSpPr>
-        <p:spPr>
-          <a:xfrm>
-            <a:off x="6461608" y="2788920"/>
-            <a:ext cx="2087804" cy="457200"/>
-          </a:xfrm>
-          <a:prstGeom prst="rect">
-            <a:avLst/>
-          </a:prstGeom>
-          <a:noFill/>
-          <a:ln/>
-        </p:spPr>
-        <p:txBody>
-          <a:bodyPr wrap="square" lIns="0" tIns="0" rIns="0" bIns="0" rtlCol="0" anchor="ctr"/>
-          <a:lstStyle/>
-          <a:p>
-            <a:pPr rtl="1" algn="r" indent="0" marL="0">
-              <a:buNone/>
-            </a:pPr>
-            <a:r>
-              <a:rPr lang="en-US" sz="1400" b="1" dirty="0">
-                <a:solidFill>
-                  <a:srgbClr val="2C6E49"/>
-                </a:solidFill>
-                <a:latin typeface="Arial" pitchFamily="34" charset="0"/>
-                <a:ea typeface="Arial" pitchFamily="34" charset="-122"/>
-                <a:cs typeface="Arial" pitchFamily="34" charset="-120"/>
-              </a:rPr>
-              <a:t>القياس</a:t>
-            </a:r>
-            <a:endParaRPr lang="en-US" sz="1400" dirty="0"/>
-          </a:p>
-        </p:txBody>
-      </p:sp>
-      <p:sp>
-        <p:nvSpPr>
-          <p:cNvPr id="18" name="Text 16"/>
-          <p:cNvSpPr txBox="1"/>
-          <p:nvPr/>
-        </p:nvSpPr>
-        <p:spPr>
-          <a:xfrm>
-            <a:off x="6461608" y="3291840"/>
-            <a:ext cx="2087804" cy="1234440"/>
-          </a:xfrm>
-          <a:prstGeom prst="rect">
-            <a:avLst/>
-          </a:prstGeom>
-          <a:noFill/>
-          <a:ln/>
-        </p:spPr>
-        <p:txBody>
-          <a:bodyPr wrap="square" lIns="0" tIns="0" rIns="0" bIns="0" rtlCol="0" anchor="t"/>
-          <a:lstStyle/>
-          <a:p>
-            <a:pPr rtl="1" algn="r" indent="0" marL="0">
-              <a:lnSpc>
-                <a:spcPct val="120000"/>
-              </a:lnSpc>
-              <a:buNone/>
-            </a:pPr>
-            <a:r>
-              <a:rPr lang="en-US" sz="1200" dirty="0">
-                <a:solidFill>
-                  <a:srgbClr val="364239"/>
-                </a:solidFill>
-                <a:latin typeface="Arial" pitchFamily="34" charset="0"/>
-                <a:ea typeface="Arial" pitchFamily="34" charset="-122"/>
-                <a:cs typeface="Arial" pitchFamily="34" charset="-120"/>
-              </a:rPr>
-              <a:t>رصد الاستهلاك المائي والإنتاج على مدى دورة زراعية كاملة.</a:t>
-            </a:r>
-            <a:endParaRPr lang="en-US" sz="1200" dirty="0"/>
-          </a:p>
-        </p:txBody>
-      </p:sp>
-      <p:sp>
-        <p:nvSpPr>
-          <p:cNvPr id="19" name="Shape 17"/>
-          <p:cNvSpPr/>
-          <p:nvPr/>
-        </p:nvSpPr>
-        <p:spPr>
-          <a:xfrm>
-            <a:off x="9052331" y="1874520"/>
-            <a:ext cx="2545004" cy="2834640"/>
-          </a:xfrm>
-          <a:prstGeom prst="roundRect">
-            <a:avLst>
-              <a:gd name="adj" fmla="val 3593"/>
-            </a:avLst>
-          </a:prstGeom>
-          <a:solidFill>
-            <a:srgbClr val="F2F1E8"/>
-          </a:solidFill>
-          <a:ln w="9525">
-            <a:solidFill>
-              <a:srgbClr val="E0DFD0"/>
-            </a:solidFill>
-            <a:prstDash val="solid"/>
-          </a:ln>
-        </p:spPr>
-      </p:sp>
-      <p:sp>
-        <p:nvSpPr>
-          <p:cNvPr id="20" name="Shape 18"/>
-          <p:cNvSpPr/>
-          <p:nvPr/>
-        </p:nvSpPr>
-        <p:spPr>
-          <a:xfrm>
-            <a:off x="9280931" y="2103120"/>
-            <a:ext cx="566928" cy="566928"/>
-          </a:xfrm>
-          <a:prstGeom prst="ellipse">
-            <a:avLst/>
-          </a:prstGeom>
-          <a:solidFill>
-            <a:srgbClr val="2C6E49"/>
-          </a:solidFill>
-          <a:ln/>
-        </p:spPr>
-      </p:sp>
-      <p:sp>
-        <p:nvSpPr>
-          <p:cNvPr id="21" name="Text 19"/>
-          <p:cNvSpPr txBox="1"/>
-          <p:nvPr/>
-        </p:nvSpPr>
-        <p:spPr>
-          <a:xfrm>
-            <a:off x="9280931" y="2103120"/>
-            <a:ext cx="566928" cy="566928"/>
-          </a:xfrm>
-          <a:prstGeom prst="rect">
-            <a:avLst/>
-          </a:prstGeom>
-          <a:noFill/>
-          <a:ln/>
-        </p:spPr>
-        <p:txBody>
-          <a:bodyPr wrap="square" lIns="0" tIns="0" rIns="0" bIns="0" rtlCol="0" anchor="ctr"/>
-          <a:lstStyle/>
-          <a:p>
-            <a:pPr rtl="1" algn="ctr" indent="0" marL="0">
-              <a:buNone/>
-            </a:pPr>
-            <a:r>
-              <a:rPr lang="en-US" sz="1600" b="1" dirty="0">
-                <a:solidFill>
-                  <a:srgbClr val="FFFFFF"/>
-                </a:solidFill>
-                <a:latin typeface="Arial" pitchFamily="34" charset="0"/>
-                <a:ea typeface="Arial" pitchFamily="34" charset="-122"/>
-                <a:cs typeface="Arial" pitchFamily="34" charset="-120"/>
-              </a:rPr>
-              <a:t>4</a:t>
-            </a:r>
-            <a:endParaRPr lang="en-US" sz="1600" dirty="0"/>
-          </a:p>
-        </p:txBody>
-      </p:sp>
-      <p:sp>
-        <p:nvSpPr>
-          <p:cNvPr id="22" name="Text 20"/>
-          <p:cNvSpPr txBox="1"/>
-          <p:nvPr/>
-        </p:nvSpPr>
-        <p:spPr>
-          <a:xfrm>
-            <a:off x="9280931" y="2788920"/>
-            <a:ext cx="2087804" cy="457200"/>
-          </a:xfrm>
-          <a:prstGeom prst="rect">
-            <a:avLst/>
-          </a:prstGeom>
-          <a:noFill/>
-          <a:ln/>
-        </p:spPr>
-        <p:txBody>
-          <a:bodyPr wrap="square" lIns="0" tIns="0" rIns="0" bIns="0" rtlCol="0" anchor="ctr"/>
-          <a:lstStyle/>
-          <a:p>
-            <a:pPr rtl="1" algn="r" indent="0" marL="0">
-              <a:buNone/>
-            </a:pPr>
-            <a:r>
-              <a:rPr lang="en-US" sz="1400" b="1" dirty="0">
-                <a:solidFill>
-                  <a:srgbClr val="2C6E49"/>
-                </a:solidFill>
-                <a:latin typeface="Arial" pitchFamily="34" charset="0"/>
-                <a:ea typeface="Arial" pitchFamily="34" charset="-122"/>
-                <a:cs typeface="Arial" pitchFamily="34" charset="-120"/>
-              </a:rPr>
-              <a:t>التوسّع</a:t>
-            </a:r>
-            <a:endParaRPr lang="en-US" sz="1400" dirty="0"/>
-          </a:p>
-        </p:txBody>
-      </p:sp>
-      <p:sp>
-        <p:nvSpPr>
-          <p:cNvPr id="23" name="Text 21"/>
-          <p:cNvSpPr txBox="1"/>
-          <p:nvPr/>
-        </p:nvSpPr>
-        <p:spPr>
-          <a:xfrm>
-            <a:off x="9280931" y="3291840"/>
-            <a:ext cx="2087804" cy="1234440"/>
-          </a:xfrm>
-          <a:prstGeom prst="rect">
-            <a:avLst/>
-          </a:prstGeom>
-          <a:noFill/>
-          <a:ln/>
-        </p:spPr>
-        <p:txBody>
-          <a:bodyPr wrap="square" lIns="0" tIns="0" rIns="0" bIns="0" rtlCol="0" anchor="t"/>
-          <a:lstStyle/>
-          <a:p>
-            <a:pPr rtl="1" algn="r" indent="0" marL="0">
-              <a:lnSpc>
-                <a:spcPct val="120000"/>
-              </a:lnSpc>
-              <a:buNone/>
-            </a:pPr>
-            <a:r>
-              <a:rPr lang="en-US" sz="1200" dirty="0">
-                <a:solidFill>
-                  <a:srgbClr val="364239"/>
-                </a:solidFill>
-                <a:latin typeface="Arial" pitchFamily="34" charset="0"/>
-                <a:ea typeface="Arial" pitchFamily="34" charset="-122"/>
-                <a:cs typeface="Arial" pitchFamily="34" charset="-120"/>
-              </a:rPr>
-              <a:t>تعميم تدريجي على بقية القطع بناءً على النتائج المسجّلة.</a:t>
-            </a:r>
-            <a:endParaRPr lang="en-US" sz="1200" dirty="0"/>
-          </a:p>
-        </p:txBody>
-      </p:sp>
-      <p:sp>
-        <p:nvSpPr>
-          <p:cNvPr id="24" name="Text 22"/>
-          <p:cNvSpPr txBox="1"/>
-          <p:nvPr/>
-        </p:nvSpPr>
-        <p:spPr>
-          <a:xfrm>
-            <a:off x="594360" y="4983480"/>
-            <a:ext cx="11002975" cy="822960"/>
+              <a:t>تُقرأ بتحفّظ</a:t>
+            </a:r>
+            <a:endParaRPr lang="en-US" sz="1300" dirty="0"/>
+          </a:p>
+        </p:txBody>
+      </p:sp>
+      <p:sp>
+        <p:nvSpPr>
+          <p:cNvPr id="7" name="Text 4"/>
+          <p:cNvSpPr txBox="1"/>
+          <p:nvPr/>
+        </p:nvSpPr>
+        <p:spPr>
+          <a:xfrm>
+            <a:off x="8503920" y="2560320"/>
+            <a:ext cx="2834640" cy="3017520"/>
           </a:xfrm>
           <a:prstGeom prst="rect">
             <a:avLst/>
@@ -8273,23 +12975,52 @@
               <a:buNone/>
             </a:pPr>
             <a:r>
-              <a:rPr lang="en-US" sz="1250" i="1" dirty="0">
-                <a:solidFill>
-                  <a:srgbClr val="6F7D71"/>
-                </a:solidFill>
-                <a:latin typeface="Arial" pitchFamily="34" charset="0"/>
-                <a:ea typeface="Arial" pitchFamily="34" charset="-122"/>
-                <a:cs typeface="Arial" pitchFamily="34" charset="-120"/>
-              </a:rPr>
-              <a:t>قاعدة الجرعة واحدة في كل مكان: 3 غرامات لكل لتر من التربة المفيدة. ما يتغير من أرض إلى أخرى هو حجم التربة الذي تستكشفه الجذور فعلياً.</a:t>
-            </a:r>
-            <a:endParaRPr lang="en-US" sz="1250" dirty="0"/>
-          </a:p>
-        </p:txBody>
-      </p:sp>
-      <p:sp>
-        <p:nvSpPr>
-          <p:cNvPr id="25" name="Text 23"/>
+              <a:rPr lang="en-US" sz="1200" dirty="0">
+                <a:solidFill>
+                  <a:srgbClr val="364239"/>
+                </a:solidFill>
+                <a:latin typeface="Arial" pitchFamily="34" charset="0"/>
+                <a:ea typeface="Arial" pitchFamily="34" charset="-122"/>
+                <a:cs typeface="Arial" pitchFamily="34" charset="-120"/>
+              </a:rPr>
+              <a:t>نطاقات يعتمدها حاسب الجرعات على موقعنا، لمحصول يُدار إدارة عادية مع وضع EVERGREEN® عند الزراعة.</a:t>
+            </a:r>
+            <a:endParaRPr lang="en-US" sz="1200" dirty="0"/>
+          </a:p>
+          <a:p>
+            <a:pPr rtl="1" algn="r" indent="0" marL="0">
+              <a:lnSpc>
+                <a:spcPct val="125000"/>
+              </a:lnSpc>
+              <a:buNone/>
+            </a:pPr>
+            <a:endParaRPr lang="en-US" sz="1200" dirty="0"/>
+          </a:p>
+          <a:p>
+            <a:pPr rtl="1" algn="r" indent="0" marL="0">
+              <a:lnSpc>
+                <a:spcPct val="125000"/>
+              </a:lnSpc>
+              <a:buNone/>
+            </a:pPr>
+            <a:r>
+              <a:rPr lang="en-US" sz="1200" dirty="0">
+                <a:solidFill>
+                  <a:srgbClr val="364239"/>
+                </a:solidFill>
+                <a:latin typeface="Arial" pitchFamily="34" charset="0"/>
+                <a:ea typeface="Arial" pitchFamily="34" charset="-122"/>
+                <a:cs typeface="Arial" pitchFamily="34" charset="-120"/>
+              </a:rPr>
+              <a:t>النتيجة الفعلية تتوقف على التربة والمناخ وأسلوب الإدارة. أما الحبوب فلا نعلن فيها أي زيادة دون تجربة ميدانية.</a:t>
+            </a:r>
+            <a:endParaRPr lang="en-US" sz="1200" dirty="0"/>
+          </a:p>
+        </p:txBody>
+      </p:sp>
+      <p:sp>
+        <p:nvSpPr>
+          <p:cNvPr id="8" name="Text 5"/>
           <p:cNvSpPr txBox="1"/>
           <p:nvPr/>
         </p:nvSpPr>
@@ -8330,7 +13061,7 @@
       </p:sp>
       <p:sp>
         <p:nvSpPr>
-          <p:cNvPr id="26" name="Text 24"/>
+          <p:cNvPr id="9" name="Text 6"/>
           <p:cNvSpPr txBox="1"/>
           <p:nvPr/>
         </p:nvSpPr>

--- a/public/documents/countries/arabie-saoudite.pptx
+++ b/public/documents/countries/arabie-saoudite.pptx
@@ -3715,7 +3715,7 @@
       </p:sp>
       <p:pic>
         <p:nvPicPr>
-          <p:cNvPr id="5" name="Image 1" descr="C:\Users\Utilisateur\dev\green-solutions-web\public\images\logo-icon.png">    </p:cNvPr>
+          <p:cNvPr id="5" name="Image 1" descr="C:\Users\Utilisateur\dev\gsw-dossiers\public\images\logo-icon.png">    </p:cNvPr>
           <p:cNvPicPr>
             <a:picLocks noChangeAspect="1"/>
           </p:cNvPicPr>
@@ -3739,7 +3739,7 @@
       </p:pic>
       <p:pic>
         <p:nvPicPr>
-          <p:cNvPr id="6" name="Image 2" descr="C:\Users\Utilisateur\dev\green-solutions-web\scripts\dossiers\drapeaux\arabie-saoudite.png">    </p:cNvPr>
+          <p:cNvPr id="6" name="Image 2" descr="C:\Users\Utilisateur\dev\gsw-dossiers\scripts\dossiers\drapeaux\arabie-saoudite.png">    </p:cNvPr>
           <p:cNvPicPr>
             <a:picLocks noChangeAspect="1"/>
           </p:cNvPicPr>
@@ -9506,7 +9506,7 @@
                 <a:ea typeface="Arial" pitchFamily="34" charset="-122"/>
                 <a:cs typeface="Arial" pitchFamily="34" charset="-120"/>
               </a:rPr>
-              <a:t>contact@evergreen-ecosorb.com · 821 Chemin des Clapiers, 83220 Le Pradet, France</a:t>
+              <a:t>contact@evergreen-ecosorb.com · Green Solutions Groupe AIM SA, 46, route de la Condémine, 1475 Forel, Switzerland</a:t>
             </a:r>
             <a:endParaRPr lang="en-US" sz="1400" dirty="0"/>
           </a:p>
@@ -9514,7 +9514,7 @@
       </p:sp>
       <p:pic>
         <p:nvPicPr>
-          <p:cNvPr id="6" name="Image 1" descr="C:\Users\Utilisateur\dev\green-solutions-web\scripts\dossiers\sceau-aim-clair.png">    </p:cNvPr>
+          <p:cNvPr id="6" name="Image 1" descr="C:\Users\Utilisateur\dev\gsw-dossiers\scripts\dossiers\sceau-aim-clair.png">    </p:cNvPr>
           <p:cNvPicPr>
             <a:picLocks noChangeAspect="1"/>
           </p:cNvPicPr>

--- a/public/documents/countries/arabie-saoudite.pptx
+++ b/public/documents/countries/arabie-saoudite.pptx
@@ -125,7 +125,7 @@
 </p:presentation>
 </file>
 
-<file path=ppt/charts/chart1.xml><?xml version="1.0" encoding="utf-8"?>
+<file path=ppt/charts/chart11.xml><?xml version="1.0" encoding="utf-8"?>
 <c:chartSpace xmlns:c="http://schemas.openxmlformats.org/drawingml/2006/chart" xmlns:a="http://schemas.openxmlformats.org/drawingml/2006/main" xmlns:r="http://schemas.openxmlformats.org/officeDocument/2006/relationships">
   <c:date1904 val="0"/>
   <c:roundedCorners val="1"/>
@@ -384,7 +384,7 @@
 </c:chartSpace>
 </file>
 
-<file path=ppt/charts/chart2.xml><?xml version="1.0" encoding="utf-8"?>
+<file path=ppt/charts/chart12.xml><?xml version="1.0" encoding="utf-8"?>
 <c:chartSpace xmlns:c="http://schemas.openxmlformats.org/drawingml/2006/chart" xmlns:a="http://schemas.openxmlformats.org/drawingml/2006/main" xmlns:r="http://schemas.openxmlformats.org/officeDocument/2006/relationships">
   <c:date1904 val="0"/>
   <c:roundedCorners val="1"/>
@@ -629,7 +629,7 @@
 </c:chartSpace>
 </file>
 
-<file path=ppt/charts/chart3.xml><?xml version="1.0" encoding="utf-8"?>
+<file path=ppt/charts/chart13.xml><?xml version="1.0" encoding="utf-8"?>
 <c:chartSpace xmlns:c="http://schemas.openxmlformats.org/drawingml/2006/chart" xmlns:a="http://schemas.openxmlformats.org/drawingml/2006/main" xmlns:r="http://schemas.openxmlformats.org/officeDocument/2006/relationships">
   <c:date1904 val="0"/>
   <c:roundedCorners val="1"/>
@@ -920,7 +920,7 @@
 </c:chartSpace>
 </file>
 
-<file path=ppt/charts/chart4.xml><?xml version="1.0" encoding="utf-8"?>
+<file path=ppt/charts/chart14.xml><?xml version="1.0" encoding="utf-8"?>
 <c:chartSpace xmlns:c="http://schemas.openxmlformats.org/drawingml/2006/chart" xmlns:a="http://schemas.openxmlformats.org/drawingml/2006/main" xmlns:r="http://schemas.openxmlformats.org/officeDocument/2006/relationships">
   <c:date1904 val="0"/>
   <c:roundedCorners val="1"/>
@@ -1273,7 +1273,7 @@
 </c:chartSpace>
 </file>
 
-<file path=ppt/charts/chart5.xml><?xml version="1.0" encoding="utf-8"?>
+<file path=ppt/charts/chart15.xml><?xml version="1.0" encoding="utf-8"?>
 <c:chartSpace xmlns:c="http://schemas.openxmlformats.org/drawingml/2006/chart" xmlns:a="http://schemas.openxmlformats.org/drawingml/2006/main" xmlns:r="http://schemas.openxmlformats.org/officeDocument/2006/relationships">
   <c:date1904 val="0"/>
   <c:roundedCorners val="1"/>
@@ -4063,7 +4063,7 @@
       </p:sp>
       <p:pic>
         <p:nvPicPr>
-          <p:cNvPr id="5" name="Image 1" descr="/workspace/scratch/50eb4f7d8e13/green-solutions-web/public/images/logo-icon.png">    </p:cNvPr>
+          <p:cNvPr id="5" name="Image 1" descr="/home/claude/green-solutions-web/public/images/logo-icon.png">    </p:cNvPr>
           <p:cNvPicPr>
             <a:picLocks noChangeAspect="1"/>
           </p:cNvPicPr>
@@ -4087,7 +4087,7 @@
       </p:pic>
       <p:pic>
         <p:nvPicPr>
-          <p:cNvPr id="6" name="Image 2" descr="/workspace/scratch/50eb4f7d8e13/green-solutions-web/scripts/dossiers/drapeaux/arabie-saoudite.png">    </p:cNvPr>
+          <p:cNvPr id="6" name="Image 2" descr="/home/claude/green-solutions-web/scripts/dossiers/drapeaux/arabie-saoudite.png">    </p:cNvPr>
           <p:cNvPicPr>
             <a:picLocks noChangeAspect="1"/>
           </p:cNvPicPr>
@@ -10271,7 +10271,7 @@
                 <a:ea typeface="Arial" pitchFamily="34" charset="-122"/>
                 <a:cs typeface="Arial" pitchFamily="34" charset="-120"/>
               </a:rPr>
-              <a:t>contact@evergreen-ecosorb.com · Green Solutions Groupe AIM SA, 46, route de la Condémine, 1475 Forel, Switzerland</a:t>
+              <a:t>contact@green-solutions-group.com · Green Solutions Groupe AIM SA, 46, route de la Condémine, 1475 Forel, Switzerland</a:t>
             </a:r>
             <a:endParaRPr lang="en-US" sz="1400" dirty="0"/>
           </a:p>
@@ -10279,7 +10279,7 @@
       </p:sp>
       <p:pic>
         <p:nvPicPr>
-          <p:cNvPr id="6" name="Image 1" descr="/workspace/scratch/50eb4f7d8e13/green-solutions-web/scripts/dossiers/sceau-aim-clair.png">    </p:cNvPr>
+          <p:cNvPr id="6" name="Image 1" descr="/home/claude/green-solutions-web/scripts/dossiers/sceau-aim-clair.png">    </p:cNvPr>
           <p:cNvPicPr>
             <a:picLocks noChangeAspect="1"/>
           </p:cNvPicPr>
